--- a/deck/out/favoured-banks.pptx
+++ b/deck/out/favoured-banks.pptx
@@ -5596,8 +5596,8 @@
         </p:nvSpPr>
         <p:spPr>
           <a:xfrm>
-            <a:off x="0" y="2857500"/>
-            <a:ext cx="12192000" cy="952500"/>
+            <a:off x="0" y="2794000"/>
+            <a:ext cx="12192000" cy="990600"/>
           </a:xfrm>
           <a:prstGeom prst="rect">
             <a:avLst/>
@@ -5635,7 +5635,7 @@
         </p:nvSpPr>
         <p:spPr>
           <a:xfrm>
-            <a:off x="0" y="3810000"/>
+            <a:off x="0" y="3937000"/>
             <a:ext cx="12192000" cy="317500"/>
           </a:xfrm>
           <a:prstGeom prst="rect">
@@ -5674,7 +5674,7 @@
         </p:nvCxnSpPr>
         <p:spPr>
           <a:xfrm>
-            <a:off x="5588000" y="4445000"/>
+            <a:off x="5588000" y="4572000"/>
             <a:ext cx="1016000" cy="0"/>
           </a:xfrm>
           <a:prstGeom prst="line">
@@ -5709,7 +5709,7 @@
         </p:nvCxnSpPr>
         <p:spPr>
           <a:xfrm>
-            <a:off x="5588000" y="4521200"/>
+            <a:off x="5588000" y="4648200"/>
             <a:ext cx="1016000" cy="0"/>
           </a:xfrm>
           <a:prstGeom prst="line">
@@ -5859,7 +5859,7 @@
         <p:spPr>
           <a:xfrm>
             <a:off x="762000" y="1206500"/>
-            <a:ext cx="3937000" cy="1717040"/>
+            <a:ext cx="3810000" cy="1717040"/>
           </a:xfrm>
           <a:prstGeom prst="rect">
             <a:avLst/>
@@ -5898,7 +5898,7 @@
         <p:spPr>
           <a:xfrm>
             <a:off x="762000" y="3088640"/>
-            <a:ext cx="3937000" cy="462280"/>
+            <a:ext cx="3810000" cy="462280"/>
           </a:xfrm>
           <a:prstGeom prst="rect">
             <a:avLst/>
@@ -5944,8 +5944,8 @@
         </p:blipFill>
         <p:spPr>
           <a:xfrm>
-            <a:off x="5016500" y="1206500"/>
-            <a:ext cx="6413500" cy="3478508"/>
+            <a:off x="4889500" y="1540144"/>
+            <a:ext cx="6731000" cy="3650711"/>
           </a:xfrm>
           <a:prstGeom prst="rect">
             <a:avLst/>
@@ -6231,7 +6231,7 @@
         <p:spPr>
           <a:xfrm>
             <a:off x="762000" y="1206500"/>
-            <a:ext cx="3937000" cy="858520"/>
+            <a:ext cx="3810000" cy="858520"/>
           </a:xfrm>
           <a:prstGeom prst="rect">
             <a:avLst/>
@@ -6270,7 +6270,7 @@
         <p:spPr>
           <a:xfrm>
             <a:off x="762000" y="2230120"/>
-            <a:ext cx="3937000" cy="462280"/>
+            <a:ext cx="3810000" cy="462280"/>
           </a:xfrm>
           <a:prstGeom prst="rect">
             <a:avLst/>
@@ -6309,7 +6309,7 @@
         <p:spPr>
           <a:xfrm>
             <a:off x="762000" y="2781300"/>
-            <a:ext cx="3937000" cy="462280"/>
+            <a:ext cx="3810000" cy="462280"/>
           </a:xfrm>
           <a:prstGeom prst="rect">
             <a:avLst/>
@@ -6355,8 +6355,8 @@
         </p:blipFill>
         <p:spPr>
           <a:xfrm>
-            <a:off x="5016500" y="1206500"/>
-            <a:ext cx="6413500" cy="3804618"/>
+            <a:off x="4889500" y="1369016"/>
+            <a:ext cx="6731000" cy="3992966"/>
           </a:xfrm>
           <a:prstGeom prst="rect">
             <a:avLst/>
@@ -7386,7 +7386,7 @@
         <p:spPr>
           <a:xfrm>
             <a:off x="762000" y="1206500"/>
-            <a:ext cx="3937000" cy="858520"/>
+            <a:ext cx="3810000" cy="1287780"/>
           </a:xfrm>
           <a:prstGeom prst="rect">
             <a:avLst/>
@@ -7424,8 +7424,8 @@
         </p:nvSpPr>
         <p:spPr>
           <a:xfrm>
-            <a:off x="762000" y="2230120"/>
-            <a:ext cx="3937000" cy="231140"/>
+            <a:off x="762000" y="2659380"/>
+            <a:ext cx="3810000" cy="462280"/>
           </a:xfrm>
           <a:prstGeom prst="rect">
             <a:avLst/>
@@ -7463,8 +7463,8 @@
         </p:nvSpPr>
         <p:spPr>
           <a:xfrm>
-            <a:off x="762000" y="2550160"/>
-            <a:ext cx="3937000" cy="693420"/>
+            <a:off x="762000" y="3210560"/>
+            <a:ext cx="3810000" cy="924560"/>
           </a:xfrm>
           <a:prstGeom prst="rect">
             <a:avLst/>
@@ -7510,8 +7510,8 @@
         </p:blipFill>
         <p:spPr>
           <a:xfrm>
-            <a:off x="5016500" y="1206500"/>
-            <a:ext cx="6413500" cy="3478508"/>
+            <a:off x="4889500" y="1540144"/>
+            <a:ext cx="6731000" cy="3650711"/>
           </a:xfrm>
           <a:prstGeom prst="rect">
             <a:avLst/>
@@ -8169,7 +8169,7 @@
         <p:spPr>
           <a:xfrm>
             <a:off x="762000" y="1206500"/>
-            <a:ext cx="3937000" cy="858520"/>
+            <a:ext cx="3810000" cy="858520"/>
           </a:xfrm>
           <a:prstGeom prst="rect">
             <a:avLst/>
@@ -8208,7 +8208,7 @@
         <p:spPr>
           <a:xfrm>
             <a:off x="762000" y="2230120"/>
-            <a:ext cx="3937000" cy="462280"/>
+            <a:ext cx="3810000" cy="462280"/>
           </a:xfrm>
           <a:prstGeom prst="rect">
             <a:avLst/>
@@ -8247,7 +8247,7 @@
         <p:spPr>
           <a:xfrm>
             <a:off x="762000" y="2781300"/>
-            <a:ext cx="3937000" cy="693420"/>
+            <a:ext cx="3810000" cy="693420"/>
           </a:xfrm>
           <a:prstGeom prst="rect">
             <a:avLst/>
@@ -8293,8 +8293,8 @@
         </p:blipFill>
         <p:spPr>
           <a:xfrm>
-            <a:off x="5016500" y="1206500"/>
-            <a:ext cx="6413500" cy="2798618"/>
+            <a:off x="4889500" y="1896918"/>
+            <a:ext cx="6731000" cy="2937163"/>
           </a:xfrm>
           <a:prstGeom prst="rect">
             <a:avLst/>
@@ -8530,8 +8530,8 @@
         </p:nvSpPr>
         <p:spPr>
           <a:xfrm>
-            <a:off x="0" y="2857500"/>
-            <a:ext cx="12192000" cy="952500"/>
+            <a:off x="0" y="2794000"/>
+            <a:ext cx="12192000" cy="990600"/>
           </a:xfrm>
           <a:prstGeom prst="rect">
             <a:avLst/>
@@ -8569,7 +8569,7 @@
         </p:nvSpPr>
         <p:spPr>
           <a:xfrm>
-            <a:off x="0" y="3810000"/>
+            <a:off x="0" y="3937000"/>
             <a:ext cx="12192000" cy="317500"/>
           </a:xfrm>
           <a:prstGeom prst="rect">
@@ -8608,7 +8608,7 @@
         </p:nvCxnSpPr>
         <p:spPr>
           <a:xfrm>
-            <a:off x="5588000" y="4445000"/>
+            <a:off x="5588000" y="4572000"/>
             <a:ext cx="1016000" cy="0"/>
           </a:xfrm>
           <a:prstGeom prst="line">
@@ -8643,7 +8643,7 @@
         </p:nvCxnSpPr>
         <p:spPr>
           <a:xfrm>
-            <a:off x="5588000" y="4521200"/>
+            <a:off x="5588000" y="4648200"/>
             <a:ext cx="1016000" cy="0"/>
           </a:xfrm>
           <a:prstGeom prst="line">
@@ -9037,7 +9037,7 @@
                 </a:solidFill>
                 <a:latin typeface="IBM Plex Mono"/>
               </a:rPr>
-              <a:t>source: data/processed/domain_type_mix.csv</a:t>
+              <a:t>source: data/processed/domain_type_mix.csv  ·  each share rounded on its own, so sums can differ by 1 point</a:t>
             </a:r>
           </a:p>
         </p:txBody>
@@ -9204,7 +9204,7 @@
         <p:spPr>
           <a:xfrm>
             <a:off x="762000" y="1826260"/>
-            <a:ext cx="9525000" cy="726440"/>
+            <a:ext cx="9525000" cy="1089660"/>
           </a:xfrm>
           <a:prstGeom prst="rect">
             <a:avLst/>
@@ -9242,7 +9242,7 @@
         </p:nvSpPr>
         <p:spPr>
           <a:xfrm>
-            <a:off x="762000" y="2616200"/>
+            <a:off x="762000" y="2979420"/>
             <a:ext cx="9525000" cy="462280"/>
           </a:xfrm>
           <a:prstGeom prst="rect">
@@ -9281,7 +9281,7 @@
         </p:nvSpPr>
         <p:spPr>
           <a:xfrm>
-            <a:off x="762000" y="3510279"/>
+            <a:off x="762000" y="3873500"/>
             <a:ext cx="88900" cy="88900"/>
           </a:xfrm>
           <a:prstGeom prst="rect">
@@ -9325,7 +9325,7 @@
         </p:nvSpPr>
         <p:spPr>
           <a:xfrm>
-            <a:off x="952500" y="3459479"/>
+            <a:off x="952500" y="3822700"/>
             <a:ext cx="3810000" cy="190500"/>
           </a:xfrm>
           <a:prstGeom prst="rect">
@@ -9364,8 +9364,8 @@
         </p:nvSpPr>
         <p:spPr>
           <a:xfrm>
-            <a:off x="762000" y="3776979"/>
-            <a:ext cx="4318000" cy="1181100"/>
+            <a:off x="762000" y="4140200"/>
+            <a:ext cx="4318000" cy="1188720"/>
           </a:xfrm>
           <a:prstGeom prst="rect">
             <a:avLst/>
@@ -9435,7 +9435,7 @@
         </p:nvSpPr>
         <p:spPr>
           <a:xfrm>
-            <a:off x="5588000" y="3510279"/>
+            <a:off x="5588000" y="3873500"/>
             <a:ext cx="88900" cy="88900"/>
           </a:xfrm>
           <a:prstGeom prst="rect">
@@ -9479,7 +9479,7 @@
         </p:nvSpPr>
         <p:spPr>
           <a:xfrm>
-            <a:off x="5778500" y="3459479"/>
+            <a:off x="5778500" y="3822700"/>
             <a:ext cx="3810000" cy="190500"/>
           </a:xfrm>
           <a:prstGeom prst="rect">
@@ -9518,8 +9518,8 @@
         </p:nvSpPr>
         <p:spPr>
           <a:xfrm>
-            <a:off x="5588000" y="3776979"/>
-            <a:ext cx="4318000" cy="1181100"/>
+            <a:off x="5588000" y="4140200"/>
+            <a:ext cx="4318000" cy="1188720"/>
           </a:xfrm>
           <a:prstGeom prst="rect">
             <a:avLst/>
@@ -9860,7 +9860,7 @@
         <p:spPr>
           <a:xfrm>
             <a:off x="762000" y="1206500"/>
-            <a:ext cx="3937000" cy="858520"/>
+            <a:ext cx="3810000" cy="858520"/>
           </a:xfrm>
           <a:prstGeom prst="rect">
             <a:avLst/>
@@ -9899,7 +9899,7 @@
         <p:spPr>
           <a:xfrm>
             <a:off x="762000" y="2230120"/>
-            <a:ext cx="3937000" cy="693420"/>
+            <a:ext cx="3810000" cy="693420"/>
           </a:xfrm>
           <a:prstGeom prst="rect">
             <a:avLst/>
@@ -9938,7 +9938,7 @@
         <p:spPr>
           <a:xfrm>
             <a:off x="762000" y="3012440"/>
-            <a:ext cx="3937000" cy="693420"/>
+            <a:ext cx="3810000" cy="924560"/>
           </a:xfrm>
           <a:prstGeom prst="rect">
             <a:avLst/>
@@ -9984,8 +9984,8 @@
         </p:blipFill>
         <p:spPr>
           <a:xfrm>
-            <a:off x="5016500" y="1206500"/>
-            <a:ext cx="6413500" cy="3265054"/>
+            <a:off x="4889500" y="1652154"/>
+            <a:ext cx="6731000" cy="3426690"/>
           </a:xfrm>
           <a:prstGeom prst="rect">
             <a:avLst/>
@@ -10310,7 +10310,7 @@
         <p:spPr>
           <a:xfrm>
             <a:off x="762000" y="1699260"/>
-            <a:ext cx="8572500" cy="462280"/>
+            <a:ext cx="8572500" cy="231140"/>
           </a:xfrm>
           <a:prstGeom prst="rect">
             <a:avLst/>
@@ -10356,8 +10356,8 @@
         </p:blipFill>
         <p:spPr>
           <a:xfrm>
-            <a:off x="1864360" y="2275840"/>
-            <a:ext cx="8463279" cy="3324859"/>
+            <a:off x="1570181" y="2044700"/>
+            <a:ext cx="9051636" cy="3556000"/>
           </a:xfrm>
           <a:prstGeom prst="rect">
             <a:avLst/>
@@ -11054,7 +11054,7 @@
         <p:spPr>
           <a:xfrm>
             <a:off x="762000" y="1206500"/>
-            <a:ext cx="3937000" cy="858520"/>
+            <a:ext cx="3810000" cy="858520"/>
           </a:xfrm>
           <a:prstGeom prst="rect">
             <a:avLst/>
@@ -11093,7 +11093,7 @@
         <p:spPr>
           <a:xfrm>
             <a:off x="762000" y="2230120"/>
-            <a:ext cx="3937000" cy="462280"/>
+            <a:ext cx="3810000" cy="462280"/>
           </a:xfrm>
           <a:prstGeom prst="rect">
             <a:avLst/>
@@ -11139,8 +11139,8 @@
         </p:blipFill>
         <p:spPr>
           <a:xfrm>
-            <a:off x="5016500" y="1206500"/>
-            <a:ext cx="6413500" cy="2098963"/>
+            <a:off x="4889500" y="2264063"/>
+            <a:ext cx="6731000" cy="2202872"/>
           </a:xfrm>
           <a:prstGeom prst="rect">
             <a:avLst/>
@@ -11426,7 +11426,7 @@
         <p:spPr>
           <a:xfrm>
             <a:off x="762000" y="1206500"/>
-            <a:ext cx="3937000" cy="1287780"/>
+            <a:ext cx="3810000" cy="1717040"/>
           </a:xfrm>
           <a:prstGeom prst="rect">
             <a:avLst/>
@@ -11464,8 +11464,8 @@
         </p:nvSpPr>
         <p:spPr>
           <a:xfrm>
-            <a:off x="762000" y="2659380"/>
-            <a:ext cx="3937000" cy="693420"/>
+            <a:off x="762000" y="3088640"/>
+            <a:ext cx="3810000" cy="693420"/>
           </a:xfrm>
           <a:prstGeom prst="rect">
             <a:avLst/>
@@ -11503,8 +11503,8 @@
         </p:nvSpPr>
         <p:spPr>
           <a:xfrm>
-            <a:off x="762000" y="3441700"/>
-            <a:ext cx="3937000" cy="462280"/>
+            <a:off x="762000" y="3870960"/>
+            <a:ext cx="3810000" cy="462280"/>
           </a:xfrm>
           <a:prstGeom prst="rect">
             <a:avLst/>
@@ -11550,8 +11550,8 @@
         </p:blipFill>
         <p:spPr>
           <a:xfrm>
-            <a:off x="5016500" y="1206500"/>
-            <a:ext cx="6413500" cy="3261101"/>
+            <a:off x="4889500" y="1654228"/>
+            <a:ext cx="6731000" cy="3422542"/>
           </a:xfrm>
           <a:prstGeom prst="rect">
             <a:avLst/>
@@ -11837,7 +11837,7 @@
         <p:spPr>
           <a:xfrm>
             <a:off x="762000" y="1206500"/>
-            <a:ext cx="3937000" cy="1287780"/>
+            <a:ext cx="3810000" cy="1287780"/>
           </a:xfrm>
           <a:prstGeom prst="rect">
             <a:avLst/>
@@ -11862,7 +11862,7 @@
                 </a:solidFill>
                 <a:latin typeface="Work Sans"/>
               </a:rPr>
-              <a:t>Gemini's dead links come from links it wrapped in a Google search</a:t>
+              <a:t>Gemini's dead links all sit behind a Google redirect</a:t>
             </a:r>
           </a:p>
         </p:txBody>
@@ -11876,7 +11876,7 @@
         <p:spPr>
           <a:xfrm>
             <a:off x="762000" y="2659380"/>
-            <a:ext cx="3937000" cy="693420"/>
+            <a:ext cx="3810000" cy="693420"/>
           </a:xfrm>
           <a:prstGeom prst="rect">
             <a:avLst/>
@@ -11915,7 +11915,7 @@
         <p:spPr>
           <a:xfrm>
             <a:off x="762000" y="3441700"/>
-            <a:ext cx="3937000" cy="693420"/>
+            <a:ext cx="3810000" cy="693420"/>
           </a:xfrm>
           <a:prstGeom prst="rect">
             <a:avLst/>
@@ -11961,8 +11961,8 @@
         </p:blipFill>
         <p:spPr>
           <a:xfrm>
-            <a:off x="5016500" y="1206500"/>
-            <a:ext cx="6413500" cy="2065364"/>
+            <a:off x="4889500" y="2281694"/>
+            <a:ext cx="6731000" cy="2167610"/>
           </a:xfrm>
           <a:prstGeom prst="rect">
             <a:avLst/>
@@ -12248,7 +12248,7 @@
         <p:spPr>
           <a:xfrm>
             <a:off x="762000" y="1206500"/>
-            <a:ext cx="3937000" cy="858520"/>
+            <a:ext cx="3810000" cy="858520"/>
           </a:xfrm>
           <a:prstGeom prst="rect">
             <a:avLst/>
@@ -12287,7 +12287,7 @@
         <p:spPr>
           <a:xfrm>
             <a:off x="762000" y="2230120"/>
-            <a:ext cx="3937000" cy="693420"/>
+            <a:ext cx="3810000" cy="693420"/>
           </a:xfrm>
           <a:prstGeom prst="rect">
             <a:avLst/>
@@ -12326,7 +12326,7 @@
         <p:spPr>
           <a:xfrm>
             <a:off x="762000" y="3012440"/>
-            <a:ext cx="3937000" cy="462280"/>
+            <a:ext cx="3810000" cy="462280"/>
           </a:xfrm>
           <a:prstGeom prst="rect">
             <a:avLst/>
@@ -12365,7 +12365,7 @@
         <p:spPr>
           <a:xfrm>
             <a:off x="762000" y="3563620"/>
-            <a:ext cx="3937000" cy="462280"/>
+            <a:ext cx="3810000" cy="693420"/>
           </a:xfrm>
           <a:prstGeom prst="rect">
             <a:avLst/>
@@ -12411,8 +12411,8 @@
         </p:blipFill>
         <p:spPr>
           <a:xfrm>
-            <a:off x="5016500" y="1206500"/>
-            <a:ext cx="6413500" cy="2826288"/>
+            <a:off x="4889500" y="1711271"/>
+            <a:ext cx="6731000" cy="3308457"/>
           </a:xfrm>
           <a:prstGeom prst="rect">
             <a:avLst/>
@@ -12648,8 +12648,8 @@
         </p:nvSpPr>
         <p:spPr>
           <a:xfrm>
-            <a:off x="0" y="2857500"/>
-            <a:ext cx="12192000" cy="952500"/>
+            <a:off x="0" y="2794000"/>
+            <a:ext cx="12192000" cy="990600"/>
           </a:xfrm>
           <a:prstGeom prst="rect">
             <a:avLst/>
@@ -12687,7 +12687,7 @@
         </p:nvSpPr>
         <p:spPr>
           <a:xfrm>
-            <a:off x="0" y="3810000"/>
+            <a:off x="0" y="3937000"/>
             <a:ext cx="12192000" cy="317500"/>
           </a:xfrm>
           <a:prstGeom prst="rect">
@@ -12726,7 +12726,7 @@
         </p:nvCxnSpPr>
         <p:spPr>
           <a:xfrm>
-            <a:off x="5588000" y="4445000"/>
+            <a:off x="5588000" y="4572000"/>
             <a:ext cx="1016000" cy="0"/>
           </a:xfrm>
           <a:prstGeom prst="line">
@@ -12761,7 +12761,7 @@
         </p:nvCxnSpPr>
         <p:spPr>
           <a:xfrm>
-            <a:off x="5588000" y="4521200"/>
+            <a:off x="5588000" y="4648200"/>
             <a:ext cx="1016000" cy="0"/>
           </a:xfrm>
           <a:prstGeom prst="line">
@@ -12911,7 +12911,7 @@
         <p:spPr>
           <a:xfrm>
             <a:off x="762000" y="1270000"/>
-            <a:ext cx="9525000" cy="495300"/>
+            <a:ext cx="10668000" cy="495300"/>
           </a:xfrm>
           <a:prstGeom prst="rect">
             <a:avLst/>
@@ -13571,7 +13571,7 @@
         <p:spPr>
           <a:xfrm>
             <a:off x="762000" y="1270000"/>
-            <a:ext cx="9525000" cy="990600"/>
+            <a:ext cx="10668000" cy="495300"/>
           </a:xfrm>
           <a:prstGeom prst="rect">
             <a:avLst/>
@@ -13609,7 +13609,7 @@
         </p:nvSpPr>
         <p:spPr>
           <a:xfrm>
-            <a:off x="762000" y="2501900"/>
+            <a:off x="762000" y="2006600"/>
             <a:ext cx="571500" cy="215900"/>
           </a:xfrm>
           <a:prstGeom prst="rect">
@@ -13648,27 +13648,27 @@
         </p:nvSpPr>
         <p:spPr>
           <a:xfrm>
-            <a:off x="1460500" y="2476500"/>
-            <a:ext cx="8636000" cy="561340"/>
-          </a:xfrm>
-          <a:prstGeom prst="rect">
-            <a:avLst/>
-          </a:prstGeom>
-          <a:noFill/>
-        </p:spPr>
-        <p:txBody>
-          <a:bodyPr wrap="square" lIns="0" rIns="0" tIns="0" bIns="0" anchor="t">
-            <a:spAutoFit/>
-          </a:bodyPr>
-          <a:lstStyle/>
-          <a:p>
-            <a:pPr algn="l">
-              <a:lnSpc>
-                <a:spcPct val="115000"/>
-              </a:lnSpc>
-            </a:pPr>
-            <a:r>
-              <a:rPr sz="1700" b="0">
+            <a:off x="1460500" y="1981200"/>
+            <a:ext cx="8636000" cy="264160"/>
+          </a:xfrm>
+          <a:prstGeom prst="rect">
+            <a:avLst/>
+          </a:prstGeom>
+          <a:noFill/>
+        </p:spPr>
+        <p:txBody>
+          <a:bodyPr wrap="square" lIns="0" rIns="0" tIns="0" bIns="0" anchor="t">
+            <a:spAutoFit/>
+          </a:bodyPr>
+          <a:lstStyle/>
+          <a:p>
+            <a:pPr algn="l">
+              <a:lnSpc>
+                <a:spcPct val="115000"/>
+              </a:lnSpc>
+            </a:pPr>
+            <a:r>
+              <a:rPr sz="1600" b="0">
                 <a:solidFill>
                   <a:srgbClr val="ECE7DD"/>
                 </a:solidFill>
@@ -13687,7 +13687,7 @@
         </p:nvSpPr>
         <p:spPr>
           <a:xfrm>
-            <a:off x="762000" y="3202940"/>
+            <a:off x="762000" y="2397760"/>
             <a:ext cx="571500" cy="215900"/>
           </a:xfrm>
           <a:prstGeom prst="rect">
@@ -13726,27 +13726,27 @@
         </p:nvSpPr>
         <p:spPr>
           <a:xfrm>
-            <a:off x="1460500" y="3177540"/>
-            <a:ext cx="8636000" cy="280670"/>
-          </a:xfrm>
-          <a:prstGeom prst="rect">
-            <a:avLst/>
-          </a:prstGeom>
-          <a:noFill/>
-        </p:spPr>
-        <p:txBody>
-          <a:bodyPr wrap="square" lIns="0" rIns="0" tIns="0" bIns="0" anchor="t">
-            <a:spAutoFit/>
-          </a:bodyPr>
-          <a:lstStyle/>
-          <a:p>
-            <a:pPr algn="l">
-              <a:lnSpc>
-                <a:spcPct val="115000"/>
-              </a:lnSpc>
-            </a:pPr>
-            <a:r>
-              <a:rPr sz="1700" b="0">
+            <a:off x="1460500" y="2372360"/>
+            <a:ext cx="8636000" cy="264160"/>
+          </a:xfrm>
+          <a:prstGeom prst="rect">
+            <a:avLst/>
+          </a:prstGeom>
+          <a:noFill/>
+        </p:spPr>
+        <p:txBody>
+          <a:bodyPr wrap="square" lIns="0" rIns="0" tIns="0" bIns="0" anchor="t">
+            <a:spAutoFit/>
+          </a:bodyPr>
+          <a:lstStyle/>
+          <a:p>
+            <a:pPr algn="l">
+              <a:lnSpc>
+                <a:spcPct val="115000"/>
+              </a:lnSpc>
+            </a:pPr>
+            <a:r>
+              <a:rPr sz="1600" b="0">
                 <a:solidFill>
                   <a:srgbClr val="ECE7DD"/>
                 </a:solidFill>
@@ -13765,7 +13765,7 @@
         </p:nvSpPr>
         <p:spPr>
           <a:xfrm>
-            <a:off x="762000" y="3623310"/>
+            <a:off x="762000" y="2788920"/>
             <a:ext cx="571500" cy="215900"/>
           </a:xfrm>
           <a:prstGeom prst="rect">
@@ -13804,27 +13804,27 @@
         </p:nvSpPr>
         <p:spPr>
           <a:xfrm>
-            <a:off x="1460500" y="3597910"/>
-            <a:ext cx="8636000" cy="561340"/>
-          </a:xfrm>
-          <a:prstGeom prst="rect">
-            <a:avLst/>
-          </a:prstGeom>
-          <a:noFill/>
-        </p:spPr>
-        <p:txBody>
-          <a:bodyPr wrap="square" lIns="0" rIns="0" tIns="0" bIns="0" anchor="t">
-            <a:spAutoFit/>
-          </a:bodyPr>
-          <a:lstStyle/>
-          <a:p>
-            <a:pPr algn="l">
-              <a:lnSpc>
-                <a:spcPct val="115000"/>
-              </a:lnSpc>
-            </a:pPr>
-            <a:r>
-              <a:rPr sz="1700" b="0">
+            <a:off x="1460500" y="2763520"/>
+            <a:ext cx="8636000" cy="528320"/>
+          </a:xfrm>
+          <a:prstGeom prst="rect">
+            <a:avLst/>
+          </a:prstGeom>
+          <a:noFill/>
+        </p:spPr>
+        <p:txBody>
+          <a:bodyPr wrap="square" lIns="0" rIns="0" tIns="0" bIns="0" anchor="t">
+            <a:spAutoFit/>
+          </a:bodyPr>
+          <a:lstStyle/>
+          <a:p>
+            <a:pPr algn="l">
+              <a:lnSpc>
+                <a:spcPct val="115000"/>
+              </a:lnSpc>
+            </a:pPr>
+            <a:r>
+              <a:rPr sz="1600" b="0">
                 <a:solidFill>
                   <a:srgbClr val="ECE7DD"/>
                 </a:solidFill>
@@ -13843,7 +13843,7 @@
         </p:nvSpPr>
         <p:spPr>
           <a:xfrm>
-            <a:off x="762000" y="4324350"/>
+            <a:off x="762000" y="3444240"/>
             <a:ext cx="571500" cy="215900"/>
           </a:xfrm>
           <a:prstGeom prst="rect">
@@ -13882,27 +13882,27 @@
         </p:nvSpPr>
         <p:spPr>
           <a:xfrm>
-            <a:off x="1460500" y="4298950"/>
-            <a:ext cx="8636000" cy="561340"/>
-          </a:xfrm>
-          <a:prstGeom prst="rect">
-            <a:avLst/>
-          </a:prstGeom>
-          <a:noFill/>
-        </p:spPr>
-        <p:txBody>
-          <a:bodyPr wrap="square" lIns="0" rIns="0" tIns="0" bIns="0" anchor="t">
-            <a:spAutoFit/>
-          </a:bodyPr>
-          <a:lstStyle/>
-          <a:p>
-            <a:pPr algn="l">
-              <a:lnSpc>
-                <a:spcPct val="115000"/>
-              </a:lnSpc>
-            </a:pPr>
-            <a:r>
-              <a:rPr sz="1700" b="0">
+            <a:off x="1460500" y="3418840"/>
+            <a:ext cx="8636000" cy="264160"/>
+          </a:xfrm>
+          <a:prstGeom prst="rect">
+            <a:avLst/>
+          </a:prstGeom>
+          <a:noFill/>
+        </p:spPr>
+        <p:txBody>
+          <a:bodyPr wrap="square" lIns="0" rIns="0" tIns="0" bIns="0" anchor="t">
+            <a:spAutoFit/>
+          </a:bodyPr>
+          <a:lstStyle/>
+          <a:p>
+            <a:pPr algn="l">
+              <a:lnSpc>
+                <a:spcPct val="115000"/>
+              </a:lnSpc>
+            </a:pPr>
+            <a:r>
+              <a:rPr sz="1600" b="0">
                 <a:solidFill>
                   <a:srgbClr val="ECE7DD"/>
                 </a:solidFill>
@@ -13921,7 +13921,7 @@
         </p:nvSpPr>
         <p:spPr>
           <a:xfrm>
-            <a:off x="762000" y="5025390"/>
+            <a:off x="762000" y="3835400"/>
             <a:ext cx="571500" cy="215900"/>
           </a:xfrm>
           <a:prstGeom prst="rect">
@@ -13960,27 +13960,27 @@
         </p:nvSpPr>
         <p:spPr>
           <a:xfrm>
-            <a:off x="1460500" y="4999990"/>
-            <a:ext cx="8636000" cy="561340"/>
-          </a:xfrm>
-          <a:prstGeom prst="rect">
-            <a:avLst/>
-          </a:prstGeom>
-          <a:noFill/>
-        </p:spPr>
-        <p:txBody>
-          <a:bodyPr wrap="square" lIns="0" rIns="0" tIns="0" bIns="0" anchor="t">
-            <a:spAutoFit/>
-          </a:bodyPr>
-          <a:lstStyle/>
-          <a:p>
-            <a:pPr algn="l">
-              <a:lnSpc>
-                <a:spcPct val="115000"/>
-              </a:lnSpc>
-            </a:pPr>
-            <a:r>
-              <a:rPr sz="1700" b="0">
+            <a:off x="1460500" y="3810000"/>
+            <a:ext cx="8636000" cy="528320"/>
+          </a:xfrm>
+          <a:prstGeom prst="rect">
+            <a:avLst/>
+          </a:prstGeom>
+          <a:noFill/>
+        </p:spPr>
+        <p:txBody>
+          <a:bodyPr wrap="square" lIns="0" rIns="0" tIns="0" bIns="0" anchor="t">
+            <a:spAutoFit/>
+          </a:bodyPr>
+          <a:lstStyle/>
+          <a:p>
+            <a:pPr algn="l">
+              <a:lnSpc>
+                <a:spcPct val="115000"/>
+              </a:lnSpc>
+            </a:pPr>
+            <a:r>
+              <a:rPr sz="1600" b="0">
                 <a:solidFill>
                   <a:srgbClr val="ECE7DD"/>
                 </a:solidFill>
@@ -13999,7 +13999,7 @@
         </p:nvSpPr>
         <p:spPr>
           <a:xfrm>
-            <a:off x="762000" y="5726430"/>
+            <a:off x="762000" y="4490720"/>
             <a:ext cx="571500" cy="215900"/>
           </a:xfrm>
           <a:prstGeom prst="rect">
@@ -14038,27 +14038,27 @@
         </p:nvSpPr>
         <p:spPr>
           <a:xfrm>
-            <a:off x="1460500" y="5701030"/>
-            <a:ext cx="8636000" cy="561340"/>
-          </a:xfrm>
-          <a:prstGeom prst="rect">
-            <a:avLst/>
-          </a:prstGeom>
-          <a:noFill/>
-        </p:spPr>
-        <p:txBody>
-          <a:bodyPr wrap="square" lIns="0" rIns="0" tIns="0" bIns="0" anchor="t">
-            <a:spAutoFit/>
-          </a:bodyPr>
-          <a:lstStyle/>
-          <a:p>
-            <a:pPr algn="l">
-              <a:lnSpc>
-                <a:spcPct val="115000"/>
-              </a:lnSpc>
-            </a:pPr>
-            <a:r>
-              <a:rPr sz="1700" b="0">
+            <a:off x="1460500" y="4465320"/>
+            <a:ext cx="8636000" cy="528320"/>
+          </a:xfrm>
+          <a:prstGeom prst="rect">
+            <a:avLst/>
+          </a:prstGeom>
+          <a:noFill/>
+        </p:spPr>
+        <p:txBody>
+          <a:bodyPr wrap="square" lIns="0" rIns="0" tIns="0" bIns="0" anchor="t">
+            <a:spAutoFit/>
+          </a:bodyPr>
+          <a:lstStyle/>
+          <a:p>
+            <a:pPr algn="l">
+              <a:lnSpc>
+                <a:spcPct val="115000"/>
+              </a:lnSpc>
+            </a:pPr>
+            <a:r>
+              <a:rPr sz="1600" b="0">
                 <a:solidFill>
                   <a:srgbClr val="ECE7DD"/>
                 </a:solidFill>
@@ -14678,7 +14678,7 @@
         <p:spPr>
           <a:xfrm>
             <a:off x="762000" y="1270000"/>
-            <a:ext cx="9525000" cy="495300"/>
+            <a:ext cx="10668000" cy="495300"/>
           </a:xfrm>
           <a:prstGeom prst="rect">
             <a:avLst/>
@@ -14716,8 +14716,8 @@
         </p:nvSpPr>
         <p:spPr>
           <a:xfrm>
-            <a:off x="1460500" y="1981200"/>
-            <a:ext cx="8636000" cy="561340"/>
+            <a:off x="762000" y="1981200"/>
+            <a:ext cx="9334500" cy="561340"/>
           </a:xfrm>
           <a:prstGeom prst="rect">
             <a:avLst/>
@@ -14755,8 +14755,8 @@
         </p:nvSpPr>
         <p:spPr>
           <a:xfrm>
-            <a:off x="1460500" y="2682240"/>
-            <a:ext cx="8636000" cy="561340"/>
+            <a:off x="762000" y="2682240"/>
+            <a:ext cx="9334500" cy="561340"/>
           </a:xfrm>
           <a:prstGeom prst="rect">
             <a:avLst/>
@@ -15026,7 +15026,7 @@
         <p:spPr>
           <a:xfrm>
             <a:off x="762000" y="1270000"/>
-            <a:ext cx="9525000" cy="495300"/>
+            <a:ext cx="10668000" cy="495300"/>
           </a:xfrm>
           <a:prstGeom prst="rect">
             <a:avLst/>
@@ -15520,7 +15520,7 @@
         <p:spPr>
           <a:xfrm>
             <a:off x="762000" y="1079500"/>
-            <a:ext cx="10160000" cy="660400"/>
+            <a:ext cx="10160000" cy="1320800"/>
           </a:xfrm>
           <a:prstGeom prst="rect">
             <a:avLst/>
@@ -15559,7 +15559,7 @@
         <p:spPr>
           <a:xfrm>
             <a:off x="762000" y="1841500"/>
-            <a:ext cx="10160000" cy="254000"/>
+            <a:ext cx="10160000" cy="264160"/>
           </a:xfrm>
           <a:prstGeom prst="rect">
             <a:avLst/>
@@ -15637,7 +15637,7 @@
         <p:spPr>
           <a:xfrm>
             <a:off x="762000" y="2819400"/>
-            <a:ext cx="9525000" cy="177800"/>
+            <a:ext cx="9525000" cy="181610"/>
           </a:xfrm>
           <a:prstGeom prst="rect">
             <a:avLst/>
@@ -15676,7 +15676,7 @@
         <p:spPr>
           <a:xfrm>
             <a:off x="762000" y="3048000"/>
-            <a:ext cx="9525000" cy="177800"/>
+            <a:ext cx="9525000" cy="181610"/>
           </a:xfrm>
           <a:prstGeom prst="rect">
             <a:avLst/>
@@ -15715,7 +15715,7 @@
         <p:spPr>
           <a:xfrm>
             <a:off x="762000" y="3276600"/>
-            <a:ext cx="9525000" cy="177800"/>
+            <a:ext cx="9525000" cy="181610"/>
           </a:xfrm>
           <a:prstGeom prst="rect">
             <a:avLst/>
@@ -15754,7 +15754,7 @@
         <p:spPr>
           <a:xfrm>
             <a:off x="762000" y="3505200"/>
-            <a:ext cx="9525000" cy="177800"/>
+            <a:ext cx="9525000" cy="181610"/>
           </a:xfrm>
           <a:prstGeom prst="rect">
             <a:avLst/>
@@ -15793,7 +15793,7 @@
         <p:spPr>
           <a:xfrm>
             <a:off x="762000" y="3733800"/>
-            <a:ext cx="9525000" cy="177800"/>
+            <a:ext cx="9525000" cy="181610"/>
           </a:xfrm>
           <a:prstGeom prst="rect">
             <a:avLst/>
@@ -15832,7 +15832,7 @@
         <p:spPr>
           <a:xfrm>
             <a:off x="762000" y="3962400"/>
-            <a:ext cx="9525000" cy="177800"/>
+            <a:ext cx="9525000" cy="181610"/>
           </a:xfrm>
           <a:prstGeom prst="rect">
             <a:avLst/>
@@ -15871,7 +15871,7 @@
         <p:spPr>
           <a:xfrm>
             <a:off x="762000" y="4191000"/>
-            <a:ext cx="9525000" cy="177800"/>
+            <a:ext cx="9525000" cy="181610"/>
           </a:xfrm>
           <a:prstGeom prst="rect">
             <a:avLst/>
@@ -15910,7 +15910,7 @@
         <p:spPr>
           <a:xfrm>
             <a:off x="762000" y="4419600"/>
-            <a:ext cx="9525000" cy="177800"/>
+            <a:ext cx="9525000" cy="181610"/>
           </a:xfrm>
           <a:prstGeom prst="rect">
             <a:avLst/>
@@ -16172,7 +16172,7 @@
         <p:spPr>
           <a:xfrm>
             <a:off x="762000" y="1270000"/>
-            <a:ext cx="9525000" cy="495300"/>
+            <a:ext cx="10668000" cy="495300"/>
           </a:xfrm>
           <a:prstGeom prst="rect">
             <a:avLst/>
@@ -16626,8 +16626,8 @@
         </p:nvSpPr>
         <p:spPr>
           <a:xfrm>
-            <a:off x="0" y="2857500"/>
-            <a:ext cx="12192000" cy="952500"/>
+            <a:off x="0" y="2794000"/>
+            <a:ext cx="12192000" cy="990600"/>
           </a:xfrm>
           <a:prstGeom prst="rect">
             <a:avLst/>
@@ -16665,7 +16665,7 @@
         </p:nvSpPr>
         <p:spPr>
           <a:xfrm>
-            <a:off x="0" y="3810000"/>
+            <a:off x="0" y="3937000"/>
             <a:ext cx="12192000" cy="317500"/>
           </a:xfrm>
           <a:prstGeom prst="rect">
@@ -16704,7 +16704,7 @@
         </p:nvCxnSpPr>
         <p:spPr>
           <a:xfrm>
-            <a:off x="5588000" y="4445000"/>
+            <a:off x="5588000" y="4572000"/>
             <a:ext cx="1016000" cy="0"/>
           </a:xfrm>
           <a:prstGeom prst="line">
@@ -16739,7 +16739,7 @@
         </p:nvCxnSpPr>
         <p:spPr>
           <a:xfrm>
-            <a:off x="5588000" y="4521200"/>
+            <a:off x="5588000" y="4648200"/>
             <a:ext cx="1016000" cy="0"/>
           </a:xfrm>
           <a:prstGeom prst="line">
@@ -16889,7 +16889,7 @@
         <p:spPr>
           <a:xfrm>
             <a:off x="762000" y="1206500"/>
-            <a:ext cx="3937000" cy="1287780"/>
+            <a:ext cx="3810000" cy="1287780"/>
           </a:xfrm>
           <a:prstGeom prst="rect">
             <a:avLst/>
@@ -16928,7 +16928,7 @@
         <p:spPr>
           <a:xfrm>
             <a:off x="762000" y="2659380"/>
-            <a:ext cx="3937000" cy="693420"/>
+            <a:ext cx="3810000" cy="693420"/>
           </a:xfrm>
           <a:prstGeom prst="rect">
             <a:avLst/>
@@ -16967,7 +16967,7 @@
         <p:spPr>
           <a:xfrm>
             <a:off x="762000" y="3441700"/>
-            <a:ext cx="3937000" cy="693420"/>
+            <a:ext cx="3810000" cy="693420"/>
           </a:xfrm>
           <a:prstGeom prst="rect">
             <a:avLst/>
@@ -17006,7 +17006,7 @@
         <p:spPr>
           <a:xfrm>
             <a:off x="762000" y="4224020"/>
-            <a:ext cx="3937000" cy="462280"/>
+            <a:ext cx="3810000" cy="231140"/>
           </a:xfrm>
           <a:prstGeom prst="rect">
             <a:avLst/>
@@ -17052,8 +17052,8 @@
         </p:blipFill>
         <p:spPr>
           <a:xfrm>
-            <a:off x="5016500" y="1206500"/>
-            <a:ext cx="6413500" cy="2992966"/>
+            <a:off x="4889500" y="1794933"/>
+            <a:ext cx="6731000" cy="3141133"/>
           </a:xfrm>
           <a:prstGeom prst="rect">
             <a:avLst/>
@@ -17710,7 +17710,7 @@
         </p:nvSpPr>
         <p:spPr>
           <a:xfrm>
-            <a:off x="762000" y="1206500"/>
+            <a:off x="762000" y="1181100"/>
             <a:ext cx="10668000" cy="429260"/>
           </a:xfrm>
           <a:prstGeom prst="rect">
@@ -17749,27 +17749,27 @@
         </p:nvSpPr>
         <p:spPr>
           <a:xfrm>
-            <a:off x="762000" y="1800860"/>
-            <a:ext cx="4826000" cy="254000"/>
-          </a:xfrm>
-          <a:prstGeom prst="rect">
-            <a:avLst/>
-          </a:prstGeom>
-          <a:noFill/>
-        </p:spPr>
-        <p:txBody>
-          <a:bodyPr wrap="square" lIns="0" rIns="0" tIns="0" bIns="0" anchor="t">
-            <a:spAutoFit/>
-          </a:bodyPr>
-          <a:lstStyle/>
-          <a:p>
-            <a:pPr algn="l">
-              <a:lnSpc>
-                <a:spcPct val="115000"/>
-              </a:lnSpc>
-            </a:pPr>
-            <a:r>
-              <a:rPr sz="1500" b="0">
+            <a:off x="762000" y="1724660"/>
+            <a:ext cx="5207000" cy="231140"/>
+          </a:xfrm>
+          <a:prstGeom prst="rect">
+            <a:avLst/>
+          </a:prstGeom>
+          <a:noFill/>
+        </p:spPr>
+        <p:txBody>
+          <a:bodyPr wrap="square" lIns="0" rIns="0" tIns="0" bIns="0" anchor="t">
+            <a:spAutoFit/>
+          </a:bodyPr>
+          <a:lstStyle/>
+          <a:p>
+            <a:pPr algn="l">
+              <a:lnSpc>
+                <a:spcPct val="115000"/>
+              </a:lnSpc>
+            </a:pPr>
+            <a:r>
+              <a:rPr sz="1400" b="0">
                 <a:solidFill>
                   <a:srgbClr val="ECE7DD"/>
                 </a:solidFill>
@@ -17788,8 +17788,8 @@
         </p:nvSpPr>
         <p:spPr>
           <a:xfrm>
-            <a:off x="762000" y="2042160"/>
-            <a:ext cx="4826000" cy="198120"/>
+            <a:off x="762000" y="1953260"/>
+            <a:ext cx="5207000" cy="198120"/>
           </a:xfrm>
           <a:prstGeom prst="rect">
             <a:avLst/>
@@ -17827,27 +17827,27 @@
         </p:nvSpPr>
         <p:spPr>
           <a:xfrm>
-            <a:off x="762000" y="2341880"/>
-            <a:ext cx="4826000" cy="254000"/>
-          </a:xfrm>
-          <a:prstGeom prst="rect">
-            <a:avLst/>
-          </a:prstGeom>
-          <a:noFill/>
-        </p:spPr>
-        <p:txBody>
-          <a:bodyPr wrap="square" lIns="0" rIns="0" tIns="0" bIns="0" anchor="t">
-            <a:spAutoFit/>
-          </a:bodyPr>
-          <a:lstStyle/>
-          <a:p>
-            <a:pPr algn="l">
-              <a:lnSpc>
-                <a:spcPct val="115000"/>
-              </a:lnSpc>
-            </a:pPr>
-            <a:r>
-              <a:rPr sz="1500" b="0">
+            <a:off x="762000" y="2227580"/>
+            <a:ext cx="5207000" cy="231140"/>
+          </a:xfrm>
+          <a:prstGeom prst="rect">
+            <a:avLst/>
+          </a:prstGeom>
+          <a:noFill/>
+        </p:spPr>
+        <p:txBody>
+          <a:bodyPr wrap="square" lIns="0" rIns="0" tIns="0" bIns="0" anchor="t">
+            <a:spAutoFit/>
+          </a:bodyPr>
+          <a:lstStyle/>
+          <a:p>
+            <a:pPr algn="l">
+              <a:lnSpc>
+                <a:spcPct val="115000"/>
+              </a:lnSpc>
+            </a:pPr>
+            <a:r>
+              <a:rPr sz="1400" b="0">
                 <a:solidFill>
                   <a:srgbClr val="ECE7DD"/>
                 </a:solidFill>
@@ -17866,8 +17866,8 @@
         </p:nvSpPr>
         <p:spPr>
           <a:xfrm>
-            <a:off x="762000" y="2583180"/>
-            <a:ext cx="4826000" cy="396240"/>
+            <a:off x="762000" y="2456180"/>
+            <a:ext cx="5207000" cy="198120"/>
           </a:xfrm>
           <a:prstGeom prst="rect">
             <a:avLst/>
@@ -17905,27 +17905,27 @@
         </p:nvSpPr>
         <p:spPr>
           <a:xfrm>
-            <a:off x="762000" y="3081020"/>
-            <a:ext cx="4826000" cy="254000"/>
-          </a:xfrm>
-          <a:prstGeom prst="rect">
-            <a:avLst/>
-          </a:prstGeom>
-          <a:noFill/>
-        </p:spPr>
-        <p:txBody>
-          <a:bodyPr wrap="square" lIns="0" rIns="0" tIns="0" bIns="0" anchor="t">
-            <a:spAutoFit/>
-          </a:bodyPr>
-          <a:lstStyle/>
-          <a:p>
-            <a:pPr algn="l">
-              <a:lnSpc>
-                <a:spcPct val="115000"/>
-              </a:lnSpc>
-            </a:pPr>
-            <a:r>
-              <a:rPr sz="1500" b="0">
+            <a:off x="762000" y="2730500"/>
+            <a:ext cx="5207000" cy="231140"/>
+          </a:xfrm>
+          <a:prstGeom prst="rect">
+            <a:avLst/>
+          </a:prstGeom>
+          <a:noFill/>
+        </p:spPr>
+        <p:txBody>
+          <a:bodyPr wrap="square" lIns="0" rIns="0" tIns="0" bIns="0" anchor="t">
+            <a:spAutoFit/>
+          </a:bodyPr>
+          <a:lstStyle/>
+          <a:p>
+            <a:pPr algn="l">
+              <a:lnSpc>
+                <a:spcPct val="115000"/>
+              </a:lnSpc>
+            </a:pPr>
+            <a:r>
+              <a:rPr sz="1400" b="0">
                 <a:solidFill>
                   <a:srgbClr val="ECE7DD"/>
                 </a:solidFill>
@@ -17944,8 +17944,8 @@
         </p:nvSpPr>
         <p:spPr>
           <a:xfrm>
-            <a:off x="762000" y="3322320"/>
-            <a:ext cx="4826000" cy="396240"/>
+            <a:off x="762000" y="2959100"/>
+            <a:ext cx="5207000" cy="396240"/>
           </a:xfrm>
           <a:prstGeom prst="rect">
             <a:avLst/>
@@ -17983,27 +17983,27 @@
         </p:nvSpPr>
         <p:spPr>
           <a:xfrm>
-            <a:off x="762000" y="3820160"/>
-            <a:ext cx="4826000" cy="254000"/>
-          </a:xfrm>
-          <a:prstGeom prst="rect">
-            <a:avLst/>
-          </a:prstGeom>
-          <a:noFill/>
-        </p:spPr>
-        <p:txBody>
-          <a:bodyPr wrap="square" lIns="0" rIns="0" tIns="0" bIns="0" anchor="t">
-            <a:spAutoFit/>
-          </a:bodyPr>
-          <a:lstStyle/>
-          <a:p>
-            <a:pPr algn="l">
-              <a:lnSpc>
-                <a:spcPct val="115000"/>
-              </a:lnSpc>
-            </a:pPr>
-            <a:r>
-              <a:rPr sz="1500" b="0">
+            <a:off x="762000" y="3431540"/>
+            <a:ext cx="5207000" cy="231140"/>
+          </a:xfrm>
+          <a:prstGeom prst="rect">
+            <a:avLst/>
+          </a:prstGeom>
+          <a:noFill/>
+        </p:spPr>
+        <p:txBody>
+          <a:bodyPr wrap="square" lIns="0" rIns="0" tIns="0" bIns="0" anchor="t">
+            <a:spAutoFit/>
+          </a:bodyPr>
+          <a:lstStyle/>
+          <a:p>
+            <a:pPr algn="l">
+              <a:lnSpc>
+                <a:spcPct val="115000"/>
+              </a:lnSpc>
+            </a:pPr>
+            <a:r>
+              <a:rPr sz="1400" b="0">
                 <a:solidFill>
                   <a:srgbClr val="ECE7DD"/>
                 </a:solidFill>
@@ -18022,8 +18022,8 @@
         </p:nvSpPr>
         <p:spPr>
           <a:xfrm>
-            <a:off x="762000" y="4061460"/>
-            <a:ext cx="4826000" cy="396240"/>
+            <a:off x="762000" y="3660140"/>
+            <a:ext cx="5207000" cy="198120"/>
           </a:xfrm>
           <a:prstGeom prst="rect">
             <a:avLst/>
@@ -18061,27 +18061,27 @@
         </p:nvSpPr>
         <p:spPr>
           <a:xfrm>
-            <a:off x="762000" y="4559300"/>
-            <a:ext cx="4826000" cy="254000"/>
-          </a:xfrm>
-          <a:prstGeom prst="rect">
-            <a:avLst/>
-          </a:prstGeom>
-          <a:noFill/>
-        </p:spPr>
-        <p:txBody>
-          <a:bodyPr wrap="square" lIns="0" rIns="0" tIns="0" bIns="0" anchor="t">
-            <a:spAutoFit/>
-          </a:bodyPr>
-          <a:lstStyle/>
-          <a:p>
-            <a:pPr algn="l">
-              <a:lnSpc>
-                <a:spcPct val="115000"/>
-              </a:lnSpc>
-            </a:pPr>
-            <a:r>
-              <a:rPr sz="1500" b="0">
+            <a:off x="762000" y="3934460"/>
+            <a:ext cx="5207000" cy="231140"/>
+          </a:xfrm>
+          <a:prstGeom prst="rect">
+            <a:avLst/>
+          </a:prstGeom>
+          <a:noFill/>
+        </p:spPr>
+        <p:txBody>
+          <a:bodyPr wrap="square" lIns="0" rIns="0" tIns="0" bIns="0" anchor="t">
+            <a:spAutoFit/>
+          </a:bodyPr>
+          <a:lstStyle/>
+          <a:p>
+            <a:pPr algn="l">
+              <a:lnSpc>
+                <a:spcPct val="115000"/>
+              </a:lnSpc>
+            </a:pPr>
+            <a:r>
+              <a:rPr sz="1400" b="0">
                 <a:solidFill>
                   <a:srgbClr val="ECE7DD"/>
                 </a:solidFill>
@@ -18100,8 +18100,8 @@
         </p:nvSpPr>
         <p:spPr>
           <a:xfrm>
-            <a:off x="762000" y="4800600"/>
-            <a:ext cx="4826000" cy="198120"/>
+            <a:off x="762000" y="4163060"/>
+            <a:ext cx="5207000" cy="198120"/>
           </a:xfrm>
           <a:prstGeom prst="rect">
             <a:avLst/>
@@ -18139,27 +18139,27 @@
         </p:nvSpPr>
         <p:spPr>
           <a:xfrm>
-            <a:off x="762000" y="5100320"/>
-            <a:ext cx="4826000" cy="254000"/>
-          </a:xfrm>
-          <a:prstGeom prst="rect">
-            <a:avLst/>
-          </a:prstGeom>
-          <a:noFill/>
-        </p:spPr>
-        <p:txBody>
-          <a:bodyPr wrap="square" lIns="0" rIns="0" tIns="0" bIns="0" anchor="t">
-            <a:spAutoFit/>
-          </a:bodyPr>
-          <a:lstStyle/>
-          <a:p>
-            <a:pPr algn="l">
-              <a:lnSpc>
-                <a:spcPct val="115000"/>
-              </a:lnSpc>
-            </a:pPr>
-            <a:r>
-              <a:rPr sz="1500" b="0">
+            <a:off x="762000" y="4437380"/>
+            <a:ext cx="5207000" cy="231140"/>
+          </a:xfrm>
+          <a:prstGeom prst="rect">
+            <a:avLst/>
+          </a:prstGeom>
+          <a:noFill/>
+        </p:spPr>
+        <p:txBody>
+          <a:bodyPr wrap="square" lIns="0" rIns="0" tIns="0" bIns="0" anchor="t">
+            <a:spAutoFit/>
+          </a:bodyPr>
+          <a:lstStyle/>
+          <a:p>
+            <a:pPr algn="l">
+              <a:lnSpc>
+                <a:spcPct val="115000"/>
+              </a:lnSpc>
+            </a:pPr>
+            <a:r>
+              <a:rPr sz="1400" b="0">
                 <a:solidFill>
                   <a:srgbClr val="ECE7DD"/>
                 </a:solidFill>
@@ -18178,8 +18178,8 @@
         </p:nvSpPr>
         <p:spPr>
           <a:xfrm>
-            <a:off x="762000" y="5341620"/>
-            <a:ext cx="4826000" cy="396240"/>
+            <a:off x="762000" y="4665980"/>
+            <a:ext cx="5207000" cy="396240"/>
           </a:xfrm>
           <a:prstGeom prst="rect">
             <a:avLst/>
@@ -18225,8 +18225,8 @@
         </p:blipFill>
         <p:spPr>
           <a:xfrm>
-            <a:off x="6096000" y="1905000"/>
-            <a:ext cx="5334000" cy="2667000"/>
+            <a:off x="6350000" y="1905000"/>
+            <a:ext cx="5080000" cy="2540000"/>
           </a:xfrm>
           <a:prstGeom prst="rect">
             <a:avLst/>
@@ -18512,7 +18512,7 @@
         <p:spPr>
           <a:xfrm>
             <a:off x="762000" y="1206500"/>
-            <a:ext cx="3937000" cy="858520"/>
+            <a:ext cx="3810000" cy="858520"/>
           </a:xfrm>
           <a:prstGeom prst="rect">
             <a:avLst/>
@@ -18551,7 +18551,7 @@
         <p:spPr>
           <a:xfrm>
             <a:off x="762000" y="2230120"/>
-            <a:ext cx="3937000" cy="462280"/>
+            <a:ext cx="3810000" cy="462280"/>
           </a:xfrm>
           <a:prstGeom prst="rect">
             <a:avLst/>
@@ -18590,7 +18590,7 @@
         <p:spPr>
           <a:xfrm>
             <a:off x="762000" y="2781300"/>
-            <a:ext cx="3937000" cy="462280"/>
+            <a:ext cx="3810000" cy="462280"/>
           </a:xfrm>
           <a:prstGeom prst="rect">
             <a:avLst/>
@@ -18629,7 +18629,7 @@
         <p:spPr>
           <a:xfrm>
             <a:off x="762000" y="3332480"/>
-            <a:ext cx="3937000" cy="462280"/>
+            <a:ext cx="3810000" cy="462280"/>
           </a:xfrm>
           <a:prstGeom prst="rect">
             <a:avLst/>
@@ -18668,7 +18668,7 @@
         <p:spPr>
           <a:xfrm>
             <a:off x="762000" y="3883660"/>
-            <a:ext cx="3937000" cy="462280"/>
+            <a:ext cx="3810000" cy="462280"/>
           </a:xfrm>
           <a:prstGeom prst="rect">
             <a:avLst/>
@@ -18707,7 +18707,7 @@
         <p:spPr>
           <a:xfrm>
             <a:off x="762000" y="4434840"/>
-            <a:ext cx="3937000" cy="462280"/>
+            <a:ext cx="3810000" cy="462280"/>
           </a:xfrm>
           <a:prstGeom prst="rect">
             <a:avLst/>
@@ -18746,7 +18746,7 @@
         <p:spPr>
           <a:xfrm>
             <a:off x="762000" y="4986020"/>
-            <a:ext cx="3937000" cy="462280"/>
+            <a:ext cx="3810000" cy="462280"/>
           </a:xfrm>
           <a:prstGeom prst="rect">
             <a:avLst/>
@@ -18792,8 +18792,8 @@
         </p:blipFill>
         <p:spPr>
           <a:xfrm>
-            <a:off x="5016500" y="1206500"/>
-            <a:ext cx="6413500" cy="3078480"/>
+            <a:off x="4889500" y="1750060"/>
+            <a:ext cx="6731000" cy="3230880"/>
           </a:xfrm>
           <a:prstGeom prst="rect">
             <a:avLst/>

--- a/deck/out/favoured-banks.pptx
+++ b/deck/out/favoured-banks.pptx
@@ -743,7 +743,7 @@
           <a:lstStyle/>
           <a:p>
             <a:r>
-              <a:t>Outlined cells are the leader in each row. BCA's digital lead comes largely through its apps.</a:t>
+              <a:t>The three comparison prompts name banks, which puts those banks in the answer, so they are left out here. Outlined cells lead their row, ties together. Every lead is a tie or one answer, so read the rows as close.</a:t>
             </a:r>
           </a:p>
         </p:txBody>
@@ -5306,7 +5306,7 @@
         <p:spPr>
           <a:xfrm>
             <a:off x="762000" y="1905000"/>
-            <a:ext cx="10160000" cy="190500"/>
+            <a:ext cx="10160000" cy="195579"/>
           </a:xfrm>
           <a:prstGeom prst="rect">
             <a:avLst/>
@@ -5345,7 +5345,7 @@
         <p:spPr>
           <a:xfrm>
             <a:off x="762000" y="2159000"/>
-            <a:ext cx="10668000" cy="1333500"/>
+            <a:ext cx="10668000" cy="1422400"/>
           </a:xfrm>
           <a:prstGeom prst="rect">
             <a:avLst/>
@@ -5384,7 +5384,7 @@
         <p:spPr>
           <a:xfrm>
             <a:off x="762000" y="3556000"/>
-            <a:ext cx="7302500" cy="660400"/>
+            <a:ext cx="7302500" cy="711200"/>
           </a:xfrm>
           <a:prstGeom prst="rect">
             <a:avLst/>
@@ -5597,7 +5597,7 @@
         <p:spPr>
           <a:xfrm>
             <a:off x="0" y="2794000"/>
-            <a:ext cx="12192000" cy="990600"/>
+            <a:ext cx="12192000" cy="1066800"/>
           </a:xfrm>
           <a:prstGeom prst="rect">
             <a:avLst/>
@@ -5636,7 +5636,7 @@
         <p:spPr>
           <a:xfrm>
             <a:off x="0" y="3937000"/>
-            <a:ext cx="12192000" cy="317500"/>
+            <a:ext cx="12192000" cy="320040"/>
           </a:xfrm>
           <a:prstGeom prst="rect">
             <a:avLst/>
@@ -5859,7 +5859,7 @@
         <p:spPr>
           <a:xfrm>
             <a:off x="762000" y="1206500"/>
-            <a:ext cx="3810000" cy="1717040"/>
+            <a:ext cx="3810000" cy="1849120"/>
           </a:xfrm>
           <a:prstGeom prst="rect">
             <a:avLst/>
@@ -5897,8 +5897,8 @@
         </p:nvSpPr>
         <p:spPr>
           <a:xfrm>
-            <a:off x="762000" y="3088640"/>
-            <a:ext cx="3810000" cy="462280"/>
+            <a:off x="762000" y="3220720"/>
+            <a:ext cx="3810000" cy="497839"/>
           </a:xfrm>
           <a:prstGeom prst="rect">
             <a:avLst/>
@@ -6103,7 +6103,7 @@
                 </a:solidFill>
                 <a:latin typeface="IBM Plex Mono"/>
               </a:rPr>
-              <a:t>source: data/processed/brand_engine.csv  ·  top 10 banks</a:t>
+              <a:t>source: data/processed/brand_engine.csv  ·  top 10 banks  ·  n = 20 answers per engine</a:t>
             </a:r>
           </a:p>
         </p:txBody>
@@ -6231,7 +6231,7 @@
         <p:spPr>
           <a:xfrm>
             <a:off x="762000" y="1206500"/>
-            <a:ext cx="3810000" cy="858520"/>
+            <a:ext cx="3810000" cy="1386839"/>
           </a:xfrm>
           <a:prstGeom prst="rect">
             <a:avLst/>
@@ -6256,7 +6256,7 @@
                 </a:solidFill>
                 <a:latin typeface="Work Sans"/>
               </a:rPr>
-              <a:t>BCA has the highest visibility score</a:t>
+              <a:t>BCA scores highest, with Bank Jago and BRI close behind</a:t>
             </a:r>
           </a:p>
         </p:txBody>
@@ -6269,8 +6269,8 @@
         </p:nvSpPr>
         <p:spPr>
           <a:xfrm>
-            <a:off x="762000" y="2230120"/>
-            <a:ext cx="3810000" cy="462280"/>
+            <a:off x="762000" y="2758440"/>
+            <a:ext cx="3810000" cy="497839"/>
           </a:xfrm>
           <a:prstGeom prst="rect">
             <a:avLst/>
@@ -6308,8 +6308,8 @@
         </p:nvSpPr>
         <p:spPr>
           <a:xfrm>
-            <a:off x="762000" y="2781300"/>
-            <a:ext cx="3810000" cy="462280"/>
+            <a:off x="762000" y="3345179"/>
+            <a:ext cx="3810000" cy="497839"/>
           </a:xfrm>
           <a:prstGeom prst="rect">
             <a:avLst/>
@@ -6514,7 +6514,7 @@
                 </a:solidFill>
                 <a:latin typeface="IBM Plex Mono"/>
               </a:rPr>
-              <a:t>source: data/processed/vis.csv</a:t>
+              <a:t>source: data/processed/vis.csv  ·  n = 40 answers</a:t>
             </a:r>
           </a:p>
         </p:txBody>
@@ -6642,7 +6642,7 @@
         <p:spPr>
           <a:xfrm>
             <a:off x="762000" y="1181100"/>
-            <a:ext cx="10668000" cy="429260"/>
+            <a:ext cx="10668000" cy="462280"/>
           </a:xfrm>
           <a:prstGeom prst="rect">
             <a:avLst/>
@@ -6680,8 +6680,8 @@
         </p:nvSpPr>
         <p:spPr>
           <a:xfrm>
-            <a:off x="762000" y="1699260"/>
-            <a:ext cx="8572500" cy="462280"/>
+            <a:off x="762000" y="1732280"/>
+            <a:ext cx="8572500" cy="497839"/>
           </a:xfrm>
           <a:prstGeom prst="rect">
             <a:avLst/>
@@ -6727,7 +6727,7 @@
         </p:blipFill>
         <p:spPr>
           <a:xfrm>
-            <a:off x="762000" y="2275840"/>
+            <a:off x="762000" y="2344420"/>
             <a:ext cx="10668000" cy="2730500"/>
           </a:xfrm>
           <a:prstGeom prst="rect">
@@ -6886,7 +6886,7 @@
                 </a:solidFill>
                 <a:latin typeface="IBM Plex Mono"/>
               </a:rPr>
-              <a:t>source: data/processed/brand_engine.csv</a:t>
+              <a:t>source: data/processed/brand_engine.csv  ·  n = 20 answers per engine</a:t>
             </a:r>
           </a:p>
         </p:txBody>
@@ -7014,7 +7014,7 @@
         <p:spPr>
           <a:xfrm>
             <a:off x="762000" y="1181100"/>
-            <a:ext cx="10668000" cy="429260"/>
+            <a:ext cx="10668000" cy="924560"/>
           </a:xfrm>
           <a:prstGeom prst="rect">
             <a:avLst/>
@@ -7039,7 +7039,7 @@
                 </a:solidFill>
                 <a:latin typeface="Work Sans"/>
               </a:rPr>
-              <a:t>Each customer need has its own leading bank</a:t>
+              <a:t>No bank leads every customer need, and no lead is more than one answer</a:t>
             </a:r>
           </a:p>
         </p:txBody>
@@ -7052,8 +7052,8 @@
         </p:nvSpPr>
         <p:spPr>
           <a:xfrm>
-            <a:off x="762000" y="1699260"/>
-            <a:ext cx="8572500" cy="462280"/>
+            <a:off x="762000" y="2194560"/>
+            <a:ext cx="8572500" cy="746760"/>
           </a:xfrm>
           <a:prstGeom prst="rect">
             <a:avLst/>
@@ -7078,7 +7078,7 @@
                 </a:solidFill>
                 <a:latin typeface="Work Sans"/>
               </a:rPr>
-              <a:t>Fees and rates: Bank Jago and SeaBank (80%). Digital experience: BCA (88%). Safety: Bank Jago (63%). Service: BRI (63%). Trust: BCA (50%).</a:t>
+              <a:t>Counted on the 17 prompts that name no bank. Fees and rates: Bank Jago, Krom Bank and SeaBank, 6 of 8. Digital experience: Bank Jago and SeaBank, 6 of 6. Safety: Bank Jago, 5 of 8. Service: BCA, 4 of 6. Trust: BCA, 3 of 6.</a:t>
             </a:r>
           </a:p>
         </p:txBody>
@@ -7099,8 +7099,8 @@
         </p:blipFill>
         <p:spPr>
           <a:xfrm>
-            <a:off x="1108710" y="2275840"/>
-            <a:ext cx="9974579" cy="3324859"/>
+            <a:off x="2278380" y="3055620"/>
+            <a:ext cx="7635239" cy="2545079"/>
           </a:xfrm>
           <a:prstGeom prst="rect">
             <a:avLst/>
@@ -7258,7 +7258,7 @@
                 </a:solidFill>
                 <a:latin typeface="IBM Plex Mono"/>
               </a:rPr>
-              <a:t>source: data/processed/brand_pillar.csv  ·  share of answers in each pillar that name the bank</a:t>
+              <a:t>source: data/interim/answers.csv, mentions.csv  ·  share of a need's answers that name the bank  ·  n = 34 answers</a:t>
             </a:r>
           </a:p>
         </p:txBody>
@@ -7386,7 +7386,7 @@
         <p:spPr>
           <a:xfrm>
             <a:off x="762000" y="1206500"/>
-            <a:ext cx="3810000" cy="1287780"/>
+            <a:ext cx="3810000" cy="1386839"/>
           </a:xfrm>
           <a:prstGeom prst="rect">
             <a:avLst/>
@@ -7424,8 +7424,8 @@
         </p:nvSpPr>
         <p:spPr>
           <a:xfrm>
-            <a:off x="762000" y="2659380"/>
-            <a:ext cx="3810000" cy="462280"/>
+            <a:off x="762000" y="2758440"/>
+            <a:ext cx="3810000" cy="497839"/>
           </a:xfrm>
           <a:prstGeom prst="rect">
             <a:avLst/>
@@ -7463,8 +7463,8 @@
         </p:nvSpPr>
         <p:spPr>
           <a:xfrm>
-            <a:off x="762000" y="3210560"/>
-            <a:ext cx="3810000" cy="924560"/>
+            <a:off x="762000" y="3345179"/>
+            <a:ext cx="3810000" cy="995679"/>
           </a:xfrm>
           <a:prstGeom prst="rect">
             <a:avLst/>
@@ -7669,7 +7669,7 @@
                 </a:solidFill>
                 <a:latin typeface="IBM Plex Mono"/>
               </a:rPr>
-              <a:t>source: data/processed/brand_engine.csv  ·  banks named in at least 3 answers</a:t>
+              <a:t>source: data/processed/brand_engine.csv  ·  banks named in at least 3 answers  ·  n = 40 answers</a:t>
             </a:r>
           </a:p>
         </p:txBody>
@@ -7797,7 +7797,7 @@
         <p:spPr>
           <a:xfrm>
             <a:off x="762000" y="1181100"/>
-            <a:ext cx="10668000" cy="429260"/>
+            <a:ext cx="10668000" cy="462280"/>
           </a:xfrm>
           <a:prstGeom prst="rect">
             <a:avLst/>
@@ -7835,8 +7835,8 @@
         </p:nvSpPr>
         <p:spPr>
           <a:xfrm>
-            <a:off x="762000" y="1699260"/>
-            <a:ext cx="8572500" cy="462280"/>
+            <a:off x="762000" y="1732280"/>
+            <a:ext cx="8572500" cy="497839"/>
           </a:xfrm>
           <a:prstGeom prst="rect">
             <a:avLst/>
@@ -7882,7 +7882,7 @@
         </p:blipFill>
         <p:spPr>
           <a:xfrm>
-            <a:off x="762000" y="2275840"/>
+            <a:off x="762000" y="2344420"/>
             <a:ext cx="10668000" cy="2413000"/>
           </a:xfrm>
           <a:prstGeom prst="rect">
@@ -8041,7 +8041,7 @@
                 </a:solidFill>
                 <a:latin typeface="IBM Plex Mono"/>
               </a:rPr>
-              <a:t>source: data/labels/sentiment.csv  ·  labelled by Claude, spot-checked by RG</a:t>
+              <a:t>source: data/labels/sentiment.csv  ·  labelled by Claude, spot-checked by RG  ·  n = 137 pairs</a:t>
             </a:r>
           </a:p>
         </p:txBody>
@@ -8169,7 +8169,7 @@
         <p:spPr>
           <a:xfrm>
             <a:off x="762000" y="1206500"/>
-            <a:ext cx="3810000" cy="858520"/>
+            <a:ext cx="3810000" cy="924560"/>
           </a:xfrm>
           <a:prstGeom prst="rect">
             <a:avLst/>
@@ -8207,8 +8207,8 @@
         </p:nvSpPr>
         <p:spPr>
           <a:xfrm>
-            <a:off x="762000" y="2230120"/>
-            <a:ext cx="3810000" cy="462280"/>
+            <a:off x="762000" y="2296160"/>
+            <a:ext cx="3810000" cy="497839"/>
           </a:xfrm>
           <a:prstGeom prst="rect">
             <a:avLst/>
@@ -8246,8 +8246,8 @@
         </p:nvSpPr>
         <p:spPr>
           <a:xfrm>
-            <a:off x="762000" y="2781300"/>
-            <a:ext cx="3810000" cy="693420"/>
+            <a:off x="762000" y="2882900"/>
+            <a:ext cx="3810000" cy="746760"/>
           </a:xfrm>
           <a:prstGeom prst="rect">
             <a:avLst/>
@@ -8272,7 +8272,7 @@
                 </a:solidFill>
                 <a:latin typeface="Work Sans"/>
               </a:rPr>
-              <a:t>Only 1 of 6 how-to answers did. Explainers on deposit insurance, scams and complaints are a gap for banks.</a:t>
+              <a:t>Only 1 of 6 how-to answers did. Explainers on deposit insurance, scams and complaints look like a gap for banks.</a:t>
             </a:r>
           </a:p>
         </p:txBody>
@@ -8452,7 +8452,7 @@
                 </a:solidFill>
                 <a:latin typeface="IBM Plex Mono"/>
               </a:rPr>
-              <a:t>source: data/processed/no_brand_rate.csv</a:t>
+              <a:t>source: data/processed/no_brand_rate.csv  ·  n = 40 answers</a:t>
             </a:r>
           </a:p>
         </p:txBody>
@@ -8531,7 +8531,7 @@
         <p:spPr>
           <a:xfrm>
             <a:off x="0" y="2794000"/>
-            <a:ext cx="12192000" cy="990600"/>
+            <a:ext cx="12192000" cy="1066800"/>
           </a:xfrm>
           <a:prstGeom prst="rect">
             <a:avLst/>
@@ -8570,7 +8570,7 @@
         <p:spPr>
           <a:xfrm>
             <a:off x="0" y="3937000"/>
-            <a:ext cx="12192000" cy="317500"/>
+            <a:ext cx="12192000" cy="320040"/>
           </a:xfrm>
           <a:prstGeom prst="rect">
             <a:avLst/>
@@ -8793,7 +8793,7 @@
         <p:spPr>
           <a:xfrm>
             <a:off x="762000" y="1181100"/>
-            <a:ext cx="10668000" cy="858520"/>
+            <a:ext cx="10668000" cy="924560"/>
           </a:xfrm>
           <a:prstGeom prst="rect">
             <a:avLst/>
@@ -8831,8 +8831,8 @@
         </p:nvSpPr>
         <p:spPr>
           <a:xfrm>
-            <a:off x="762000" y="2128520"/>
-            <a:ext cx="8572500" cy="462280"/>
+            <a:off x="762000" y="2194560"/>
+            <a:ext cx="8572500" cy="497839"/>
           </a:xfrm>
           <a:prstGeom prst="rect">
             <a:avLst/>
@@ -8878,8 +8878,8 @@
         </p:blipFill>
         <p:spPr>
           <a:xfrm>
-            <a:off x="808382" y="2705100"/>
-            <a:ext cx="10575234" cy="2895599"/>
+            <a:off x="993913" y="2806700"/>
+            <a:ext cx="10204173" cy="2794000"/>
           </a:xfrm>
           <a:prstGeom prst="rect">
             <a:avLst/>
@@ -9037,7 +9037,7 @@
                 </a:solidFill>
                 <a:latin typeface="IBM Plex Mono"/>
               </a:rPr>
-              <a:t>source: data/processed/domain_type_mix.csv  ·  each share rounded on its own, so sums can differ by 1 point</a:t>
+              <a:t>source: data/processed/domain_type_mix.csv  ·  shares rounded on their own, sums can differ by 1 point  ·  n = 199 and 200 citations</a:t>
             </a:r>
           </a:p>
         </p:txBody>
@@ -9165,7 +9165,7 @@
         <p:spPr>
           <a:xfrm>
             <a:off x="762000" y="1206500"/>
-            <a:ext cx="10668000" cy="429260"/>
+            <a:ext cx="10668000" cy="462280"/>
           </a:xfrm>
           <a:prstGeom prst="rect">
             <a:avLst/>
@@ -9203,8 +9203,8 @@
         </p:nvSpPr>
         <p:spPr>
           <a:xfrm>
-            <a:off x="762000" y="1826260"/>
-            <a:ext cx="9525000" cy="1089660"/>
+            <a:off x="762000" y="1859280"/>
+            <a:ext cx="9525000" cy="1173480"/>
           </a:xfrm>
           <a:prstGeom prst="rect">
             <a:avLst/>
@@ -9242,8 +9242,8 @@
         </p:nvSpPr>
         <p:spPr>
           <a:xfrm>
-            <a:off x="762000" y="2979420"/>
-            <a:ext cx="9525000" cy="462280"/>
+            <a:off x="762000" y="3185160"/>
+            <a:ext cx="9525000" cy="497839"/>
           </a:xfrm>
           <a:prstGeom prst="rect">
             <a:avLst/>
@@ -9281,7 +9281,7 @@
         </p:nvSpPr>
         <p:spPr>
           <a:xfrm>
-            <a:off x="762000" y="3873500"/>
+            <a:off x="762000" y="4114800"/>
             <a:ext cx="88900" cy="88900"/>
           </a:xfrm>
           <a:prstGeom prst="rect">
@@ -9325,8 +9325,8 @@
         </p:nvSpPr>
         <p:spPr>
           <a:xfrm>
-            <a:off x="952500" y="3822700"/>
-            <a:ext cx="3810000" cy="190500"/>
+            <a:off x="952500" y="4064000"/>
+            <a:ext cx="3810000" cy="195579"/>
           </a:xfrm>
           <a:prstGeom prst="rect">
             <a:avLst/>
@@ -9364,8 +9364,8 @@
         </p:nvSpPr>
         <p:spPr>
           <a:xfrm>
-            <a:off x="762000" y="4140200"/>
-            <a:ext cx="4318000" cy="1188720"/>
+            <a:off x="762000" y="4381500"/>
+            <a:ext cx="4318000" cy="1280159"/>
           </a:xfrm>
           <a:prstGeom prst="rect">
             <a:avLst/>
@@ -9435,7 +9435,7 @@
         </p:nvSpPr>
         <p:spPr>
           <a:xfrm>
-            <a:off x="5588000" y="3873500"/>
+            <a:off x="5588000" y="4114800"/>
             <a:ext cx="88900" cy="88900"/>
           </a:xfrm>
           <a:prstGeom prst="rect">
@@ -9479,8 +9479,8 @@
         </p:nvSpPr>
         <p:spPr>
           <a:xfrm>
-            <a:off x="5778500" y="3822700"/>
-            <a:ext cx="3810000" cy="190500"/>
+            <a:off x="5778500" y="4064000"/>
+            <a:ext cx="3810000" cy="195579"/>
           </a:xfrm>
           <a:prstGeom prst="rect">
             <a:avLst/>
@@ -9518,8 +9518,8 @@
         </p:nvSpPr>
         <p:spPr>
           <a:xfrm>
-            <a:off x="5588000" y="4140200"/>
-            <a:ext cx="4318000" cy="1188720"/>
+            <a:off x="5588000" y="4381500"/>
+            <a:ext cx="4318000" cy="1280159"/>
           </a:xfrm>
           <a:prstGeom prst="rect">
             <a:avLst/>
@@ -9860,7 +9860,7 @@
         <p:spPr>
           <a:xfrm>
             <a:off x="762000" y="1206500"/>
-            <a:ext cx="3810000" cy="858520"/>
+            <a:ext cx="3810000" cy="1849120"/>
           </a:xfrm>
           <a:prstGeom prst="rect">
             <a:avLst/>
@@ -9885,7 +9885,7 @@
                 </a:solidFill>
                 <a:latin typeface="Work Sans"/>
               </a:rPr>
-              <a:t>The two engines barely share a source</a:t>
+              <a:t>The engines share sites more than pages: 21 of 97 sites, 11 of 243 pages</a:t>
             </a:r>
           </a:p>
         </p:txBody>
@@ -9898,8 +9898,8 @@
         </p:nvSpPr>
         <p:spPr>
           <a:xfrm>
-            <a:off x="762000" y="2230120"/>
-            <a:ext cx="3810000" cy="693420"/>
+            <a:off x="762000" y="3220720"/>
+            <a:ext cx="3810000" cy="995679"/>
           </a:xfrm>
           <a:prstGeom prst="rect">
             <a:avLst/>
@@ -9924,7 +9924,7 @@
                 </a:solidFill>
                 <a:latin typeface="Work Sans"/>
               </a:rPr>
-              <a:t>21 of 97 sites and 11 of 243 pages are cited by both. That is a Jaccard overlap of 0.22 for sites and 0.05 for pages.</a:t>
+              <a:t>21 of ChatGPT's 46 sites are also cited by Gemini, but rarely the same page. The Jaccard overlap is 0.22 for sites and 0.05 for pages.</a:t>
             </a:r>
           </a:p>
         </p:txBody>
@@ -9937,8 +9937,8 @@
         </p:nvSpPr>
         <p:spPr>
           <a:xfrm>
-            <a:off x="762000" y="3012440"/>
-            <a:ext cx="3810000" cy="924560"/>
+            <a:off x="762000" y="4305300"/>
+            <a:ext cx="3810000" cy="995679"/>
           </a:xfrm>
           <a:prstGeom prst="rect">
             <a:avLst/>
@@ -10143,7 +10143,7 @@
                 </a:solidFill>
                 <a:latin typeface="IBM Plex Mono"/>
               </a:rPr>
-              <a:t>source: data/interim/citations.csv  ·  Writesonic, AI citation source overlap study</a:t>
+              <a:t>source: data/interim/citations.csv  ·  Writesonic, AI citation source overlap study  ·  n = 97 sites, 243 pages</a:t>
             </a:r>
           </a:p>
         </p:txBody>
@@ -10271,7 +10271,7 @@
         <p:spPr>
           <a:xfrm>
             <a:off x="762000" y="1181100"/>
-            <a:ext cx="10668000" cy="429260"/>
+            <a:ext cx="10668000" cy="462280"/>
           </a:xfrm>
           <a:prstGeom prst="rect">
             <a:avLst/>
@@ -10309,8 +10309,8 @@
         </p:nvSpPr>
         <p:spPr>
           <a:xfrm>
-            <a:off x="762000" y="1699260"/>
-            <a:ext cx="8572500" cy="231140"/>
+            <a:off x="762000" y="1732280"/>
+            <a:ext cx="8572500" cy="248919"/>
           </a:xfrm>
           <a:prstGeom prst="rect">
             <a:avLst/>
@@ -10356,8 +10356,8 @@
         </p:blipFill>
         <p:spPr>
           <a:xfrm>
-            <a:off x="1570181" y="2044700"/>
-            <a:ext cx="9051636" cy="3556000"/>
+            <a:off x="1634836" y="2095500"/>
+            <a:ext cx="8922327" cy="3505200"/>
           </a:xfrm>
           <a:prstGeom prst="rect">
             <a:avLst/>
@@ -10515,7 +10515,7 @@
                 </a:solidFill>
                 <a:latin typeface="IBM Plex Mono"/>
               </a:rPr>
-              <a:t>source: data/processed/domains.csv  ·  top sites by citations</a:t>
+              <a:t>source: data/processed/domains.csv  ·  top sites by citations  ·  n = 399 citations</a:t>
             </a:r>
           </a:p>
         </p:txBody>
@@ -10643,7 +10643,7 @@
         <p:spPr>
           <a:xfrm>
             <a:off x="762000" y="1181100"/>
-            <a:ext cx="10668000" cy="429260"/>
+            <a:ext cx="10668000" cy="462280"/>
           </a:xfrm>
           <a:prstGeom prst="rect">
             <a:avLst/>
@@ -10681,8 +10681,8 @@
         </p:nvSpPr>
         <p:spPr>
           <a:xfrm>
-            <a:off x="762000" y="1699260"/>
-            <a:ext cx="8572500" cy="462280"/>
+            <a:off x="762000" y="1732280"/>
+            <a:ext cx="8572500" cy="497839"/>
           </a:xfrm>
           <a:prstGeom prst="rect">
             <a:avLst/>
@@ -10720,8 +10720,8 @@
         </p:nvSpPr>
         <p:spPr>
           <a:xfrm>
-            <a:off x="762000" y="2212340"/>
-            <a:ext cx="8572500" cy="462280"/>
+            <a:off x="762000" y="2280920"/>
+            <a:ext cx="8572500" cy="497839"/>
           </a:xfrm>
           <a:prstGeom prst="rect">
             <a:avLst/>
@@ -10767,8 +10767,8 @@
         </p:blipFill>
         <p:spPr>
           <a:xfrm>
-            <a:off x="2159508" y="2788920"/>
-            <a:ext cx="7872983" cy="2811779"/>
+            <a:off x="2305304" y="2893060"/>
+            <a:ext cx="7581392" cy="2707640"/>
           </a:xfrm>
           <a:prstGeom prst="rect">
             <a:avLst/>
@@ -10926,7 +10926,7 @@
                 </a:solidFill>
                 <a:latin typeface="IBM Plex Mono"/>
               </a:rPr>
-              <a:t>source: data/processed/pages_top.csv  ·  most cited pages</a:t>
+              <a:t>source: data/processed/pages_top.csv  ·  most cited pages  ·  n = 399 citations</a:t>
             </a:r>
           </a:p>
         </p:txBody>
@@ -11054,7 +11054,7 @@
         <p:spPr>
           <a:xfrm>
             <a:off x="762000" y="1206500"/>
-            <a:ext cx="3810000" cy="858520"/>
+            <a:ext cx="3810000" cy="924560"/>
           </a:xfrm>
           <a:prstGeom prst="rect">
             <a:avLst/>
@@ -11092,8 +11092,8 @@
         </p:nvSpPr>
         <p:spPr>
           <a:xfrm>
-            <a:off x="762000" y="2230120"/>
-            <a:ext cx="3810000" cy="462280"/>
+            <a:off x="762000" y="2296160"/>
+            <a:ext cx="3810000" cy="497839"/>
           </a:xfrm>
           <a:prstGeom prst="rect">
             <a:avLst/>
@@ -11298,7 +11298,7 @@
                 </a:solidFill>
                 <a:latin typeface="IBM Plex Mono"/>
               </a:rPr>
-              <a:t>source: data/processed/concentration.csv</a:t>
+              <a:t>source: data/processed/concentration.csv  ·  n = 199 and 200 citations</a:t>
             </a:r>
           </a:p>
         </p:txBody>
@@ -11426,7 +11426,7 @@
         <p:spPr>
           <a:xfrm>
             <a:off x="762000" y="1206500"/>
-            <a:ext cx="3810000" cy="1717040"/>
+            <a:ext cx="3810000" cy="1386839"/>
           </a:xfrm>
           <a:prstGeom prst="rect">
             <a:avLst/>
@@ -11451,7 +11451,7 @@
                 </a:solidFill>
                 <a:latin typeface="Work Sans"/>
               </a:rPr>
-              <a:t>Bank Jago and BCA take more of the answers than of their sources</a:t>
+              <a:t>Bank Mandiri gets less of the answers than its sources give it</a:t>
             </a:r>
           </a:p>
         </p:txBody>
@@ -11464,8 +11464,8 @@
         </p:nvSpPr>
         <p:spPr>
           <a:xfrm>
-            <a:off x="762000" y="3088640"/>
-            <a:ext cx="3810000" cy="693420"/>
+            <a:off x="762000" y="2758440"/>
+            <a:ext cx="3810000" cy="746760"/>
           </a:xfrm>
           <a:prstGeom prst="rect">
             <a:avLst/>
@@ -11490,7 +11490,7 @@
                 </a:solidFill>
                 <a:latin typeface="Work Sans"/>
               </a:rPr>
-              <a:t>Bank Jago holds 20.2% of bank mentions in the answers and 13.6% in the pages they cite.</a:t>
+              <a:t>Bank Mandiri holds 11.5% of bank mentions in the cited pages and 5.9% in the answers.</a:t>
             </a:r>
           </a:p>
         </p:txBody>
@@ -11503,8 +11503,8 @@
         </p:nvSpPr>
         <p:spPr>
           <a:xfrm>
-            <a:off x="762000" y="3870960"/>
-            <a:ext cx="3810000" cy="462280"/>
+            <a:off x="762000" y="3594100"/>
+            <a:ext cx="3810000" cy="746760"/>
           </a:xfrm>
           <a:prstGeom prst="rect">
             <a:avLst/>
@@ -11529,14 +11529,53 @@
                 </a:solidFill>
                 <a:latin typeface="Work Sans"/>
               </a:rPr>
-              <a:t>Bank Mandiri runs the other way: 11.5% in the pages, 5.9% in the answers.</a:t>
+              <a:t>Bank Jago and BCA lean the other way. Bank Jago holds 20.2% of mentions in the answers and 13.6% in the pages.</a:t>
+            </a:r>
+          </a:p>
+        </p:txBody>
+      </p:sp>
+      <p:sp>
+        <p:nvSpPr>
+          <p:cNvPr id="7" name="TextBox 6"/>
+          <p:cNvSpPr txBox="1"/>
+          <p:nvPr/>
+        </p:nvSpPr>
+        <p:spPr>
+          <a:xfrm>
+            <a:off x="762000" y="4429760"/>
+            <a:ext cx="3810000" cy="995679"/>
+          </a:xfrm>
+          <a:prstGeom prst="rect">
+            <a:avLst/>
+          </a:prstGeom>
+          <a:noFill/>
+        </p:spPr>
+        <p:txBody>
+          <a:bodyPr wrap="square" lIns="0" rIns="0" tIns="0" bIns="0" anchor="t">
+            <a:spAutoFit/>
+          </a:bodyPr>
+          <a:lstStyle/>
+          <a:p>
+            <a:pPr algn="l">
+              <a:lnSpc>
+                <a:spcPct val="115000"/>
+              </a:lnSpc>
+            </a:pPr>
+            <a:r>
+              <a:rPr sz="1400" b="0">
+                <a:solidFill>
+                  <a:srgbClr val="9A9EA6"/>
+                </a:solidFill>
+                <a:latin typeface="Work Sans"/>
+              </a:rPr>
+              <a:t>Pages were counted without a bare “Jago” or “blu”, so these two banks' source share may be low and their gaps too wide.</a:t>
             </a:r>
           </a:p>
         </p:txBody>
       </p:sp>
       <p:pic>
         <p:nvPicPr>
-          <p:cNvPr id="7" name="Picture 6" descr="sov_gap.png"/>
+          <p:cNvPr id="8" name="Picture 7" descr="sov_gap.png"/>
           <p:cNvPicPr>
             <a:picLocks noChangeAspect="1"/>
           </p:cNvPicPr>
@@ -11560,7 +11599,7 @@
       </p:pic>
       <p:sp>
         <p:nvSpPr>
-          <p:cNvPr id="8" name="TextBox 7"/>
+          <p:cNvPr id="9" name="TextBox 8"/>
           <p:cNvSpPr txBox="1"/>
           <p:nvPr/>
         </p:nvSpPr>
@@ -11599,7 +11638,7 @@
       </p:sp>
       <p:sp>
         <p:nvSpPr>
-          <p:cNvPr id="9" name="TextBox 8"/>
+          <p:cNvPr id="10" name="TextBox 9"/>
           <p:cNvSpPr txBox="1"/>
           <p:nvPr/>
         </p:nvSpPr>
@@ -11638,7 +11677,7 @@
       </p:sp>
       <p:sp>
         <p:nvSpPr>
-          <p:cNvPr id="10" name="TextBox 9"/>
+          <p:cNvPr id="11" name="TextBox 10"/>
           <p:cNvSpPr txBox="1"/>
           <p:nvPr/>
         </p:nvSpPr>
@@ -11677,7 +11716,7 @@
       </p:sp>
       <p:sp>
         <p:nvSpPr>
-          <p:cNvPr id="11" name="TextBox 10"/>
+          <p:cNvPr id="12" name="TextBox 11"/>
           <p:cNvSpPr txBox="1"/>
           <p:nvPr/>
         </p:nvSpPr>
@@ -11709,7 +11748,7 @@
                 </a:solidFill>
                 <a:latin typeface="IBM Plex Mono"/>
               </a:rPr>
-              <a:t>source: data/processed/source_sov.csv  ·  answers weighted equally, pages weighted equally</a:t>
+              <a:t>source: data/processed/source_sov.csv  ·  answers and pages weighted equally  ·  n = 40 answers, 148 pages</a:t>
             </a:r>
           </a:p>
         </p:txBody>
@@ -11837,7 +11876,7 @@
         <p:spPr>
           <a:xfrm>
             <a:off x="762000" y="1206500"/>
-            <a:ext cx="3810000" cy="1287780"/>
+            <a:ext cx="3810000" cy="1386839"/>
           </a:xfrm>
           <a:prstGeom prst="rect">
             <a:avLst/>
@@ -11875,8 +11914,8 @@
         </p:nvSpPr>
         <p:spPr>
           <a:xfrm>
-            <a:off x="762000" y="2659380"/>
-            <a:ext cx="3810000" cy="693420"/>
+            <a:off x="762000" y="2758440"/>
+            <a:ext cx="3810000" cy="746760"/>
           </a:xfrm>
           <a:prstGeom prst="rect">
             <a:avLst/>
@@ -11914,8 +11953,8 @@
         </p:nvSpPr>
         <p:spPr>
           <a:xfrm>
-            <a:off x="762000" y="3441700"/>
-            <a:ext cx="3810000" cy="693420"/>
+            <a:off x="762000" y="3594100"/>
+            <a:ext cx="3810000" cy="746760"/>
           </a:xfrm>
           <a:prstGeom prst="rect">
             <a:avLst/>
@@ -12120,7 +12159,7 @@
                 </a:solidFill>
                 <a:latin typeface="IBM Plex Mono"/>
               </a:rPr>
-              <a:t>source: data/interim/citations.csv, pages.csv</a:t>
+              <a:t>source: data/interim/citations.csv, pages.csv  ·  n = 200 Gemini citations</a:t>
             </a:r>
           </a:p>
         </p:txBody>
@@ -12248,7 +12287,7 @@
         <p:spPr>
           <a:xfrm>
             <a:off x="762000" y="1206500"/>
-            <a:ext cx="3810000" cy="858520"/>
+            <a:ext cx="3810000" cy="924560"/>
           </a:xfrm>
           <a:prstGeom prst="rect">
             <a:avLst/>
@@ -12286,8 +12325,8 @@
         </p:nvSpPr>
         <p:spPr>
           <a:xfrm>
-            <a:off x="762000" y="2230120"/>
-            <a:ext cx="3810000" cy="693420"/>
+            <a:off x="762000" y="2296160"/>
+            <a:ext cx="3810000" cy="746760"/>
           </a:xfrm>
           <a:prstGeom prst="rect">
             <a:avLst/>
@@ -12325,8 +12364,8 @@
         </p:nvSpPr>
         <p:spPr>
           <a:xfrm>
-            <a:off x="762000" y="3012440"/>
-            <a:ext cx="3810000" cy="462280"/>
+            <a:off x="762000" y="3131820"/>
+            <a:ext cx="3810000" cy="497839"/>
           </a:xfrm>
           <a:prstGeom prst="rect">
             <a:avLst/>
@@ -12364,8 +12403,8 @@
         </p:nvSpPr>
         <p:spPr>
           <a:xfrm>
-            <a:off x="762000" y="3563620"/>
-            <a:ext cx="3810000" cy="693420"/>
+            <a:off x="762000" y="3718560"/>
+            <a:ext cx="3810000" cy="746760"/>
           </a:xfrm>
           <a:prstGeom prst="rect">
             <a:avLst/>
@@ -12570,7 +12609,7 @@
                 </a:solidFill>
                 <a:latin typeface="IBM Plex Mono"/>
               </a:rPr>
-              <a:t>source: data/processed/schema.csv, recency.csv  ·  Google Search Central, AI features and your website</a:t>
+              <a:t>source: data/processed/schema.csv, recency.csv  ·  Google Search Central  ·  n = 191 pages, 333 citations</a:t>
             </a:r>
           </a:p>
         </p:txBody>
@@ -12649,7 +12688,7 @@
         <p:spPr>
           <a:xfrm>
             <a:off x="0" y="2794000"/>
-            <a:ext cx="12192000" cy="990600"/>
+            <a:ext cx="12192000" cy="1066800"/>
           </a:xfrm>
           <a:prstGeom prst="rect">
             <a:avLst/>
@@ -12688,7 +12727,7 @@
         <p:spPr>
           <a:xfrm>
             <a:off x="0" y="3937000"/>
-            <a:ext cx="12192000" cy="317500"/>
+            <a:ext cx="12192000" cy="320040"/>
           </a:xfrm>
           <a:prstGeom prst="rect">
             <a:avLst/>
@@ -12911,7 +12950,7 @@
         <p:spPr>
           <a:xfrm>
             <a:off x="762000" y="1270000"/>
-            <a:ext cx="10668000" cy="495300"/>
+            <a:ext cx="10668000" cy="533400"/>
           </a:xfrm>
           <a:prstGeom prst="rect">
             <a:avLst/>
@@ -12949,8 +12988,8 @@
         </p:nvSpPr>
         <p:spPr>
           <a:xfrm>
-            <a:off x="762000" y="2006600"/>
-            <a:ext cx="571500" cy="215900"/>
+            <a:off x="762000" y="2044700"/>
+            <a:ext cx="571500" cy="231140"/>
           </a:xfrm>
           <a:prstGeom prst="rect">
             <a:avLst/>
@@ -12988,8 +13027,8 @@
         </p:nvSpPr>
         <p:spPr>
           <a:xfrm>
-            <a:off x="1460500" y="1981200"/>
-            <a:ext cx="8636000" cy="561340"/>
+            <a:off x="1460500" y="2019300"/>
+            <a:ext cx="8636000" cy="604519"/>
           </a:xfrm>
           <a:prstGeom prst="rect">
             <a:avLst/>
@@ -13027,8 +13066,8 @@
         </p:nvSpPr>
         <p:spPr>
           <a:xfrm>
-            <a:off x="762000" y="2707640"/>
-            <a:ext cx="571500" cy="215900"/>
+            <a:off x="762000" y="2788920"/>
+            <a:ext cx="571500" cy="231140"/>
           </a:xfrm>
           <a:prstGeom prst="rect">
             <a:avLst/>
@@ -13066,8 +13105,8 @@
         </p:nvSpPr>
         <p:spPr>
           <a:xfrm>
-            <a:off x="1460500" y="2682240"/>
-            <a:ext cx="8636000" cy="561340"/>
+            <a:off x="1460500" y="2763520"/>
+            <a:ext cx="8636000" cy="604519"/>
           </a:xfrm>
           <a:prstGeom prst="rect">
             <a:avLst/>
@@ -13105,8 +13144,8 @@
         </p:nvSpPr>
         <p:spPr>
           <a:xfrm>
-            <a:off x="762000" y="3408679"/>
-            <a:ext cx="571500" cy="215900"/>
+            <a:off x="762000" y="3533140"/>
+            <a:ext cx="571500" cy="231140"/>
           </a:xfrm>
           <a:prstGeom prst="rect">
             <a:avLst/>
@@ -13144,8 +13183,8 @@
         </p:nvSpPr>
         <p:spPr>
           <a:xfrm>
-            <a:off x="1460500" y="3383279"/>
-            <a:ext cx="8636000" cy="561340"/>
+            <a:off x="1460500" y="3507740"/>
+            <a:ext cx="8636000" cy="604519"/>
           </a:xfrm>
           <a:prstGeom prst="rect">
             <a:avLst/>
@@ -13170,7 +13209,7 @@
                 </a:solidFill>
                 <a:latin typeface="Work Sans"/>
               </a:rPr>
-              <a:t>Know what the comparison articles say about you. Akulaku, Zaipad and Fazz appear in 13 to 15 of Gemini's 20 answers.</a:t>
+              <a:t>Know what the comparison sites say about you. Gemini cites Akulaku's, Zaipad's and Fazz's sites in 13 to 15 of its 20 answers.</a:t>
             </a:r>
           </a:p>
         </p:txBody>
@@ -13183,8 +13222,8 @@
         </p:nvSpPr>
         <p:spPr>
           <a:xfrm>
-            <a:off x="762000" y="4109719"/>
-            <a:ext cx="571500" cy="215900"/>
+            <a:off x="762000" y="4277359"/>
+            <a:ext cx="571500" cy="231140"/>
           </a:xfrm>
           <a:prstGeom prst="rect">
             <a:avLst/>
@@ -13222,8 +13261,8 @@
         </p:nvSpPr>
         <p:spPr>
           <a:xfrm>
-            <a:off x="1460500" y="4084319"/>
-            <a:ext cx="8636000" cy="280670"/>
+            <a:off x="1460500" y="4251959"/>
+            <a:ext cx="8636000" cy="302259"/>
           </a:xfrm>
           <a:prstGeom prst="rect">
             <a:avLst/>
@@ -13261,8 +13300,8 @@
         </p:nvSpPr>
         <p:spPr>
           <a:xfrm>
-            <a:off x="762000" y="4530090"/>
-            <a:ext cx="571500" cy="215900"/>
+            <a:off x="762000" y="4719320"/>
+            <a:ext cx="571500" cy="231140"/>
           </a:xfrm>
           <a:prstGeom prst="rect">
             <a:avLst/>
@@ -13300,8 +13339,8 @@
         </p:nvSpPr>
         <p:spPr>
           <a:xfrm>
-            <a:off x="1460500" y="4504690"/>
-            <a:ext cx="8636000" cy="280670"/>
+            <a:off x="1460500" y="4693920"/>
+            <a:ext cx="8636000" cy="302259"/>
           </a:xfrm>
           <a:prstGeom prst="rect">
             <a:avLst/>
@@ -13571,7 +13610,7 @@
         <p:spPr>
           <a:xfrm>
             <a:off x="762000" y="1270000"/>
-            <a:ext cx="10668000" cy="495300"/>
+            <a:ext cx="10668000" cy="533400"/>
           </a:xfrm>
           <a:prstGeom prst="rect">
             <a:avLst/>
@@ -13609,8 +13648,8 @@
         </p:nvSpPr>
         <p:spPr>
           <a:xfrm>
-            <a:off x="762000" y="2006600"/>
-            <a:ext cx="571500" cy="215900"/>
+            <a:off x="762000" y="2044700"/>
+            <a:ext cx="571500" cy="231140"/>
           </a:xfrm>
           <a:prstGeom prst="rect">
             <a:avLst/>
@@ -13648,8 +13687,8 @@
         </p:nvSpPr>
         <p:spPr>
           <a:xfrm>
-            <a:off x="1460500" y="1981200"/>
-            <a:ext cx="8636000" cy="264160"/>
+            <a:off x="1460500" y="2019300"/>
+            <a:ext cx="8636000" cy="284480"/>
           </a:xfrm>
           <a:prstGeom prst="rect">
             <a:avLst/>
@@ -13687,8 +13726,8 @@
         </p:nvSpPr>
         <p:spPr>
           <a:xfrm>
-            <a:off x="762000" y="2397760"/>
-            <a:ext cx="571500" cy="215900"/>
+            <a:off x="762000" y="2456180"/>
+            <a:ext cx="571500" cy="231140"/>
           </a:xfrm>
           <a:prstGeom prst="rect">
             <a:avLst/>
@@ -13726,8 +13765,8 @@
         </p:nvSpPr>
         <p:spPr>
           <a:xfrm>
-            <a:off x="1460500" y="2372360"/>
-            <a:ext cx="8636000" cy="264160"/>
+            <a:off x="1460500" y="2430780"/>
+            <a:ext cx="8636000" cy="284480"/>
           </a:xfrm>
           <a:prstGeom prst="rect">
             <a:avLst/>
@@ -13765,8 +13804,8 @@
         </p:nvSpPr>
         <p:spPr>
           <a:xfrm>
-            <a:off x="762000" y="2788920"/>
-            <a:ext cx="571500" cy="215900"/>
+            <a:off x="762000" y="2867660"/>
+            <a:ext cx="571500" cy="231140"/>
           </a:xfrm>
           <a:prstGeom prst="rect">
             <a:avLst/>
@@ -13804,8 +13843,8 @@
         </p:nvSpPr>
         <p:spPr>
           <a:xfrm>
-            <a:off x="1460500" y="2763520"/>
-            <a:ext cx="8636000" cy="528320"/>
+            <a:off x="1460500" y="2842260"/>
+            <a:ext cx="8636000" cy="568960"/>
           </a:xfrm>
           <a:prstGeom prst="rect">
             <a:avLst/>
@@ -13843,8 +13882,8 @@
         </p:nvSpPr>
         <p:spPr>
           <a:xfrm>
-            <a:off x="762000" y="3444240"/>
-            <a:ext cx="571500" cy="215900"/>
+            <a:off x="762000" y="3563620"/>
+            <a:ext cx="571500" cy="231140"/>
           </a:xfrm>
           <a:prstGeom prst="rect">
             <a:avLst/>
@@ -13882,8 +13921,8 @@
         </p:nvSpPr>
         <p:spPr>
           <a:xfrm>
-            <a:off x="1460500" y="3418840"/>
-            <a:ext cx="8636000" cy="264160"/>
+            <a:off x="1460500" y="3538220"/>
+            <a:ext cx="8636000" cy="284480"/>
           </a:xfrm>
           <a:prstGeom prst="rect">
             <a:avLst/>
@@ -13921,8 +13960,8 @@
         </p:nvSpPr>
         <p:spPr>
           <a:xfrm>
-            <a:off x="762000" y="3835400"/>
-            <a:ext cx="571500" cy="215900"/>
+            <a:off x="762000" y="3975100"/>
+            <a:ext cx="571500" cy="231140"/>
           </a:xfrm>
           <a:prstGeom prst="rect">
             <a:avLst/>
@@ -13960,8 +13999,8 @@
         </p:nvSpPr>
         <p:spPr>
           <a:xfrm>
-            <a:off x="1460500" y="3810000"/>
-            <a:ext cx="8636000" cy="528320"/>
+            <a:off x="1460500" y="3949700"/>
+            <a:ext cx="8636000" cy="568960"/>
           </a:xfrm>
           <a:prstGeom prst="rect">
             <a:avLst/>
@@ -13999,8 +14038,8 @@
         </p:nvSpPr>
         <p:spPr>
           <a:xfrm>
-            <a:off x="762000" y="4490720"/>
-            <a:ext cx="571500" cy="215900"/>
+            <a:off x="762000" y="4671060"/>
+            <a:ext cx="571500" cy="231140"/>
           </a:xfrm>
           <a:prstGeom prst="rect">
             <a:avLst/>
@@ -14038,8 +14077,8 @@
         </p:nvSpPr>
         <p:spPr>
           <a:xfrm>
-            <a:off x="1460500" y="4465320"/>
-            <a:ext cx="8636000" cy="528320"/>
+            <a:off x="1460500" y="4645660"/>
+            <a:ext cx="8636000" cy="568960"/>
           </a:xfrm>
           <a:prstGeom prst="rect">
             <a:avLst/>
@@ -14221,7 +14260,7 @@
         <p:spPr>
           <a:xfrm>
             <a:off x="762000" y="1079500"/>
-            <a:ext cx="9525000" cy="858520"/>
+            <a:ext cx="9525000" cy="924560"/>
           </a:xfrm>
           <a:prstGeom prst="rect">
             <a:avLst/>
@@ -14260,7 +14299,7 @@
         <p:spPr>
           <a:xfrm>
             <a:off x="762000" y="2476500"/>
-            <a:ext cx="5207000" cy="1270000"/>
+            <a:ext cx="5207000" cy="1280160"/>
           </a:xfrm>
           <a:prstGeom prst="rect">
             <a:avLst/>
@@ -14299,7 +14338,7 @@
         <p:spPr>
           <a:xfrm>
             <a:off x="762000" y="3810000"/>
-            <a:ext cx="4572000" cy="528320"/>
+            <a:ext cx="4572000" cy="568960"/>
           </a:xfrm>
           <a:prstGeom prst="rect">
             <a:avLst/>
@@ -14377,7 +14416,7 @@
         <p:spPr>
           <a:xfrm>
             <a:off x="6223000" y="2476500"/>
-            <a:ext cx="5207000" cy="1270000"/>
+            <a:ext cx="5207000" cy="1280160"/>
           </a:xfrm>
           <a:prstGeom prst="rect">
             <a:avLst/>
@@ -14416,7 +14455,7 @@
         <p:spPr>
           <a:xfrm>
             <a:off x="6223000" y="3810000"/>
-            <a:ext cx="4572000" cy="528320"/>
+            <a:ext cx="4572000" cy="568960"/>
           </a:xfrm>
           <a:prstGeom prst="rect">
             <a:avLst/>
@@ -14678,7 +14717,7 @@
         <p:spPr>
           <a:xfrm>
             <a:off x="762000" y="1270000"/>
-            <a:ext cx="10668000" cy="495300"/>
+            <a:ext cx="10668000" cy="533400"/>
           </a:xfrm>
           <a:prstGeom prst="rect">
             <a:avLst/>
@@ -14716,8 +14755,8 @@
         </p:nvSpPr>
         <p:spPr>
           <a:xfrm>
-            <a:off x="762000" y="1981200"/>
-            <a:ext cx="9334500" cy="561340"/>
+            <a:off x="762000" y="2019300"/>
+            <a:ext cx="9334500" cy="604519"/>
           </a:xfrm>
           <a:prstGeom prst="rect">
             <a:avLst/>
@@ -14755,8 +14794,8 @@
         </p:nvSpPr>
         <p:spPr>
           <a:xfrm>
-            <a:off x="762000" y="2682240"/>
-            <a:ext cx="9334500" cy="561340"/>
+            <a:off x="762000" y="2763520"/>
+            <a:ext cx="9334500" cy="604519"/>
           </a:xfrm>
           <a:prstGeom prst="rect">
             <a:avLst/>
@@ -15026,7 +15065,7 @@
         <p:spPr>
           <a:xfrm>
             <a:off x="762000" y="1270000"/>
-            <a:ext cx="10668000" cy="495300"/>
+            <a:ext cx="10668000" cy="533400"/>
           </a:xfrm>
           <a:prstGeom prst="rect">
             <a:avLst/>
@@ -15064,8 +15103,8 @@
         </p:nvSpPr>
         <p:spPr>
           <a:xfrm>
-            <a:off x="762000" y="2006600"/>
-            <a:ext cx="571500" cy="215900"/>
+            <a:off x="762000" y="2044700"/>
+            <a:ext cx="571500" cy="231140"/>
           </a:xfrm>
           <a:prstGeom prst="rect">
             <a:avLst/>
@@ -15103,8 +15142,8 @@
         </p:nvSpPr>
         <p:spPr>
           <a:xfrm>
-            <a:off x="1460500" y="1981200"/>
-            <a:ext cx="8636000" cy="561340"/>
+            <a:off x="1460500" y="2019300"/>
+            <a:ext cx="8636000" cy="604519"/>
           </a:xfrm>
           <a:prstGeom prst="rect">
             <a:avLst/>
@@ -15142,8 +15181,8 @@
         </p:nvSpPr>
         <p:spPr>
           <a:xfrm>
-            <a:off x="762000" y="2707640"/>
-            <a:ext cx="571500" cy="215900"/>
+            <a:off x="762000" y="2788920"/>
+            <a:ext cx="571500" cy="231140"/>
           </a:xfrm>
           <a:prstGeom prst="rect">
             <a:avLst/>
@@ -15181,8 +15220,8 @@
         </p:nvSpPr>
         <p:spPr>
           <a:xfrm>
-            <a:off x="1460500" y="2682240"/>
-            <a:ext cx="8636000" cy="280670"/>
+            <a:off x="1460500" y="2763520"/>
+            <a:ext cx="8636000" cy="302259"/>
           </a:xfrm>
           <a:prstGeom prst="rect">
             <a:avLst/>
@@ -15220,8 +15259,8 @@
         </p:nvSpPr>
         <p:spPr>
           <a:xfrm>
-            <a:off x="762000" y="3128010"/>
-            <a:ext cx="571500" cy="215900"/>
+            <a:off x="762000" y="3230879"/>
+            <a:ext cx="571500" cy="231140"/>
           </a:xfrm>
           <a:prstGeom prst="rect">
             <a:avLst/>
@@ -15259,8 +15298,8 @@
         </p:nvSpPr>
         <p:spPr>
           <a:xfrm>
-            <a:off x="1460500" y="3102610"/>
-            <a:ext cx="8636000" cy="561340"/>
+            <a:off x="1460500" y="3205479"/>
+            <a:ext cx="8636000" cy="604519"/>
           </a:xfrm>
           <a:prstGeom prst="rect">
             <a:avLst/>
@@ -15298,8 +15337,8 @@
         </p:nvSpPr>
         <p:spPr>
           <a:xfrm>
-            <a:off x="762000" y="3829050"/>
-            <a:ext cx="571500" cy="215900"/>
+            <a:off x="762000" y="3975100"/>
+            <a:ext cx="571500" cy="231140"/>
           </a:xfrm>
           <a:prstGeom prst="rect">
             <a:avLst/>
@@ -15337,8 +15376,8 @@
         </p:nvSpPr>
         <p:spPr>
           <a:xfrm>
-            <a:off x="1460500" y="3803650"/>
-            <a:ext cx="8636000" cy="280670"/>
+            <a:off x="1460500" y="3949700"/>
+            <a:ext cx="8636000" cy="302259"/>
           </a:xfrm>
           <a:prstGeom prst="rect">
             <a:avLst/>
@@ -15520,7 +15559,7 @@
         <p:spPr>
           <a:xfrm>
             <a:off x="762000" y="1079500"/>
-            <a:ext cx="10160000" cy="1320800"/>
+            <a:ext cx="10160000" cy="1422400"/>
           </a:xfrm>
           <a:prstGeom prst="rect">
             <a:avLst/>
@@ -15559,7 +15598,7 @@
         <p:spPr>
           <a:xfrm>
             <a:off x="762000" y="1841500"/>
-            <a:ext cx="10160000" cy="264160"/>
+            <a:ext cx="10160000" cy="284480"/>
           </a:xfrm>
           <a:prstGeom prst="rect">
             <a:avLst/>
@@ -15637,7 +15676,7 @@
         <p:spPr>
           <a:xfrm>
             <a:off x="762000" y="2819400"/>
-            <a:ext cx="9525000" cy="181610"/>
+            <a:ext cx="9525000" cy="195579"/>
           </a:xfrm>
           <a:prstGeom prst="rect">
             <a:avLst/>
@@ -15676,7 +15715,7 @@
         <p:spPr>
           <a:xfrm>
             <a:off x="762000" y="3048000"/>
-            <a:ext cx="9525000" cy="181610"/>
+            <a:ext cx="9525000" cy="195579"/>
           </a:xfrm>
           <a:prstGeom prst="rect">
             <a:avLst/>
@@ -15715,7 +15754,7 @@
         <p:spPr>
           <a:xfrm>
             <a:off x="762000" y="3276600"/>
-            <a:ext cx="9525000" cy="181610"/>
+            <a:ext cx="9525000" cy="195579"/>
           </a:xfrm>
           <a:prstGeom prst="rect">
             <a:avLst/>
@@ -15754,7 +15793,7 @@
         <p:spPr>
           <a:xfrm>
             <a:off x="762000" y="3505200"/>
-            <a:ext cx="9525000" cy="181610"/>
+            <a:ext cx="9525000" cy="195579"/>
           </a:xfrm>
           <a:prstGeom prst="rect">
             <a:avLst/>
@@ -15793,7 +15832,7 @@
         <p:spPr>
           <a:xfrm>
             <a:off x="762000" y="3733800"/>
-            <a:ext cx="9525000" cy="181610"/>
+            <a:ext cx="9525000" cy="195579"/>
           </a:xfrm>
           <a:prstGeom prst="rect">
             <a:avLst/>
@@ -15832,7 +15871,7 @@
         <p:spPr>
           <a:xfrm>
             <a:off x="762000" y="3962400"/>
-            <a:ext cx="9525000" cy="181610"/>
+            <a:ext cx="9525000" cy="195579"/>
           </a:xfrm>
           <a:prstGeom prst="rect">
             <a:avLst/>
@@ -15871,7 +15910,7 @@
         <p:spPr>
           <a:xfrm>
             <a:off x="762000" y="4191000"/>
-            <a:ext cx="9525000" cy="181610"/>
+            <a:ext cx="9525000" cy="195579"/>
           </a:xfrm>
           <a:prstGeom prst="rect">
             <a:avLst/>
@@ -15910,7 +15949,7 @@
         <p:spPr>
           <a:xfrm>
             <a:off x="762000" y="4419600"/>
-            <a:ext cx="9525000" cy="181610"/>
+            <a:ext cx="9525000" cy="195579"/>
           </a:xfrm>
           <a:prstGeom prst="rect">
             <a:avLst/>
@@ -16172,7 +16211,7 @@
         <p:spPr>
           <a:xfrm>
             <a:off x="762000" y="1270000"/>
-            <a:ext cx="10668000" cy="495300"/>
+            <a:ext cx="10668000" cy="533400"/>
           </a:xfrm>
           <a:prstGeom prst="rect">
             <a:avLst/>
@@ -16210,8 +16249,8 @@
         </p:nvSpPr>
         <p:spPr>
           <a:xfrm>
-            <a:off x="762000" y="2006600"/>
-            <a:ext cx="571500" cy="215900"/>
+            <a:off x="762000" y="2044700"/>
+            <a:ext cx="571500" cy="231140"/>
           </a:xfrm>
           <a:prstGeom prst="rect">
             <a:avLst/>
@@ -16249,8 +16288,8 @@
         </p:nvSpPr>
         <p:spPr>
           <a:xfrm>
-            <a:off x="1460500" y="1981200"/>
-            <a:ext cx="8636000" cy="280670"/>
+            <a:off x="1460500" y="2019300"/>
+            <a:ext cx="8636000" cy="302259"/>
           </a:xfrm>
           <a:prstGeom prst="rect">
             <a:avLst/>
@@ -16288,8 +16327,8 @@
         </p:nvSpPr>
         <p:spPr>
           <a:xfrm>
-            <a:off x="762000" y="2426970"/>
-            <a:ext cx="571500" cy="215900"/>
+            <a:off x="762000" y="2486660"/>
+            <a:ext cx="571500" cy="231140"/>
           </a:xfrm>
           <a:prstGeom prst="rect">
             <a:avLst/>
@@ -16327,8 +16366,8 @@
         </p:nvSpPr>
         <p:spPr>
           <a:xfrm>
-            <a:off x="1460500" y="2401570"/>
-            <a:ext cx="8636000" cy="280670"/>
+            <a:off x="1460500" y="2461260"/>
+            <a:ext cx="8636000" cy="302259"/>
           </a:xfrm>
           <a:prstGeom prst="rect">
             <a:avLst/>
@@ -16366,8 +16405,8 @@
         </p:nvSpPr>
         <p:spPr>
           <a:xfrm>
-            <a:off x="762000" y="2847340"/>
-            <a:ext cx="571500" cy="215900"/>
+            <a:off x="762000" y="2928620"/>
+            <a:ext cx="571500" cy="231140"/>
           </a:xfrm>
           <a:prstGeom prst="rect">
             <a:avLst/>
@@ -16405,8 +16444,8 @@
         </p:nvSpPr>
         <p:spPr>
           <a:xfrm>
-            <a:off x="1460500" y="2821940"/>
-            <a:ext cx="8636000" cy="561340"/>
+            <a:off x="1460500" y="2903220"/>
+            <a:ext cx="8636000" cy="604519"/>
           </a:xfrm>
           <a:prstGeom prst="rect">
             <a:avLst/>
@@ -16627,7 +16666,7 @@
         <p:spPr>
           <a:xfrm>
             <a:off x="0" y="2794000"/>
-            <a:ext cx="12192000" cy="990600"/>
+            <a:ext cx="12192000" cy="1066800"/>
           </a:xfrm>
           <a:prstGeom prst="rect">
             <a:avLst/>
@@ -16666,7 +16705,7 @@
         <p:spPr>
           <a:xfrm>
             <a:off x="0" y="3937000"/>
-            <a:ext cx="12192000" cy="317500"/>
+            <a:ext cx="12192000" cy="320040"/>
           </a:xfrm>
           <a:prstGeom prst="rect">
             <a:avLst/>
@@ -16889,7 +16928,7 @@
         <p:spPr>
           <a:xfrm>
             <a:off x="762000" y="1206500"/>
-            <a:ext cx="3810000" cy="1287780"/>
+            <a:ext cx="3810000" cy="1386839"/>
           </a:xfrm>
           <a:prstGeom prst="rect">
             <a:avLst/>
@@ -16927,8 +16966,8 @@
         </p:nvSpPr>
         <p:spPr>
           <a:xfrm>
-            <a:off x="762000" y="2659380"/>
-            <a:ext cx="3810000" cy="693420"/>
+            <a:off x="762000" y="2758440"/>
+            <a:ext cx="3810000" cy="746760"/>
           </a:xfrm>
           <a:prstGeom prst="rect">
             <a:avLst/>
@@ -16966,8 +17005,8 @@
         </p:nvSpPr>
         <p:spPr>
           <a:xfrm>
-            <a:off x="762000" y="3441700"/>
-            <a:ext cx="3810000" cy="693420"/>
+            <a:off x="762000" y="3594100"/>
+            <a:ext cx="3810000" cy="746760"/>
           </a:xfrm>
           <a:prstGeom prst="rect">
             <a:avLst/>
@@ -17005,8 +17044,8 @@
         </p:nvSpPr>
         <p:spPr>
           <a:xfrm>
-            <a:off x="762000" y="4224020"/>
-            <a:ext cx="3810000" cy="231140"/>
+            <a:off x="762000" y="4429760"/>
+            <a:ext cx="3810000" cy="248919"/>
           </a:xfrm>
           <a:prstGeom prst="rect">
             <a:avLst/>
@@ -17211,7 +17250,7 @@
                 </a:solidFill>
                 <a:latin typeface="IBM Plex Mono"/>
               </a:rPr>
-              <a:t>source: data/interim/answers.csv</a:t>
+              <a:t>source: data/interim/answers.csv  ·  n = 20 prompts</a:t>
             </a:r>
           </a:p>
         </p:txBody>
@@ -17339,7 +17378,7 @@
         <p:spPr>
           <a:xfrm>
             <a:off x="762000" y="1181100"/>
-            <a:ext cx="10668000" cy="429260"/>
+            <a:ext cx="10668000" cy="462280"/>
           </a:xfrm>
           <a:prstGeom prst="rect">
             <a:avLst/>
@@ -17377,8 +17416,8 @@
         </p:nvSpPr>
         <p:spPr>
           <a:xfrm>
-            <a:off x="762000" y="1699260"/>
-            <a:ext cx="8572500" cy="462280"/>
+            <a:off x="762000" y="1732280"/>
+            <a:ext cx="8572500" cy="497839"/>
           </a:xfrm>
           <a:prstGeom prst="rect">
             <a:avLst/>
@@ -17424,8 +17463,8 @@
         </p:blipFill>
         <p:spPr>
           <a:xfrm>
-            <a:off x="1441196" y="2275840"/>
-            <a:ext cx="9309607" cy="3324859"/>
+            <a:off x="1537208" y="2344420"/>
+            <a:ext cx="9117584" cy="3256279"/>
           </a:xfrm>
           <a:prstGeom prst="rect">
             <a:avLst/>
@@ -17583,7 +17622,7 @@
                 </a:solidFill>
                 <a:latin typeface="IBM Plex Mono"/>
               </a:rPr>
-              <a:t>code and data: github.com/rgmwnn/geo-bank-visibility</a:t>
+              <a:t>code and data: github.com/rgmwnn/geo-bank-visibility  ·  n = 40 answers</a:t>
             </a:r>
           </a:p>
         </p:txBody>
@@ -17711,7 +17750,7 @@
         <p:spPr>
           <a:xfrm>
             <a:off x="762000" y="1181100"/>
-            <a:ext cx="10668000" cy="429260"/>
+            <a:ext cx="10668000" cy="462280"/>
           </a:xfrm>
           <a:prstGeom prst="rect">
             <a:avLst/>
@@ -17749,8 +17788,8 @@
         </p:nvSpPr>
         <p:spPr>
           <a:xfrm>
-            <a:off x="762000" y="1724660"/>
-            <a:ext cx="5207000" cy="231140"/>
+            <a:off x="762000" y="1757680"/>
+            <a:ext cx="5207000" cy="248919"/>
           </a:xfrm>
           <a:prstGeom prst="rect">
             <a:avLst/>
@@ -17788,8 +17827,8 @@
         </p:nvSpPr>
         <p:spPr>
           <a:xfrm>
-            <a:off x="762000" y="1953260"/>
-            <a:ext cx="5207000" cy="198120"/>
+            <a:off x="762000" y="1986280"/>
+            <a:ext cx="5207000" cy="213359"/>
           </a:xfrm>
           <a:prstGeom prst="rect">
             <a:avLst/>
@@ -17827,8 +17866,8 @@
         </p:nvSpPr>
         <p:spPr>
           <a:xfrm>
-            <a:off x="762000" y="2227580"/>
-            <a:ext cx="5207000" cy="231140"/>
+            <a:off x="762000" y="2275840"/>
+            <a:ext cx="5207000" cy="248919"/>
           </a:xfrm>
           <a:prstGeom prst="rect">
             <a:avLst/>
@@ -17866,8 +17905,8 @@
         </p:nvSpPr>
         <p:spPr>
           <a:xfrm>
-            <a:off x="762000" y="2456180"/>
-            <a:ext cx="5207000" cy="198120"/>
+            <a:off x="762000" y="2504440"/>
+            <a:ext cx="5207000" cy="213359"/>
           </a:xfrm>
           <a:prstGeom prst="rect">
             <a:avLst/>
@@ -17905,8 +17944,8 @@
         </p:nvSpPr>
         <p:spPr>
           <a:xfrm>
-            <a:off x="762000" y="2730500"/>
-            <a:ext cx="5207000" cy="231140"/>
+            <a:off x="762000" y="2794000"/>
+            <a:ext cx="5207000" cy="248919"/>
           </a:xfrm>
           <a:prstGeom prst="rect">
             <a:avLst/>
@@ -17944,8 +17983,8 @@
         </p:nvSpPr>
         <p:spPr>
           <a:xfrm>
-            <a:off x="762000" y="2959100"/>
-            <a:ext cx="5207000" cy="396240"/>
+            <a:off x="762000" y="3022600"/>
+            <a:ext cx="5207000" cy="426719"/>
           </a:xfrm>
           <a:prstGeom prst="rect">
             <a:avLst/>
@@ -17983,8 +18022,8 @@
         </p:nvSpPr>
         <p:spPr>
           <a:xfrm>
-            <a:off x="762000" y="3431540"/>
-            <a:ext cx="5207000" cy="231140"/>
+            <a:off x="762000" y="3525520"/>
+            <a:ext cx="5207000" cy="248919"/>
           </a:xfrm>
           <a:prstGeom prst="rect">
             <a:avLst/>
@@ -18022,8 +18061,8 @@
         </p:nvSpPr>
         <p:spPr>
           <a:xfrm>
-            <a:off x="762000" y="3660140"/>
-            <a:ext cx="5207000" cy="198120"/>
+            <a:off x="762000" y="3754120"/>
+            <a:ext cx="5207000" cy="213359"/>
           </a:xfrm>
           <a:prstGeom prst="rect">
             <a:avLst/>
@@ -18061,8 +18100,8 @@
         </p:nvSpPr>
         <p:spPr>
           <a:xfrm>
-            <a:off x="762000" y="3934460"/>
-            <a:ext cx="5207000" cy="231140"/>
+            <a:off x="762000" y="4043680"/>
+            <a:ext cx="5207000" cy="248919"/>
           </a:xfrm>
           <a:prstGeom prst="rect">
             <a:avLst/>
@@ -18100,8 +18139,8 @@
         </p:nvSpPr>
         <p:spPr>
           <a:xfrm>
-            <a:off x="762000" y="4163060"/>
-            <a:ext cx="5207000" cy="198120"/>
+            <a:off x="762000" y="4272280"/>
+            <a:ext cx="5207000" cy="213359"/>
           </a:xfrm>
           <a:prstGeom prst="rect">
             <a:avLst/>
@@ -18139,8 +18178,8 @@
         </p:nvSpPr>
         <p:spPr>
           <a:xfrm>
-            <a:off x="762000" y="4437380"/>
-            <a:ext cx="5207000" cy="231140"/>
+            <a:off x="762000" y="4561840"/>
+            <a:ext cx="5207000" cy="248919"/>
           </a:xfrm>
           <a:prstGeom prst="rect">
             <a:avLst/>
@@ -18178,8 +18217,8 @@
         </p:nvSpPr>
         <p:spPr>
           <a:xfrm>
-            <a:off x="762000" y="4665980"/>
-            <a:ext cx="5207000" cy="396240"/>
+            <a:off x="762000" y="4790440"/>
+            <a:ext cx="5207000" cy="426719"/>
           </a:xfrm>
           <a:prstGeom prst="rect">
             <a:avLst/>
@@ -18512,7 +18551,7 @@
         <p:spPr>
           <a:xfrm>
             <a:off x="762000" y="1206500"/>
-            <a:ext cx="3810000" cy="858520"/>
+            <a:ext cx="3810000" cy="924560"/>
           </a:xfrm>
           <a:prstGeom prst="rect">
             <a:avLst/>
@@ -18550,8 +18589,8 @@
         </p:nvSpPr>
         <p:spPr>
           <a:xfrm>
-            <a:off x="762000" y="2230120"/>
-            <a:ext cx="3810000" cy="462280"/>
+            <a:off x="762000" y="2296160"/>
+            <a:ext cx="3810000" cy="497839"/>
           </a:xfrm>
           <a:prstGeom prst="rect">
             <a:avLst/>
@@ -18589,8 +18628,8 @@
         </p:nvSpPr>
         <p:spPr>
           <a:xfrm>
-            <a:off x="762000" y="2781300"/>
-            <a:ext cx="3810000" cy="462280"/>
+            <a:off x="762000" y="2857500"/>
+            <a:ext cx="3810000" cy="497839"/>
           </a:xfrm>
           <a:prstGeom prst="rect">
             <a:avLst/>
@@ -18628,8 +18667,8 @@
         </p:nvSpPr>
         <p:spPr>
           <a:xfrm>
-            <a:off x="762000" y="3332480"/>
-            <a:ext cx="3810000" cy="462280"/>
+            <a:off x="762000" y="3418840"/>
+            <a:ext cx="3810000" cy="497839"/>
           </a:xfrm>
           <a:prstGeom prst="rect">
             <a:avLst/>
@@ -18667,8 +18706,8 @@
         </p:nvSpPr>
         <p:spPr>
           <a:xfrm>
-            <a:off x="762000" y="3883660"/>
-            <a:ext cx="3810000" cy="462280"/>
+            <a:off x="762000" y="3980179"/>
+            <a:ext cx="3810000" cy="497839"/>
           </a:xfrm>
           <a:prstGeom prst="rect">
             <a:avLst/>
@@ -18706,8 +18745,8 @@
         </p:nvSpPr>
         <p:spPr>
           <a:xfrm>
-            <a:off x="762000" y="4434840"/>
-            <a:ext cx="3810000" cy="462280"/>
+            <a:off x="762000" y="4541520"/>
+            <a:ext cx="3810000" cy="497839"/>
           </a:xfrm>
           <a:prstGeom prst="rect">
             <a:avLst/>
@@ -18745,8 +18784,8 @@
         </p:nvSpPr>
         <p:spPr>
           <a:xfrm>
-            <a:off x="762000" y="4986020"/>
-            <a:ext cx="3810000" cy="462280"/>
+            <a:off x="762000" y="5102859"/>
+            <a:ext cx="3810000" cy="497839"/>
           </a:xfrm>
           <a:prstGeom prst="rect">
             <a:avLst/>
@@ -18951,7 +18990,7 @@
                 </a:solidFill>
                 <a:latin typeface="IBM Plex Mono"/>
               </a:rPr>
-              <a:t>source: data/interim/pages.csv, page_brand_counts.csv</a:t>
+              <a:t>source: data/interim/pages.csv, page_brand_counts.csv  ·  n = 243 pages</a:t>
             </a:r>
           </a:p>
         </p:txBody>

--- a/deck/out/favoured-banks.pptx
+++ b/deck/out/favoured-banks.pptx
@@ -37,6 +37,7 @@
     <p:sldId id="285" r:id="rId37"/>
     <p:sldId id="286" r:id="rId38"/>
     <p:sldId id="287" r:id="rId39"/>
+    <p:sldId id="288" r:id="rId40"/>
   </p:sldIdLst>
   <p:sldSz cx="12192000" cy="6858000" type="screen4x3"/>
   <p:notesSz cx="6858000" cy="9144000"/>
@@ -1653,7 +1654,7 @@
           <a:lstStyle/>
           <a:p>
             <a:r>
-              <a:t>These are likely levers based on one snapshot, not tested interventions.</a:t>
+              <a:t>The strategist owns measurement. With these four habits the team can report one number each month.</a:t>
             </a:r>
           </a:p>
         </p:txBody>
@@ -1723,7 +1724,7 @@
           <a:lstStyle/>
           <a:p>
             <a:r>
-              <a:t>Each of these came from a bug or a check during the build. The fixes and tests are in the repo history.</a:t>
+              <a:t>Content owns the pages the engines quote and the explainers they do not yet have.</a:t>
             </a:r>
           </a:p>
         </p:txBody>
@@ -1749,6 +1750,76 @@
 </file>
 
 <file path=ppt/notesSlides/notesSlide26.xml><?xml version="1.0" encoding="utf-8"?>
+<p:notes xmlns:a="http://schemas.openxmlformats.org/drawingml/2006/main" xmlns:p="http://schemas.openxmlformats.org/presentationml/2006/main" xmlns:r="http://schemas.openxmlformats.org/officeDocument/2006/relationships">
+  <p:cSld>
+    <p:spTree>
+      <p:nvGrpSpPr>
+        <p:cNvPr id="1" name=""/>
+        <p:cNvGrpSpPr/>
+        <p:nvPr/>
+      </p:nvGrpSpPr>
+      <p:grpSpPr>
+        <a:xfrm>
+          <a:off x="0" y="0"/>
+          <a:ext cx="0" cy="0"/>
+          <a:chOff x="0" y="0"/>
+          <a:chExt cx="0" cy="0"/>
+        </a:xfrm>
+      </p:grpSpPr>
+      <p:sp>
+        <p:nvSpPr>
+          <p:cNvPr id="2" name="Slide Image Placeholder 1"/>
+          <p:cNvSpPr>
+            <a:spLocks noGrp="1"/>
+          </p:cNvSpPr>
+          <p:nvPr>
+            <p:ph type="sldImg" idx="2"/>
+          </p:nvPr>
+        </p:nvSpPr>
+        <p:spPr/>
+      </p:sp>
+      <p:sp>
+        <p:nvSpPr>
+          <p:cNvPr id="3" name="Notes Placeholder 2"/>
+          <p:cNvSpPr>
+            <a:spLocks noGrp="1"/>
+          </p:cNvSpPr>
+          <p:nvPr>
+            <p:ph type="body" idx="3" sz="quarter"/>
+          </p:nvPr>
+        </p:nvSpPr>
+        <p:spPr/>
+        <p:txBody>
+          <a:bodyPr/>
+          <a:lstStyle/>
+          <a:p>
+            <a:r>
+              <a:t>Our crawler is not an AI crawler, so these are signs to check, not proof that an engine was blocked.</a:t>
+            </a:r>
+          </a:p>
+        </p:txBody>
+      </p:sp>
+      <p:sp>
+        <p:nvSpPr>
+          <p:cNvPr id="4" name="Slide Number Placeholder 3"/>
+          <p:cNvSpPr>
+            <a:spLocks noGrp="1"/>
+          </p:cNvSpPr>
+          <p:nvPr>
+            <p:ph type="sldNum" idx="5" sz="quarter"/>
+          </p:nvPr>
+        </p:nvSpPr>
+        <p:spPr/>
+      </p:sp>
+    </p:spTree>
+  </p:cSld>
+  <p:clrMapOvr>
+    <a:masterClrMapping/>
+  </p:clrMapOvr>
+</p:notes>
+</file>
+
+<file path=ppt/notesSlides/notesSlide27.xml><?xml version="1.0" encoding="utf-8"?>
 <p:notes xmlns:a="http://schemas.openxmlformats.org/drawingml/2006/main" xmlns:p="http://schemas.openxmlformats.org/presentationml/2006/main" xmlns:r="http://schemas.openxmlformats.org/officeDocument/2006/relationships">
   <p:cSld>
     <p:spTree>
@@ -7297,7 +7368,7 @@
                 </a:solidFill>
                 <a:latin typeface="IBM Plex Mono"/>
               </a:rPr>
-              <a:t>11 / 32</a:t>
+              <a:t>11 / 33</a:t>
             </a:r>
           </a:p>
         </p:txBody>
@@ -8435,6 +8506,41 @@
         <p:spPr>
           <a:xfrm>
             <a:off x="11417300" y="6350000"/>
+            <a:ext cx="0" cy="76200"/>
+          </a:xfrm>
+          <a:prstGeom prst="line">
+            <a:avLst/>
+          </a:prstGeom>
+          <a:ln w="12700">
+            <a:solidFill>
+              <a:srgbClr val="3A3D43"/>
+            </a:solidFill>
+          </a:ln>
+        </p:spPr>
+        <p:style>
+          <a:lnRef idx="2">
+            <a:schemeClr val="accent1"/>
+          </a:lnRef>
+          <a:fillRef idx="0">
+            <a:schemeClr val="accent1"/>
+          </a:fillRef>
+          <a:effectRef idx="1">
+            <a:schemeClr val="accent1"/>
+          </a:effectRef>
+          <a:fontRef idx="minor">
+            <a:schemeClr val="tx1"/>
+          </a:fontRef>
+        </p:style>
+      </p:cxnSp>
+      <p:cxnSp>
+        <p:nvCxnSpPr>
+          <p:cNvPr id="44" name="motif-line-tick-33"/>
+          <p:cNvCxnSpPr/>
+          <p:nvPr/>
+        </p:nvCxnSpPr>
+        <p:spPr>
+          <a:xfrm>
+            <a:off x="11531600" y="6350000"/>
             <a:ext cx="0" cy="76200"/>
           </a:xfrm>
           <a:prstGeom prst="line">
@@ -8859,7 +8965,7 @@
                 </a:solidFill>
                 <a:latin typeface="IBM Plex Mono"/>
               </a:rPr>
-              <a:t>12 / 32</a:t>
+              <a:t>12 / 33</a:t>
             </a:r>
           </a:p>
         </p:txBody>
@@ -9997,6 +10103,41 @@
         <p:spPr>
           <a:xfrm>
             <a:off x="11417300" y="6350000"/>
+            <a:ext cx="0" cy="76200"/>
+          </a:xfrm>
+          <a:prstGeom prst="line">
+            <a:avLst/>
+          </a:prstGeom>
+          <a:ln w="12700">
+            <a:solidFill>
+              <a:srgbClr val="3A3D43"/>
+            </a:solidFill>
+          </a:ln>
+        </p:spPr>
+        <p:style>
+          <a:lnRef idx="2">
+            <a:schemeClr val="accent1"/>
+          </a:lnRef>
+          <a:fillRef idx="0">
+            <a:schemeClr val="accent1"/>
+          </a:fillRef>
+          <a:effectRef idx="1">
+            <a:schemeClr val="accent1"/>
+          </a:effectRef>
+          <a:fontRef idx="minor">
+            <a:schemeClr val="tx1"/>
+          </a:fontRef>
+        </p:style>
+      </p:cxnSp>
+      <p:cxnSp>
+        <p:nvCxnSpPr>
+          <p:cNvPr id="45" name="motif-line-tick-33"/>
+          <p:cNvCxnSpPr/>
+          <p:nvPr/>
+        </p:nvCxnSpPr>
+        <p:spPr>
+          <a:xfrm>
+            <a:off x="11531600" y="6350000"/>
             <a:ext cx="0" cy="76200"/>
           </a:xfrm>
           <a:prstGeom prst="line">
@@ -10382,7 +10523,7 @@
                 </a:solidFill>
                 <a:latin typeface="IBM Plex Mono"/>
               </a:rPr>
-              <a:t>13 / 32</a:t>
+              <a:t>13 / 33</a:t>
             </a:r>
           </a:p>
         </p:txBody>
@@ -11520,6 +11661,41 @@
         <p:spPr>
           <a:xfrm>
             <a:off x="11417300" y="6350000"/>
+            <a:ext cx="0" cy="76200"/>
+          </a:xfrm>
+          <a:prstGeom prst="line">
+            <a:avLst/>
+          </a:prstGeom>
+          <a:ln w="12700">
+            <a:solidFill>
+              <a:srgbClr val="3A3D43"/>
+            </a:solidFill>
+          </a:ln>
+        </p:spPr>
+        <p:style>
+          <a:lnRef idx="2">
+            <a:schemeClr val="accent1"/>
+          </a:lnRef>
+          <a:fillRef idx="0">
+            <a:schemeClr val="accent1"/>
+          </a:fillRef>
+          <a:effectRef idx="1">
+            <a:schemeClr val="accent1"/>
+          </a:effectRef>
+          <a:fontRef idx="minor">
+            <a:schemeClr val="tx1"/>
+          </a:fontRef>
+        </p:style>
+      </p:cxnSp>
+      <p:cxnSp>
+        <p:nvCxnSpPr>
+          <p:cNvPr id="44" name="motif-line-tick-33"/>
+          <p:cNvCxnSpPr/>
+          <p:nvPr/>
+        </p:nvCxnSpPr>
+        <p:spPr>
+          <a:xfrm>
+            <a:off x="11531600" y="6350000"/>
             <a:ext cx="0" cy="76200"/>
           </a:xfrm>
           <a:prstGeom prst="line">
@@ -11905,7 +12081,7 @@
                 </a:solidFill>
                 <a:latin typeface="IBM Plex Mono"/>
               </a:rPr>
-              <a:t>14 / 32</a:t>
+              <a:t>14 / 33</a:t>
             </a:r>
           </a:p>
         </p:txBody>
@@ -13043,6 +13219,41 @@
         <p:spPr>
           <a:xfrm>
             <a:off x="11417300" y="6350000"/>
+            <a:ext cx="0" cy="76200"/>
+          </a:xfrm>
+          <a:prstGeom prst="line">
+            <a:avLst/>
+          </a:prstGeom>
+          <a:ln w="12700">
+            <a:solidFill>
+              <a:srgbClr val="3A3D43"/>
+            </a:solidFill>
+          </a:ln>
+        </p:spPr>
+        <p:style>
+          <a:lnRef idx="2">
+            <a:schemeClr val="accent1"/>
+          </a:lnRef>
+          <a:fillRef idx="0">
+            <a:schemeClr val="accent1"/>
+          </a:fillRef>
+          <a:effectRef idx="1">
+            <a:schemeClr val="accent1"/>
+          </a:effectRef>
+          <a:fontRef idx="minor">
+            <a:schemeClr val="tx1"/>
+          </a:fontRef>
+        </p:style>
+      </p:cxnSp>
+      <p:cxnSp>
+        <p:nvCxnSpPr>
+          <p:cNvPr id="44" name="motif-line-tick-33"/>
+          <p:cNvCxnSpPr/>
+          <p:nvPr/>
+        </p:nvCxnSpPr>
+        <p:spPr>
+          <a:xfrm>
+            <a:off x="11531600" y="6350000"/>
             <a:ext cx="0" cy="76200"/>
           </a:xfrm>
           <a:prstGeom prst="line">
@@ -13467,7 +13678,7 @@
                 </a:solidFill>
                 <a:latin typeface="IBM Plex Mono"/>
               </a:rPr>
-              <a:t>15 / 32</a:t>
+              <a:t>15 / 33</a:t>
             </a:r>
           </a:p>
         </p:txBody>
@@ -14605,6 +14816,41 @@
         <p:spPr>
           <a:xfrm>
             <a:off x="11417300" y="6350000"/>
+            <a:ext cx="0" cy="76200"/>
+          </a:xfrm>
+          <a:prstGeom prst="line">
+            <a:avLst/>
+          </a:prstGeom>
+          <a:ln w="12700">
+            <a:solidFill>
+              <a:srgbClr val="3A3D43"/>
+            </a:solidFill>
+          </a:ln>
+        </p:spPr>
+        <p:style>
+          <a:lnRef idx="2">
+            <a:schemeClr val="accent1"/>
+          </a:lnRef>
+          <a:fillRef idx="0">
+            <a:schemeClr val="accent1"/>
+          </a:fillRef>
+          <a:effectRef idx="1">
+            <a:schemeClr val="accent1"/>
+          </a:effectRef>
+          <a:fontRef idx="minor">
+            <a:schemeClr val="tx1"/>
+          </a:fontRef>
+        </p:style>
+      </p:cxnSp>
+      <p:cxnSp>
+        <p:nvCxnSpPr>
+          <p:cNvPr id="45" name="motif-line-tick-33"/>
+          <p:cNvCxnSpPr/>
+          <p:nvPr/>
+        </p:nvCxnSpPr>
+        <p:spPr>
+          <a:xfrm>
+            <a:off x="11531600" y="6350000"/>
             <a:ext cx="0" cy="76200"/>
           </a:xfrm>
           <a:prstGeom prst="line">
@@ -14990,7 +15236,7 @@
                 </a:solidFill>
                 <a:latin typeface="IBM Plex Mono"/>
               </a:rPr>
-              <a:t>16 / 32</a:t>
+              <a:t>16 / 33</a:t>
             </a:r>
           </a:p>
         </p:txBody>
@@ -16128,6 +16374,41 @@
         <p:spPr>
           <a:xfrm>
             <a:off x="11417300" y="6350000"/>
+            <a:ext cx="0" cy="76200"/>
+          </a:xfrm>
+          <a:prstGeom prst="line">
+            <a:avLst/>
+          </a:prstGeom>
+          <a:ln w="12700">
+            <a:solidFill>
+              <a:srgbClr val="3A3D43"/>
+            </a:solidFill>
+          </a:ln>
+        </p:spPr>
+        <p:style>
+          <a:lnRef idx="2">
+            <a:schemeClr val="accent1"/>
+          </a:lnRef>
+          <a:fillRef idx="0">
+            <a:schemeClr val="accent1"/>
+          </a:fillRef>
+          <a:effectRef idx="1">
+            <a:schemeClr val="accent1"/>
+          </a:effectRef>
+          <a:fontRef idx="minor">
+            <a:schemeClr val="tx1"/>
+          </a:fontRef>
+        </p:style>
+      </p:cxnSp>
+      <p:cxnSp>
+        <p:nvCxnSpPr>
+          <p:cNvPr id="44" name="motif-line-tick-33"/>
+          <p:cNvCxnSpPr/>
+          <p:nvPr/>
+        </p:nvCxnSpPr>
+        <p:spPr>
+          <a:xfrm>
+            <a:off x="11531600" y="6350000"/>
             <a:ext cx="0" cy="76200"/>
           </a:xfrm>
           <a:prstGeom prst="line">
@@ -16552,7 +16833,7 @@
                 </a:solidFill>
                 <a:latin typeface="IBM Plex Mono"/>
               </a:rPr>
-              <a:t>17 / 32</a:t>
+              <a:t>17 / 33</a:t>
             </a:r>
           </a:p>
         </p:txBody>
@@ -17690,6 +17971,41 @@
         <p:spPr>
           <a:xfrm>
             <a:off x="11417300" y="6350000"/>
+            <a:ext cx="0" cy="76200"/>
+          </a:xfrm>
+          <a:prstGeom prst="line">
+            <a:avLst/>
+          </a:prstGeom>
+          <a:ln w="12700">
+            <a:solidFill>
+              <a:srgbClr val="3A3D43"/>
+            </a:solidFill>
+          </a:ln>
+        </p:spPr>
+        <p:style>
+          <a:lnRef idx="2">
+            <a:schemeClr val="accent1"/>
+          </a:lnRef>
+          <a:fillRef idx="0">
+            <a:schemeClr val="accent1"/>
+          </a:fillRef>
+          <a:effectRef idx="1">
+            <a:schemeClr val="accent1"/>
+          </a:effectRef>
+          <a:fontRef idx="minor">
+            <a:schemeClr val="tx1"/>
+          </a:fontRef>
+        </p:style>
+      </p:cxnSp>
+      <p:cxnSp>
+        <p:nvCxnSpPr>
+          <p:cNvPr id="45" name="motif-line-tick-33"/>
+          <p:cNvCxnSpPr/>
+          <p:nvPr/>
+        </p:nvCxnSpPr>
+        <p:spPr>
+          <a:xfrm>
+            <a:off x="11531600" y="6350000"/>
             <a:ext cx="0" cy="76200"/>
           </a:xfrm>
           <a:prstGeom prst="line">
@@ -19408,7 +19724,7 @@
                 </a:solidFill>
                 <a:latin typeface="IBM Plex Mono"/>
               </a:rPr>
-              <a:t>19 / 32</a:t>
+              <a:t>19 / 33</a:t>
             </a:r>
           </a:p>
         </p:txBody>
@@ -20546,6 +20862,41 @@
         <p:spPr>
           <a:xfrm>
             <a:off x="11417300" y="6350000"/>
+            <a:ext cx="0" cy="76200"/>
+          </a:xfrm>
+          <a:prstGeom prst="line">
+            <a:avLst/>
+          </a:prstGeom>
+          <a:ln w="12700">
+            <a:solidFill>
+              <a:srgbClr val="3A3D43"/>
+            </a:solidFill>
+          </a:ln>
+        </p:spPr>
+        <p:style>
+          <a:lnRef idx="2">
+            <a:schemeClr val="accent1"/>
+          </a:lnRef>
+          <a:fillRef idx="0">
+            <a:schemeClr val="accent1"/>
+          </a:fillRef>
+          <a:effectRef idx="1">
+            <a:schemeClr val="accent1"/>
+          </a:effectRef>
+          <a:fontRef idx="minor">
+            <a:schemeClr val="tx1"/>
+          </a:fontRef>
+        </p:style>
+      </p:cxnSp>
+      <p:cxnSp>
+        <p:nvCxnSpPr>
+          <p:cNvPr id="44" name="motif-line-tick-33"/>
+          <p:cNvCxnSpPr/>
+          <p:nvPr/>
+        </p:nvCxnSpPr>
+        <p:spPr>
+          <a:xfrm>
+            <a:off x="11531600" y="6350000"/>
             <a:ext cx="0" cy="76200"/>
           </a:xfrm>
           <a:prstGeom prst="line">
@@ -21254,7 +21605,7 @@
                 </a:solidFill>
                 <a:latin typeface="IBM Plex Mono"/>
               </a:rPr>
-              <a:t>2 / 32</a:t>
+              <a:t>2 / 33</a:t>
             </a:r>
           </a:p>
         </p:txBody>
@@ -22392,6 +22743,41 @@
         <p:spPr>
           <a:xfrm>
             <a:off x="11417300" y="6350000"/>
+            <a:ext cx="0" cy="76200"/>
+          </a:xfrm>
+          <a:prstGeom prst="line">
+            <a:avLst/>
+          </a:prstGeom>
+          <a:ln w="12700">
+            <a:solidFill>
+              <a:srgbClr val="3A3D43"/>
+            </a:solidFill>
+          </a:ln>
+        </p:spPr>
+        <p:style>
+          <a:lnRef idx="2">
+            <a:schemeClr val="accent1"/>
+          </a:lnRef>
+          <a:fillRef idx="0">
+            <a:schemeClr val="accent1"/>
+          </a:fillRef>
+          <a:effectRef idx="1">
+            <a:schemeClr val="accent1"/>
+          </a:effectRef>
+          <a:fontRef idx="minor">
+            <a:schemeClr val="tx1"/>
+          </a:fontRef>
+        </p:style>
+      </p:cxnSp>
+      <p:cxnSp>
+        <p:nvCxnSpPr>
+          <p:cNvPr id="50" name="motif-line-tick-33"/>
+          <p:cNvCxnSpPr/>
+          <p:nvPr/>
+        </p:nvCxnSpPr>
+        <p:spPr>
+          <a:xfrm>
+            <a:off x="11531600" y="6350000"/>
             <a:ext cx="0" cy="76200"/>
           </a:xfrm>
           <a:prstGeom prst="line">
@@ -22816,7 +23202,7 @@
                 </a:solidFill>
                 <a:latin typeface="IBM Plex Mono"/>
               </a:rPr>
-              <a:t>20 / 32</a:t>
+              <a:t>20 / 33</a:t>
             </a:r>
           </a:p>
         </p:txBody>
@@ -23954,6 +24340,41 @@
         <p:spPr>
           <a:xfrm>
             <a:off x="11417300" y="6350000"/>
+            <a:ext cx="0" cy="76200"/>
+          </a:xfrm>
+          <a:prstGeom prst="line">
+            <a:avLst/>
+          </a:prstGeom>
+          <a:ln w="12700">
+            <a:solidFill>
+              <a:srgbClr val="3A3D43"/>
+            </a:solidFill>
+          </a:ln>
+        </p:spPr>
+        <p:style>
+          <a:lnRef idx="2">
+            <a:schemeClr val="accent1"/>
+          </a:lnRef>
+          <a:fillRef idx="0">
+            <a:schemeClr val="accent1"/>
+          </a:fillRef>
+          <a:effectRef idx="1">
+            <a:schemeClr val="accent1"/>
+          </a:effectRef>
+          <a:fontRef idx="minor">
+            <a:schemeClr val="tx1"/>
+          </a:fontRef>
+        </p:style>
+      </p:cxnSp>
+      <p:cxnSp>
+        <p:nvCxnSpPr>
+          <p:cNvPr id="45" name="motif-line-tick-33"/>
+          <p:cNvCxnSpPr/>
+          <p:nvPr/>
+        </p:nvCxnSpPr>
+        <p:spPr>
+          <a:xfrm>
+            <a:off x="11531600" y="6350000"/>
             <a:ext cx="0" cy="76200"/>
           </a:xfrm>
           <a:prstGeom prst="line">
@@ -24339,7 +24760,7 @@
                 </a:solidFill>
                 <a:latin typeface="IBM Plex Mono"/>
               </a:rPr>
-              <a:t>21 / 32</a:t>
+              <a:t>21 / 33</a:t>
             </a:r>
           </a:p>
         </p:txBody>
@@ -25477,6 +25898,41 @@
         <p:spPr>
           <a:xfrm>
             <a:off x="11417300" y="6350000"/>
+            <a:ext cx="0" cy="76200"/>
+          </a:xfrm>
+          <a:prstGeom prst="line">
+            <a:avLst/>
+          </a:prstGeom>
+          <a:ln w="12700">
+            <a:solidFill>
+              <a:srgbClr val="3A3D43"/>
+            </a:solidFill>
+          </a:ln>
+        </p:spPr>
+        <p:style>
+          <a:lnRef idx="2">
+            <a:schemeClr val="accent1"/>
+          </a:lnRef>
+          <a:fillRef idx="0">
+            <a:schemeClr val="accent1"/>
+          </a:fillRef>
+          <a:effectRef idx="1">
+            <a:schemeClr val="accent1"/>
+          </a:effectRef>
+          <a:fontRef idx="minor">
+            <a:schemeClr val="tx1"/>
+          </a:fontRef>
+        </p:style>
+      </p:cxnSp>
+      <p:cxnSp>
+        <p:nvCxnSpPr>
+          <p:cNvPr id="44" name="motif-line-tick-33"/>
+          <p:cNvCxnSpPr/>
+          <p:nvPr/>
+        </p:nvCxnSpPr>
+        <p:spPr>
+          <a:xfrm>
+            <a:off x="11531600" y="6350000"/>
             <a:ext cx="0" cy="76200"/>
           </a:xfrm>
           <a:prstGeom prst="line">
@@ -25901,7 +26357,7 @@
                 </a:solidFill>
                 <a:latin typeface="IBM Plex Mono"/>
               </a:rPr>
-              <a:t>22 / 32</a:t>
+              <a:t>22 / 33</a:t>
             </a:r>
           </a:p>
         </p:txBody>
@@ -27039,6 +27495,41 @@
         <p:spPr>
           <a:xfrm>
             <a:off x="11417300" y="6350000"/>
+            <a:ext cx="0" cy="76200"/>
+          </a:xfrm>
+          <a:prstGeom prst="line">
+            <a:avLst/>
+          </a:prstGeom>
+          <a:ln w="12700">
+            <a:solidFill>
+              <a:srgbClr val="3A3D43"/>
+            </a:solidFill>
+          </a:ln>
+        </p:spPr>
+        <p:style>
+          <a:lnRef idx="2">
+            <a:schemeClr val="accent1"/>
+          </a:lnRef>
+          <a:fillRef idx="0">
+            <a:schemeClr val="accent1"/>
+          </a:fillRef>
+          <a:effectRef idx="1">
+            <a:schemeClr val="accent1"/>
+          </a:effectRef>
+          <a:fontRef idx="minor">
+            <a:schemeClr val="tx1"/>
+          </a:fontRef>
+        </p:style>
+      </p:cxnSp>
+      <p:cxnSp>
+        <p:nvCxnSpPr>
+          <p:cNvPr id="45" name="motif-line-tick-33"/>
+          <p:cNvCxnSpPr/>
+          <p:nvPr/>
+        </p:nvCxnSpPr>
+        <p:spPr>
+          <a:xfrm>
+            <a:off x="11531600" y="6350000"/>
             <a:ext cx="0" cy="76200"/>
           </a:xfrm>
           <a:prstGeom prst="line">
@@ -27424,7 +27915,7 @@
                 </a:solidFill>
                 <a:latin typeface="IBM Plex Mono"/>
               </a:rPr>
-              <a:t>23 / 32</a:t>
+              <a:t>23 / 33</a:t>
             </a:r>
           </a:p>
         </p:txBody>
@@ -28562,6 +29053,41 @@
         <p:spPr>
           <a:xfrm>
             <a:off x="11417300" y="6350000"/>
+            <a:ext cx="0" cy="76200"/>
+          </a:xfrm>
+          <a:prstGeom prst="line">
+            <a:avLst/>
+          </a:prstGeom>
+          <a:ln w="12700">
+            <a:solidFill>
+              <a:srgbClr val="3A3D43"/>
+            </a:solidFill>
+          </a:ln>
+        </p:spPr>
+        <p:style>
+          <a:lnRef idx="2">
+            <a:schemeClr val="accent1"/>
+          </a:lnRef>
+          <a:fillRef idx="0">
+            <a:schemeClr val="accent1"/>
+          </a:fillRef>
+          <a:effectRef idx="1">
+            <a:schemeClr val="accent1"/>
+          </a:effectRef>
+          <a:fontRef idx="minor">
+            <a:schemeClr val="tx1"/>
+          </a:fontRef>
+        </p:style>
+      </p:cxnSp>
+      <p:cxnSp>
+        <p:nvCxnSpPr>
+          <p:cNvPr id="44" name="motif-line-tick-33"/>
+          <p:cNvCxnSpPr/>
+          <p:nvPr/>
+        </p:nvCxnSpPr>
+        <p:spPr>
+          <a:xfrm>
+            <a:off x="11531600" y="6350000"/>
             <a:ext cx="0" cy="76200"/>
           </a:xfrm>
           <a:prstGeom prst="line">
@@ -29025,7 +29551,7 @@
                 </a:solidFill>
                 <a:latin typeface="IBM Plex Mono"/>
               </a:rPr>
-              <a:t>24 / 32</a:t>
+              <a:t>24 / 33</a:t>
             </a:r>
           </a:p>
         </p:txBody>
@@ -30163,6 +30689,41 @@
         <p:spPr>
           <a:xfrm>
             <a:off x="11417300" y="6350000"/>
+            <a:ext cx="0" cy="76200"/>
+          </a:xfrm>
+          <a:prstGeom prst="line">
+            <a:avLst/>
+          </a:prstGeom>
+          <a:ln w="12700">
+            <a:solidFill>
+              <a:srgbClr val="3A3D43"/>
+            </a:solidFill>
+          </a:ln>
+        </p:spPr>
+        <p:style>
+          <a:lnRef idx="2">
+            <a:schemeClr val="accent1"/>
+          </a:lnRef>
+          <a:fillRef idx="0">
+            <a:schemeClr val="accent1"/>
+          </a:fillRef>
+          <a:effectRef idx="1">
+            <a:schemeClr val="accent1"/>
+          </a:effectRef>
+          <a:fontRef idx="minor">
+            <a:schemeClr val="tx1"/>
+          </a:fontRef>
+        </p:style>
+      </p:cxnSp>
+      <p:cxnSp>
+        <p:nvCxnSpPr>
+          <p:cNvPr id="46" name="motif-line-tick-33"/>
+          <p:cNvCxnSpPr/>
+          <p:nvPr/>
+        </p:nvCxnSpPr>
+        <p:spPr>
+          <a:xfrm>
+            <a:off x="11531600" y="6350000"/>
             <a:ext cx="0" cy="76200"/>
           </a:xfrm>
           <a:prstGeom prst="line">
@@ -30587,7 +31148,7 @@
                 </a:solidFill>
                 <a:latin typeface="IBM Plex Mono"/>
               </a:rPr>
-              <a:t>25 / 32</a:t>
+              <a:t>25 / 33</a:t>
             </a:r>
           </a:p>
         </p:txBody>
@@ -31725,6 +32286,41 @@
         <p:spPr>
           <a:xfrm>
             <a:off x="11417300" y="6350000"/>
+            <a:ext cx="0" cy="76200"/>
+          </a:xfrm>
+          <a:prstGeom prst="line">
+            <a:avLst/>
+          </a:prstGeom>
+          <a:ln w="12700">
+            <a:solidFill>
+              <a:srgbClr val="3A3D43"/>
+            </a:solidFill>
+          </a:ln>
+        </p:spPr>
+        <p:style>
+          <a:lnRef idx="2">
+            <a:schemeClr val="accent1"/>
+          </a:lnRef>
+          <a:fillRef idx="0">
+            <a:schemeClr val="accent1"/>
+          </a:fillRef>
+          <a:effectRef idx="1">
+            <a:schemeClr val="accent1"/>
+          </a:effectRef>
+          <a:fontRef idx="minor">
+            <a:schemeClr val="tx1"/>
+          </a:fontRef>
+        </p:style>
+      </p:cxnSp>
+      <p:cxnSp>
+        <p:nvCxnSpPr>
+          <p:cNvPr id="45" name="motif-line-tick-33"/>
+          <p:cNvCxnSpPr/>
+          <p:nvPr/>
+        </p:nvCxnSpPr>
+        <p:spPr>
+          <a:xfrm>
+            <a:off x="11531600" y="6350000"/>
             <a:ext cx="0" cy="76200"/>
           </a:xfrm>
           <a:prstGeom prst="line">
@@ -32188,7 +32784,7 @@
                 </a:solidFill>
                 <a:latin typeface="IBM Plex Mono"/>
               </a:rPr>
-              <a:t>26 / 32</a:t>
+              <a:t>26 / 33</a:t>
             </a:r>
           </a:p>
         </p:txBody>
@@ -33326,6 +33922,41 @@
         <p:spPr>
           <a:xfrm>
             <a:off x="11417300" y="6350000"/>
+            <a:ext cx="0" cy="76200"/>
+          </a:xfrm>
+          <a:prstGeom prst="line">
+            <a:avLst/>
+          </a:prstGeom>
+          <a:ln w="12700">
+            <a:solidFill>
+              <a:srgbClr val="3A3D43"/>
+            </a:solidFill>
+          </a:ln>
+        </p:spPr>
+        <p:style>
+          <a:lnRef idx="2">
+            <a:schemeClr val="accent1"/>
+          </a:lnRef>
+          <a:fillRef idx="0">
+            <a:schemeClr val="accent1"/>
+          </a:fillRef>
+          <a:effectRef idx="1">
+            <a:schemeClr val="accent1"/>
+          </a:effectRef>
+          <a:fontRef idx="minor">
+            <a:schemeClr val="tx1"/>
+          </a:fontRef>
+        </p:style>
+      </p:cxnSp>
+      <p:cxnSp>
+        <p:nvCxnSpPr>
+          <p:cNvPr id="46" name="motif-line-tick-33"/>
+          <p:cNvCxnSpPr/>
+          <p:nvPr/>
+        </p:nvCxnSpPr>
+        <p:spPr>
+          <a:xfrm>
+            <a:off x="11531600" y="6350000"/>
             <a:ext cx="0" cy="76200"/>
           </a:xfrm>
           <a:prstGeom prst="line">
@@ -34750,7 +35381,7 @@
                 </a:solidFill>
                 <a:latin typeface="Work Sans"/>
               </a:rPr>
-              <a:t>For banks, and for people who measure AI search</a:t>
+              <a:t>What the bank's website team can do with this</a:t>
             </a:r>
           </a:p>
         </p:txBody>
@@ -35043,7 +35674,7 @@
                 </a:solidFill>
                 <a:latin typeface="Work Sans"/>
               </a:rPr>
-              <a:t>For banks</a:t>
+              <a:t>For the SEO strategist</a:t>
             </a:r>
           </a:p>
         </p:txBody>
@@ -35096,7 +35727,7 @@
         <p:spPr>
           <a:xfrm>
             <a:off x="1524000" y="2019300"/>
-            <a:ext cx="8636000" cy="604519"/>
+            <a:ext cx="8636000" cy="906779"/>
           </a:xfrm>
           <a:prstGeom prst="rect">
             <a:avLst/>
@@ -35121,7 +35752,7 @@
                 </a:solidFill>
                 <a:latin typeface="Work Sans"/>
               </a:rPr>
-              <a:t>Plan for each engine. ChatGPT cites bank and regulator pages; Gemini cites comparison sites, blogs and news.</a:t>
+              <a:t>Measure AI answers as a channel of their own. Google rank is a weak proxy: 12% of URLs cited by AI assistants rank in Google's top 10 for the same query (Ahrefs).</a:t>
             </a:r>
           </a:p>
         </p:txBody>
@@ -35134,7 +35765,7 @@
         </p:nvSpPr>
         <p:spPr>
           <a:xfrm>
-            <a:off x="762000" y="2788920"/>
+            <a:off x="762000" y="3091179"/>
             <a:ext cx="317500" cy="231140"/>
           </a:xfrm>
           <a:prstGeom prst="rect">
@@ -35173,7 +35804,7 @@
         </p:nvSpPr>
         <p:spPr>
           <a:xfrm>
-            <a:off x="1524000" y="2763520"/>
+            <a:off x="1524000" y="3065779"/>
             <a:ext cx="8636000" cy="604519"/>
           </a:xfrm>
           <a:prstGeom prst="rect">
@@ -35199,7 +35830,7 @@
                 </a:solidFill>
                 <a:latin typeface="Work Sans"/>
               </a:rPr>
-              <a:t>Fee and rate pages get cited directly. ChatGPT cites SeaBank's and blu's fee pages by name.</a:t>
+              <a:t>Report ChatGPT and Gemini separately. ChatGPT took 64% of its citations from bank websites, Gemini 29%. A blended figure would hide that gap.</a:t>
             </a:r>
           </a:p>
         </p:txBody>
@@ -35212,7 +35843,7 @@
         </p:nvSpPr>
         <p:spPr>
           <a:xfrm>
-            <a:off x="762000" y="3533140"/>
+            <a:off x="762000" y="3835400"/>
             <a:ext cx="317500" cy="231140"/>
           </a:xfrm>
           <a:prstGeom prst="rect">
@@ -35251,7 +35882,7 @@
         </p:nvSpPr>
         <p:spPr>
           <a:xfrm>
-            <a:off x="1524000" y="3507740"/>
+            <a:off x="1524000" y="3810000"/>
             <a:ext cx="8636000" cy="604519"/>
           </a:xfrm>
           <a:prstGeom prst="rect">
@@ -35277,7 +35908,7 @@
                 </a:solidFill>
                 <a:latin typeface="Work Sans"/>
               </a:rPr>
-              <a:t>Know what the comparison sites say about you. Gemini cites Akulaku's, Zaipad's and Fazz's sites in 13 to 15 of its 20 answers.</a:t>
+              <a:t>Track pages, not only domains. The engines cited 21 of the same 97 sites but only 11 of the same 243 pages.</a:t>
             </a:r>
           </a:p>
         </p:txBody>
@@ -35290,7 +35921,7 @@
         </p:nvSpPr>
         <p:spPr>
           <a:xfrm>
-            <a:off x="762000" y="4277359"/>
+            <a:off x="762000" y="4579620"/>
             <a:ext cx="317500" cy="231140"/>
           </a:xfrm>
           <a:prstGeom prst="rect">
@@ -35329,7 +35960,7 @@
         </p:nvSpPr>
         <p:spPr>
           <a:xfrm>
-            <a:off x="1524000" y="4251959"/>
+            <a:off x="1524000" y="4554220"/>
             <a:ext cx="8636000" cy="604519"/>
           </a:xfrm>
           <a:prstGeom prst="rect">
@@ -35355,302 +35986,189 @@
                 </a:solidFill>
                 <a:latin typeface="Work Sans"/>
               </a:rPr>
-              <a:t>Track how often you are named. No answer in this run was negative about any bank.</a:t>
+              <a:t>Run a fixed set of customer questions in both engines every month, in Bahasa Indonesia. This study is one run of 20 questions, so treat it as the baseline.</a:t>
             </a:r>
           </a:p>
         </p:txBody>
       </p:sp>
+      <p:cxnSp>
+        <p:nvCxnSpPr>
+          <p:cNvPr id="15" name="motif-line-rail"/>
+          <p:cNvCxnSpPr/>
+          <p:nvPr/>
+        </p:nvCxnSpPr>
+        <p:spPr>
+          <a:xfrm>
+            <a:off x="1282700" y="2056130"/>
+            <a:ext cx="0" cy="2763520"/>
+          </a:xfrm>
+          <a:prstGeom prst="line">
+            <a:avLst/>
+          </a:prstGeom>
+          <a:ln w="12700">
+            <a:solidFill>
+              <a:srgbClr val="3A3D43"/>
+            </a:solidFill>
+          </a:ln>
+        </p:spPr>
+        <p:style>
+          <a:lnRef idx="2">
+            <a:schemeClr val="accent1"/>
+          </a:lnRef>
+          <a:fillRef idx="0">
+            <a:schemeClr val="accent1"/>
+          </a:fillRef>
+          <a:effectRef idx="1">
+            <a:schemeClr val="accent1"/>
+          </a:effectRef>
+          <a:fontRef idx="minor">
+            <a:schemeClr val="tx1"/>
+          </a:fontRef>
+        </p:style>
+      </p:cxnSp>
+      <p:cxnSp>
+        <p:nvCxnSpPr>
+          <p:cNvPr id="16" name="motif-line-stop-1"/>
+          <p:cNvCxnSpPr/>
+          <p:nvPr/>
+        </p:nvCxnSpPr>
+        <p:spPr>
+          <a:xfrm>
+            <a:off x="1238250" y="2170430"/>
+            <a:ext cx="88900" cy="0"/>
+          </a:xfrm>
+          <a:prstGeom prst="line">
+            <a:avLst/>
+          </a:prstGeom>
+          <a:ln w="15875">
+            <a:solidFill>
+              <a:srgbClr val="9A9EA6"/>
+            </a:solidFill>
+          </a:ln>
+        </p:spPr>
+        <p:style>
+          <a:lnRef idx="2">
+            <a:schemeClr val="accent1"/>
+          </a:lnRef>
+          <a:fillRef idx="0">
+            <a:schemeClr val="accent1"/>
+          </a:fillRef>
+          <a:effectRef idx="1">
+            <a:schemeClr val="accent1"/>
+          </a:effectRef>
+          <a:fontRef idx="minor">
+            <a:schemeClr val="tx1"/>
+          </a:fontRef>
+        </p:style>
+      </p:cxnSp>
+      <p:cxnSp>
+        <p:nvCxnSpPr>
+          <p:cNvPr id="17" name="motif-line-stop-2"/>
+          <p:cNvCxnSpPr/>
+          <p:nvPr/>
+        </p:nvCxnSpPr>
+        <p:spPr>
+          <a:xfrm>
+            <a:off x="1238250" y="3216910"/>
+            <a:ext cx="88900" cy="0"/>
+          </a:xfrm>
+          <a:prstGeom prst="line">
+            <a:avLst/>
+          </a:prstGeom>
+          <a:ln w="15875">
+            <a:solidFill>
+              <a:srgbClr val="9A9EA6"/>
+            </a:solidFill>
+          </a:ln>
+        </p:spPr>
+        <p:style>
+          <a:lnRef idx="2">
+            <a:schemeClr val="accent1"/>
+          </a:lnRef>
+          <a:fillRef idx="0">
+            <a:schemeClr val="accent1"/>
+          </a:fillRef>
+          <a:effectRef idx="1">
+            <a:schemeClr val="accent1"/>
+          </a:effectRef>
+          <a:fontRef idx="minor">
+            <a:schemeClr val="tx1"/>
+          </a:fontRef>
+        </p:style>
+      </p:cxnSp>
+      <p:cxnSp>
+        <p:nvCxnSpPr>
+          <p:cNvPr id="18" name="motif-line-stop-3"/>
+          <p:cNvCxnSpPr/>
+          <p:nvPr/>
+        </p:nvCxnSpPr>
+        <p:spPr>
+          <a:xfrm>
+            <a:off x="1238250" y="3961129"/>
+            <a:ext cx="88900" cy="0"/>
+          </a:xfrm>
+          <a:prstGeom prst="line">
+            <a:avLst/>
+          </a:prstGeom>
+          <a:ln w="15875">
+            <a:solidFill>
+              <a:srgbClr val="9A9EA6"/>
+            </a:solidFill>
+          </a:ln>
+        </p:spPr>
+        <p:style>
+          <a:lnRef idx="2">
+            <a:schemeClr val="accent1"/>
+          </a:lnRef>
+          <a:fillRef idx="0">
+            <a:schemeClr val="accent1"/>
+          </a:fillRef>
+          <a:effectRef idx="1">
+            <a:schemeClr val="accent1"/>
+          </a:effectRef>
+          <a:fontRef idx="minor">
+            <a:schemeClr val="tx1"/>
+          </a:fontRef>
+        </p:style>
+      </p:cxnSp>
+      <p:cxnSp>
+        <p:nvCxnSpPr>
+          <p:cNvPr id="19" name="motif-line-stop-4"/>
+          <p:cNvCxnSpPr/>
+          <p:nvPr/>
+        </p:nvCxnSpPr>
+        <p:spPr>
+          <a:xfrm>
+            <a:off x="1238250" y="4705350"/>
+            <a:ext cx="88900" cy="0"/>
+          </a:xfrm>
+          <a:prstGeom prst="line">
+            <a:avLst/>
+          </a:prstGeom>
+          <a:ln w="15875">
+            <a:solidFill>
+              <a:srgbClr val="9A9EA6"/>
+            </a:solidFill>
+          </a:ln>
+        </p:spPr>
+        <p:style>
+          <a:lnRef idx="2">
+            <a:schemeClr val="accent1"/>
+          </a:lnRef>
+          <a:fillRef idx="0">
+            <a:schemeClr val="accent1"/>
+          </a:fillRef>
+          <a:effectRef idx="1">
+            <a:schemeClr val="accent1"/>
+          </a:effectRef>
+          <a:fontRef idx="minor">
+            <a:schemeClr val="tx1"/>
+          </a:fontRef>
+        </p:style>
+      </p:cxnSp>
       <p:sp>
         <p:nvSpPr>
-          <p:cNvPr id="15" name="TextBox 14"/>
-          <p:cNvSpPr txBox="1"/>
-          <p:nvPr/>
-        </p:nvSpPr>
-        <p:spPr>
-          <a:xfrm>
-            <a:off x="762000" y="5021580"/>
-            <a:ext cx="317500" cy="231140"/>
-          </a:xfrm>
-          <a:prstGeom prst="rect">
-            <a:avLst/>
-          </a:prstGeom>
-          <a:noFill/>
-        </p:spPr>
-        <p:txBody>
-          <a:bodyPr wrap="square" lIns="0" rIns="0" tIns="0" bIns="0" anchor="t">
-            <a:spAutoFit/>
-          </a:bodyPr>
-          <a:lstStyle/>
-          <a:p>
-            <a:pPr algn="l">
-              <a:lnSpc>
-                <a:spcPct val="115000"/>
-              </a:lnSpc>
-            </a:pPr>
-            <a:r>
-              <a:rPr sz="1300" b="0">
-                <a:solidFill>
-                  <a:srgbClr val="9A9EA6"/>
-                </a:solidFill>
-                <a:latin typeface="IBM Plex Mono"/>
-              </a:rPr>
-              <a:t>05</a:t>
-            </a:r>
-          </a:p>
-        </p:txBody>
-      </p:sp>
-      <p:sp>
-        <p:nvSpPr>
-          <p:cNvPr id="16" name="TextBox 15"/>
-          <p:cNvSpPr txBox="1"/>
-          <p:nvPr/>
-        </p:nvSpPr>
-        <p:spPr>
-          <a:xfrm>
-            <a:off x="1524000" y="4996180"/>
-            <a:ext cx="8636000" cy="302259"/>
-          </a:xfrm>
-          <a:prstGeom prst="rect">
-            <a:avLst/>
-          </a:prstGeom>
-          <a:noFill/>
-        </p:spPr>
-        <p:txBody>
-          <a:bodyPr wrap="square" lIns="0" rIns="0" tIns="0" bIns="0" anchor="t">
-            <a:spAutoFit/>
-          </a:bodyPr>
-          <a:lstStyle/>
-          <a:p>
-            <a:pPr algn="l">
-              <a:lnSpc>
-                <a:spcPct val="115000"/>
-              </a:lnSpc>
-            </a:pPr>
-            <a:r>
-              <a:rPr sz="1700" b="0">
-                <a:solidFill>
-                  <a:srgbClr val="ECE7DD"/>
-                </a:solidFill>
-                <a:latin typeface="Work Sans"/>
-              </a:rPr>
-              <a:t>Write the explainers. Only 1 of 6 how-to answers named a bank.</a:t>
-            </a:r>
-          </a:p>
-        </p:txBody>
-      </p:sp>
-      <p:cxnSp>
-        <p:nvCxnSpPr>
-          <p:cNvPr id="17" name="motif-line-rail"/>
-          <p:cNvCxnSpPr/>
-          <p:nvPr/>
-        </p:nvCxnSpPr>
-        <p:spPr>
-          <a:xfrm>
-            <a:off x="1282700" y="2056130"/>
-            <a:ext cx="0" cy="3205479"/>
-          </a:xfrm>
-          <a:prstGeom prst="line">
-            <a:avLst/>
-          </a:prstGeom>
-          <a:ln w="12700">
-            <a:solidFill>
-              <a:srgbClr val="3A3D43"/>
-            </a:solidFill>
-          </a:ln>
-        </p:spPr>
-        <p:style>
-          <a:lnRef idx="2">
-            <a:schemeClr val="accent1"/>
-          </a:lnRef>
-          <a:fillRef idx="0">
-            <a:schemeClr val="accent1"/>
-          </a:fillRef>
-          <a:effectRef idx="1">
-            <a:schemeClr val="accent1"/>
-          </a:effectRef>
-          <a:fontRef idx="minor">
-            <a:schemeClr val="tx1"/>
-          </a:fontRef>
-        </p:style>
-      </p:cxnSp>
-      <p:cxnSp>
-        <p:nvCxnSpPr>
-          <p:cNvPr id="18" name="motif-line-stop-1"/>
-          <p:cNvCxnSpPr/>
-          <p:nvPr/>
-        </p:nvCxnSpPr>
-        <p:spPr>
-          <a:xfrm>
-            <a:off x="1238250" y="2170430"/>
-            <a:ext cx="88900" cy="0"/>
-          </a:xfrm>
-          <a:prstGeom prst="line">
-            <a:avLst/>
-          </a:prstGeom>
-          <a:ln w="15875">
-            <a:solidFill>
-              <a:srgbClr val="9A9EA6"/>
-            </a:solidFill>
-          </a:ln>
-        </p:spPr>
-        <p:style>
-          <a:lnRef idx="2">
-            <a:schemeClr val="accent1"/>
-          </a:lnRef>
-          <a:fillRef idx="0">
-            <a:schemeClr val="accent1"/>
-          </a:fillRef>
-          <a:effectRef idx="1">
-            <a:schemeClr val="accent1"/>
-          </a:effectRef>
-          <a:fontRef idx="minor">
-            <a:schemeClr val="tx1"/>
-          </a:fontRef>
-        </p:style>
-      </p:cxnSp>
-      <p:cxnSp>
-        <p:nvCxnSpPr>
-          <p:cNvPr id="19" name="motif-line-stop-2"/>
-          <p:cNvCxnSpPr/>
-          <p:nvPr/>
-        </p:nvCxnSpPr>
-        <p:spPr>
-          <a:xfrm>
-            <a:off x="1238250" y="2914650"/>
-            <a:ext cx="88900" cy="0"/>
-          </a:xfrm>
-          <a:prstGeom prst="line">
-            <a:avLst/>
-          </a:prstGeom>
-          <a:ln w="15875">
-            <a:solidFill>
-              <a:srgbClr val="9A9EA6"/>
-            </a:solidFill>
-          </a:ln>
-        </p:spPr>
-        <p:style>
-          <a:lnRef idx="2">
-            <a:schemeClr val="accent1"/>
-          </a:lnRef>
-          <a:fillRef idx="0">
-            <a:schemeClr val="accent1"/>
-          </a:fillRef>
-          <a:effectRef idx="1">
-            <a:schemeClr val="accent1"/>
-          </a:effectRef>
-          <a:fontRef idx="minor">
-            <a:schemeClr val="tx1"/>
-          </a:fontRef>
-        </p:style>
-      </p:cxnSp>
-      <p:cxnSp>
-        <p:nvCxnSpPr>
-          <p:cNvPr id="20" name="motif-line-stop-3"/>
-          <p:cNvCxnSpPr/>
-          <p:nvPr/>
-        </p:nvCxnSpPr>
-        <p:spPr>
-          <a:xfrm>
-            <a:off x="1238250" y="3658869"/>
-            <a:ext cx="88900" cy="0"/>
-          </a:xfrm>
-          <a:prstGeom prst="line">
-            <a:avLst/>
-          </a:prstGeom>
-          <a:ln w="15875">
-            <a:solidFill>
-              <a:srgbClr val="9A9EA6"/>
-            </a:solidFill>
-          </a:ln>
-        </p:spPr>
-        <p:style>
-          <a:lnRef idx="2">
-            <a:schemeClr val="accent1"/>
-          </a:lnRef>
-          <a:fillRef idx="0">
-            <a:schemeClr val="accent1"/>
-          </a:fillRef>
-          <a:effectRef idx="1">
-            <a:schemeClr val="accent1"/>
-          </a:effectRef>
-          <a:fontRef idx="minor">
-            <a:schemeClr val="tx1"/>
-          </a:fontRef>
-        </p:style>
-      </p:cxnSp>
-      <p:cxnSp>
-        <p:nvCxnSpPr>
-          <p:cNvPr id="21" name="motif-line-stop-4"/>
-          <p:cNvCxnSpPr/>
-          <p:nvPr/>
-        </p:nvCxnSpPr>
-        <p:spPr>
-          <a:xfrm>
-            <a:off x="1238250" y="4403089"/>
-            <a:ext cx="88900" cy="0"/>
-          </a:xfrm>
-          <a:prstGeom prst="line">
-            <a:avLst/>
-          </a:prstGeom>
-          <a:ln w="15875">
-            <a:solidFill>
-              <a:srgbClr val="9A9EA6"/>
-            </a:solidFill>
-          </a:ln>
-        </p:spPr>
-        <p:style>
-          <a:lnRef idx="2">
-            <a:schemeClr val="accent1"/>
-          </a:lnRef>
-          <a:fillRef idx="0">
-            <a:schemeClr val="accent1"/>
-          </a:fillRef>
-          <a:effectRef idx="1">
-            <a:schemeClr val="accent1"/>
-          </a:effectRef>
-          <a:fontRef idx="minor">
-            <a:schemeClr val="tx1"/>
-          </a:fontRef>
-        </p:style>
-      </p:cxnSp>
-      <p:cxnSp>
-        <p:nvCxnSpPr>
-          <p:cNvPr id="22" name="motif-line-stop-5"/>
-          <p:cNvCxnSpPr/>
-          <p:nvPr/>
-        </p:nvCxnSpPr>
-        <p:spPr>
-          <a:xfrm>
-            <a:off x="1238250" y="5147309"/>
-            <a:ext cx="88900" cy="0"/>
-          </a:xfrm>
-          <a:prstGeom prst="line">
-            <a:avLst/>
-          </a:prstGeom>
-          <a:ln w="15875">
-            <a:solidFill>
-              <a:srgbClr val="9A9EA6"/>
-            </a:solidFill>
-          </a:ln>
-        </p:spPr>
-        <p:style>
-          <a:lnRef idx="2">
-            <a:schemeClr val="accent1"/>
-          </a:lnRef>
-          <a:fillRef idx="0">
-            <a:schemeClr val="accent1"/>
-          </a:fillRef>
-          <a:effectRef idx="1">
-            <a:schemeClr val="accent1"/>
-          </a:effectRef>
-          <a:fontRef idx="minor">
-            <a:schemeClr val="tx1"/>
-          </a:fontRef>
-        </p:style>
-      </p:cxnSp>
-      <p:sp>
-        <p:nvSpPr>
-          <p:cNvPr id="23" name="TextBox 22"/>
+          <p:cNvPr id="20" name="TextBox 19"/>
           <p:cNvSpPr txBox="1"/>
           <p:nvPr/>
         </p:nvSpPr>
@@ -35689,7 +36207,7 @@
       </p:sp>
       <p:sp>
         <p:nvSpPr>
-          <p:cNvPr id="24" name="TextBox 23"/>
+          <p:cNvPr id="21" name="TextBox 20"/>
           <p:cNvSpPr txBox="1"/>
           <p:nvPr/>
         </p:nvSpPr>
@@ -35721,14 +36239,53 @@
                 </a:solidFill>
                 <a:latin typeface="IBM Plex Mono"/>
               </a:rPr>
-              <a:t>28 / 32</a:t>
+              <a:t>28 / 33</a:t>
             </a:r>
           </a:p>
         </p:txBody>
       </p:sp>
-      <p:cxnSp>
-        <p:nvCxnSpPr>
-          <p:cNvPr id="25" name="motif-line-tick-01"/>
+      <p:sp>
+        <p:nvSpPr>
+          <p:cNvPr id="22" name="TextBox 21"/>
+          <p:cNvSpPr txBox="1"/>
+          <p:nvPr/>
+        </p:nvSpPr>
+        <p:spPr>
+          <a:xfrm>
+            <a:off x="762000" y="5727700"/>
+            <a:ext cx="10668000" cy="165100"/>
+          </a:xfrm>
+          <a:prstGeom prst="rect">
+            <a:avLst/>
+          </a:prstGeom>
+          <a:noFill/>
+        </p:spPr>
+        <p:txBody>
+          <a:bodyPr wrap="square" lIns="0" rIns="0" tIns="0" bIns="0" anchor="t">
+            <a:spAutoFit/>
+          </a:bodyPr>
+          <a:lstStyle/>
+          <a:p>
+            <a:pPr algn="l">
+              <a:lnSpc>
+                <a:spcPct val="115000"/>
+              </a:lnSpc>
+            </a:pPr>
+            <a:r>
+              <a:rPr sz="900" b="0">
+                <a:solidFill>
+                  <a:srgbClr val="9A9EA6"/>
+                </a:solidFill>
+                <a:latin typeface="IBM Plex Mono"/>
+              </a:rPr>
+              <a:t>Source: data/interim/citations.csv. Ahrefs, AI search overlap with Google results</a:t>
+            </a:r>
+          </a:p>
+        </p:txBody>
+      </p:sp>
+      <p:cxnSp>
+        <p:nvCxnSpPr>
+          <p:cNvPr id="23" name="motif-line-tick-01"/>
           <p:cNvCxnSpPr/>
           <p:nvPr/>
         </p:nvCxnSpPr>
@@ -35763,7 +36320,7 @@
       </p:cxnSp>
       <p:cxnSp>
         <p:nvCxnSpPr>
-          <p:cNvPr id="26" name="motif-line-tick-02"/>
+          <p:cNvPr id="24" name="motif-line-tick-02"/>
           <p:cNvCxnSpPr/>
           <p:nvPr/>
         </p:nvCxnSpPr>
@@ -35798,7 +36355,7 @@
       </p:cxnSp>
       <p:cxnSp>
         <p:nvCxnSpPr>
-          <p:cNvPr id="27" name="motif-line-tick-03"/>
+          <p:cNvPr id="25" name="motif-line-tick-03"/>
           <p:cNvCxnSpPr/>
           <p:nvPr/>
         </p:nvCxnSpPr>
@@ -35833,7 +36390,7 @@
       </p:cxnSp>
       <p:cxnSp>
         <p:nvCxnSpPr>
-          <p:cNvPr id="28" name="motif-line-tick-04"/>
+          <p:cNvPr id="26" name="motif-line-tick-04"/>
           <p:cNvCxnSpPr/>
           <p:nvPr/>
         </p:nvCxnSpPr>
@@ -35868,7 +36425,7 @@
       </p:cxnSp>
       <p:cxnSp>
         <p:nvCxnSpPr>
-          <p:cNvPr id="29" name="motif-line-tick-05"/>
+          <p:cNvPr id="27" name="motif-line-tick-05"/>
           <p:cNvCxnSpPr/>
           <p:nvPr/>
         </p:nvCxnSpPr>
@@ -35903,7 +36460,7 @@
       </p:cxnSp>
       <p:cxnSp>
         <p:nvCxnSpPr>
-          <p:cNvPr id="30" name="motif-line-tick-06"/>
+          <p:cNvPr id="28" name="motif-line-tick-06"/>
           <p:cNvCxnSpPr/>
           <p:nvPr/>
         </p:nvCxnSpPr>
@@ -35938,7 +36495,7 @@
       </p:cxnSp>
       <p:cxnSp>
         <p:nvCxnSpPr>
-          <p:cNvPr id="31" name="motif-line-tick-07"/>
+          <p:cNvPr id="29" name="motif-line-tick-07"/>
           <p:cNvCxnSpPr/>
           <p:nvPr/>
         </p:nvCxnSpPr>
@@ -35973,7 +36530,7 @@
       </p:cxnSp>
       <p:cxnSp>
         <p:nvCxnSpPr>
-          <p:cNvPr id="32" name="motif-line-tick-08"/>
+          <p:cNvPr id="30" name="motif-line-tick-08"/>
           <p:cNvCxnSpPr/>
           <p:nvPr/>
         </p:nvCxnSpPr>
@@ -36008,7 +36565,7 @@
       </p:cxnSp>
       <p:cxnSp>
         <p:nvCxnSpPr>
-          <p:cNvPr id="33" name="motif-line-tick-09"/>
+          <p:cNvPr id="31" name="motif-line-tick-09"/>
           <p:cNvCxnSpPr/>
           <p:nvPr/>
         </p:nvCxnSpPr>
@@ -36043,7 +36600,7 @@
       </p:cxnSp>
       <p:cxnSp>
         <p:nvCxnSpPr>
-          <p:cNvPr id="34" name="motif-line-tick-10"/>
+          <p:cNvPr id="32" name="motif-line-tick-10"/>
           <p:cNvCxnSpPr/>
           <p:nvPr/>
         </p:nvCxnSpPr>
@@ -36078,7 +36635,7 @@
       </p:cxnSp>
       <p:cxnSp>
         <p:nvCxnSpPr>
-          <p:cNvPr id="35" name="motif-line-tick-11"/>
+          <p:cNvPr id="33" name="motif-line-tick-11"/>
           <p:cNvCxnSpPr/>
           <p:nvPr/>
         </p:nvCxnSpPr>
@@ -36113,7 +36670,7 @@
       </p:cxnSp>
       <p:cxnSp>
         <p:nvCxnSpPr>
-          <p:cNvPr id="36" name="motif-line-tick-12"/>
+          <p:cNvPr id="34" name="motif-line-tick-12"/>
           <p:cNvCxnSpPr/>
           <p:nvPr/>
         </p:nvCxnSpPr>
@@ -36148,7 +36705,7 @@
       </p:cxnSp>
       <p:cxnSp>
         <p:nvCxnSpPr>
-          <p:cNvPr id="37" name="motif-line-tick-13"/>
+          <p:cNvPr id="35" name="motif-line-tick-13"/>
           <p:cNvCxnSpPr/>
           <p:nvPr/>
         </p:nvCxnSpPr>
@@ -36183,7 +36740,7 @@
       </p:cxnSp>
       <p:cxnSp>
         <p:nvCxnSpPr>
-          <p:cNvPr id="38" name="motif-line-tick-14"/>
+          <p:cNvPr id="36" name="motif-line-tick-14"/>
           <p:cNvCxnSpPr/>
           <p:nvPr/>
         </p:nvCxnSpPr>
@@ -36218,7 +36775,7 @@
       </p:cxnSp>
       <p:cxnSp>
         <p:nvCxnSpPr>
-          <p:cNvPr id="39" name="motif-line-tick-15"/>
+          <p:cNvPr id="37" name="motif-line-tick-15"/>
           <p:cNvCxnSpPr/>
           <p:nvPr/>
         </p:nvCxnSpPr>
@@ -36253,7 +36810,7 @@
       </p:cxnSp>
       <p:cxnSp>
         <p:nvCxnSpPr>
-          <p:cNvPr id="40" name="motif-line-tick-16"/>
+          <p:cNvPr id="38" name="motif-line-tick-16"/>
           <p:cNvCxnSpPr/>
           <p:nvPr/>
         </p:nvCxnSpPr>
@@ -36288,7 +36845,7 @@
       </p:cxnSp>
       <p:cxnSp>
         <p:nvCxnSpPr>
-          <p:cNvPr id="41" name="motif-line-tick-17"/>
+          <p:cNvPr id="39" name="motif-line-tick-17"/>
           <p:cNvCxnSpPr/>
           <p:nvPr/>
         </p:nvCxnSpPr>
@@ -36323,7 +36880,7 @@
       </p:cxnSp>
       <p:cxnSp>
         <p:nvCxnSpPr>
-          <p:cNvPr id="42" name="motif-line-tick-18"/>
+          <p:cNvPr id="40" name="motif-line-tick-18"/>
           <p:cNvCxnSpPr/>
           <p:nvPr/>
         </p:nvCxnSpPr>
@@ -36358,7 +36915,7 @@
       </p:cxnSp>
       <p:cxnSp>
         <p:nvCxnSpPr>
-          <p:cNvPr id="43" name="motif-line-tick-19"/>
+          <p:cNvPr id="41" name="motif-line-tick-19"/>
           <p:cNvCxnSpPr/>
           <p:nvPr/>
         </p:nvCxnSpPr>
@@ -36393,7 +36950,7 @@
       </p:cxnSp>
       <p:cxnSp>
         <p:nvCxnSpPr>
-          <p:cNvPr id="44" name="motif-line-tick-20"/>
+          <p:cNvPr id="42" name="motif-line-tick-20"/>
           <p:cNvCxnSpPr/>
           <p:nvPr/>
         </p:nvCxnSpPr>
@@ -36428,7 +36985,7 @@
       </p:cxnSp>
       <p:cxnSp>
         <p:nvCxnSpPr>
-          <p:cNvPr id="45" name="motif-line-tick-21"/>
+          <p:cNvPr id="43" name="motif-line-tick-21"/>
           <p:cNvCxnSpPr/>
           <p:nvPr/>
         </p:nvCxnSpPr>
@@ -36463,7 +37020,7 @@
       </p:cxnSp>
       <p:cxnSp>
         <p:nvCxnSpPr>
-          <p:cNvPr id="46" name="motif-line-tick-22"/>
+          <p:cNvPr id="44" name="motif-line-tick-22"/>
           <p:cNvCxnSpPr/>
           <p:nvPr/>
         </p:nvCxnSpPr>
@@ -36498,7 +37055,7 @@
       </p:cxnSp>
       <p:cxnSp>
         <p:nvCxnSpPr>
-          <p:cNvPr id="47" name="motif-line-tick-23"/>
+          <p:cNvPr id="45" name="motif-line-tick-23"/>
           <p:cNvCxnSpPr/>
           <p:nvPr/>
         </p:nvCxnSpPr>
@@ -36533,7 +37090,7 @@
       </p:cxnSp>
       <p:cxnSp>
         <p:nvCxnSpPr>
-          <p:cNvPr id="48" name="motif-line-tick-24"/>
+          <p:cNvPr id="46" name="motif-line-tick-24"/>
           <p:cNvCxnSpPr/>
           <p:nvPr/>
         </p:nvCxnSpPr>
@@ -36568,7 +37125,7 @@
       </p:cxnSp>
       <p:cxnSp>
         <p:nvCxnSpPr>
-          <p:cNvPr id="49" name="motif-line-tick-25"/>
+          <p:cNvPr id="47" name="motif-line-tick-25"/>
           <p:cNvCxnSpPr/>
           <p:nvPr/>
         </p:nvCxnSpPr>
@@ -36603,7 +37160,7 @@
       </p:cxnSp>
       <p:cxnSp>
         <p:nvCxnSpPr>
-          <p:cNvPr id="50" name="motif-line-tick-26"/>
+          <p:cNvPr id="48" name="motif-line-tick-26"/>
           <p:cNvCxnSpPr/>
           <p:nvPr/>
         </p:nvCxnSpPr>
@@ -36638,7 +37195,7 @@
       </p:cxnSp>
       <p:cxnSp>
         <p:nvCxnSpPr>
-          <p:cNvPr id="51" name="motif-line-tick-27"/>
+          <p:cNvPr id="49" name="motif-line-tick-27"/>
           <p:cNvCxnSpPr/>
           <p:nvPr/>
         </p:nvCxnSpPr>
@@ -36673,7 +37230,7 @@
       </p:cxnSp>
       <p:cxnSp>
         <p:nvCxnSpPr>
-          <p:cNvPr id="52" name="motif-line-tick-28"/>
+          <p:cNvPr id="50" name="motif-line-tick-28"/>
           <p:cNvCxnSpPr/>
           <p:nvPr/>
         </p:nvCxnSpPr>
@@ -36708,7 +37265,7 @@
       </p:cxnSp>
       <p:cxnSp>
         <p:nvCxnSpPr>
-          <p:cNvPr id="53" name="motif-line-tick-29"/>
+          <p:cNvPr id="51" name="motif-line-tick-29"/>
           <p:cNvCxnSpPr/>
           <p:nvPr/>
         </p:nvCxnSpPr>
@@ -36743,7 +37300,7 @@
       </p:cxnSp>
       <p:cxnSp>
         <p:nvCxnSpPr>
-          <p:cNvPr id="54" name="motif-line-tick-30"/>
+          <p:cNvPr id="52" name="motif-line-tick-30"/>
           <p:cNvCxnSpPr/>
           <p:nvPr/>
         </p:nvCxnSpPr>
@@ -36778,7 +37335,7 @@
       </p:cxnSp>
       <p:cxnSp>
         <p:nvCxnSpPr>
-          <p:cNvPr id="55" name="motif-line-tick-31"/>
+          <p:cNvPr id="53" name="motif-line-tick-31"/>
           <p:cNvCxnSpPr/>
           <p:nvPr/>
         </p:nvCxnSpPr>
@@ -36813,13 +37370,48 @@
       </p:cxnSp>
       <p:cxnSp>
         <p:nvCxnSpPr>
-          <p:cNvPr id="56" name="motif-line-tick-32"/>
+          <p:cNvPr id="54" name="motif-line-tick-32"/>
           <p:cNvCxnSpPr/>
           <p:nvPr/>
         </p:nvCxnSpPr>
         <p:spPr>
           <a:xfrm>
             <a:off x="11417300" y="6350000"/>
+            <a:ext cx="0" cy="76200"/>
+          </a:xfrm>
+          <a:prstGeom prst="line">
+            <a:avLst/>
+          </a:prstGeom>
+          <a:ln w="12700">
+            <a:solidFill>
+              <a:srgbClr val="3A3D43"/>
+            </a:solidFill>
+          </a:ln>
+        </p:spPr>
+        <p:style>
+          <a:lnRef idx="2">
+            <a:schemeClr val="accent1"/>
+          </a:lnRef>
+          <a:fillRef idx="0">
+            <a:schemeClr val="accent1"/>
+          </a:fillRef>
+          <a:effectRef idx="1">
+            <a:schemeClr val="accent1"/>
+          </a:effectRef>
+          <a:fontRef idx="minor">
+            <a:schemeClr val="tx1"/>
+          </a:fontRef>
+        </p:style>
+      </p:cxnSp>
+      <p:cxnSp>
+        <p:nvCxnSpPr>
+          <p:cNvPr id="55" name="motif-line-tick-33"/>
+          <p:cNvCxnSpPr/>
+          <p:nvPr/>
+        </p:nvCxnSpPr>
+        <p:spPr>
+          <a:xfrm>
+            <a:off x="11531600" y="6350000"/>
             <a:ext cx="0" cy="76200"/>
           </a:xfrm>
           <a:prstGeom prst="line">
@@ -37064,7 +37656,7 @@
                 </a:solidFill>
                 <a:latin typeface="Work Sans"/>
               </a:rPr>
-              <a:t>For GEO practitioners: what building this taught me</a:t>
+              <a:t>For content and marketing</a:t>
             </a:r>
           </a:p>
         </p:txBody>
@@ -37117,7 +37709,7 @@
         <p:spPr>
           <a:xfrm>
             <a:off x="1524000" y="2019300"/>
-            <a:ext cx="8636000" cy="284480"/>
+            <a:ext cx="8636000" cy="604519"/>
           </a:xfrm>
           <a:prstGeom prst="rect">
             <a:avLst/>
@@ -37136,13 +37728,13 @@
               </a:lnSpc>
             </a:pPr>
             <a:r>
-              <a:rPr sz="1600" b="0">
+              <a:rPr sz="1700" b="0">
                 <a:solidFill>
                   <a:srgbClr val="ECE7DD"/>
                 </a:solidFill>
                 <a:latin typeface="Work Sans"/>
               </a:rPr>
-              <a:t>Count only the listed sources. Inline links and source chips inflate citation counts.</a:t>
+              <a:t>Keep fee and rate pages complete and current. ChatGPT cited SeaBank's fees page 5 times and blu's 4 times, by URL.</a:t>
             </a:r>
           </a:p>
         </p:txBody>
@@ -37155,7 +37747,7 @@
         </p:nvSpPr>
         <p:spPr>
           <a:xfrm>
-            <a:off x="762000" y="2456180"/>
+            <a:off x="762000" y="2788920"/>
             <a:ext cx="317500" cy="231140"/>
           </a:xfrm>
           <a:prstGeom prst="rect">
@@ -37194,8 +37786,8 @@
         </p:nvSpPr>
         <p:spPr>
           <a:xfrm>
-            <a:off x="1524000" y="2430780"/>
-            <a:ext cx="8636000" cy="284480"/>
+            <a:off x="1524000" y="2763520"/>
+            <a:ext cx="8636000" cy="604519"/>
           </a:xfrm>
           <a:prstGeom prst="rect">
             <a:avLst/>
@@ -37214,13 +37806,13 @@
               </a:lnSpc>
             </a:pPr>
             <a:r>
-              <a:rPr sz="1600" b="0">
+              <a:rPr sz="1700" b="0">
                 <a:solidFill>
                   <a:srgbClr val="ECE7DD"/>
                 </a:solidFill>
                 <a:latin typeface="Work Sans"/>
               </a:rPr>
-              <a:t>Unwrap redirects and normalise URLs before counting pages.</a:t>
+              <a:t>Write explainers for how-to questions on deposit insurance, scams and complaints. Only 1 of 6 how-to answers named a bank.</a:t>
             </a:r>
           </a:p>
         </p:txBody>
@@ -37233,7 +37825,7 @@
         </p:nvSpPr>
         <p:spPr>
           <a:xfrm>
-            <a:off x="762000" y="2867660"/>
+            <a:off x="762000" y="3533140"/>
             <a:ext cx="317500" cy="231140"/>
           </a:xfrm>
           <a:prstGeom prst="rect">
@@ -37272,8 +37864,8 @@
         </p:nvSpPr>
         <p:spPr>
           <a:xfrm>
-            <a:off x="1524000" y="2842260"/>
-            <a:ext cx="8636000" cy="568960"/>
+            <a:off x="1524000" y="3507740"/>
+            <a:ext cx="8636000" cy="906779"/>
           </a:xfrm>
           <a:prstGeom prst="rect">
             <a:avLst/>
@@ -37292,13 +37884,13 @@
               </a:lnSpc>
             </a:pPr>
             <a:r>
-              <a:rPr sz="1600" b="0">
+              <a:rPr sz="1700" b="0">
                 <a:solidFill>
                   <a:srgbClr val="ECE7DD"/>
                 </a:solidFill>
                 <a:latin typeface="Work Sans"/>
               </a:rPr>
-              <a:t>Render pages built with JavaScript. 19 cited pages needed a headless browser to be read.</a:t>
+              <a:t>Read the comparison articles Gemini cites and send their publishers corrections when a fact about your bank is out of date. One Akulaku article appeared in 14 of Gemini's 20 answers.</a:t>
             </a:r>
           </a:p>
         </p:txBody>
@@ -37311,7 +37903,7 @@
         </p:nvSpPr>
         <p:spPr>
           <a:xfrm>
-            <a:off x="762000" y="3563620"/>
+            <a:off x="762000" y="4579620"/>
             <a:ext cx="317500" cy="231140"/>
           </a:xfrm>
           <a:prstGeom prst="rect">
@@ -37350,8 +37942,8 @@
         </p:nvSpPr>
         <p:spPr>
           <a:xfrm>
-            <a:off x="1524000" y="3538220"/>
-            <a:ext cx="8636000" cy="284480"/>
+            <a:off x="1524000" y="4554220"/>
+            <a:ext cx="8636000" cy="604519"/>
           </a:xfrm>
           <a:prstGeom prst="rect">
             <a:avLst/>
@@ -37370,421 +37962,195 @@
               </a:lnSpc>
             </a:pPr>
             <a:r>
-              <a:rPr sz="1600" b="0">
+              <a:rPr sz="1700" b="0">
                 <a:solidFill>
                   <a:srgbClr val="ECE7DD"/>
                 </a:solidFill>
                 <a:latin typeface="Work Sans"/>
               </a:rPr>
-              <a:t>Weight pages equally in source share, or one long annual report can dominate it.</a:t>
+              <a:t>Report how often the bank is named before reporting tone. Of 137 answer and bank pairs, none was negative.</a:t>
             </a:r>
           </a:p>
         </p:txBody>
       </p:sp>
+      <p:cxnSp>
+        <p:nvCxnSpPr>
+          <p:cNvPr id="15" name="motif-line-rail"/>
+          <p:cNvCxnSpPr/>
+          <p:nvPr/>
+        </p:nvCxnSpPr>
+        <p:spPr>
+          <a:xfrm>
+            <a:off x="1282700" y="2056130"/>
+            <a:ext cx="0" cy="2763519"/>
+          </a:xfrm>
+          <a:prstGeom prst="line">
+            <a:avLst/>
+          </a:prstGeom>
+          <a:ln w="12700">
+            <a:solidFill>
+              <a:srgbClr val="3A3D43"/>
+            </a:solidFill>
+          </a:ln>
+        </p:spPr>
+        <p:style>
+          <a:lnRef idx="2">
+            <a:schemeClr val="accent1"/>
+          </a:lnRef>
+          <a:fillRef idx="0">
+            <a:schemeClr val="accent1"/>
+          </a:fillRef>
+          <a:effectRef idx="1">
+            <a:schemeClr val="accent1"/>
+          </a:effectRef>
+          <a:fontRef idx="minor">
+            <a:schemeClr val="tx1"/>
+          </a:fontRef>
+        </p:style>
+      </p:cxnSp>
+      <p:cxnSp>
+        <p:nvCxnSpPr>
+          <p:cNvPr id="16" name="motif-line-stop-1"/>
+          <p:cNvCxnSpPr/>
+          <p:nvPr/>
+        </p:nvCxnSpPr>
+        <p:spPr>
+          <a:xfrm>
+            <a:off x="1238250" y="2170430"/>
+            <a:ext cx="88900" cy="0"/>
+          </a:xfrm>
+          <a:prstGeom prst="line">
+            <a:avLst/>
+          </a:prstGeom>
+          <a:ln w="15875">
+            <a:solidFill>
+              <a:srgbClr val="9A9EA6"/>
+            </a:solidFill>
+          </a:ln>
+        </p:spPr>
+        <p:style>
+          <a:lnRef idx="2">
+            <a:schemeClr val="accent1"/>
+          </a:lnRef>
+          <a:fillRef idx="0">
+            <a:schemeClr val="accent1"/>
+          </a:fillRef>
+          <a:effectRef idx="1">
+            <a:schemeClr val="accent1"/>
+          </a:effectRef>
+          <a:fontRef idx="minor">
+            <a:schemeClr val="tx1"/>
+          </a:fontRef>
+        </p:style>
+      </p:cxnSp>
+      <p:cxnSp>
+        <p:nvCxnSpPr>
+          <p:cNvPr id="17" name="motif-line-stop-2"/>
+          <p:cNvCxnSpPr/>
+          <p:nvPr/>
+        </p:nvCxnSpPr>
+        <p:spPr>
+          <a:xfrm>
+            <a:off x="1238250" y="2914650"/>
+            <a:ext cx="88900" cy="0"/>
+          </a:xfrm>
+          <a:prstGeom prst="line">
+            <a:avLst/>
+          </a:prstGeom>
+          <a:ln w="15875">
+            <a:solidFill>
+              <a:srgbClr val="9A9EA6"/>
+            </a:solidFill>
+          </a:ln>
+        </p:spPr>
+        <p:style>
+          <a:lnRef idx="2">
+            <a:schemeClr val="accent1"/>
+          </a:lnRef>
+          <a:fillRef idx="0">
+            <a:schemeClr val="accent1"/>
+          </a:fillRef>
+          <a:effectRef idx="1">
+            <a:schemeClr val="accent1"/>
+          </a:effectRef>
+          <a:fontRef idx="minor">
+            <a:schemeClr val="tx1"/>
+          </a:fontRef>
+        </p:style>
+      </p:cxnSp>
+      <p:cxnSp>
+        <p:nvCxnSpPr>
+          <p:cNvPr id="18" name="motif-line-stop-3"/>
+          <p:cNvCxnSpPr/>
+          <p:nvPr/>
+        </p:nvCxnSpPr>
+        <p:spPr>
+          <a:xfrm>
+            <a:off x="1238250" y="3658869"/>
+            <a:ext cx="88900" cy="0"/>
+          </a:xfrm>
+          <a:prstGeom prst="line">
+            <a:avLst/>
+          </a:prstGeom>
+          <a:ln w="15875">
+            <a:solidFill>
+              <a:srgbClr val="9A9EA6"/>
+            </a:solidFill>
+          </a:ln>
+        </p:spPr>
+        <p:style>
+          <a:lnRef idx="2">
+            <a:schemeClr val="accent1"/>
+          </a:lnRef>
+          <a:fillRef idx="0">
+            <a:schemeClr val="accent1"/>
+          </a:fillRef>
+          <a:effectRef idx="1">
+            <a:schemeClr val="accent1"/>
+          </a:effectRef>
+          <a:fontRef idx="minor">
+            <a:schemeClr val="tx1"/>
+          </a:fontRef>
+        </p:style>
+      </p:cxnSp>
+      <p:cxnSp>
+        <p:nvCxnSpPr>
+          <p:cNvPr id="19" name="motif-line-stop-4"/>
+          <p:cNvCxnSpPr/>
+          <p:nvPr/>
+        </p:nvCxnSpPr>
+        <p:spPr>
+          <a:xfrm>
+            <a:off x="1238250" y="4705349"/>
+            <a:ext cx="88900" cy="0"/>
+          </a:xfrm>
+          <a:prstGeom prst="line">
+            <a:avLst/>
+          </a:prstGeom>
+          <a:ln w="15875">
+            <a:solidFill>
+              <a:srgbClr val="9A9EA6"/>
+            </a:solidFill>
+          </a:ln>
+        </p:spPr>
+        <p:style>
+          <a:lnRef idx="2">
+            <a:schemeClr val="accent1"/>
+          </a:lnRef>
+          <a:fillRef idx="0">
+            <a:schemeClr val="accent1"/>
+          </a:fillRef>
+          <a:effectRef idx="1">
+            <a:schemeClr val="accent1"/>
+          </a:effectRef>
+          <a:fontRef idx="minor">
+            <a:schemeClr val="tx1"/>
+          </a:fontRef>
+        </p:style>
+      </p:cxnSp>
       <p:sp>
         <p:nvSpPr>
-          <p:cNvPr id="15" name="TextBox 14"/>
-          <p:cNvSpPr txBox="1"/>
-          <p:nvPr/>
-        </p:nvSpPr>
-        <p:spPr>
-          <a:xfrm>
-            <a:off x="762000" y="3975100"/>
-            <a:ext cx="317500" cy="231140"/>
-          </a:xfrm>
-          <a:prstGeom prst="rect">
-            <a:avLst/>
-          </a:prstGeom>
-          <a:noFill/>
-        </p:spPr>
-        <p:txBody>
-          <a:bodyPr wrap="square" lIns="0" rIns="0" tIns="0" bIns="0" anchor="t">
-            <a:spAutoFit/>
-          </a:bodyPr>
-          <a:lstStyle/>
-          <a:p>
-            <a:pPr algn="l">
-              <a:lnSpc>
-                <a:spcPct val="115000"/>
-              </a:lnSpc>
-            </a:pPr>
-            <a:r>
-              <a:rPr sz="1300" b="0">
-                <a:solidFill>
-                  <a:srgbClr val="9A9EA6"/>
-                </a:solidFill>
-                <a:latin typeface="IBM Plex Mono"/>
-              </a:rPr>
-              <a:t>05</a:t>
-            </a:r>
-          </a:p>
-        </p:txBody>
-      </p:sp>
-      <p:sp>
-        <p:nvSpPr>
-          <p:cNvPr id="16" name="TextBox 15"/>
-          <p:cNvSpPr txBox="1"/>
-          <p:nvPr/>
-        </p:nvSpPr>
-        <p:spPr>
-          <a:xfrm>
-            <a:off x="1524000" y="3949700"/>
-            <a:ext cx="8636000" cy="568960"/>
-          </a:xfrm>
-          <a:prstGeom prst="rect">
-            <a:avLst/>
-          </a:prstGeom>
-          <a:noFill/>
-        </p:spPr>
-        <p:txBody>
-          <a:bodyPr wrap="square" lIns="0" rIns="0" tIns="0" bIns="0" anchor="t">
-            <a:spAutoFit/>
-          </a:bodyPr>
-          <a:lstStyle/>
-          <a:p>
-            <a:pPr algn="l">
-              <a:lnSpc>
-                <a:spcPct val="115000"/>
-              </a:lnSpc>
-            </a:pPr>
-            <a:r>
-              <a:rPr sz="1600" b="0">
-                <a:solidFill>
-                  <a:srgbClr val="ECE7DD"/>
-                </a:solidFill>
-                <a:latin typeface="Work Sans"/>
-              </a:rPr>
-              <a:t>Weight answers equally in answer share, so one long answer does not count many times.</a:t>
-            </a:r>
-          </a:p>
-        </p:txBody>
-      </p:sp>
-      <p:sp>
-        <p:nvSpPr>
-          <p:cNvPr id="17" name="TextBox 16"/>
-          <p:cNvSpPr txBox="1"/>
-          <p:nvPr/>
-        </p:nvSpPr>
-        <p:spPr>
-          <a:xfrm>
-            <a:off x="762000" y="4671060"/>
-            <a:ext cx="317500" cy="231140"/>
-          </a:xfrm>
-          <a:prstGeom prst="rect">
-            <a:avLst/>
-          </a:prstGeom>
-          <a:noFill/>
-        </p:spPr>
-        <p:txBody>
-          <a:bodyPr wrap="square" lIns="0" rIns="0" tIns="0" bIns="0" anchor="t">
-            <a:spAutoFit/>
-          </a:bodyPr>
-          <a:lstStyle/>
-          <a:p>
-            <a:pPr algn="l">
-              <a:lnSpc>
-                <a:spcPct val="115000"/>
-              </a:lnSpc>
-            </a:pPr>
-            <a:r>
-              <a:rPr sz="1300" b="0">
-                <a:solidFill>
-                  <a:srgbClr val="9A9EA6"/>
-                </a:solidFill>
-                <a:latin typeface="IBM Plex Mono"/>
-              </a:rPr>
-              <a:t>06</a:t>
-            </a:r>
-          </a:p>
-        </p:txBody>
-      </p:sp>
-      <p:sp>
-        <p:nvSpPr>
-          <p:cNvPr id="18" name="TextBox 17"/>
-          <p:cNvSpPr txBox="1"/>
-          <p:nvPr/>
-        </p:nvSpPr>
-        <p:spPr>
-          <a:xfrm>
-            <a:off x="1524000" y="4645660"/>
-            <a:ext cx="8636000" cy="568960"/>
-          </a:xfrm>
-          <a:prstGeom prst="rect">
-            <a:avLst/>
-          </a:prstGeom>
-          <a:noFill/>
-        </p:spPr>
-        <p:txBody>
-          <a:bodyPr wrap="square" lIns="0" rIns="0" tIns="0" bIns="0" anchor="t">
-            <a:spAutoFit/>
-          </a:bodyPr>
-          <a:lstStyle/>
-          <a:p>
-            <a:pPr algn="l">
-              <a:lnSpc>
-                <a:spcPct val="115000"/>
-              </a:lnSpc>
-            </a:pPr>
-            <a:r>
-              <a:rPr sz="1600" b="0">
-                <a:solidFill>
-                  <a:srgbClr val="ECE7DD"/>
-                </a:solidFill>
-                <a:latin typeface="Work Sans"/>
-              </a:rPr>
-              <a:t>Per-source PAWC needs inline citation markers. Neither engine gave them, so only brand PAWC is reported.</a:t>
-            </a:r>
-          </a:p>
-        </p:txBody>
-      </p:sp>
-      <p:cxnSp>
-        <p:nvCxnSpPr>
-          <p:cNvPr id="19" name="motif-line-rail"/>
-          <p:cNvCxnSpPr/>
-          <p:nvPr/>
-        </p:nvCxnSpPr>
-        <p:spPr>
-          <a:xfrm>
-            <a:off x="1282700" y="2047239"/>
-            <a:ext cx="0" cy="2854961"/>
-          </a:xfrm>
-          <a:prstGeom prst="line">
-            <a:avLst/>
-          </a:prstGeom>
-          <a:ln w="12700">
-            <a:solidFill>
-              <a:srgbClr val="3A3D43"/>
-            </a:solidFill>
-          </a:ln>
-        </p:spPr>
-        <p:style>
-          <a:lnRef idx="2">
-            <a:schemeClr val="accent1"/>
-          </a:lnRef>
-          <a:fillRef idx="0">
-            <a:schemeClr val="accent1"/>
-          </a:fillRef>
-          <a:effectRef idx="1">
-            <a:schemeClr val="accent1"/>
-          </a:effectRef>
-          <a:fontRef idx="minor">
-            <a:schemeClr val="tx1"/>
-          </a:fontRef>
-        </p:style>
-      </p:cxnSp>
-      <p:cxnSp>
-        <p:nvCxnSpPr>
-          <p:cNvPr id="20" name="motif-line-stop-1"/>
-          <p:cNvCxnSpPr/>
-          <p:nvPr/>
-        </p:nvCxnSpPr>
-        <p:spPr>
-          <a:xfrm>
-            <a:off x="1238250" y="2161540"/>
-            <a:ext cx="88900" cy="0"/>
-          </a:xfrm>
-          <a:prstGeom prst="line">
-            <a:avLst/>
-          </a:prstGeom>
-          <a:ln w="15875">
-            <a:solidFill>
-              <a:srgbClr val="9A9EA6"/>
-            </a:solidFill>
-          </a:ln>
-        </p:spPr>
-        <p:style>
-          <a:lnRef idx="2">
-            <a:schemeClr val="accent1"/>
-          </a:lnRef>
-          <a:fillRef idx="0">
-            <a:schemeClr val="accent1"/>
-          </a:fillRef>
-          <a:effectRef idx="1">
-            <a:schemeClr val="accent1"/>
-          </a:effectRef>
-          <a:fontRef idx="minor">
-            <a:schemeClr val="tx1"/>
-          </a:fontRef>
-        </p:style>
-      </p:cxnSp>
-      <p:cxnSp>
-        <p:nvCxnSpPr>
-          <p:cNvPr id="21" name="motif-line-stop-2"/>
-          <p:cNvCxnSpPr/>
-          <p:nvPr/>
-        </p:nvCxnSpPr>
-        <p:spPr>
-          <a:xfrm>
-            <a:off x="1238250" y="2573020"/>
-            <a:ext cx="88900" cy="0"/>
-          </a:xfrm>
-          <a:prstGeom prst="line">
-            <a:avLst/>
-          </a:prstGeom>
-          <a:ln w="15875">
-            <a:solidFill>
-              <a:srgbClr val="9A9EA6"/>
-            </a:solidFill>
-          </a:ln>
-        </p:spPr>
-        <p:style>
-          <a:lnRef idx="2">
-            <a:schemeClr val="accent1"/>
-          </a:lnRef>
-          <a:fillRef idx="0">
-            <a:schemeClr val="accent1"/>
-          </a:fillRef>
-          <a:effectRef idx="1">
-            <a:schemeClr val="accent1"/>
-          </a:effectRef>
-          <a:fontRef idx="minor">
-            <a:schemeClr val="tx1"/>
-          </a:fontRef>
-        </p:style>
-      </p:cxnSp>
-      <p:cxnSp>
-        <p:nvCxnSpPr>
-          <p:cNvPr id="22" name="motif-line-stop-3"/>
-          <p:cNvCxnSpPr/>
-          <p:nvPr/>
-        </p:nvCxnSpPr>
-        <p:spPr>
-          <a:xfrm>
-            <a:off x="1238250" y="2984500"/>
-            <a:ext cx="88900" cy="0"/>
-          </a:xfrm>
-          <a:prstGeom prst="line">
-            <a:avLst/>
-          </a:prstGeom>
-          <a:ln w="15875">
-            <a:solidFill>
-              <a:srgbClr val="9A9EA6"/>
-            </a:solidFill>
-          </a:ln>
-        </p:spPr>
-        <p:style>
-          <a:lnRef idx="2">
-            <a:schemeClr val="accent1"/>
-          </a:lnRef>
-          <a:fillRef idx="0">
-            <a:schemeClr val="accent1"/>
-          </a:fillRef>
-          <a:effectRef idx="1">
-            <a:schemeClr val="accent1"/>
-          </a:effectRef>
-          <a:fontRef idx="minor">
-            <a:schemeClr val="tx1"/>
-          </a:fontRef>
-        </p:style>
-      </p:cxnSp>
-      <p:cxnSp>
-        <p:nvCxnSpPr>
-          <p:cNvPr id="23" name="motif-line-stop-4"/>
-          <p:cNvCxnSpPr/>
-          <p:nvPr/>
-        </p:nvCxnSpPr>
-        <p:spPr>
-          <a:xfrm>
-            <a:off x="1238250" y="3680460"/>
-            <a:ext cx="88900" cy="0"/>
-          </a:xfrm>
-          <a:prstGeom prst="line">
-            <a:avLst/>
-          </a:prstGeom>
-          <a:ln w="15875">
-            <a:solidFill>
-              <a:srgbClr val="9A9EA6"/>
-            </a:solidFill>
-          </a:ln>
-        </p:spPr>
-        <p:style>
-          <a:lnRef idx="2">
-            <a:schemeClr val="accent1"/>
-          </a:lnRef>
-          <a:fillRef idx="0">
-            <a:schemeClr val="accent1"/>
-          </a:fillRef>
-          <a:effectRef idx="1">
-            <a:schemeClr val="accent1"/>
-          </a:effectRef>
-          <a:fontRef idx="minor">
-            <a:schemeClr val="tx1"/>
-          </a:fontRef>
-        </p:style>
-      </p:cxnSp>
-      <p:cxnSp>
-        <p:nvCxnSpPr>
-          <p:cNvPr id="24" name="motif-line-stop-5"/>
-          <p:cNvCxnSpPr/>
-          <p:nvPr/>
-        </p:nvCxnSpPr>
-        <p:spPr>
-          <a:xfrm>
-            <a:off x="1238250" y="4091940"/>
-            <a:ext cx="88900" cy="0"/>
-          </a:xfrm>
-          <a:prstGeom prst="line">
-            <a:avLst/>
-          </a:prstGeom>
-          <a:ln w="15875">
-            <a:solidFill>
-              <a:srgbClr val="9A9EA6"/>
-            </a:solidFill>
-          </a:ln>
-        </p:spPr>
-        <p:style>
-          <a:lnRef idx="2">
-            <a:schemeClr val="accent1"/>
-          </a:lnRef>
-          <a:fillRef idx="0">
-            <a:schemeClr val="accent1"/>
-          </a:fillRef>
-          <a:effectRef idx="1">
-            <a:schemeClr val="accent1"/>
-          </a:effectRef>
-          <a:fontRef idx="minor">
-            <a:schemeClr val="tx1"/>
-          </a:fontRef>
-        </p:style>
-      </p:cxnSp>
-      <p:cxnSp>
-        <p:nvCxnSpPr>
-          <p:cNvPr id="25" name="motif-line-stop-6"/>
-          <p:cNvCxnSpPr/>
-          <p:nvPr/>
-        </p:nvCxnSpPr>
-        <p:spPr>
-          <a:xfrm>
-            <a:off x="1238250" y="4787900"/>
-            <a:ext cx="88900" cy="0"/>
-          </a:xfrm>
-          <a:prstGeom prst="line">
-            <a:avLst/>
-          </a:prstGeom>
-          <a:ln w="15875">
-            <a:solidFill>
-              <a:srgbClr val="9A9EA6"/>
-            </a:solidFill>
-          </a:ln>
-        </p:spPr>
-        <p:style>
-          <a:lnRef idx="2">
-            <a:schemeClr val="accent1"/>
-          </a:lnRef>
-          <a:fillRef idx="0">
-            <a:schemeClr val="accent1"/>
-          </a:fillRef>
-          <a:effectRef idx="1">
-            <a:schemeClr val="accent1"/>
-          </a:effectRef>
-          <a:fontRef idx="minor">
-            <a:schemeClr val="tx1"/>
-          </a:fontRef>
-        </p:style>
-      </p:cxnSp>
-      <p:sp>
-        <p:nvSpPr>
-          <p:cNvPr id="26" name="TextBox 25"/>
+          <p:cNvPr id="20" name="TextBox 19"/>
           <p:cNvSpPr txBox="1"/>
           <p:nvPr/>
         </p:nvSpPr>
@@ -37823,7 +38189,7 @@
       </p:sp>
       <p:sp>
         <p:nvSpPr>
-          <p:cNvPr id="27" name="TextBox 26"/>
+          <p:cNvPr id="21" name="TextBox 20"/>
           <p:cNvSpPr txBox="1"/>
           <p:nvPr/>
         </p:nvSpPr>
@@ -37855,14 +38221,53 @@
                 </a:solidFill>
                 <a:latin typeface="IBM Plex Mono"/>
               </a:rPr>
-              <a:t>29 / 32</a:t>
+              <a:t>29 / 33</a:t>
             </a:r>
           </a:p>
         </p:txBody>
       </p:sp>
-      <p:cxnSp>
-        <p:nvCxnSpPr>
-          <p:cNvPr id="28" name="motif-line-tick-01"/>
+      <p:sp>
+        <p:nvSpPr>
+          <p:cNvPr id="22" name="TextBox 21"/>
+          <p:cNvSpPr txBox="1"/>
+          <p:nvPr/>
+        </p:nvSpPr>
+        <p:spPr>
+          <a:xfrm>
+            <a:off x="762000" y="5727700"/>
+            <a:ext cx="10668000" cy="165100"/>
+          </a:xfrm>
+          <a:prstGeom prst="rect">
+            <a:avLst/>
+          </a:prstGeom>
+          <a:noFill/>
+        </p:spPr>
+        <p:txBody>
+          <a:bodyPr wrap="square" lIns="0" rIns="0" tIns="0" bIns="0" anchor="t">
+            <a:spAutoFit/>
+          </a:bodyPr>
+          <a:lstStyle/>
+          <a:p>
+            <a:pPr algn="l">
+              <a:lnSpc>
+                <a:spcPct val="115000"/>
+              </a:lnSpc>
+            </a:pPr>
+            <a:r>
+              <a:rPr sz="900" b="0">
+                <a:solidFill>
+                  <a:srgbClr val="9A9EA6"/>
+                </a:solidFill>
+                <a:latin typeface="IBM Plex Mono"/>
+              </a:rPr>
+              <a:t>Source: data/interim/citations.csv, data/processed/no_brand_rate.csv, pages_top.csv, data/labels/sentiment.csv</a:t>
+            </a:r>
+          </a:p>
+        </p:txBody>
+      </p:sp>
+      <p:cxnSp>
+        <p:nvCxnSpPr>
+          <p:cNvPr id="23" name="motif-line-tick-01"/>
           <p:cNvCxnSpPr/>
           <p:nvPr/>
         </p:nvCxnSpPr>
@@ -37897,7 +38302,7 @@
       </p:cxnSp>
       <p:cxnSp>
         <p:nvCxnSpPr>
-          <p:cNvPr id="29" name="motif-line-tick-02"/>
+          <p:cNvPr id="24" name="motif-line-tick-02"/>
           <p:cNvCxnSpPr/>
           <p:nvPr/>
         </p:nvCxnSpPr>
@@ -37932,7 +38337,7 @@
       </p:cxnSp>
       <p:cxnSp>
         <p:nvCxnSpPr>
-          <p:cNvPr id="30" name="motif-line-tick-03"/>
+          <p:cNvPr id="25" name="motif-line-tick-03"/>
           <p:cNvCxnSpPr/>
           <p:nvPr/>
         </p:nvCxnSpPr>
@@ -37967,7 +38372,7 @@
       </p:cxnSp>
       <p:cxnSp>
         <p:nvCxnSpPr>
-          <p:cNvPr id="31" name="motif-line-tick-04"/>
+          <p:cNvPr id="26" name="motif-line-tick-04"/>
           <p:cNvCxnSpPr/>
           <p:nvPr/>
         </p:nvCxnSpPr>
@@ -38002,7 +38407,7 @@
       </p:cxnSp>
       <p:cxnSp>
         <p:nvCxnSpPr>
-          <p:cNvPr id="32" name="motif-line-tick-05"/>
+          <p:cNvPr id="27" name="motif-line-tick-05"/>
           <p:cNvCxnSpPr/>
           <p:nvPr/>
         </p:nvCxnSpPr>
@@ -38037,7 +38442,7 @@
       </p:cxnSp>
       <p:cxnSp>
         <p:nvCxnSpPr>
-          <p:cNvPr id="33" name="motif-line-tick-06"/>
+          <p:cNvPr id="28" name="motif-line-tick-06"/>
           <p:cNvCxnSpPr/>
           <p:nvPr/>
         </p:nvCxnSpPr>
@@ -38072,7 +38477,7 @@
       </p:cxnSp>
       <p:cxnSp>
         <p:nvCxnSpPr>
-          <p:cNvPr id="34" name="motif-line-tick-07"/>
+          <p:cNvPr id="29" name="motif-line-tick-07"/>
           <p:cNvCxnSpPr/>
           <p:nvPr/>
         </p:nvCxnSpPr>
@@ -38107,7 +38512,7 @@
       </p:cxnSp>
       <p:cxnSp>
         <p:nvCxnSpPr>
-          <p:cNvPr id="35" name="motif-line-tick-08"/>
+          <p:cNvPr id="30" name="motif-line-tick-08"/>
           <p:cNvCxnSpPr/>
           <p:nvPr/>
         </p:nvCxnSpPr>
@@ -38142,7 +38547,7 @@
       </p:cxnSp>
       <p:cxnSp>
         <p:nvCxnSpPr>
-          <p:cNvPr id="36" name="motif-line-tick-09"/>
+          <p:cNvPr id="31" name="motif-line-tick-09"/>
           <p:cNvCxnSpPr/>
           <p:nvPr/>
         </p:nvCxnSpPr>
@@ -38177,7 +38582,7 @@
       </p:cxnSp>
       <p:cxnSp>
         <p:nvCxnSpPr>
-          <p:cNvPr id="37" name="motif-line-tick-10"/>
+          <p:cNvPr id="32" name="motif-line-tick-10"/>
           <p:cNvCxnSpPr/>
           <p:nvPr/>
         </p:nvCxnSpPr>
@@ -38212,7 +38617,7 @@
       </p:cxnSp>
       <p:cxnSp>
         <p:nvCxnSpPr>
-          <p:cNvPr id="38" name="motif-line-tick-11"/>
+          <p:cNvPr id="33" name="motif-line-tick-11"/>
           <p:cNvCxnSpPr/>
           <p:nvPr/>
         </p:nvCxnSpPr>
@@ -38247,7 +38652,7 @@
       </p:cxnSp>
       <p:cxnSp>
         <p:nvCxnSpPr>
-          <p:cNvPr id="39" name="motif-line-tick-12"/>
+          <p:cNvPr id="34" name="motif-line-tick-12"/>
           <p:cNvCxnSpPr/>
           <p:nvPr/>
         </p:nvCxnSpPr>
@@ -38282,7 +38687,7 @@
       </p:cxnSp>
       <p:cxnSp>
         <p:nvCxnSpPr>
-          <p:cNvPr id="40" name="motif-line-tick-13"/>
+          <p:cNvPr id="35" name="motif-line-tick-13"/>
           <p:cNvCxnSpPr/>
           <p:nvPr/>
         </p:nvCxnSpPr>
@@ -38317,7 +38722,7 @@
       </p:cxnSp>
       <p:cxnSp>
         <p:nvCxnSpPr>
-          <p:cNvPr id="41" name="motif-line-tick-14"/>
+          <p:cNvPr id="36" name="motif-line-tick-14"/>
           <p:cNvCxnSpPr/>
           <p:nvPr/>
         </p:nvCxnSpPr>
@@ -38352,7 +38757,7 @@
       </p:cxnSp>
       <p:cxnSp>
         <p:nvCxnSpPr>
-          <p:cNvPr id="42" name="motif-line-tick-15"/>
+          <p:cNvPr id="37" name="motif-line-tick-15"/>
           <p:cNvCxnSpPr/>
           <p:nvPr/>
         </p:nvCxnSpPr>
@@ -38387,7 +38792,7 @@
       </p:cxnSp>
       <p:cxnSp>
         <p:nvCxnSpPr>
-          <p:cNvPr id="43" name="motif-line-tick-16"/>
+          <p:cNvPr id="38" name="motif-line-tick-16"/>
           <p:cNvCxnSpPr/>
           <p:nvPr/>
         </p:nvCxnSpPr>
@@ -38422,7 +38827,7 @@
       </p:cxnSp>
       <p:cxnSp>
         <p:nvCxnSpPr>
-          <p:cNvPr id="44" name="motif-line-tick-17"/>
+          <p:cNvPr id="39" name="motif-line-tick-17"/>
           <p:cNvCxnSpPr/>
           <p:nvPr/>
         </p:nvCxnSpPr>
@@ -38457,7 +38862,7 @@
       </p:cxnSp>
       <p:cxnSp>
         <p:nvCxnSpPr>
-          <p:cNvPr id="45" name="motif-line-tick-18"/>
+          <p:cNvPr id="40" name="motif-line-tick-18"/>
           <p:cNvCxnSpPr/>
           <p:nvPr/>
         </p:nvCxnSpPr>
@@ -38492,7 +38897,7 @@
       </p:cxnSp>
       <p:cxnSp>
         <p:nvCxnSpPr>
-          <p:cNvPr id="46" name="motif-line-tick-19"/>
+          <p:cNvPr id="41" name="motif-line-tick-19"/>
           <p:cNvCxnSpPr/>
           <p:nvPr/>
         </p:nvCxnSpPr>
@@ -38527,7 +38932,7 @@
       </p:cxnSp>
       <p:cxnSp>
         <p:nvCxnSpPr>
-          <p:cNvPr id="47" name="motif-line-tick-20"/>
+          <p:cNvPr id="42" name="motif-line-tick-20"/>
           <p:cNvCxnSpPr/>
           <p:nvPr/>
         </p:nvCxnSpPr>
@@ -38562,7 +38967,7 @@
       </p:cxnSp>
       <p:cxnSp>
         <p:nvCxnSpPr>
-          <p:cNvPr id="48" name="motif-line-tick-21"/>
+          <p:cNvPr id="43" name="motif-line-tick-21"/>
           <p:cNvCxnSpPr/>
           <p:nvPr/>
         </p:nvCxnSpPr>
@@ -38597,7 +39002,7 @@
       </p:cxnSp>
       <p:cxnSp>
         <p:nvCxnSpPr>
-          <p:cNvPr id="49" name="motif-line-tick-22"/>
+          <p:cNvPr id="44" name="motif-line-tick-22"/>
           <p:cNvCxnSpPr/>
           <p:nvPr/>
         </p:nvCxnSpPr>
@@ -38632,7 +39037,7 @@
       </p:cxnSp>
       <p:cxnSp>
         <p:nvCxnSpPr>
-          <p:cNvPr id="50" name="motif-line-tick-23"/>
+          <p:cNvPr id="45" name="motif-line-tick-23"/>
           <p:cNvCxnSpPr/>
           <p:nvPr/>
         </p:nvCxnSpPr>
@@ -38667,7 +39072,7 @@
       </p:cxnSp>
       <p:cxnSp>
         <p:nvCxnSpPr>
-          <p:cNvPr id="51" name="motif-line-tick-24"/>
+          <p:cNvPr id="46" name="motif-line-tick-24"/>
           <p:cNvCxnSpPr/>
           <p:nvPr/>
         </p:nvCxnSpPr>
@@ -38702,7 +39107,7 @@
       </p:cxnSp>
       <p:cxnSp>
         <p:nvCxnSpPr>
-          <p:cNvPr id="52" name="motif-line-tick-25"/>
+          <p:cNvPr id="47" name="motif-line-tick-25"/>
           <p:cNvCxnSpPr/>
           <p:nvPr/>
         </p:nvCxnSpPr>
@@ -38737,7 +39142,7 @@
       </p:cxnSp>
       <p:cxnSp>
         <p:nvCxnSpPr>
-          <p:cNvPr id="53" name="motif-line-tick-26"/>
+          <p:cNvPr id="48" name="motif-line-tick-26"/>
           <p:cNvCxnSpPr/>
           <p:nvPr/>
         </p:nvCxnSpPr>
@@ -38772,7 +39177,7 @@
       </p:cxnSp>
       <p:cxnSp>
         <p:nvCxnSpPr>
-          <p:cNvPr id="54" name="motif-line-tick-27"/>
+          <p:cNvPr id="49" name="motif-line-tick-27"/>
           <p:cNvCxnSpPr/>
           <p:nvPr/>
         </p:nvCxnSpPr>
@@ -38807,7 +39212,7 @@
       </p:cxnSp>
       <p:cxnSp>
         <p:nvCxnSpPr>
-          <p:cNvPr id="55" name="motif-line-tick-28"/>
+          <p:cNvPr id="50" name="motif-line-tick-28"/>
           <p:cNvCxnSpPr/>
           <p:nvPr/>
         </p:nvCxnSpPr>
@@ -38842,7 +39247,7 @@
       </p:cxnSp>
       <p:cxnSp>
         <p:nvCxnSpPr>
-          <p:cNvPr id="56" name="motif-line-tick-29"/>
+          <p:cNvPr id="51" name="motif-line-tick-29"/>
           <p:cNvCxnSpPr/>
           <p:nvPr/>
         </p:nvCxnSpPr>
@@ -38877,7 +39282,7 @@
       </p:cxnSp>
       <p:cxnSp>
         <p:nvCxnSpPr>
-          <p:cNvPr id="57" name="motif-line-tick-30"/>
+          <p:cNvPr id="52" name="motif-line-tick-30"/>
           <p:cNvCxnSpPr/>
           <p:nvPr/>
         </p:nvCxnSpPr>
@@ -38912,7 +39317,7 @@
       </p:cxnSp>
       <p:cxnSp>
         <p:nvCxnSpPr>
-          <p:cNvPr id="58" name="motif-line-tick-31"/>
+          <p:cNvPr id="53" name="motif-line-tick-31"/>
           <p:cNvCxnSpPr/>
           <p:nvPr/>
         </p:nvCxnSpPr>
@@ -38947,13 +39352,48 @@
       </p:cxnSp>
       <p:cxnSp>
         <p:nvCxnSpPr>
-          <p:cNvPr id="59" name="motif-line-tick-32"/>
+          <p:cNvPr id="54" name="motif-line-tick-32"/>
           <p:cNvCxnSpPr/>
           <p:nvPr/>
         </p:nvCxnSpPr>
         <p:spPr>
           <a:xfrm>
             <a:off x="11417300" y="6350000"/>
+            <a:ext cx="0" cy="76200"/>
+          </a:xfrm>
+          <a:prstGeom prst="line">
+            <a:avLst/>
+          </a:prstGeom>
+          <a:ln w="12700">
+            <a:solidFill>
+              <a:srgbClr val="3A3D43"/>
+            </a:solidFill>
+          </a:ln>
+        </p:spPr>
+        <p:style>
+          <a:lnRef idx="2">
+            <a:schemeClr val="accent1"/>
+          </a:lnRef>
+          <a:fillRef idx="0">
+            <a:schemeClr val="accent1"/>
+          </a:fillRef>
+          <a:effectRef idx="1">
+            <a:schemeClr val="accent1"/>
+          </a:effectRef>
+          <a:fontRef idx="minor">
+            <a:schemeClr val="tx1"/>
+          </a:fontRef>
+        </p:style>
+      </p:cxnSp>
+      <p:cxnSp>
+        <p:nvCxnSpPr>
+          <p:cNvPr id="55" name="motif-line-tick-33"/>
+          <p:cNvCxnSpPr/>
+          <p:nvPr/>
+        </p:nvCxnSpPr>
+        <p:spPr>
+          <a:xfrm>
+            <a:off x="11531600" y="6350000"/>
             <a:ext cx="0" cy="76200"/>
           </a:xfrm>
           <a:prstGeom prst="line">
@@ -39521,7 +39961,7 @@
                 </a:solidFill>
                 <a:latin typeface="Work Sans"/>
               </a:rPr>
-              <a:t>These numbers come from one run</a:t>
+              <a:t>For the web team</a:t>
             </a:r>
           </a:p>
         </p:txBody>
@@ -39534,8 +39974,8 @@
         </p:nvSpPr>
         <p:spPr>
           <a:xfrm>
-            <a:off x="1524000" y="2019300"/>
-            <a:ext cx="8636000" cy="604519"/>
+            <a:off x="762000" y="2044700"/>
+            <a:ext cx="317500" cy="231140"/>
           </a:xfrm>
           <a:prstGeom prst="rect">
             <a:avLst/>
@@ -39554,13 +39994,13 @@
               </a:lnSpc>
             </a:pPr>
             <a:r>
-              <a:rPr sz="1700" b="0">
+              <a:rPr sz="1300" b="0">
                 <a:solidFill>
-                  <a:srgbClr val="ECE7DD"/>
+                  <a:srgbClr val="9A9EA6"/>
                 </a:solidFill>
-                <a:latin typeface="Work Sans"/>
+                <a:latin typeface="IBM Plex Mono"/>
               </a:rPr>
-              <a:t>SparkToro and Gumshoe ran 12 prompts nearly 3,000 times. The same brand list came back less than 1 in 100 times (Search Engine Land, January 2026).</a:t>
+              <a:t>01</a:t>
             </a:r>
           </a:p>
         </p:txBody>
@@ -39573,8 +40013,8 @@
         </p:nvSpPr>
         <p:spPr>
           <a:xfrm>
-            <a:off x="1524000" y="2763520"/>
-            <a:ext cx="8636000" cy="604519"/>
+            <a:off x="1524000" y="2019300"/>
+            <a:ext cx="8636000" cy="568960"/>
           </a:xfrm>
           <a:prstGeom prst="rect">
             <a:avLst/>
@@ -39593,125 +40033,429 @@
               </a:lnSpc>
             </a:pPr>
             <a:r>
-              <a:rPr sz="1700" b="0">
+              <a:rPr sz="1600" b="0">
                 <a:solidFill>
                   <a:srgbClr val="ECE7DD"/>
                 </a:solidFill>
                 <a:latin typeface="Work Sans"/>
               </a:rPr>
-              <a:t>Read gaps of a few points here as ties: BCA and Bank Jago at 55%, SeaBank at 53%.</a:t>
+              <a:t>Fix or redirect cited pages that no longer work. Gemini cited 2 broken bank pages 4 times: a 404 on jago.com and a BNI complaints page that loads as an error page.</a:t>
             </a:r>
           </a:p>
         </p:txBody>
       </p:sp>
-      <p:cxnSp>
-        <p:nvCxnSpPr>
-          <p:cNvPr id="9" name="motif-line-rail"/>
-          <p:cNvCxnSpPr/>
-          <p:nvPr/>
-        </p:nvCxnSpPr>
-        <p:spPr>
-          <a:xfrm>
-            <a:off x="1282700" y="2056130"/>
-            <a:ext cx="0" cy="972820"/>
-          </a:xfrm>
-          <a:prstGeom prst="line">
-            <a:avLst/>
-          </a:prstGeom>
-          <a:ln w="12700">
-            <a:solidFill>
-              <a:srgbClr val="3A3D43"/>
-            </a:solidFill>
-          </a:ln>
-        </p:spPr>
-        <p:style>
-          <a:lnRef idx="2">
-            <a:schemeClr val="accent1"/>
-          </a:lnRef>
-          <a:fillRef idx="0">
-            <a:schemeClr val="accent1"/>
-          </a:fillRef>
-          <a:effectRef idx="1">
-            <a:schemeClr val="accent1"/>
-          </a:effectRef>
-          <a:fontRef idx="minor">
-            <a:schemeClr val="tx1"/>
-          </a:fontRef>
-        </p:style>
-      </p:cxnSp>
-      <p:cxnSp>
-        <p:nvCxnSpPr>
-          <p:cNvPr id="10" name="motif-line-stop-1"/>
-          <p:cNvCxnSpPr/>
-          <p:nvPr/>
-        </p:nvCxnSpPr>
-        <p:spPr>
-          <a:xfrm>
-            <a:off x="1238250" y="2170430"/>
-            <a:ext cx="88900" cy="0"/>
-          </a:xfrm>
-          <a:prstGeom prst="line">
-            <a:avLst/>
-          </a:prstGeom>
-          <a:ln w="15875">
-            <a:solidFill>
-              <a:srgbClr val="9A9EA6"/>
-            </a:solidFill>
-          </a:ln>
-        </p:spPr>
-        <p:style>
-          <a:lnRef idx="2">
-            <a:schemeClr val="accent1"/>
-          </a:lnRef>
-          <a:fillRef idx="0">
-            <a:schemeClr val="accent1"/>
-          </a:fillRef>
-          <a:effectRef idx="1">
-            <a:schemeClr val="accent1"/>
-          </a:effectRef>
-          <a:fontRef idx="minor">
-            <a:schemeClr val="tx1"/>
-          </a:fontRef>
-        </p:style>
-      </p:cxnSp>
-      <p:cxnSp>
-        <p:nvCxnSpPr>
-          <p:cNvPr id="11" name="motif-line-stop-2"/>
-          <p:cNvCxnSpPr/>
-          <p:nvPr/>
-        </p:nvCxnSpPr>
-        <p:spPr>
-          <a:xfrm>
-            <a:off x="1238250" y="2914650"/>
-            <a:ext cx="88900" cy="0"/>
-          </a:xfrm>
-          <a:prstGeom prst="line">
-            <a:avLst/>
-          </a:prstGeom>
-          <a:ln w="15875">
-            <a:solidFill>
-              <a:srgbClr val="9A9EA6"/>
-            </a:solidFill>
-          </a:ln>
-        </p:spPr>
-        <p:style>
-          <a:lnRef idx="2">
-            <a:schemeClr val="accent1"/>
-          </a:lnRef>
-          <a:fillRef idx="0">
-            <a:schemeClr val="accent1"/>
-          </a:fillRef>
-          <a:effectRef idx="1">
-            <a:schemeClr val="accent1"/>
-          </a:effectRef>
-          <a:fontRef idx="minor">
-            <a:schemeClr val="tx1"/>
-          </a:fontRef>
-        </p:style>
-      </p:cxnSp>
+      <p:sp>
+        <p:nvSpPr>
+          <p:cNvPr id="9" name="TextBox 8"/>
+          <p:cNvSpPr txBox="1"/>
+          <p:nvPr/>
+        </p:nvSpPr>
+        <p:spPr>
+          <a:xfrm>
+            <a:off x="762000" y="2740660"/>
+            <a:ext cx="317500" cy="231140"/>
+          </a:xfrm>
+          <a:prstGeom prst="rect">
+            <a:avLst/>
+          </a:prstGeom>
+          <a:noFill/>
+        </p:spPr>
+        <p:txBody>
+          <a:bodyPr wrap="square" lIns="0" rIns="0" tIns="0" bIns="0" anchor="t">
+            <a:spAutoFit/>
+          </a:bodyPr>
+          <a:lstStyle/>
+          <a:p>
+            <a:pPr algn="l">
+              <a:lnSpc>
+                <a:spcPct val="115000"/>
+              </a:lnSpc>
+            </a:pPr>
+            <a:r>
+              <a:rPr sz="1300" b="0">
+                <a:solidFill>
+                  <a:srgbClr val="9A9EA6"/>
+                </a:solidFill>
+                <a:latin typeface="IBM Plex Mono"/>
+              </a:rPr>
+              <a:t>02</a:t>
+            </a:r>
+          </a:p>
+        </p:txBody>
+      </p:sp>
+      <p:sp>
+        <p:nvSpPr>
+          <p:cNvPr id="10" name="TextBox 9"/>
+          <p:cNvSpPr txBox="1"/>
+          <p:nvPr/>
+        </p:nvSpPr>
+        <p:spPr>
+          <a:xfrm>
+            <a:off x="1524000" y="2715260"/>
+            <a:ext cx="8636000" cy="853439"/>
+          </a:xfrm>
+          <a:prstGeom prst="rect">
+            <a:avLst/>
+          </a:prstGeom>
+          <a:noFill/>
+        </p:spPr>
+        <p:txBody>
+          <a:bodyPr wrap="square" lIns="0" rIns="0" tIns="0" bIns="0" anchor="t">
+            <a:spAutoFit/>
+          </a:bodyPr>
+          <a:lstStyle/>
+          <a:p>
+            <a:pPr algn="l">
+              <a:lnSpc>
+                <a:spcPct val="115000"/>
+              </a:lnSpc>
+            </a:pPr>
+            <a:r>
+              <a:rPr sz="1600" b="0">
+                <a:solidFill>
+                  <a:srgbClr val="ECE7DD"/>
+                </a:solidFill>
+                <a:latin typeface="Work Sans"/>
+              </a:rPr>
+              <a:t>Send key text in the HTML from the server. 12 cited bank pages, SeaBank's fees and rates page among them, showed their text only after a browser ran JavaScript. A crawler that skips JavaScript may read them as empty.</a:t>
+            </a:r>
+          </a:p>
+        </p:txBody>
+      </p:sp>
+      <p:sp>
+        <p:nvSpPr>
+          <p:cNvPr id="11" name="TextBox 10"/>
+          <p:cNvSpPr txBox="1"/>
+          <p:nvPr/>
+        </p:nvSpPr>
+        <p:spPr>
+          <a:xfrm>
+            <a:off x="762000" y="3721100"/>
+            <a:ext cx="317500" cy="231140"/>
+          </a:xfrm>
+          <a:prstGeom prst="rect">
+            <a:avLst/>
+          </a:prstGeom>
+          <a:noFill/>
+        </p:spPr>
+        <p:txBody>
+          <a:bodyPr wrap="square" lIns="0" rIns="0" tIns="0" bIns="0" anchor="t">
+            <a:spAutoFit/>
+          </a:bodyPr>
+          <a:lstStyle/>
+          <a:p>
+            <a:pPr algn="l">
+              <a:lnSpc>
+                <a:spcPct val="115000"/>
+              </a:lnSpc>
+            </a:pPr>
+            <a:r>
+              <a:rPr sz="1300" b="0">
+                <a:solidFill>
+                  <a:srgbClr val="9A9EA6"/>
+                </a:solidFill>
+                <a:latin typeface="IBM Plex Mono"/>
+              </a:rPr>
+              <a:t>03</a:t>
+            </a:r>
+          </a:p>
+        </p:txBody>
+      </p:sp>
       <p:sp>
         <p:nvSpPr>
           <p:cNvPr id="12" name="TextBox 11"/>
+          <p:cNvSpPr txBox="1"/>
+          <p:nvPr/>
+        </p:nvSpPr>
+        <p:spPr>
+          <a:xfrm>
+            <a:off x="1524000" y="3695700"/>
+            <a:ext cx="8636000" cy="568960"/>
+          </a:xfrm>
+          <a:prstGeom prst="rect">
+            <a:avLst/>
+          </a:prstGeom>
+          <a:noFill/>
+        </p:spPr>
+        <p:txBody>
+          <a:bodyPr wrap="square" lIns="0" rIns="0" tIns="0" bIns="0" anchor="t">
+            <a:spAutoFit/>
+          </a:bodyPr>
+          <a:lstStyle/>
+          <a:p>
+            <a:pPr algn="l">
+              <a:lnSpc>
+                <a:spcPct val="115000"/>
+              </a:lnSpc>
+            </a:pPr>
+            <a:r>
+              <a:rPr sz="1600" b="0">
+                <a:solidFill>
+                  <a:srgbClr val="ECE7DD"/>
+                </a:solidFill>
+                <a:latin typeface="Work Sans"/>
+              </a:rPr>
+              <a:t>Check robots.txt on reports and product pages. It blocked our crawler from 2 BNI annual reports, and 3 bank sites returned no robots.txt our crawler could read.</a:t>
+            </a:r>
+          </a:p>
+        </p:txBody>
+      </p:sp>
+      <p:sp>
+        <p:nvSpPr>
+          <p:cNvPr id="13" name="TextBox 12"/>
+          <p:cNvSpPr txBox="1"/>
+          <p:nvPr/>
+        </p:nvSpPr>
+        <p:spPr>
+          <a:xfrm>
+            <a:off x="762000" y="4417060"/>
+            <a:ext cx="317500" cy="231140"/>
+          </a:xfrm>
+          <a:prstGeom prst="rect">
+            <a:avLst/>
+          </a:prstGeom>
+          <a:noFill/>
+        </p:spPr>
+        <p:txBody>
+          <a:bodyPr wrap="square" lIns="0" rIns="0" tIns="0" bIns="0" anchor="t">
+            <a:spAutoFit/>
+          </a:bodyPr>
+          <a:lstStyle/>
+          <a:p>
+            <a:pPr algn="l">
+              <a:lnSpc>
+                <a:spcPct val="115000"/>
+              </a:lnSpc>
+            </a:pPr>
+            <a:r>
+              <a:rPr sz="1300" b="0">
+                <a:solidFill>
+                  <a:srgbClr val="9A9EA6"/>
+                </a:solidFill>
+                <a:latin typeface="IBM Plex Mono"/>
+              </a:rPr>
+              <a:t>04</a:t>
+            </a:r>
+          </a:p>
+        </p:txBody>
+      </p:sp>
+      <p:sp>
+        <p:nvSpPr>
+          <p:cNvPr id="14" name="TextBox 13"/>
+          <p:cNvSpPr txBox="1"/>
+          <p:nvPr/>
+        </p:nvSpPr>
+        <p:spPr>
+          <a:xfrm>
+            <a:off x="1524000" y="4391660"/>
+            <a:ext cx="8636000" cy="568960"/>
+          </a:xfrm>
+          <a:prstGeom prst="rect">
+            <a:avLst/>
+          </a:prstGeom>
+          <a:noFill/>
+        </p:spPr>
+        <p:txBody>
+          <a:bodyPr wrap="square" lIns="0" rIns="0" tIns="0" bIns="0" anchor="t">
+            <a:spAutoFit/>
+          </a:bodyPr>
+          <a:lstStyle/>
+          <a:p>
+            <a:pPr algn="l">
+              <a:lnSpc>
+                <a:spcPct val="115000"/>
+              </a:lnSpc>
+            </a:pPr>
+            <a:r>
+              <a:rPr sz="1600" b="0">
+                <a:solidFill>
+                  <a:srgbClr val="ECE7DD"/>
+                </a:solidFill>
+                <a:latin typeface="Work Sans"/>
+              </a:rPr>
+              <a:t>Treat schema as optional for AI citations. Bank sites carried schema on 32% of cited pages and were still the most cited type.</a:t>
+            </a:r>
+          </a:p>
+        </p:txBody>
+      </p:sp>
+      <p:cxnSp>
+        <p:nvCxnSpPr>
+          <p:cNvPr id="15" name="motif-line-rail"/>
+          <p:cNvCxnSpPr/>
+          <p:nvPr/>
+        </p:nvCxnSpPr>
+        <p:spPr>
+          <a:xfrm>
+            <a:off x="1282700" y="2047239"/>
+            <a:ext cx="0" cy="2600961"/>
+          </a:xfrm>
+          <a:prstGeom prst="line">
+            <a:avLst/>
+          </a:prstGeom>
+          <a:ln w="12700">
+            <a:solidFill>
+              <a:srgbClr val="3A3D43"/>
+            </a:solidFill>
+          </a:ln>
+        </p:spPr>
+        <p:style>
+          <a:lnRef idx="2">
+            <a:schemeClr val="accent1"/>
+          </a:lnRef>
+          <a:fillRef idx="0">
+            <a:schemeClr val="accent1"/>
+          </a:fillRef>
+          <a:effectRef idx="1">
+            <a:schemeClr val="accent1"/>
+          </a:effectRef>
+          <a:fontRef idx="minor">
+            <a:schemeClr val="tx1"/>
+          </a:fontRef>
+        </p:style>
+      </p:cxnSp>
+      <p:cxnSp>
+        <p:nvCxnSpPr>
+          <p:cNvPr id="16" name="motif-line-stop-1"/>
+          <p:cNvCxnSpPr/>
+          <p:nvPr/>
+        </p:nvCxnSpPr>
+        <p:spPr>
+          <a:xfrm>
+            <a:off x="1238250" y="2161540"/>
+            <a:ext cx="88900" cy="0"/>
+          </a:xfrm>
+          <a:prstGeom prst="line">
+            <a:avLst/>
+          </a:prstGeom>
+          <a:ln w="15875">
+            <a:solidFill>
+              <a:srgbClr val="9A9EA6"/>
+            </a:solidFill>
+          </a:ln>
+        </p:spPr>
+        <p:style>
+          <a:lnRef idx="2">
+            <a:schemeClr val="accent1"/>
+          </a:lnRef>
+          <a:fillRef idx="0">
+            <a:schemeClr val="accent1"/>
+          </a:fillRef>
+          <a:effectRef idx="1">
+            <a:schemeClr val="accent1"/>
+          </a:effectRef>
+          <a:fontRef idx="minor">
+            <a:schemeClr val="tx1"/>
+          </a:fontRef>
+        </p:style>
+      </p:cxnSp>
+      <p:cxnSp>
+        <p:nvCxnSpPr>
+          <p:cNvPr id="17" name="motif-line-stop-2"/>
+          <p:cNvCxnSpPr/>
+          <p:nvPr/>
+        </p:nvCxnSpPr>
+        <p:spPr>
+          <a:xfrm>
+            <a:off x="1238250" y="2857500"/>
+            <a:ext cx="88900" cy="0"/>
+          </a:xfrm>
+          <a:prstGeom prst="line">
+            <a:avLst/>
+          </a:prstGeom>
+          <a:ln w="15875">
+            <a:solidFill>
+              <a:srgbClr val="9A9EA6"/>
+            </a:solidFill>
+          </a:ln>
+        </p:spPr>
+        <p:style>
+          <a:lnRef idx="2">
+            <a:schemeClr val="accent1"/>
+          </a:lnRef>
+          <a:fillRef idx="0">
+            <a:schemeClr val="accent1"/>
+          </a:fillRef>
+          <a:effectRef idx="1">
+            <a:schemeClr val="accent1"/>
+          </a:effectRef>
+          <a:fontRef idx="minor">
+            <a:schemeClr val="tx1"/>
+          </a:fontRef>
+        </p:style>
+      </p:cxnSp>
+      <p:cxnSp>
+        <p:nvCxnSpPr>
+          <p:cNvPr id="18" name="motif-line-stop-3"/>
+          <p:cNvCxnSpPr/>
+          <p:nvPr/>
+        </p:nvCxnSpPr>
+        <p:spPr>
+          <a:xfrm>
+            <a:off x="1238250" y="3837940"/>
+            <a:ext cx="88900" cy="0"/>
+          </a:xfrm>
+          <a:prstGeom prst="line">
+            <a:avLst/>
+          </a:prstGeom>
+          <a:ln w="15875">
+            <a:solidFill>
+              <a:srgbClr val="9A9EA6"/>
+            </a:solidFill>
+          </a:ln>
+        </p:spPr>
+        <p:style>
+          <a:lnRef idx="2">
+            <a:schemeClr val="accent1"/>
+          </a:lnRef>
+          <a:fillRef idx="0">
+            <a:schemeClr val="accent1"/>
+          </a:fillRef>
+          <a:effectRef idx="1">
+            <a:schemeClr val="accent1"/>
+          </a:effectRef>
+          <a:fontRef idx="minor">
+            <a:schemeClr val="tx1"/>
+          </a:fontRef>
+        </p:style>
+      </p:cxnSp>
+      <p:cxnSp>
+        <p:nvCxnSpPr>
+          <p:cNvPr id="19" name="motif-line-stop-4"/>
+          <p:cNvCxnSpPr/>
+          <p:nvPr/>
+        </p:nvCxnSpPr>
+        <p:spPr>
+          <a:xfrm>
+            <a:off x="1238250" y="4533900"/>
+            <a:ext cx="88900" cy="0"/>
+          </a:xfrm>
+          <a:prstGeom prst="line">
+            <a:avLst/>
+          </a:prstGeom>
+          <a:ln w="15875">
+            <a:solidFill>
+              <a:srgbClr val="9A9EA6"/>
+            </a:solidFill>
+          </a:ln>
+        </p:spPr>
+        <p:style>
+          <a:lnRef idx="2">
+            <a:schemeClr val="accent1"/>
+          </a:lnRef>
+          <a:fillRef idx="0">
+            <a:schemeClr val="accent1"/>
+          </a:fillRef>
+          <a:effectRef idx="1">
+            <a:schemeClr val="accent1"/>
+          </a:effectRef>
+          <a:fontRef idx="minor">
+            <a:schemeClr val="tx1"/>
+          </a:fontRef>
+        </p:style>
+      </p:cxnSp>
+      <p:sp>
+        <p:nvSpPr>
+          <p:cNvPr id="20" name="TextBox 19"/>
           <p:cNvSpPr txBox="1"/>
           <p:nvPr/>
         </p:nvSpPr>
@@ -39750,7 +40494,7 @@
       </p:sp>
       <p:sp>
         <p:nvSpPr>
-          <p:cNvPr id="13" name="TextBox 12"/>
+          <p:cNvPr id="21" name="TextBox 20"/>
           <p:cNvSpPr txBox="1"/>
           <p:nvPr/>
         </p:nvSpPr>
@@ -39782,14 +40526,53 @@
                 </a:solidFill>
                 <a:latin typeface="IBM Plex Mono"/>
               </a:rPr>
-              <a:t>30 / 32</a:t>
+              <a:t>30 / 33</a:t>
             </a:r>
           </a:p>
         </p:txBody>
       </p:sp>
-      <p:cxnSp>
-        <p:nvCxnSpPr>
-          <p:cNvPr id="14" name="motif-line-tick-01"/>
+      <p:sp>
+        <p:nvSpPr>
+          <p:cNvPr id="22" name="TextBox 21"/>
+          <p:cNvSpPr txBox="1"/>
+          <p:nvPr/>
+        </p:nvSpPr>
+        <p:spPr>
+          <a:xfrm>
+            <a:off x="762000" y="5727700"/>
+            <a:ext cx="10668000" cy="165100"/>
+          </a:xfrm>
+          <a:prstGeom prst="rect">
+            <a:avLst/>
+          </a:prstGeom>
+          <a:noFill/>
+        </p:spPr>
+        <p:txBody>
+          <a:bodyPr wrap="square" lIns="0" rIns="0" tIns="0" bIns="0" anchor="t">
+            <a:spAutoFit/>
+          </a:bodyPr>
+          <a:lstStyle/>
+          <a:p>
+            <a:pPr algn="l">
+              <a:lnSpc>
+                <a:spcPct val="115000"/>
+              </a:lnSpc>
+            </a:pPr>
+            <a:r>
+              <a:rPr sz="900" b="0">
+                <a:solidFill>
+                  <a:srgbClr val="9A9EA6"/>
+                </a:solidFill>
+                <a:latin typeface="IBM Plex Mono"/>
+              </a:rPr>
+              <a:t>Source: data/interim/pages.csv, crawled from GitHub's servers on 9 October 2026. Google Search Central</a:t>
+            </a:r>
+          </a:p>
+        </p:txBody>
+      </p:sp>
+      <p:cxnSp>
+        <p:nvCxnSpPr>
+          <p:cNvPr id="23" name="motif-line-tick-01"/>
           <p:cNvCxnSpPr/>
           <p:nvPr/>
         </p:nvCxnSpPr>
@@ -39824,7 +40607,7 @@
       </p:cxnSp>
       <p:cxnSp>
         <p:nvCxnSpPr>
-          <p:cNvPr id="15" name="motif-line-tick-02"/>
+          <p:cNvPr id="24" name="motif-line-tick-02"/>
           <p:cNvCxnSpPr/>
           <p:nvPr/>
         </p:nvCxnSpPr>
@@ -39859,7 +40642,7 @@
       </p:cxnSp>
       <p:cxnSp>
         <p:nvCxnSpPr>
-          <p:cNvPr id="16" name="motif-line-tick-03"/>
+          <p:cNvPr id="25" name="motif-line-tick-03"/>
           <p:cNvCxnSpPr/>
           <p:nvPr/>
         </p:nvCxnSpPr>
@@ -39894,7 +40677,7 @@
       </p:cxnSp>
       <p:cxnSp>
         <p:nvCxnSpPr>
-          <p:cNvPr id="17" name="motif-line-tick-04"/>
+          <p:cNvPr id="26" name="motif-line-tick-04"/>
           <p:cNvCxnSpPr/>
           <p:nvPr/>
         </p:nvCxnSpPr>
@@ -39929,7 +40712,7 @@
       </p:cxnSp>
       <p:cxnSp>
         <p:nvCxnSpPr>
-          <p:cNvPr id="18" name="motif-line-tick-05"/>
+          <p:cNvPr id="27" name="motif-line-tick-05"/>
           <p:cNvCxnSpPr/>
           <p:nvPr/>
         </p:nvCxnSpPr>
@@ -39964,7 +40747,7 @@
       </p:cxnSp>
       <p:cxnSp>
         <p:nvCxnSpPr>
-          <p:cNvPr id="19" name="motif-line-tick-06"/>
+          <p:cNvPr id="28" name="motif-line-tick-06"/>
           <p:cNvCxnSpPr/>
           <p:nvPr/>
         </p:nvCxnSpPr>
@@ -39999,7 +40782,7 @@
       </p:cxnSp>
       <p:cxnSp>
         <p:nvCxnSpPr>
-          <p:cNvPr id="20" name="motif-line-tick-07"/>
+          <p:cNvPr id="29" name="motif-line-tick-07"/>
           <p:cNvCxnSpPr/>
           <p:nvPr/>
         </p:nvCxnSpPr>
@@ -40034,7 +40817,7 @@
       </p:cxnSp>
       <p:cxnSp>
         <p:nvCxnSpPr>
-          <p:cNvPr id="21" name="motif-line-tick-08"/>
+          <p:cNvPr id="30" name="motif-line-tick-08"/>
           <p:cNvCxnSpPr/>
           <p:nvPr/>
         </p:nvCxnSpPr>
@@ -40069,7 +40852,7 @@
       </p:cxnSp>
       <p:cxnSp>
         <p:nvCxnSpPr>
-          <p:cNvPr id="22" name="motif-line-tick-09"/>
+          <p:cNvPr id="31" name="motif-line-tick-09"/>
           <p:cNvCxnSpPr/>
           <p:nvPr/>
         </p:nvCxnSpPr>
@@ -40104,7 +40887,7 @@
       </p:cxnSp>
       <p:cxnSp>
         <p:nvCxnSpPr>
-          <p:cNvPr id="23" name="motif-line-tick-10"/>
+          <p:cNvPr id="32" name="motif-line-tick-10"/>
           <p:cNvCxnSpPr/>
           <p:nvPr/>
         </p:nvCxnSpPr>
@@ -40139,7 +40922,7 @@
       </p:cxnSp>
       <p:cxnSp>
         <p:nvCxnSpPr>
-          <p:cNvPr id="24" name="motif-line-tick-11"/>
+          <p:cNvPr id="33" name="motif-line-tick-11"/>
           <p:cNvCxnSpPr/>
           <p:nvPr/>
         </p:nvCxnSpPr>
@@ -40174,7 +40957,7 @@
       </p:cxnSp>
       <p:cxnSp>
         <p:nvCxnSpPr>
-          <p:cNvPr id="25" name="motif-line-tick-12"/>
+          <p:cNvPr id="34" name="motif-line-tick-12"/>
           <p:cNvCxnSpPr/>
           <p:nvPr/>
         </p:nvCxnSpPr>
@@ -40209,7 +40992,7 @@
       </p:cxnSp>
       <p:cxnSp>
         <p:nvCxnSpPr>
-          <p:cNvPr id="26" name="motif-line-tick-13"/>
+          <p:cNvPr id="35" name="motif-line-tick-13"/>
           <p:cNvCxnSpPr/>
           <p:nvPr/>
         </p:nvCxnSpPr>
@@ -40244,7 +41027,7 @@
       </p:cxnSp>
       <p:cxnSp>
         <p:nvCxnSpPr>
-          <p:cNvPr id="27" name="motif-line-tick-14"/>
+          <p:cNvPr id="36" name="motif-line-tick-14"/>
           <p:cNvCxnSpPr/>
           <p:nvPr/>
         </p:nvCxnSpPr>
@@ -40279,7 +41062,7 @@
       </p:cxnSp>
       <p:cxnSp>
         <p:nvCxnSpPr>
-          <p:cNvPr id="28" name="motif-line-tick-15"/>
+          <p:cNvPr id="37" name="motif-line-tick-15"/>
           <p:cNvCxnSpPr/>
           <p:nvPr/>
         </p:nvCxnSpPr>
@@ -40314,7 +41097,7 @@
       </p:cxnSp>
       <p:cxnSp>
         <p:nvCxnSpPr>
-          <p:cNvPr id="29" name="motif-line-tick-16"/>
+          <p:cNvPr id="38" name="motif-line-tick-16"/>
           <p:cNvCxnSpPr/>
           <p:nvPr/>
         </p:nvCxnSpPr>
@@ -40349,7 +41132,7 @@
       </p:cxnSp>
       <p:cxnSp>
         <p:nvCxnSpPr>
-          <p:cNvPr id="30" name="motif-line-tick-17"/>
+          <p:cNvPr id="39" name="motif-line-tick-17"/>
           <p:cNvCxnSpPr/>
           <p:nvPr/>
         </p:nvCxnSpPr>
@@ -40384,7 +41167,7 @@
       </p:cxnSp>
       <p:cxnSp>
         <p:nvCxnSpPr>
-          <p:cNvPr id="31" name="motif-line-tick-18"/>
+          <p:cNvPr id="40" name="motif-line-tick-18"/>
           <p:cNvCxnSpPr/>
           <p:nvPr/>
         </p:nvCxnSpPr>
@@ -40419,7 +41202,7 @@
       </p:cxnSp>
       <p:cxnSp>
         <p:nvCxnSpPr>
-          <p:cNvPr id="32" name="motif-line-tick-19"/>
+          <p:cNvPr id="41" name="motif-line-tick-19"/>
           <p:cNvCxnSpPr/>
           <p:nvPr/>
         </p:nvCxnSpPr>
@@ -40454,7 +41237,7 @@
       </p:cxnSp>
       <p:cxnSp>
         <p:nvCxnSpPr>
-          <p:cNvPr id="33" name="motif-line-tick-20"/>
+          <p:cNvPr id="42" name="motif-line-tick-20"/>
           <p:cNvCxnSpPr/>
           <p:nvPr/>
         </p:nvCxnSpPr>
@@ -40489,7 +41272,7 @@
       </p:cxnSp>
       <p:cxnSp>
         <p:nvCxnSpPr>
-          <p:cNvPr id="34" name="motif-line-tick-21"/>
+          <p:cNvPr id="43" name="motif-line-tick-21"/>
           <p:cNvCxnSpPr/>
           <p:nvPr/>
         </p:nvCxnSpPr>
@@ -40524,7 +41307,7 @@
       </p:cxnSp>
       <p:cxnSp>
         <p:nvCxnSpPr>
-          <p:cNvPr id="35" name="motif-line-tick-22"/>
+          <p:cNvPr id="44" name="motif-line-tick-22"/>
           <p:cNvCxnSpPr/>
           <p:nvPr/>
         </p:nvCxnSpPr>
@@ -40559,7 +41342,7 @@
       </p:cxnSp>
       <p:cxnSp>
         <p:nvCxnSpPr>
-          <p:cNvPr id="36" name="motif-line-tick-23"/>
+          <p:cNvPr id="45" name="motif-line-tick-23"/>
           <p:cNvCxnSpPr/>
           <p:nvPr/>
         </p:nvCxnSpPr>
@@ -40594,7 +41377,7 @@
       </p:cxnSp>
       <p:cxnSp>
         <p:nvCxnSpPr>
-          <p:cNvPr id="37" name="motif-line-tick-24"/>
+          <p:cNvPr id="46" name="motif-line-tick-24"/>
           <p:cNvCxnSpPr/>
           <p:nvPr/>
         </p:nvCxnSpPr>
@@ -40629,7 +41412,7 @@
       </p:cxnSp>
       <p:cxnSp>
         <p:nvCxnSpPr>
-          <p:cNvPr id="38" name="motif-line-tick-25"/>
+          <p:cNvPr id="47" name="motif-line-tick-25"/>
           <p:cNvCxnSpPr/>
           <p:nvPr/>
         </p:nvCxnSpPr>
@@ -40664,7 +41447,7 @@
       </p:cxnSp>
       <p:cxnSp>
         <p:nvCxnSpPr>
-          <p:cNvPr id="39" name="motif-line-tick-26"/>
+          <p:cNvPr id="48" name="motif-line-tick-26"/>
           <p:cNvCxnSpPr/>
           <p:nvPr/>
         </p:nvCxnSpPr>
@@ -40699,7 +41482,7 @@
       </p:cxnSp>
       <p:cxnSp>
         <p:nvCxnSpPr>
-          <p:cNvPr id="40" name="motif-line-tick-27"/>
+          <p:cNvPr id="49" name="motif-line-tick-27"/>
           <p:cNvCxnSpPr/>
           <p:nvPr/>
         </p:nvCxnSpPr>
@@ -40734,7 +41517,7 @@
       </p:cxnSp>
       <p:cxnSp>
         <p:nvCxnSpPr>
-          <p:cNvPr id="41" name="motif-line-tick-28"/>
+          <p:cNvPr id="50" name="motif-line-tick-28"/>
           <p:cNvCxnSpPr/>
           <p:nvPr/>
         </p:nvCxnSpPr>
@@ -40769,7 +41552,7 @@
       </p:cxnSp>
       <p:cxnSp>
         <p:nvCxnSpPr>
-          <p:cNvPr id="42" name="motif-line-tick-29"/>
+          <p:cNvPr id="51" name="motif-line-tick-29"/>
           <p:cNvCxnSpPr/>
           <p:nvPr/>
         </p:nvCxnSpPr>
@@ -40804,7 +41587,7 @@
       </p:cxnSp>
       <p:cxnSp>
         <p:nvCxnSpPr>
-          <p:cNvPr id="43" name="motif-line-tick-30"/>
+          <p:cNvPr id="52" name="motif-line-tick-30"/>
           <p:cNvCxnSpPr/>
           <p:nvPr/>
         </p:nvCxnSpPr>
@@ -40839,7 +41622,7 @@
       </p:cxnSp>
       <p:cxnSp>
         <p:nvCxnSpPr>
-          <p:cNvPr id="44" name="motif-line-tick-31"/>
+          <p:cNvPr id="53" name="motif-line-tick-31"/>
           <p:cNvCxnSpPr/>
           <p:nvPr/>
         </p:nvCxnSpPr>
@@ -40874,13 +41657,48 @@
       </p:cxnSp>
       <p:cxnSp>
         <p:nvCxnSpPr>
-          <p:cNvPr id="45" name="motif-line-tick-32"/>
+          <p:cNvPr id="54" name="motif-line-tick-32"/>
           <p:cNvCxnSpPr/>
           <p:nvPr/>
         </p:nvCxnSpPr>
         <p:spPr>
           <a:xfrm>
             <a:off x="11417300" y="6350000"/>
+            <a:ext cx="0" cy="76200"/>
+          </a:xfrm>
+          <a:prstGeom prst="line">
+            <a:avLst/>
+          </a:prstGeom>
+          <a:ln w="12700">
+            <a:solidFill>
+              <a:srgbClr val="3A3D43"/>
+            </a:solidFill>
+          </a:ln>
+        </p:spPr>
+        <p:style>
+          <a:lnRef idx="2">
+            <a:schemeClr val="accent1"/>
+          </a:lnRef>
+          <a:fillRef idx="0">
+            <a:schemeClr val="accent1"/>
+          </a:fillRef>
+          <a:effectRef idx="1">
+            <a:schemeClr val="accent1"/>
+          </a:effectRef>
+          <a:fontRef idx="minor">
+            <a:schemeClr val="tx1"/>
+          </a:fontRef>
+        </p:style>
+      </p:cxnSp>
+      <p:cxnSp>
+        <p:nvCxnSpPr>
+          <p:cNvPr id="55" name="motif-line-tick-33"/>
+          <p:cNvCxnSpPr/>
+          <p:nvPr/>
+        </p:nvCxnSpPr>
+        <p:spPr>
+          <a:xfrm>
+            <a:off x="11531600" y="6350000"/>
             <a:ext cx="0" cy="76200"/>
           </a:xfrm>
           <a:prstGeom prst="line">
@@ -41125,6 +41943,1645 @@
                 </a:solidFill>
                 <a:latin typeface="Work Sans"/>
               </a:rPr>
+              <a:t>These numbers come from one run</a:t>
+            </a:r>
+          </a:p>
+        </p:txBody>
+      </p:sp>
+      <p:sp>
+        <p:nvSpPr>
+          <p:cNvPr id="7" name="TextBox 6"/>
+          <p:cNvSpPr txBox="1"/>
+          <p:nvPr/>
+        </p:nvSpPr>
+        <p:spPr>
+          <a:xfrm>
+            <a:off x="1524000" y="2019300"/>
+            <a:ext cx="8636000" cy="604519"/>
+          </a:xfrm>
+          <a:prstGeom prst="rect">
+            <a:avLst/>
+          </a:prstGeom>
+          <a:noFill/>
+        </p:spPr>
+        <p:txBody>
+          <a:bodyPr wrap="square" lIns="0" rIns="0" tIns="0" bIns="0" anchor="t">
+            <a:spAutoFit/>
+          </a:bodyPr>
+          <a:lstStyle/>
+          <a:p>
+            <a:pPr algn="l">
+              <a:lnSpc>
+                <a:spcPct val="115000"/>
+              </a:lnSpc>
+            </a:pPr>
+            <a:r>
+              <a:rPr sz="1700" b="0">
+                <a:solidFill>
+                  <a:srgbClr val="ECE7DD"/>
+                </a:solidFill>
+                <a:latin typeface="Work Sans"/>
+              </a:rPr>
+              <a:t>SparkToro and Gumshoe ran 12 prompts nearly 3,000 times. The same brand list came back less than 1 in 100 times (Search Engine Land, January 2026).</a:t>
+            </a:r>
+          </a:p>
+        </p:txBody>
+      </p:sp>
+      <p:sp>
+        <p:nvSpPr>
+          <p:cNvPr id="8" name="TextBox 7"/>
+          <p:cNvSpPr txBox="1"/>
+          <p:nvPr/>
+        </p:nvSpPr>
+        <p:spPr>
+          <a:xfrm>
+            <a:off x="1524000" y="2763520"/>
+            <a:ext cx="8636000" cy="604519"/>
+          </a:xfrm>
+          <a:prstGeom prst="rect">
+            <a:avLst/>
+          </a:prstGeom>
+          <a:noFill/>
+        </p:spPr>
+        <p:txBody>
+          <a:bodyPr wrap="square" lIns="0" rIns="0" tIns="0" bIns="0" anchor="t">
+            <a:spAutoFit/>
+          </a:bodyPr>
+          <a:lstStyle/>
+          <a:p>
+            <a:pPr algn="l">
+              <a:lnSpc>
+                <a:spcPct val="115000"/>
+              </a:lnSpc>
+            </a:pPr>
+            <a:r>
+              <a:rPr sz="1700" b="0">
+                <a:solidFill>
+                  <a:srgbClr val="ECE7DD"/>
+                </a:solidFill>
+                <a:latin typeface="Work Sans"/>
+              </a:rPr>
+              <a:t>Read gaps of a few points here as ties: BCA and Bank Jago at 55%, SeaBank at 53%.</a:t>
+            </a:r>
+          </a:p>
+        </p:txBody>
+      </p:sp>
+      <p:cxnSp>
+        <p:nvCxnSpPr>
+          <p:cNvPr id="9" name="motif-line-rail"/>
+          <p:cNvCxnSpPr/>
+          <p:nvPr/>
+        </p:nvCxnSpPr>
+        <p:spPr>
+          <a:xfrm>
+            <a:off x="1282700" y="2056130"/>
+            <a:ext cx="0" cy="972820"/>
+          </a:xfrm>
+          <a:prstGeom prst="line">
+            <a:avLst/>
+          </a:prstGeom>
+          <a:ln w="12700">
+            <a:solidFill>
+              <a:srgbClr val="3A3D43"/>
+            </a:solidFill>
+          </a:ln>
+        </p:spPr>
+        <p:style>
+          <a:lnRef idx="2">
+            <a:schemeClr val="accent1"/>
+          </a:lnRef>
+          <a:fillRef idx="0">
+            <a:schemeClr val="accent1"/>
+          </a:fillRef>
+          <a:effectRef idx="1">
+            <a:schemeClr val="accent1"/>
+          </a:effectRef>
+          <a:fontRef idx="minor">
+            <a:schemeClr val="tx1"/>
+          </a:fontRef>
+        </p:style>
+      </p:cxnSp>
+      <p:cxnSp>
+        <p:nvCxnSpPr>
+          <p:cNvPr id="10" name="motif-line-stop-1"/>
+          <p:cNvCxnSpPr/>
+          <p:nvPr/>
+        </p:nvCxnSpPr>
+        <p:spPr>
+          <a:xfrm>
+            <a:off x="1238250" y="2170430"/>
+            <a:ext cx="88900" cy="0"/>
+          </a:xfrm>
+          <a:prstGeom prst="line">
+            <a:avLst/>
+          </a:prstGeom>
+          <a:ln w="15875">
+            <a:solidFill>
+              <a:srgbClr val="9A9EA6"/>
+            </a:solidFill>
+          </a:ln>
+        </p:spPr>
+        <p:style>
+          <a:lnRef idx="2">
+            <a:schemeClr val="accent1"/>
+          </a:lnRef>
+          <a:fillRef idx="0">
+            <a:schemeClr val="accent1"/>
+          </a:fillRef>
+          <a:effectRef idx="1">
+            <a:schemeClr val="accent1"/>
+          </a:effectRef>
+          <a:fontRef idx="minor">
+            <a:schemeClr val="tx1"/>
+          </a:fontRef>
+        </p:style>
+      </p:cxnSp>
+      <p:cxnSp>
+        <p:nvCxnSpPr>
+          <p:cNvPr id="11" name="motif-line-stop-2"/>
+          <p:cNvCxnSpPr/>
+          <p:nvPr/>
+        </p:nvCxnSpPr>
+        <p:spPr>
+          <a:xfrm>
+            <a:off x="1238250" y="2914650"/>
+            <a:ext cx="88900" cy="0"/>
+          </a:xfrm>
+          <a:prstGeom prst="line">
+            <a:avLst/>
+          </a:prstGeom>
+          <a:ln w="15875">
+            <a:solidFill>
+              <a:srgbClr val="9A9EA6"/>
+            </a:solidFill>
+          </a:ln>
+        </p:spPr>
+        <p:style>
+          <a:lnRef idx="2">
+            <a:schemeClr val="accent1"/>
+          </a:lnRef>
+          <a:fillRef idx="0">
+            <a:schemeClr val="accent1"/>
+          </a:fillRef>
+          <a:effectRef idx="1">
+            <a:schemeClr val="accent1"/>
+          </a:effectRef>
+          <a:fontRef idx="minor">
+            <a:schemeClr val="tx1"/>
+          </a:fontRef>
+        </p:style>
+      </p:cxnSp>
+      <p:sp>
+        <p:nvSpPr>
+          <p:cNvPr id="12" name="TextBox 11"/>
+          <p:cNvSpPr txBox="1"/>
+          <p:nvPr/>
+        </p:nvSpPr>
+        <p:spPr>
+          <a:xfrm>
+            <a:off x="762000" y="355600"/>
+            <a:ext cx="5715000" cy="195579"/>
+          </a:xfrm>
+          <a:prstGeom prst="rect">
+            <a:avLst/>
+          </a:prstGeom>
+          <a:noFill/>
+        </p:spPr>
+        <p:txBody>
+          <a:bodyPr wrap="square" lIns="0" rIns="0" tIns="0" bIns="0" anchor="t">
+            <a:spAutoFit/>
+          </a:bodyPr>
+          <a:lstStyle/>
+          <a:p>
+            <a:pPr algn="l">
+              <a:lnSpc>
+                <a:spcPct val="115000"/>
+              </a:lnSpc>
+            </a:pPr>
+            <a:r>
+              <a:rPr sz="1100" b="0">
+                <a:solidFill>
+                  <a:srgbClr val="9A9EA6"/>
+                </a:solidFill>
+                <a:latin typeface="Work Sans"/>
+              </a:rPr>
+              <a:t>Part IV: What it means</a:t>
+            </a:r>
+          </a:p>
+        </p:txBody>
+      </p:sp>
+      <p:sp>
+        <p:nvSpPr>
+          <p:cNvPr id="13" name="TextBox 12"/>
+          <p:cNvSpPr txBox="1"/>
+          <p:nvPr/>
+        </p:nvSpPr>
+        <p:spPr>
+          <a:xfrm>
+            <a:off x="6731000" y="6324600"/>
+            <a:ext cx="889000" cy="177800"/>
+          </a:xfrm>
+          <a:prstGeom prst="rect">
+            <a:avLst/>
+          </a:prstGeom>
+          <a:noFill/>
+        </p:spPr>
+        <p:txBody>
+          <a:bodyPr wrap="square" lIns="0" rIns="0" tIns="0" bIns="0" anchor="t">
+            <a:spAutoFit/>
+          </a:bodyPr>
+          <a:lstStyle/>
+          <a:p>
+            <a:pPr algn="r">
+              <a:lnSpc>
+                <a:spcPct val="115000"/>
+              </a:lnSpc>
+            </a:pPr>
+            <a:r>
+              <a:rPr sz="1000" b="0">
+                <a:solidFill>
+                  <a:srgbClr val="9A9EA6"/>
+                </a:solidFill>
+                <a:latin typeface="IBM Plex Mono"/>
+              </a:rPr>
+              <a:t>31 / 33</a:t>
+            </a:r>
+          </a:p>
+        </p:txBody>
+      </p:sp>
+      <p:cxnSp>
+        <p:nvCxnSpPr>
+          <p:cNvPr id="14" name="motif-line-tick-01"/>
+          <p:cNvCxnSpPr/>
+          <p:nvPr/>
+        </p:nvCxnSpPr>
+        <p:spPr>
+          <a:xfrm>
+            <a:off x="7874000" y="6350000"/>
+            <a:ext cx="0" cy="76200"/>
+          </a:xfrm>
+          <a:prstGeom prst="line">
+            <a:avLst/>
+          </a:prstGeom>
+          <a:ln w="12700">
+            <a:solidFill>
+              <a:srgbClr val="9A9EA6"/>
+            </a:solidFill>
+          </a:ln>
+        </p:spPr>
+        <p:style>
+          <a:lnRef idx="2">
+            <a:schemeClr val="accent1"/>
+          </a:lnRef>
+          <a:fillRef idx="0">
+            <a:schemeClr val="accent1"/>
+          </a:fillRef>
+          <a:effectRef idx="1">
+            <a:schemeClr val="accent1"/>
+          </a:effectRef>
+          <a:fontRef idx="minor">
+            <a:schemeClr val="tx1"/>
+          </a:fontRef>
+        </p:style>
+      </p:cxnSp>
+      <p:cxnSp>
+        <p:nvCxnSpPr>
+          <p:cNvPr id="15" name="motif-line-tick-02"/>
+          <p:cNvCxnSpPr/>
+          <p:nvPr/>
+        </p:nvCxnSpPr>
+        <p:spPr>
+          <a:xfrm>
+            <a:off x="7988300" y="6350000"/>
+            <a:ext cx="0" cy="76200"/>
+          </a:xfrm>
+          <a:prstGeom prst="line">
+            <a:avLst/>
+          </a:prstGeom>
+          <a:ln w="12700">
+            <a:solidFill>
+              <a:srgbClr val="9A9EA6"/>
+            </a:solidFill>
+          </a:ln>
+        </p:spPr>
+        <p:style>
+          <a:lnRef idx="2">
+            <a:schemeClr val="accent1"/>
+          </a:lnRef>
+          <a:fillRef idx="0">
+            <a:schemeClr val="accent1"/>
+          </a:fillRef>
+          <a:effectRef idx="1">
+            <a:schemeClr val="accent1"/>
+          </a:effectRef>
+          <a:fontRef idx="minor">
+            <a:schemeClr val="tx1"/>
+          </a:fontRef>
+        </p:style>
+      </p:cxnSp>
+      <p:cxnSp>
+        <p:nvCxnSpPr>
+          <p:cNvPr id="16" name="motif-line-tick-03"/>
+          <p:cNvCxnSpPr/>
+          <p:nvPr/>
+        </p:nvCxnSpPr>
+        <p:spPr>
+          <a:xfrm>
+            <a:off x="8102600" y="6350000"/>
+            <a:ext cx="0" cy="76200"/>
+          </a:xfrm>
+          <a:prstGeom prst="line">
+            <a:avLst/>
+          </a:prstGeom>
+          <a:ln w="12700">
+            <a:solidFill>
+              <a:srgbClr val="9A9EA6"/>
+            </a:solidFill>
+          </a:ln>
+        </p:spPr>
+        <p:style>
+          <a:lnRef idx="2">
+            <a:schemeClr val="accent1"/>
+          </a:lnRef>
+          <a:fillRef idx="0">
+            <a:schemeClr val="accent1"/>
+          </a:fillRef>
+          <a:effectRef idx="1">
+            <a:schemeClr val="accent1"/>
+          </a:effectRef>
+          <a:fontRef idx="minor">
+            <a:schemeClr val="tx1"/>
+          </a:fontRef>
+        </p:style>
+      </p:cxnSp>
+      <p:cxnSp>
+        <p:nvCxnSpPr>
+          <p:cNvPr id="17" name="motif-line-tick-04"/>
+          <p:cNvCxnSpPr/>
+          <p:nvPr/>
+        </p:nvCxnSpPr>
+        <p:spPr>
+          <a:xfrm>
+            <a:off x="8216900" y="6350000"/>
+            <a:ext cx="0" cy="76200"/>
+          </a:xfrm>
+          <a:prstGeom prst="line">
+            <a:avLst/>
+          </a:prstGeom>
+          <a:ln w="12700">
+            <a:solidFill>
+              <a:srgbClr val="9A9EA6"/>
+            </a:solidFill>
+          </a:ln>
+        </p:spPr>
+        <p:style>
+          <a:lnRef idx="2">
+            <a:schemeClr val="accent1"/>
+          </a:lnRef>
+          <a:fillRef idx="0">
+            <a:schemeClr val="accent1"/>
+          </a:fillRef>
+          <a:effectRef idx="1">
+            <a:schemeClr val="accent1"/>
+          </a:effectRef>
+          <a:fontRef idx="minor">
+            <a:schemeClr val="tx1"/>
+          </a:fontRef>
+        </p:style>
+      </p:cxnSp>
+      <p:cxnSp>
+        <p:nvCxnSpPr>
+          <p:cNvPr id="18" name="motif-line-tick-05"/>
+          <p:cNvCxnSpPr/>
+          <p:nvPr/>
+        </p:nvCxnSpPr>
+        <p:spPr>
+          <a:xfrm>
+            <a:off x="8331200" y="6350000"/>
+            <a:ext cx="0" cy="76200"/>
+          </a:xfrm>
+          <a:prstGeom prst="line">
+            <a:avLst/>
+          </a:prstGeom>
+          <a:ln w="12700">
+            <a:solidFill>
+              <a:srgbClr val="9A9EA6"/>
+            </a:solidFill>
+          </a:ln>
+        </p:spPr>
+        <p:style>
+          <a:lnRef idx="2">
+            <a:schemeClr val="accent1"/>
+          </a:lnRef>
+          <a:fillRef idx="0">
+            <a:schemeClr val="accent1"/>
+          </a:fillRef>
+          <a:effectRef idx="1">
+            <a:schemeClr val="accent1"/>
+          </a:effectRef>
+          <a:fontRef idx="minor">
+            <a:schemeClr val="tx1"/>
+          </a:fontRef>
+        </p:style>
+      </p:cxnSp>
+      <p:cxnSp>
+        <p:nvCxnSpPr>
+          <p:cNvPr id="19" name="motif-line-tick-06"/>
+          <p:cNvCxnSpPr/>
+          <p:nvPr/>
+        </p:nvCxnSpPr>
+        <p:spPr>
+          <a:xfrm>
+            <a:off x="8445500" y="6350000"/>
+            <a:ext cx="0" cy="76200"/>
+          </a:xfrm>
+          <a:prstGeom prst="line">
+            <a:avLst/>
+          </a:prstGeom>
+          <a:ln w="12700">
+            <a:solidFill>
+              <a:srgbClr val="9A9EA6"/>
+            </a:solidFill>
+          </a:ln>
+        </p:spPr>
+        <p:style>
+          <a:lnRef idx="2">
+            <a:schemeClr val="accent1"/>
+          </a:lnRef>
+          <a:fillRef idx="0">
+            <a:schemeClr val="accent1"/>
+          </a:fillRef>
+          <a:effectRef idx="1">
+            <a:schemeClr val="accent1"/>
+          </a:effectRef>
+          <a:fontRef idx="minor">
+            <a:schemeClr val="tx1"/>
+          </a:fontRef>
+        </p:style>
+      </p:cxnSp>
+      <p:cxnSp>
+        <p:nvCxnSpPr>
+          <p:cNvPr id="20" name="motif-line-tick-07"/>
+          <p:cNvCxnSpPr/>
+          <p:nvPr/>
+        </p:nvCxnSpPr>
+        <p:spPr>
+          <a:xfrm>
+            <a:off x="8559800" y="6350000"/>
+            <a:ext cx="0" cy="76200"/>
+          </a:xfrm>
+          <a:prstGeom prst="line">
+            <a:avLst/>
+          </a:prstGeom>
+          <a:ln w="12700">
+            <a:solidFill>
+              <a:srgbClr val="9A9EA6"/>
+            </a:solidFill>
+          </a:ln>
+        </p:spPr>
+        <p:style>
+          <a:lnRef idx="2">
+            <a:schemeClr val="accent1"/>
+          </a:lnRef>
+          <a:fillRef idx="0">
+            <a:schemeClr val="accent1"/>
+          </a:fillRef>
+          <a:effectRef idx="1">
+            <a:schemeClr val="accent1"/>
+          </a:effectRef>
+          <a:fontRef idx="minor">
+            <a:schemeClr val="tx1"/>
+          </a:fontRef>
+        </p:style>
+      </p:cxnSp>
+      <p:cxnSp>
+        <p:nvCxnSpPr>
+          <p:cNvPr id="21" name="motif-line-tick-08"/>
+          <p:cNvCxnSpPr/>
+          <p:nvPr/>
+        </p:nvCxnSpPr>
+        <p:spPr>
+          <a:xfrm>
+            <a:off x="8674100" y="6350000"/>
+            <a:ext cx="0" cy="76200"/>
+          </a:xfrm>
+          <a:prstGeom prst="line">
+            <a:avLst/>
+          </a:prstGeom>
+          <a:ln w="12700">
+            <a:solidFill>
+              <a:srgbClr val="9A9EA6"/>
+            </a:solidFill>
+          </a:ln>
+        </p:spPr>
+        <p:style>
+          <a:lnRef idx="2">
+            <a:schemeClr val="accent1"/>
+          </a:lnRef>
+          <a:fillRef idx="0">
+            <a:schemeClr val="accent1"/>
+          </a:fillRef>
+          <a:effectRef idx="1">
+            <a:schemeClr val="accent1"/>
+          </a:effectRef>
+          <a:fontRef idx="minor">
+            <a:schemeClr val="tx1"/>
+          </a:fontRef>
+        </p:style>
+      </p:cxnSp>
+      <p:cxnSp>
+        <p:nvCxnSpPr>
+          <p:cNvPr id="22" name="motif-line-tick-09"/>
+          <p:cNvCxnSpPr/>
+          <p:nvPr/>
+        </p:nvCxnSpPr>
+        <p:spPr>
+          <a:xfrm>
+            <a:off x="8788400" y="6350000"/>
+            <a:ext cx="0" cy="76200"/>
+          </a:xfrm>
+          <a:prstGeom prst="line">
+            <a:avLst/>
+          </a:prstGeom>
+          <a:ln w="12700">
+            <a:solidFill>
+              <a:srgbClr val="9A9EA6"/>
+            </a:solidFill>
+          </a:ln>
+        </p:spPr>
+        <p:style>
+          <a:lnRef idx="2">
+            <a:schemeClr val="accent1"/>
+          </a:lnRef>
+          <a:fillRef idx="0">
+            <a:schemeClr val="accent1"/>
+          </a:fillRef>
+          <a:effectRef idx="1">
+            <a:schemeClr val="accent1"/>
+          </a:effectRef>
+          <a:fontRef idx="minor">
+            <a:schemeClr val="tx1"/>
+          </a:fontRef>
+        </p:style>
+      </p:cxnSp>
+      <p:cxnSp>
+        <p:nvCxnSpPr>
+          <p:cNvPr id="23" name="motif-line-tick-10"/>
+          <p:cNvCxnSpPr/>
+          <p:nvPr/>
+        </p:nvCxnSpPr>
+        <p:spPr>
+          <a:xfrm>
+            <a:off x="8902700" y="6350000"/>
+            <a:ext cx="0" cy="76200"/>
+          </a:xfrm>
+          <a:prstGeom prst="line">
+            <a:avLst/>
+          </a:prstGeom>
+          <a:ln w="12700">
+            <a:solidFill>
+              <a:srgbClr val="9A9EA6"/>
+            </a:solidFill>
+          </a:ln>
+        </p:spPr>
+        <p:style>
+          <a:lnRef idx="2">
+            <a:schemeClr val="accent1"/>
+          </a:lnRef>
+          <a:fillRef idx="0">
+            <a:schemeClr val="accent1"/>
+          </a:fillRef>
+          <a:effectRef idx="1">
+            <a:schemeClr val="accent1"/>
+          </a:effectRef>
+          <a:fontRef idx="minor">
+            <a:schemeClr val="tx1"/>
+          </a:fontRef>
+        </p:style>
+      </p:cxnSp>
+      <p:cxnSp>
+        <p:nvCxnSpPr>
+          <p:cNvPr id="24" name="motif-line-tick-11"/>
+          <p:cNvCxnSpPr/>
+          <p:nvPr/>
+        </p:nvCxnSpPr>
+        <p:spPr>
+          <a:xfrm>
+            <a:off x="9017000" y="6350000"/>
+            <a:ext cx="0" cy="76200"/>
+          </a:xfrm>
+          <a:prstGeom prst="line">
+            <a:avLst/>
+          </a:prstGeom>
+          <a:ln w="12700">
+            <a:solidFill>
+              <a:srgbClr val="9A9EA6"/>
+            </a:solidFill>
+          </a:ln>
+        </p:spPr>
+        <p:style>
+          <a:lnRef idx="2">
+            <a:schemeClr val="accent1"/>
+          </a:lnRef>
+          <a:fillRef idx="0">
+            <a:schemeClr val="accent1"/>
+          </a:fillRef>
+          <a:effectRef idx="1">
+            <a:schemeClr val="accent1"/>
+          </a:effectRef>
+          <a:fontRef idx="minor">
+            <a:schemeClr val="tx1"/>
+          </a:fontRef>
+        </p:style>
+      </p:cxnSp>
+      <p:cxnSp>
+        <p:nvCxnSpPr>
+          <p:cNvPr id="25" name="motif-line-tick-12"/>
+          <p:cNvCxnSpPr/>
+          <p:nvPr/>
+        </p:nvCxnSpPr>
+        <p:spPr>
+          <a:xfrm>
+            <a:off x="9131300" y="6350000"/>
+            <a:ext cx="0" cy="76200"/>
+          </a:xfrm>
+          <a:prstGeom prst="line">
+            <a:avLst/>
+          </a:prstGeom>
+          <a:ln w="12700">
+            <a:solidFill>
+              <a:srgbClr val="9A9EA6"/>
+            </a:solidFill>
+          </a:ln>
+        </p:spPr>
+        <p:style>
+          <a:lnRef idx="2">
+            <a:schemeClr val="accent1"/>
+          </a:lnRef>
+          <a:fillRef idx="0">
+            <a:schemeClr val="accent1"/>
+          </a:fillRef>
+          <a:effectRef idx="1">
+            <a:schemeClr val="accent1"/>
+          </a:effectRef>
+          <a:fontRef idx="minor">
+            <a:schemeClr val="tx1"/>
+          </a:fontRef>
+        </p:style>
+      </p:cxnSp>
+      <p:cxnSp>
+        <p:nvCxnSpPr>
+          <p:cNvPr id="26" name="motif-line-tick-13"/>
+          <p:cNvCxnSpPr/>
+          <p:nvPr/>
+        </p:nvCxnSpPr>
+        <p:spPr>
+          <a:xfrm>
+            <a:off x="9245600" y="6350000"/>
+            <a:ext cx="0" cy="76200"/>
+          </a:xfrm>
+          <a:prstGeom prst="line">
+            <a:avLst/>
+          </a:prstGeom>
+          <a:ln w="12700">
+            <a:solidFill>
+              <a:srgbClr val="9A9EA6"/>
+            </a:solidFill>
+          </a:ln>
+        </p:spPr>
+        <p:style>
+          <a:lnRef idx="2">
+            <a:schemeClr val="accent1"/>
+          </a:lnRef>
+          <a:fillRef idx="0">
+            <a:schemeClr val="accent1"/>
+          </a:fillRef>
+          <a:effectRef idx="1">
+            <a:schemeClr val="accent1"/>
+          </a:effectRef>
+          <a:fontRef idx="minor">
+            <a:schemeClr val="tx1"/>
+          </a:fontRef>
+        </p:style>
+      </p:cxnSp>
+      <p:cxnSp>
+        <p:nvCxnSpPr>
+          <p:cNvPr id="27" name="motif-line-tick-14"/>
+          <p:cNvCxnSpPr/>
+          <p:nvPr/>
+        </p:nvCxnSpPr>
+        <p:spPr>
+          <a:xfrm>
+            <a:off x="9359900" y="6350000"/>
+            <a:ext cx="0" cy="76200"/>
+          </a:xfrm>
+          <a:prstGeom prst="line">
+            <a:avLst/>
+          </a:prstGeom>
+          <a:ln w="12700">
+            <a:solidFill>
+              <a:srgbClr val="9A9EA6"/>
+            </a:solidFill>
+          </a:ln>
+        </p:spPr>
+        <p:style>
+          <a:lnRef idx="2">
+            <a:schemeClr val="accent1"/>
+          </a:lnRef>
+          <a:fillRef idx="0">
+            <a:schemeClr val="accent1"/>
+          </a:fillRef>
+          <a:effectRef idx="1">
+            <a:schemeClr val="accent1"/>
+          </a:effectRef>
+          <a:fontRef idx="minor">
+            <a:schemeClr val="tx1"/>
+          </a:fontRef>
+        </p:style>
+      </p:cxnSp>
+      <p:cxnSp>
+        <p:nvCxnSpPr>
+          <p:cNvPr id="28" name="motif-line-tick-15"/>
+          <p:cNvCxnSpPr/>
+          <p:nvPr/>
+        </p:nvCxnSpPr>
+        <p:spPr>
+          <a:xfrm>
+            <a:off x="9474200" y="6350000"/>
+            <a:ext cx="0" cy="76200"/>
+          </a:xfrm>
+          <a:prstGeom prst="line">
+            <a:avLst/>
+          </a:prstGeom>
+          <a:ln w="12700">
+            <a:solidFill>
+              <a:srgbClr val="9A9EA6"/>
+            </a:solidFill>
+          </a:ln>
+        </p:spPr>
+        <p:style>
+          <a:lnRef idx="2">
+            <a:schemeClr val="accent1"/>
+          </a:lnRef>
+          <a:fillRef idx="0">
+            <a:schemeClr val="accent1"/>
+          </a:fillRef>
+          <a:effectRef idx="1">
+            <a:schemeClr val="accent1"/>
+          </a:effectRef>
+          <a:fontRef idx="minor">
+            <a:schemeClr val="tx1"/>
+          </a:fontRef>
+        </p:style>
+      </p:cxnSp>
+      <p:cxnSp>
+        <p:nvCxnSpPr>
+          <p:cNvPr id="29" name="motif-line-tick-16"/>
+          <p:cNvCxnSpPr/>
+          <p:nvPr/>
+        </p:nvCxnSpPr>
+        <p:spPr>
+          <a:xfrm>
+            <a:off x="9588500" y="6350000"/>
+            <a:ext cx="0" cy="76200"/>
+          </a:xfrm>
+          <a:prstGeom prst="line">
+            <a:avLst/>
+          </a:prstGeom>
+          <a:ln w="12700">
+            <a:solidFill>
+              <a:srgbClr val="9A9EA6"/>
+            </a:solidFill>
+          </a:ln>
+        </p:spPr>
+        <p:style>
+          <a:lnRef idx="2">
+            <a:schemeClr val="accent1"/>
+          </a:lnRef>
+          <a:fillRef idx="0">
+            <a:schemeClr val="accent1"/>
+          </a:fillRef>
+          <a:effectRef idx="1">
+            <a:schemeClr val="accent1"/>
+          </a:effectRef>
+          <a:fontRef idx="minor">
+            <a:schemeClr val="tx1"/>
+          </a:fontRef>
+        </p:style>
+      </p:cxnSp>
+      <p:cxnSp>
+        <p:nvCxnSpPr>
+          <p:cNvPr id="30" name="motif-line-tick-17"/>
+          <p:cNvCxnSpPr/>
+          <p:nvPr/>
+        </p:nvCxnSpPr>
+        <p:spPr>
+          <a:xfrm>
+            <a:off x="9702800" y="6350000"/>
+            <a:ext cx="0" cy="76200"/>
+          </a:xfrm>
+          <a:prstGeom prst="line">
+            <a:avLst/>
+          </a:prstGeom>
+          <a:ln w="12700">
+            <a:solidFill>
+              <a:srgbClr val="9A9EA6"/>
+            </a:solidFill>
+          </a:ln>
+        </p:spPr>
+        <p:style>
+          <a:lnRef idx="2">
+            <a:schemeClr val="accent1"/>
+          </a:lnRef>
+          <a:fillRef idx="0">
+            <a:schemeClr val="accent1"/>
+          </a:fillRef>
+          <a:effectRef idx="1">
+            <a:schemeClr val="accent1"/>
+          </a:effectRef>
+          <a:fontRef idx="minor">
+            <a:schemeClr val="tx1"/>
+          </a:fontRef>
+        </p:style>
+      </p:cxnSp>
+      <p:cxnSp>
+        <p:nvCxnSpPr>
+          <p:cNvPr id="31" name="motif-line-tick-18"/>
+          <p:cNvCxnSpPr/>
+          <p:nvPr/>
+        </p:nvCxnSpPr>
+        <p:spPr>
+          <a:xfrm>
+            <a:off x="9817100" y="6350000"/>
+            <a:ext cx="0" cy="76200"/>
+          </a:xfrm>
+          <a:prstGeom prst="line">
+            <a:avLst/>
+          </a:prstGeom>
+          <a:ln w="12700">
+            <a:solidFill>
+              <a:srgbClr val="9A9EA6"/>
+            </a:solidFill>
+          </a:ln>
+        </p:spPr>
+        <p:style>
+          <a:lnRef idx="2">
+            <a:schemeClr val="accent1"/>
+          </a:lnRef>
+          <a:fillRef idx="0">
+            <a:schemeClr val="accent1"/>
+          </a:fillRef>
+          <a:effectRef idx="1">
+            <a:schemeClr val="accent1"/>
+          </a:effectRef>
+          <a:fontRef idx="minor">
+            <a:schemeClr val="tx1"/>
+          </a:fontRef>
+        </p:style>
+      </p:cxnSp>
+      <p:cxnSp>
+        <p:nvCxnSpPr>
+          <p:cNvPr id="32" name="motif-line-tick-19"/>
+          <p:cNvCxnSpPr/>
+          <p:nvPr/>
+        </p:nvCxnSpPr>
+        <p:spPr>
+          <a:xfrm>
+            <a:off x="9931400" y="6350000"/>
+            <a:ext cx="0" cy="76200"/>
+          </a:xfrm>
+          <a:prstGeom prst="line">
+            <a:avLst/>
+          </a:prstGeom>
+          <a:ln w="12700">
+            <a:solidFill>
+              <a:srgbClr val="9A9EA6"/>
+            </a:solidFill>
+          </a:ln>
+        </p:spPr>
+        <p:style>
+          <a:lnRef idx="2">
+            <a:schemeClr val="accent1"/>
+          </a:lnRef>
+          <a:fillRef idx="0">
+            <a:schemeClr val="accent1"/>
+          </a:fillRef>
+          <a:effectRef idx="1">
+            <a:schemeClr val="accent1"/>
+          </a:effectRef>
+          <a:fontRef idx="minor">
+            <a:schemeClr val="tx1"/>
+          </a:fontRef>
+        </p:style>
+      </p:cxnSp>
+      <p:cxnSp>
+        <p:nvCxnSpPr>
+          <p:cNvPr id="33" name="motif-line-tick-20"/>
+          <p:cNvCxnSpPr/>
+          <p:nvPr/>
+        </p:nvCxnSpPr>
+        <p:spPr>
+          <a:xfrm>
+            <a:off x="10045700" y="6350000"/>
+            <a:ext cx="0" cy="76200"/>
+          </a:xfrm>
+          <a:prstGeom prst="line">
+            <a:avLst/>
+          </a:prstGeom>
+          <a:ln w="12700">
+            <a:solidFill>
+              <a:srgbClr val="9A9EA6"/>
+            </a:solidFill>
+          </a:ln>
+        </p:spPr>
+        <p:style>
+          <a:lnRef idx="2">
+            <a:schemeClr val="accent1"/>
+          </a:lnRef>
+          <a:fillRef idx="0">
+            <a:schemeClr val="accent1"/>
+          </a:fillRef>
+          <a:effectRef idx="1">
+            <a:schemeClr val="accent1"/>
+          </a:effectRef>
+          <a:fontRef idx="minor">
+            <a:schemeClr val="tx1"/>
+          </a:fontRef>
+        </p:style>
+      </p:cxnSp>
+      <p:cxnSp>
+        <p:nvCxnSpPr>
+          <p:cNvPr id="34" name="motif-line-tick-21"/>
+          <p:cNvCxnSpPr/>
+          <p:nvPr/>
+        </p:nvCxnSpPr>
+        <p:spPr>
+          <a:xfrm>
+            <a:off x="10160000" y="6350000"/>
+            <a:ext cx="0" cy="76200"/>
+          </a:xfrm>
+          <a:prstGeom prst="line">
+            <a:avLst/>
+          </a:prstGeom>
+          <a:ln w="12700">
+            <a:solidFill>
+              <a:srgbClr val="9A9EA6"/>
+            </a:solidFill>
+          </a:ln>
+        </p:spPr>
+        <p:style>
+          <a:lnRef idx="2">
+            <a:schemeClr val="accent1"/>
+          </a:lnRef>
+          <a:fillRef idx="0">
+            <a:schemeClr val="accent1"/>
+          </a:fillRef>
+          <a:effectRef idx="1">
+            <a:schemeClr val="accent1"/>
+          </a:effectRef>
+          <a:fontRef idx="minor">
+            <a:schemeClr val="tx1"/>
+          </a:fontRef>
+        </p:style>
+      </p:cxnSp>
+      <p:cxnSp>
+        <p:nvCxnSpPr>
+          <p:cNvPr id="35" name="motif-line-tick-22"/>
+          <p:cNvCxnSpPr/>
+          <p:nvPr/>
+        </p:nvCxnSpPr>
+        <p:spPr>
+          <a:xfrm>
+            <a:off x="10274300" y="6350000"/>
+            <a:ext cx="0" cy="76200"/>
+          </a:xfrm>
+          <a:prstGeom prst="line">
+            <a:avLst/>
+          </a:prstGeom>
+          <a:ln w="12700">
+            <a:solidFill>
+              <a:srgbClr val="9A9EA6"/>
+            </a:solidFill>
+          </a:ln>
+        </p:spPr>
+        <p:style>
+          <a:lnRef idx="2">
+            <a:schemeClr val="accent1"/>
+          </a:lnRef>
+          <a:fillRef idx="0">
+            <a:schemeClr val="accent1"/>
+          </a:fillRef>
+          <a:effectRef idx="1">
+            <a:schemeClr val="accent1"/>
+          </a:effectRef>
+          <a:fontRef idx="minor">
+            <a:schemeClr val="tx1"/>
+          </a:fontRef>
+        </p:style>
+      </p:cxnSp>
+      <p:cxnSp>
+        <p:nvCxnSpPr>
+          <p:cNvPr id="36" name="motif-line-tick-23"/>
+          <p:cNvCxnSpPr/>
+          <p:nvPr/>
+        </p:nvCxnSpPr>
+        <p:spPr>
+          <a:xfrm>
+            <a:off x="10388600" y="6350000"/>
+            <a:ext cx="0" cy="76200"/>
+          </a:xfrm>
+          <a:prstGeom prst="line">
+            <a:avLst/>
+          </a:prstGeom>
+          <a:ln w="12700">
+            <a:solidFill>
+              <a:srgbClr val="9A9EA6"/>
+            </a:solidFill>
+          </a:ln>
+        </p:spPr>
+        <p:style>
+          <a:lnRef idx="2">
+            <a:schemeClr val="accent1"/>
+          </a:lnRef>
+          <a:fillRef idx="0">
+            <a:schemeClr val="accent1"/>
+          </a:fillRef>
+          <a:effectRef idx="1">
+            <a:schemeClr val="accent1"/>
+          </a:effectRef>
+          <a:fontRef idx="minor">
+            <a:schemeClr val="tx1"/>
+          </a:fontRef>
+        </p:style>
+      </p:cxnSp>
+      <p:cxnSp>
+        <p:nvCxnSpPr>
+          <p:cNvPr id="37" name="motif-line-tick-24"/>
+          <p:cNvCxnSpPr/>
+          <p:nvPr/>
+        </p:nvCxnSpPr>
+        <p:spPr>
+          <a:xfrm>
+            <a:off x="10502900" y="6350000"/>
+            <a:ext cx="0" cy="76200"/>
+          </a:xfrm>
+          <a:prstGeom prst="line">
+            <a:avLst/>
+          </a:prstGeom>
+          <a:ln w="12700">
+            <a:solidFill>
+              <a:srgbClr val="9A9EA6"/>
+            </a:solidFill>
+          </a:ln>
+        </p:spPr>
+        <p:style>
+          <a:lnRef idx="2">
+            <a:schemeClr val="accent1"/>
+          </a:lnRef>
+          <a:fillRef idx="0">
+            <a:schemeClr val="accent1"/>
+          </a:fillRef>
+          <a:effectRef idx="1">
+            <a:schemeClr val="accent1"/>
+          </a:effectRef>
+          <a:fontRef idx="minor">
+            <a:schemeClr val="tx1"/>
+          </a:fontRef>
+        </p:style>
+      </p:cxnSp>
+      <p:cxnSp>
+        <p:nvCxnSpPr>
+          <p:cNvPr id="38" name="motif-line-tick-25"/>
+          <p:cNvCxnSpPr/>
+          <p:nvPr/>
+        </p:nvCxnSpPr>
+        <p:spPr>
+          <a:xfrm>
+            <a:off x="10617200" y="6350000"/>
+            <a:ext cx="0" cy="76200"/>
+          </a:xfrm>
+          <a:prstGeom prst="line">
+            <a:avLst/>
+          </a:prstGeom>
+          <a:ln w="12700">
+            <a:solidFill>
+              <a:srgbClr val="9A9EA6"/>
+            </a:solidFill>
+          </a:ln>
+        </p:spPr>
+        <p:style>
+          <a:lnRef idx="2">
+            <a:schemeClr val="accent1"/>
+          </a:lnRef>
+          <a:fillRef idx="0">
+            <a:schemeClr val="accent1"/>
+          </a:fillRef>
+          <a:effectRef idx="1">
+            <a:schemeClr val="accent1"/>
+          </a:effectRef>
+          <a:fontRef idx="minor">
+            <a:schemeClr val="tx1"/>
+          </a:fontRef>
+        </p:style>
+      </p:cxnSp>
+      <p:cxnSp>
+        <p:nvCxnSpPr>
+          <p:cNvPr id="39" name="motif-line-tick-26"/>
+          <p:cNvCxnSpPr/>
+          <p:nvPr/>
+        </p:nvCxnSpPr>
+        <p:spPr>
+          <a:xfrm>
+            <a:off x="10731500" y="6350000"/>
+            <a:ext cx="0" cy="76200"/>
+          </a:xfrm>
+          <a:prstGeom prst="line">
+            <a:avLst/>
+          </a:prstGeom>
+          <a:ln w="12700">
+            <a:solidFill>
+              <a:srgbClr val="9A9EA6"/>
+            </a:solidFill>
+          </a:ln>
+        </p:spPr>
+        <p:style>
+          <a:lnRef idx="2">
+            <a:schemeClr val="accent1"/>
+          </a:lnRef>
+          <a:fillRef idx="0">
+            <a:schemeClr val="accent1"/>
+          </a:fillRef>
+          <a:effectRef idx="1">
+            <a:schemeClr val="accent1"/>
+          </a:effectRef>
+          <a:fontRef idx="minor">
+            <a:schemeClr val="tx1"/>
+          </a:fontRef>
+        </p:style>
+      </p:cxnSp>
+      <p:cxnSp>
+        <p:nvCxnSpPr>
+          <p:cNvPr id="40" name="motif-line-tick-27"/>
+          <p:cNvCxnSpPr/>
+          <p:nvPr/>
+        </p:nvCxnSpPr>
+        <p:spPr>
+          <a:xfrm>
+            <a:off x="10845800" y="6350000"/>
+            <a:ext cx="0" cy="76200"/>
+          </a:xfrm>
+          <a:prstGeom prst="line">
+            <a:avLst/>
+          </a:prstGeom>
+          <a:ln w="12700">
+            <a:solidFill>
+              <a:srgbClr val="9A9EA6"/>
+            </a:solidFill>
+          </a:ln>
+        </p:spPr>
+        <p:style>
+          <a:lnRef idx="2">
+            <a:schemeClr val="accent1"/>
+          </a:lnRef>
+          <a:fillRef idx="0">
+            <a:schemeClr val="accent1"/>
+          </a:fillRef>
+          <a:effectRef idx="1">
+            <a:schemeClr val="accent1"/>
+          </a:effectRef>
+          <a:fontRef idx="minor">
+            <a:schemeClr val="tx1"/>
+          </a:fontRef>
+        </p:style>
+      </p:cxnSp>
+      <p:cxnSp>
+        <p:nvCxnSpPr>
+          <p:cNvPr id="41" name="motif-line-tick-28"/>
+          <p:cNvCxnSpPr/>
+          <p:nvPr/>
+        </p:nvCxnSpPr>
+        <p:spPr>
+          <a:xfrm>
+            <a:off x="10960100" y="6350000"/>
+            <a:ext cx="0" cy="76200"/>
+          </a:xfrm>
+          <a:prstGeom prst="line">
+            <a:avLst/>
+          </a:prstGeom>
+          <a:ln w="12700">
+            <a:solidFill>
+              <a:srgbClr val="9A9EA6"/>
+            </a:solidFill>
+          </a:ln>
+        </p:spPr>
+        <p:style>
+          <a:lnRef idx="2">
+            <a:schemeClr val="accent1"/>
+          </a:lnRef>
+          <a:fillRef idx="0">
+            <a:schemeClr val="accent1"/>
+          </a:fillRef>
+          <a:effectRef idx="1">
+            <a:schemeClr val="accent1"/>
+          </a:effectRef>
+          <a:fontRef idx="minor">
+            <a:schemeClr val="tx1"/>
+          </a:fontRef>
+        </p:style>
+      </p:cxnSp>
+      <p:cxnSp>
+        <p:nvCxnSpPr>
+          <p:cNvPr id="42" name="motif-line-tick-29"/>
+          <p:cNvCxnSpPr/>
+          <p:nvPr/>
+        </p:nvCxnSpPr>
+        <p:spPr>
+          <a:xfrm>
+            <a:off x="11074400" y="6350000"/>
+            <a:ext cx="0" cy="76200"/>
+          </a:xfrm>
+          <a:prstGeom prst="line">
+            <a:avLst/>
+          </a:prstGeom>
+          <a:ln w="12700">
+            <a:solidFill>
+              <a:srgbClr val="9A9EA6"/>
+            </a:solidFill>
+          </a:ln>
+        </p:spPr>
+        <p:style>
+          <a:lnRef idx="2">
+            <a:schemeClr val="accent1"/>
+          </a:lnRef>
+          <a:fillRef idx="0">
+            <a:schemeClr val="accent1"/>
+          </a:fillRef>
+          <a:effectRef idx="1">
+            <a:schemeClr val="accent1"/>
+          </a:effectRef>
+          <a:fontRef idx="minor">
+            <a:schemeClr val="tx1"/>
+          </a:fontRef>
+        </p:style>
+      </p:cxnSp>
+      <p:cxnSp>
+        <p:nvCxnSpPr>
+          <p:cNvPr id="43" name="motif-line-tick-30"/>
+          <p:cNvCxnSpPr/>
+          <p:nvPr/>
+        </p:nvCxnSpPr>
+        <p:spPr>
+          <a:xfrm>
+            <a:off x="11188700" y="6350000"/>
+            <a:ext cx="0" cy="76200"/>
+          </a:xfrm>
+          <a:prstGeom prst="line">
+            <a:avLst/>
+          </a:prstGeom>
+          <a:ln w="12700">
+            <a:solidFill>
+              <a:srgbClr val="9A9EA6"/>
+            </a:solidFill>
+          </a:ln>
+        </p:spPr>
+        <p:style>
+          <a:lnRef idx="2">
+            <a:schemeClr val="accent1"/>
+          </a:lnRef>
+          <a:fillRef idx="0">
+            <a:schemeClr val="accent1"/>
+          </a:fillRef>
+          <a:effectRef idx="1">
+            <a:schemeClr val="accent1"/>
+          </a:effectRef>
+          <a:fontRef idx="minor">
+            <a:schemeClr val="tx1"/>
+          </a:fontRef>
+        </p:style>
+      </p:cxnSp>
+      <p:cxnSp>
+        <p:nvCxnSpPr>
+          <p:cNvPr id="44" name="motif-line-tick-31"/>
+          <p:cNvCxnSpPr/>
+          <p:nvPr/>
+        </p:nvCxnSpPr>
+        <p:spPr>
+          <a:xfrm>
+            <a:off x="11303000" y="6286500"/>
+            <a:ext cx="0" cy="203200"/>
+          </a:xfrm>
+          <a:prstGeom prst="line">
+            <a:avLst/>
+          </a:prstGeom>
+          <a:ln w="25400">
+            <a:solidFill>
+              <a:srgbClr val="ECE7DD"/>
+            </a:solidFill>
+          </a:ln>
+        </p:spPr>
+        <p:style>
+          <a:lnRef idx="2">
+            <a:schemeClr val="accent1"/>
+          </a:lnRef>
+          <a:fillRef idx="0">
+            <a:schemeClr val="accent1"/>
+          </a:fillRef>
+          <a:effectRef idx="1">
+            <a:schemeClr val="accent1"/>
+          </a:effectRef>
+          <a:fontRef idx="minor">
+            <a:schemeClr val="tx1"/>
+          </a:fontRef>
+        </p:style>
+      </p:cxnSp>
+      <p:cxnSp>
+        <p:nvCxnSpPr>
+          <p:cNvPr id="45" name="motif-line-tick-32"/>
+          <p:cNvCxnSpPr/>
+          <p:nvPr/>
+        </p:nvCxnSpPr>
+        <p:spPr>
+          <a:xfrm>
+            <a:off x="11417300" y="6350000"/>
+            <a:ext cx="0" cy="76200"/>
+          </a:xfrm>
+          <a:prstGeom prst="line">
+            <a:avLst/>
+          </a:prstGeom>
+          <a:ln w="12700">
+            <a:solidFill>
+              <a:srgbClr val="3A3D43"/>
+            </a:solidFill>
+          </a:ln>
+        </p:spPr>
+        <p:style>
+          <a:lnRef idx="2">
+            <a:schemeClr val="accent1"/>
+          </a:lnRef>
+          <a:fillRef idx="0">
+            <a:schemeClr val="accent1"/>
+          </a:fillRef>
+          <a:effectRef idx="1">
+            <a:schemeClr val="accent1"/>
+          </a:effectRef>
+          <a:fontRef idx="minor">
+            <a:schemeClr val="tx1"/>
+          </a:fontRef>
+        </p:style>
+      </p:cxnSp>
+      <p:cxnSp>
+        <p:nvCxnSpPr>
+          <p:cNvPr id="46" name="motif-line-tick-33"/>
+          <p:cNvCxnSpPr/>
+          <p:nvPr/>
+        </p:nvCxnSpPr>
+        <p:spPr>
+          <a:xfrm>
+            <a:off x="11531600" y="6350000"/>
+            <a:ext cx="0" cy="76200"/>
+          </a:xfrm>
+          <a:prstGeom prst="line">
+            <a:avLst/>
+          </a:prstGeom>
+          <a:ln w="12700">
+            <a:solidFill>
+              <a:srgbClr val="3A3D43"/>
+            </a:solidFill>
+          </a:ln>
+        </p:spPr>
+        <p:style>
+          <a:lnRef idx="2">
+            <a:schemeClr val="accent1"/>
+          </a:lnRef>
+          <a:fillRef idx="0">
+            <a:schemeClr val="accent1"/>
+          </a:fillRef>
+          <a:effectRef idx="1">
+            <a:schemeClr val="accent1"/>
+          </a:effectRef>
+          <a:fontRef idx="minor">
+            <a:schemeClr val="tx1"/>
+          </a:fontRef>
+        </p:style>
+      </p:cxnSp>
+    </p:spTree>
+  </p:cSld>
+  <p:clrMapOvr>
+    <a:masterClrMapping/>
+  </p:clrMapOvr>
+</p:sld>
+</file>
+
+<file path=ppt/slides/slide32.xml><?xml version="1.0" encoding="utf-8"?>
+<p:sld xmlns:a="http://schemas.openxmlformats.org/drawingml/2006/main" xmlns:p="http://schemas.openxmlformats.org/presentationml/2006/main" xmlns:r="http://schemas.openxmlformats.org/officeDocument/2006/relationships">
+  <p:cSld>
+    <p:bg>
+      <p:bgPr>
+        <a:solidFill>
+          <a:srgbClr val="0B0C0E"/>
+        </a:solidFill>
+        <a:effectLst/>
+      </p:bgPr>
+    </p:bg>
+    <p:spTree>
+      <p:nvGrpSpPr>
+        <p:cNvPr id="1" name=""/>
+        <p:cNvGrpSpPr/>
+        <p:nvPr/>
+      </p:nvGrpSpPr>
+      <p:grpSpPr/>
+      <p:sp>
+        <p:nvSpPr>
+          <p:cNvPr id="2" name="Rectangle 1"/>
+          <p:cNvSpPr/>
+          <p:nvPr/>
+        </p:nvSpPr>
+        <p:spPr>
+          <a:xfrm>
+            <a:off x="0" y="0"/>
+            <a:ext cx="12192000" cy="876300"/>
+          </a:xfrm>
+          <a:prstGeom prst="rect">
+            <a:avLst/>
+          </a:prstGeom>
+          <a:solidFill>
+            <a:srgbClr val="000000"/>
+          </a:solidFill>
+          <a:ln>
+            <a:noFill/>
+          </a:ln>
+          <a:effectLst/>
+        </p:spPr>
+        <p:style>
+          <a:lnRef idx="1">
+            <a:schemeClr val="accent1"/>
+          </a:lnRef>
+          <a:fillRef idx="3">
+            <a:schemeClr val="accent1"/>
+          </a:fillRef>
+          <a:effectRef idx="2">
+            <a:schemeClr val="accent1"/>
+          </a:effectRef>
+          <a:fontRef idx="minor">
+            <a:schemeClr val="lt1"/>
+          </a:fontRef>
+        </p:style>
+        <p:txBody>
+          <a:bodyPr rtlCol="0" anchor="ctr"/>
+          <a:lstStyle/>
+          <a:p>
+            <a:pPr algn="ctr"/>
+          </a:p>
+        </p:txBody>
+      </p:sp>
+      <p:sp>
+        <p:nvSpPr>
+          <p:cNvPr id="3" name="Rectangle 2"/>
+          <p:cNvSpPr/>
+          <p:nvPr/>
+        </p:nvSpPr>
+        <p:spPr>
+          <a:xfrm>
+            <a:off x="0" y="5981700"/>
+            <a:ext cx="12192000" cy="876300"/>
+          </a:xfrm>
+          <a:prstGeom prst="rect">
+            <a:avLst/>
+          </a:prstGeom>
+          <a:solidFill>
+            <a:srgbClr val="000000"/>
+          </a:solidFill>
+          <a:ln>
+            <a:noFill/>
+          </a:ln>
+          <a:effectLst/>
+        </p:spPr>
+        <p:style>
+          <a:lnRef idx="1">
+            <a:schemeClr val="accent1"/>
+          </a:lnRef>
+          <a:fillRef idx="3">
+            <a:schemeClr val="accent1"/>
+          </a:fillRef>
+          <a:effectRef idx="2">
+            <a:schemeClr val="accent1"/>
+          </a:effectRef>
+          <a:fontRef idx="minor">
+            <a:schemeClr val="lt1"/>
+          </a:fontRef>
+        </p:style>
+        <p:txBody>
+          <a:bodyPr rtlCol="0" anchor="ctr"/>
+          <a:lstStyle/>
+          <a:p>
+            <a:pPr algn="ctr"/>
+          </a:p>
+        </p:txBody>
+      </p:sp>
+      <p:cxnSp>
+        <p:nvCxnSpPr>
+          <p:cNvPr id="4" name="motif-line-edge-top"/>
+          <p:cNvCxnSpPr/>
+          <p:nvPr/>
+        </p:nvCxnSpPr>
+        <p:spPr>
+          <a:xfrm>
+            <a:off x="0" y="876300"/>
+            <a:ext cx="12192000" cy="0"/>
+          </a:xfrm>
+          <a:prstGeom prst="line">
+            <a:avLst/>
+          </a:prstGeom>
+          <a:ln w="9525">
+            <a:solidFill>
+              <a:srgbClr val="3A3D43"/>
+            </a:solidFill>
+          </a:ln>
+        </p:spPr>
+        <p:style>
+          <a:lnRef idx="2">
+            <a:schemeClr val="accent1"/>
+          </a:lnRef>
+          <a:fillRef idx="0">
+            <a:schemeClr val="accent1"/>
+          </a:fillRef>
+          <a:effectRef idx="1">
+            <a:schemeClr val="accent1"/>
+          </a:effectRef>
+          <a:fontRef idx="minor">
+            <a:schemeClr val="tx1"/>
+          </a:fontRef>
+        </p:style>
+      </p:cxnSp>
+      <p:cxnSp>
+        <p:nvCxnSpPr>
+          <p:cNvPr id="5" name="motif-line-edge-bottom"/>
+          <p:cNvCxnSpPr/>
+          <p:nvPr/>
+        </p:nvCxnSpPr>
+        <p:spPr>
+          <a:xfrm>
+            <a:off x="0" y="5981700"/>
+            <a:ext cx="12192000" cy="0"/>
+          </a:xfrm>
+          <a:prstGeom prst="line">
+            <a:avLst/>
+          </a:prstGeom>
+          <a:ln w="9525">
+            <a:solidFill>
+              <a:srgbClr val="3A3D43"/>
+            </a:solidFill>
+          </a:ln>
+        </p:spPr>
+        <p:style>
+          <a:lnRef idx="2">
+            <a:schemeClr val="accent1"/>
+          </a:lnRef>
+          <a:fillRef idx="0">
+            <a:schemeClr val="accent1"/>
+          </a:fillRef>
+          <a:effectRef idx="1">
+            <a:schemeClr val="accent1"/>
+          </a:effectRef>
+          <a:fontRef idx="minor">
+            <a:schemeClr val="tx1"/>
+          </a:fontRef>
+        </p:style>
+      </p:cxnSp>
+      <p:sp>
+        <p:nvSpPr>
+          <p:cNvPr id="6" name="TextBox 5"/>
+          <p:cNvSpPr txBox="1"/>
+          <p:nvPr/>
+        </p:nvSpPr>
+        <p:spPr>
+          <a:xfrm>
+            <a:off x="762000" y="1270000"/>
+            <a:ext cx="10668000" cy="533400"/>
+          </a:xfrm>
+          <a:prstGeom prst="rect">
+            <a:avLst/>
+          </a:prstGeom>
+          <a:noFill/>
+        </p:spPr>
+        <p:txBody>
+          <a:bodyPr wrap="square" lIns="0" rIns="0" tIns="0" bIns="0" anchor="t">
+            <a:spAutoFit/>
+          </a:bodyPr>
+          <a:lstStyle/>
+          <a:p>
+            <a:pPr algn="l">
+              <a:lnSpc>
+                <a:spcPct val="115000"/>
+              </a:lnSpc>
+            </a:pPr>
+            <a:r>
+              <a:rPr sz="3000" b="0">
+                <a:solidFill>
+                  <a:srgbClr val="ECE7DD"/>
+                </a:solidFill>
+                <a:latin typeface="Work Sans"/>
+              </a:rPr>
               <a:t>Next steps</a:t>
             </a:r>
           </a:p>
@@ -41690,7 +44147,7 @@
                 </a:solidFill>
                 <a:latin typeface="IBM Plex Mono"/>
               </a:rPr>
-              <a:t>31 / 32</a:t>
+              <a:t>32 / 33</a:t>
             </a:r>
           </a:p>
         </p:txBody>
@@ -42753,7 +45210,42 @@
         </p:nvCxnSpPr>
         <p:spPr>
           <a:xfrm>
-            <a:off x="11303000" y="6286500"/>
+            <a:off x="11303000" y="6350000"/>
+            <a:ext cx="0" cy="76200"/>
+          </a:xfrm>
+          <a:prstGeom prst="line">
+            <a:avLst/>
+          </a:prstGeom>
+          <a:ln w="12700">
+            <a:solidFill>
+              <a:srgbClr val="9A9EA6"/>
+            </a:solidFill>
+          </a:ln>
+        </p:spPr>
+        <p:style>
+          <a:lnRef idx="2">
+            <a:schemeClr val="accent1"/>
+          </a:lnRef>
+          <a:fillRef idx="0">
+            <a:schemeClr val="accent1"/>
+          </a:fillRef>
+          <a:effectRef idx="1">
+            <a:schemeClr val="accent1"/>
+          </a:effectRef>
+          <a:fontRef idx="minor">
+            <a:schemeClr val="tx1"/>
+          </a:fontRef>
+        </p:style>
+      </p:cxnSp>
+      <p:cxnSp>
+        <p:nvCxnSpPr>
+          <p:cNvPr id="53" name="motif-line-tick-32"/>
+          <p:cNvCxnSpPr/>
+          <p:nvPr/>
+        </p:nvCxnSpPr>
+        <p:spPr>
+          <a:xfrm>
+            <a:off x="11417300" y="6286500"/>
             <a:ext cx="0" cy="203200"/>
           </a:xfrm>
           <a:prstGeom prst="line">
@@ -42782,13 +45274,13 @@
       </p:cxnSp>
       <p:cxnSp>
         <p:nvCxnSpPr>
-          <p:cNvPr id="53" name="motif-line-tick-32"/>
-          <p:cNvCxnSpPr/>
-          <p:nvPr/>
-        </p:nvCxnSpPr>
-        <p:spPr>
-          <a:xfrm>
-            <a:off x="11417300" y="6350000"/>
+          <p:cNvPr id="54" name="motif-line-tick-33"/>
+          <p:cNvCxnSpPr/>
+          <p:nvPr/>
+        </p:nvCxnSpPr>
+        <p:spPr>
+          <a:xfrm>
+            <a:off x="11531600" y="6350000"/>
             <a:ext cx="0" cy="76200"/>
           </a:xfrm>
           <a:prstGeom prst="line">
@@ -42823,7 +45315,7 @@
 </p:sld>
 </file>
 
-<file path=ppt/slides/slide32.xml><?xml version="1.0" encoding="utf-8"?>
+<file path=ppt/slides/slide33.xml><?xml version="1.0" encoding="utf-8"?>
 <p:sld xmlns:a="http://schemas.openxmlformats.org/drawingml/2006/main" xmlns:p="http://schemas.openxmlformats.org/presentationml/2006/main" xmlns:r="http://schemas.openxmlformats.org/officeDocument/2006/relationships">
   <p:cSld>
     <p:bg>
@@ -44003,7 +46495,7 @@
                 </a:solidFill>
                 <a:latin typeface="IBM Plex Mono"/>
               </a:rPr>
-              <a:t>4 / 32</a:t>
+              <a:t>4 / 33</a:t>
             </a:r>
           </a:p>
         </p:txBody>
@@ -45102,6 +47594,41 @@
         <p:spPr>
           <a:xfrm>
             <a:off x="11417300" y="6350000"/>
+            <a:ext cx="0" cy="76200"/>
+          </a:xfrm>
+          <a:prstGeom prst="line">
+            <a:avLst/>
+          </a:prstGeom>
+          <a:ln w="12700">
+            <a:solidFill>
+              <a:srgbClr val="3A3D43"/>
+            </a:solidFill>
+          </a:ln>
+        </p:spPr>
+        <p:style>
+          <a:lnRef idx="2">
+            <a:schemeClr val="accent1"/>
+          </a:lnRef>
+          <a:fillRef idx="0">
+            <a:schemeClr val="accent1"/>
+          </a:fillRef>
+          <a:effectRef idx="1">
+            <a:schemeClr val="accent1"/>
+          </a:effectRef>
+          <a:fontRef idx="minor">
+            <a:schemeClr val="tx1"/>
+          </a:fontRef>
+        </p:style>
+      </p:cxnSp>
+      <p:cxnSp>
+        <p:nvCxnSpPr>
+          <p:cNvPr id="51" name="motif-line-tick-33"/>
+          <p:cNvCxnSpPr/>
+          <p:nvPr/>
+        </p:nvCxnSpPr>
+        <p:spPr>
+          <a:xfrm>
+            <a:off x="11531600" y="6350000"/>
             <a:ext cx="0" cy="76200"/>
           </a:xfrm>
           <a:prstGeom prst="line">
@@ -46540,7 +49067,7 @@
                 </a:solidFill>
                 <a:latin typeface="IBM Plex Mono"/>
               </a:rPr>
-              <a:t>6 / 32</a:t>
+              <a:t>6 / 33</a:t>
             </a:r>
           </a:p>
         </p:txBody>
@@ -47678,6 +50205,41 @@
         <p:spPr>
           <a:xfrm>
             <a:off x="11417300" y="6350000"/>
+            <a:ext cx="0" cy="76200"/>
+          </a:xfrm>
+          <a:prstGeom prst="line">
+            <a:avLst/>
+          </a:prstGeom>
+          <a:ln w="12700">
+            <a:solidFill>
+              <a:srgbClr val="3A3D43"/>
+            </a:solidFill>
+          </a:ln>
+        </p:spPr>
+        <p:style>
+          <a:lnRef idx="2">
+            <a:schemeClr val="accent1"/>
+          </a:lnRef>
+          <a:fillRef idx="0">
+            <a:schemeClr val="accent1"/>
+          </a:fillRef>
+          <a:effectRef idx="1">
+            <a:schemeClr val="accent1"/>
+          </a:effectRef>
+          <a:fontRef idx="minor">
+            <a:schemeClr val="tx1"/>
+          </a:fontRef>
+        </p:style>
+      </p:cxnSp>
+      <p:cxnSp>
+        <p:nvCxnSpPr>
+          <p:cNvPr id="44" name="motif-line-tick-33"/>
+          <p:cNvCxnSpPr/>
+          <p:nvPr/>
+        </p:nvCxnSpPr>
+        <p:spPr>
+          <a:xfrm>
+            <a:off x="11531600" y="6350000"/>
             <a:ext cx="0" cy="76200"/>
           </a:xfrm>
           <a:prstGeom prst="line">
@@ -48063,7 +50625,7 @@
                 </a:solidFill>
                 <a:latin typeface="IBM Plex Mono"/>
               </a:rPr>
-              <a:t>7 / 32</a:t>
+              <a:t>7 / 33</a:t>
             </a:r>
           </a:p>
         </p:txBody>
@@ -49201,6 +51763,41 @@
         <p:spPr>
           <a:xfrm>
             <a:off x="11417300" y="6350000"/>
+            <a:ext cx="0" cy="76200"/>
+          </a:xfrm>
+          <a:prstGeom prst="line">
+            <a:avLst/>
+          </a:prstGeom>
+          <a:ln w="12700">
+            <a:solidFill>
+              <a:srgbClr val="3A3D43"/>
+            </a:solidFill>
+          </a:ln>
+        </p:spPr>
+        <p:style>
+          <a:lnRef idx="2">
+            <a:schemeClr val="accent1"/>
+          </a:lnRef>
+          <a:fillRef idx="0">
+            <a:schemeClr val="accent1"/>
+          </a:fillRef>
+          <a:effectRef idx="1">
+            <a:schemeClr val="accent1"/>
+          </a:effectRef>
+          <a:fontRef idx="minor">
+            <a:schemeClr val="tx1"/>
+          </a:fontRef>
+        </p:style>
+      </p:cxnSp>
+      <p:cxnSp>
+        <p:nvCxnSpPr>
+          <p:cNvPr id="44" name="motif-line-tick-33"/>
+          <p:cNvCxnSpPr/>
+          <p:nvPr/>
+        </p:nvCxnSpPr>
+        <p:spPr>
+          <a:xfrm>
+            <a:off x="11531600" y="6350000"/>
             <a:ext cx="0" cy="76200"/>
           </a:xfrm>
           <a:prstGeom prst="line">
@@ -50015,7 +52612,7 @@
                 </a:solidFill>
                 <a:latin typeface="IBM Plex Mono"/>
               </a:rPr>
-              <a:t>8 / 32</a:t>
+              <a:t>8 / 33</a:t>
             </a:r>
           </a:p>
         </p:txBody>
@@ -51153,6 +53750,41 @@
         <p:spPr>
           <a:xfrm>
             <a:off x="11417300" y="6350000"/>
+            <a:ext cx="0" cy="76200"/>
+          </a:xfrm>
+          <a:prstGeom prst="line">
+            <a:avLst/>
+          </a:prstGeom>
+          <a:ln w="12700">
+            <a:solidFill>
+              <a:srgbClr val="3A3D43"/>
+            </a:solidFill>
+          </a:ln>
+        </p:spPr>
+        <p:style>
+          <a:lnRef idx="2">
+            <a:schemeClr val="accent1"/>
+          </a:lnRef>
+          <a:fillRef idx="0">
+            <a:schemeClr val="accent1"/>
+          </a:fillRef>
+          <a:effectRef idx="1">
+            <a:schemeClr val="accent1"/>
+          </a:effectRef>
+          <a:fontRef idx="minor">
+            <a:schemeClr val="tx1"/>
+          </a:fontRef>
+        </p:style>
+      </p:cxnSp>
+      <p:cxnSp>
+        <p:nvCxnSpPr>
+          <p:cNvPr id="55" name="motif-line-tick-33"/>
+          <p:cNvCxnSpPr/>
+          <p:nvPr/>
+        </p:nvCxnSpPr>
+        <p:spPr>
+          <a:xfrm>
+            <a:off x="11531600" y="6350000"/>
             <a:ext cx="0" cy="76200"/>
           </a:xfrm>
           <a:prstGeom prst="line">
@@ -51733,7 +54365,7 @@
                 </a:solidFill>
                 <a:latin typeface="IBM Plex Mono"/>
               </a:rPr>
-              <a:t>9 / 32</a:t>
+              <a:t>9 / 33</a:t>
             </a:r>
           </a:p>
         </p:txBody>
@@ -52871,6 +55503,41 @@
         <p:spPr>
           <a:xfrm>
             <a:off x="11417300" y="6350000"/>
+            <a:ext cx="0" cy="76200"/>
+          </a:xfrm>
+          <a:prstGeom prst="line">
+            <a:avLst/>
+          </a:prstGeom>
+          <a:ln w="12700">
+            <a:solidFill>
+              <a:srgbClr val="3A3D43"/>
+            </a:solidFill>
+          </a:ln>
+        </p:spPr>
+        <p:style>
+          <a:lnRef idx="2">
+            <a:schemeClr val="accent1"/>
+          </a:lnRef>
+          <a:fillRef idx="0">
+            <a:schemeClr val="accent1"/>
+          </a:fillRef>
+          <a:effectRef idx="1">
+            <a:schemeClr val="accent1"/>
+          </a:effectRef>
+          <a:fontRef idx="minor">
+            <a:schemeClr val="tx1"/>
+          </a:fontRef>
+        </p:style>
+      </p:cxnSp>
+      <p:cxnSp>
+        <p:nvCxnSpPr>
+          <p:cNvPr id="49" name="motif-line-tick-33"/>
+          <p:cNvCxnSpPr/>
+          <p:nvPr/>
+        </p:nvCxnSpPr>
+        <p:spPr>
+          <a:xfrm>
+            <a:off x="11531600" y="6350000"/>
             <a:ext cx="0" cy="76200"/>
           </a:xfrm>
           <a:prstGeom prst="line">

--- a/deck/out/favoured-banks.pptx
+++ b/deck/out/favoured-banks.pptx
@@ -37,7 +37,6 @@
     <p:sldId id="285" r:id="rId37"/>
     <p:sldId id="286" r:id="rId38"/>
     <p:sldId id="287" r:id="rId39"/>
-    <p:sldId id="288" r:id="rId40"/>
   </p:sldIdLst>
   <p:sldSz cx="12192000" cy="6858000" type="screen4x3"/>
   <p:notesSz cx="6858000" cy="9144000"/>
@@ -1654,7 +1653,7 @@
           <a:lstStyle/>
           <a:p>
             <a:r>
-              <a:t>The strategist owns measurement. With these four habits the team can report one number each month.</a:t>
+              <a:t>In this run, ChatGPT's answers drew mostly on bank websites, so the bank's own pages are where its citations came from. robots.txt also blocked our crawler from 2 BNI annual reports. Our crawler is not an AI crawler: the blocked and script-only pages are signs to check, not proof that an engine was blocked.</a:t>
             </a:r>
           </a:p>
         </p:txBody>
@@ -1724,7 +1723,7 @@
           <a:lstStyle/>
           <a:p>
             <a:r>
-              <a:t>Content owns the pages the engines quote and the explainers they do not yet have.</a:t>
+              <a:t>Gemini drew most of its citations from other sites in this run, so how those sites describe the bank is likely to matter more for Gemini's answers than for ChatGPT's. AirOps found the same pattern across 21,311 brand mentions in ChatGPT, Claude and Perplexity: 85% came from sites other than the brand's own. PAWC is the measure defined on slide 8 (Aggarwal et al., 2024).</a:t>
             </a:r>
           </a:p>
         </p:txBody>
@@ -1750,76 +1749,6 @@
 </file>
 
 <file path=ppt/notesSlides/notesSlide26.xml><?xml version="1.0" encoding="utf-8"?>
-<p:notes xmlns:a="http://schemas.openxmlformats.org/drawingml/2006/main" xmlns:p="http://schemas.openxmlformats.org/presentationml/2006/main" xmlns:r="http://schemas.openxmlformats.org/officeDocument/2006/relationships">
-  <p:cSld>
-    <p:spTree>
-      <p:nvGrpSpPr>
-        <p:cNvPr id="1" name=""/>
-        <p:cNvGrpSpPr/>
-        <p:nvPr/>
-      </p:nvGrpSpPr>
-      <p:grpSpPr>
-        <a:xfrm>
-          <a:off x="0" y="0"/>
-          <a:ext cx="0" cy="0"/>
-          <a:chOff x="0" y="0"/>
-          <a:chExt cx="0" cy="0"/>
-        </a:xfrm>
-      </p:grpSpPr>
-      <p:sp>
-        <p:nvSpPr>
-          <p:cNvPr id="2" name="Slide Image Placeholder 1"/>
-          <p:cNvSpPr>
-            <a:spLocks noGrp="1"/>
-          </p:cNvSpPr>
-          <p:nvPr>
-            <p:ph type="sldImg" idx="2"/>
-          </p:nvPr>
-        </p:nvSpPr>
-        <p:spPr/>
-      </p:sp>
-      <p:sp>
-        <p:nvSpPr>
-          <p:cNvPr id="3" name="Notes Placeholder 2"/>
-          <p:cNvSpPr>
-            <a:spLocks noGrp="1"/>
-          </p:cNvSpPr>
-          <p:nvPr>
-            <p:ph type="body" idx="3" sz="quarter"/>
-          </p:nvPr>
-        </p:nvSpPr>
-        <p:spPr/>
-        <p:txBody>
-          <a:bodyPr/>
-          <a:lstStyle/>
-          <a:p>
-            <a:r>
-              <a:t>Our crawler is not an AI crawler, so these are signs to check, not proof that an engine was blocked.</a:t>
-            </a:r>
-          </a:p>
-        </p:txBody>
-      </p:sp>
-      <p:sp>
-        <p:nvSpPr>
-          <p:cNvPr id="4" name="Slide Number Placeholder 3"/>
-          <p:cNvSpPr>
-            <a:spLocks noGrp="1"/>
-          </p:cNvSpPr>
-          <p:nvPr>
-            <p:ph type="sldNum" idx="5" sz="quarter"/>
-          </p:nvPr>
-        </p:nvSpPr>
-        <p:spPr/>
-      </p:sp>
-    </p:spTree>
-  </p:cSld>
-  <p:clrMapOvr>
-    <a:masterClrMapping/>
-  </p:clrMapOvr>
-</p:notes>
-</file>
-
-<file path=ppt/notesSlides/notesSlide27.xml><?xml version="1.0" encoding="utf-8"?>
 <p:notes xmlns:a="http://schemas.openxmlformats.org/drawingml/2006/main" xmlns:p="http://schemas.openxmlformats.org/presentationml/2006/main" xmlns:r="http://schemas.openxmlformats.org/officeDocument/2006/relationships">
   <p:cSld>
     <p:spTree>
@@ -7282,7 +7211,7 @@
                 </a:solidFill>
                 <a:latin typeface="IBM Plex Mono"/>
               </a:rPr>
-              <a:t>11 / 33</a:t>
+              <a:t>11 / 32</a:t>
             </a:r>
           </a:p>
         </p:txBody>
@@ -8420,41 +8349,6 @@
         <p:spPr>
           <a:xfrm>
             <a:off x="10572750" y="6273800"/>
-            <a:ext cx="0" cy="76200"/>
-          </a:xfrm>
-          <a:prstGeom prst="line">
-            <a:avLst/>
-          </a:prstGeom>
-          <a:ln w="12700">
-            <a:solidFill>
-              <a:srgbClr val="3B5A85"/>
-            </a:solidFill>
-          </a:ln>
-        </p:spPr>
-        <p:style>
-          <a:lnRef idx="2">
-            <a:schemeClr val="accent1"/>
-          </a:lnRef>
-          <a:fillRef idx="0">
-            <a:schemeClr val="accent1"/>
-          </a:fillRef>
-          <a:effectRef idx="1">
-            <a:schemeClr val="accent1"/>
-          </a:effectRef>
-          <a:fontRef idx="minor">
-            <a:schemeClr val="tx1"/>
-          </a:fontRef>
-        </p:style>
-      </p:cxnSp>
-      <p:cxnSp>
-        <p:nvCxnSpPr>
-          <p:cNvPr id="51" name="motif-line-tick-33"/>
-          <p:cNvCxnSpPr/>
-          <p:nvPr/>
-        </p:nvCxnSpPr>
-        <p:spPr>
-          <a:xfrm>
-            <a:off x="10668000" y="6273800"/>
             <a:ext cx="0" cy="76200"/>
           </a:xfrm>
           <a:prstGeom prst="line">
@@ -9115,7 +9009,7 @@
                 </a:solidFill>
                 <a:latin typeface="IBM Plex Mono"/>
               </a:rPr>
-              <a:t>12 / 33</a:t>
+              <a:t>12 / 32</a:t>
             </a:r>
           </a:p>
         </p:txBody>
@@ -10253,41 +10147,6 @@
         <p:spPr>
           <a:xfrm>
             <a:off x="10572750" y="6273800"/>
-            <a:ext cx="0" cy="76200"/>
-          </a:xfrm>
-          <a:prstGeom prst="line">
-            <a:avLst/>
-          </a:prstGeom>
-          <a:ln w="12700">
-            <a:solidFill>
-              <a:srgbClr val="3B5A85"/>
-            </a:solidFill>
-          </a:ln>
-        </p:spPr>
-        <p:style>
-          <a:lnRef idx="2">
-            <a:schemeClr val="accent1"/>
-          </a:lnRef>
-          <a:fillRef idx="0">
-            <a:schemeClr val="accent1"/>
-          </a:fillRef>
-          <a:effectRef idx="1">
-            <a:schemeClr val="accent1"/>
-          </a:effectRef>
-          <a:fontRef idx="minor">
-            <a:schemeClr val="tx1"/>
-          </a:fontRef>
-        </p:style>
-      </p:cxnSp>
-      <p:cxnSp>
-        <p:nvCxnSpPr>
-          <p:cNvPr id="52" name="motif-line-tick-33"/>
-          <p:cNvCxnSpPr/>
-          <p:nvPr/>
-        </p:nvCxnSpPr>
-        <p:spPr>
-          <a:xfrm>
-            <a:off x="10668000" y="6273800"/>
             <a:ext cx="0" cy="76200"/>
           </a:xfrm>
           <a:prstGeom prst="line">
@@ -10909,7 +10768,7 @@
                 </a:solidFill>
                 <a:latin typeface="IBM Plex Mono"/>
               </a:rPr>
-              <a:t>13 / 33</a:t>
+              <a:t>13 / 32</a:t>
             </a:r>
           </a:p>
         </p:txBody>
@@ -12047,41 +11906,6 @@
         <p:spPr>
           <a:xfrm>
             <a:off x="10572750" y="6273800"/>
-            <a:ext cx="0" cy="76200"/>
-          </a:xfrm>
-          <a:prstGeom prst="line">
-            <a:avLst/>
-          </a:prstGeom>
-          <a:ln w="12700">
-            <a:solidFill>
-              <a:srgbClr val="3B5A85"/>
-            </a:solidFill>
-          </a:ln>
-        </p:spPr>
-        <p:style>
-          <a:lnRef idx="2">
-            <a:schemeClr val="accent1"/>
-          </a:lnRef>
-          <a:fillRef idx="0">
-            <a:schemeClr val="accent1"/>
-          </a:fillRef>
-          <a:effectRef idx="1">
-            <a:schemeClr val="accent1"/>
-          </a:effectRef>
-          <a:fontRef idx="minor">
-            <a:schemeClr val="tx1"/>
-          </a:fontRef>
-        </p:style>
-      </p:cxnSp>
-      <p:cxnSp>
-        <p:nvCxnSpPr>
-          <p:cNvPr id="51" name="motif-line-tick-33"/>
-          <p:cNvCxnSpPr/>
-          <p:nvPr/>
-        </p:nvCxnSpPr>
-        <p:spPr>
-          <a:xfrm>
-            <a:off x="10668000" y="6273800"/>
             <a:ext cx="0" cy="76200"/>
           </a:xfrm>
           <a:prstGeom prst="line">
@@ -12703,7 +12527,7 @@
                 </a:solidFill>
                 <a:latin typeface="IBM Plex Mono"/>
               </a:rPr>
-              <a:t>14 / 33</a:t>
+              <a:t>14 / 32</a:t>
             </a:r>
           </a:p>
         </p:txBody>
@@ -13841,41 +13665,6 @@
         <p:spPr>
           <a:xfrm>
             <a:off x="10572750" y="6273800"/>
-            <a:ext cx="0" cy="76200"/>
-          </a:xfrm>
-          <a:prstGeom prst="line">
-            <a:avLst/>
-          </a:prstGeom>
-          <a:ln w="12700">
-            <a:solidFill>
-              <a:srgbClr val="3B5A85"/>
-            </a:solidFill>
-          </a:ln>
-        </p:spPr>
-        <p:style>
-          <a:lnRef idx="2">
-            <a:schemeClr val="accent1"/>
-          </a:lnRef>
-          <a:fillRef idx="0">
-            <a:schemeClr val="accent1"/>
-          </a:fillRef>
-          <a:effectRef idx="1">
-            <a:schemeClr val="accent1"/>
-          </a:effectRef>
-          <a:fontRef idx="minor">
-            <a:schemeClr val="tx1"/>
-          </a:fontRef>
-        </p:style>
-      </p:cxnSp>
-      <p:cxnSp>
-        <p:nvCxnSpPr>
-          <p:cNvPr id="51" name="motif-line-tick-33"/>
-          <p:cNvCxnSpPr/>
-          <p:nvPr/>
-        </p:nvCxnSpPr>
-        <p:spPr>
-          <a:xfrm>
-            <a:off x="10668000" y="6273800"/>
             <a:ext cx="0" cy="76200"/>
           </a:xfrm>
           <a:prstGeom prst="line">
@@ -14536,7 +14325,7 @@
                 </a:solidFill>
                 <a:latin typeface="IBM Plex Mono"/>
               </a:rPr>
-              <a:t>15 / 33</a:t>
+              <a:t>15 / 32</a:t>
             </a:r>
           </a:p>
         </p:txBody>
@@ -15674,41 +15463,6 @@
         <p:spPr>
           <a:xfrm>
             <a:off x="10572750" y="6273800"/>
-            <a:ext cx="0" cy="76200"/>
-          </a:xfrm>
-          <a:prstGeom prst="line">
-            <a:avLst/>
-          </a:prstGeom>
-          <a:ln w="12700">
-            <a:solidFill>
-              <a:srgbClr val="3B5A85"/>
-            </a:solidFill>
-          </a:ln>
-        </p:spPr>
-        <p:style>
-          <a:lnRef idx="2">
-            <a:schemeClr val="accent1"/>
-          </a:lnRef>
-          <a:fillRef idx="0">
-            <a:schemeClr val="accent1"/>
-          </a:fillRef>
-          <a:effectRef idx="1">
-            <a:schemeClr val="accent1"/>
-          </a:effectRef>
-          <a:fontRef idx="minor">
-            <a:schemeClr val="tx1"/>
-          </a:fontRef>
-        </p:style>
-      </p:cxnSp>
-      <p:cxnSp>
-        <p:nvCxnSpPr>
-          <p:cNvPr id="52" name="motif-line-tick-33"/>
-          <p:cNvCxnSpPr/>
-          <p:nvPr/>
-        </p:nvCxnSpPr>
-        <p:spPr>
-          <a:xfrm>
-            <a:off x="10668000" y="6273800"/>
             <a:ext cx="0" cy="76200"/>
           </a:xfrm>
           <a:prstGeom prst="line">
@@ -16330,7 +16084,7 @@
                 </a:solidFill>
                 <a:latin typeface="IBM Plex Mono"/>
               </a:rPr>
-              <a:t>16 / 33</a:t>
+              <a:t>16 / 32</a:t>
             </a:r>
           </a:p>
         </p:txBody>
@@ -17468,41 +17222,6 @@
         <p:spPr>
           <a:xfrm>
             <a:off x="10572750" y="6273800"/>
-            <a:ext cx="0" cy="76200"/>
-          </a:xfrm>
-          <a:prstGeom prst="line">
-            <a:avLst/>
-          </a:prstGeom>
-          <a:ln w="12700">
-            <a:solidFill>
-              <a:srgbClr val="3B5A85"/>
-            </a:solidFill>
-          </a:ln>
-        </p:spPr>
-        <p:style>
-          <a:lnRef idx="2">
-            <a:schemeClr val="accent1"/>
-          </a:lnRef>
-          <a:fillRef idx="0">
-            <a:schemeClr val="accent1"/>
-          </a:fillRef>
-          <a:effectRef idx="1">
-            <a:schemeClr val="accent1"/>
-          </a:effectRef>
-          <a:fontRef idx="minor">
-            <a:schemeClr val="tx1"/>
-          </a:fontRef>
-        </p:style>
-      </p:cxnSp>
-      <p:cxnSp>
-        <p:nvCxnSpPr>
-          <p:cNvPr id="51" name="motif-line-tick-33"/>
-          <p:cNvCxnSpPr/>
-          <p:nvPr/>
-        </p:nvCxnSpPr>
-        <p:spPr>
-          <a:xfrm>
-            <a:off x="10668000" y="6273800"/>
             <a:ext cx="0" cy="76200"/>
           </a:xfrm>
           <a:prstGeom prst="line">
@@ -18163,7 +17882,7 @@
                 </a:solidFill>
                 <a:latin typeface="IBM Plex Mono"/>
               </a:rPr>
-              <a:t>17 / 33</a:t>
+              <a:t>17 / 32</a:t>
             </a:r>
           </a:p>
         </p:txBody>
@@ -19301,41 +19020,6 @@
         <p:spPr>
           <a:xfrm>
             <a:off x="10572750" y="6273800"/>
-            <a:ext cx="0" cy="76200"/>
-          </a:xfrm>
-          <a:prstGeom prst="line">
-            <a:avLst/>
-          </a:prstGeom>
-          <a:ln w="12700">
-            <a:solidFill>
-              <a:srgbClr val="3B5A85"/>
-            </a:solidFill>
-          </a:ln>
-        </p:spPr>
-        <p:style>
-          <a:lnRef idx="2">
-            <a:schemeClr val="accent1"/>
-          </a:lnRef>
-          <a:fillRef idx="0">
-            <a:schemeClr val="accent1"/>
-          </a:fillRef>
-          <a:effectRef idx="1">
-            <a:schemeClr val="accent1"/>
-          </a:effectRef>
-          <a:fontRef idx="minor">
-            <a:schemeClr val="tx1"/>
-          </a:fontRef>
-        </p:style>
-      </p:cxnSp>
-      <p:cxnSp>
-        <p:nvCxnSpPr>
-          <p:cNvPr id="52" name="motif-line-tick-33"/>
-          <p:cNvCxnSpPr/>
-          <p:nvPr/>
-        </p:nvCxnSpPr>
-        <p:spPr>
-          <a:xfrm>
-            <a:off x="10668000" y="6273800"/>
             <a:ext cx="0" cy="76200"/>
           </a:xfrm>
           <a:prstGeom prst="line">
@@ -21148,7 +20832,7 @@
                 </a:solidFill>
                 <a:latin typeface="IBM Plex Mono"/>
               </a:rPr>
-              <a:t>19 / 33</a:t>
+              <a:t>19 / 32</a:t>
             </a:r>
           </a:p>
         </p:txBody>
@@ -22286,41 +21970,6 @@
         <p:spPr>
           <a:xfrm>
             <a:off x="10572750" y="6273800"/>
-            <a:ext cx="0" cy="76200"/>
-          </a:xfrm>
-          <a:prstGeom prst="line">
-            <a:avLst/>
-          </a:prstGeom>
-          <a:ln w="12700">
-            <a:solidFill>
-              <a:srgbClr val="3B5A85"/>
-            </a:solidFill>
-          </a:ln>
-        </p:spPr>
-        <p:style>
-          <a:lnRef idx="2">
-            <a:schemeClr val="accent1"/>
-          </a:lnRef>
-          <a:fillRef idx="0">
-            <a:schemeClr val="accent1"/>
-          </a:fillRef>
-          <a:effectRef idx="1">
-            <a:schemeClr val="accent1"/>
-          </a:effectRef>
-          <a:fontRef idx="minor">
-            <a:schemeClr val="tx1"/>
-          </a:fontRef>
-        </p:style>
-      </p:cxnSp>
-      <p:cxnSp>
-        <p:nvCxnSpPr>
-          <p:cNvPr id="51" name="motif-line-tick-33"/>
-          <p:cNvCxnSpPr/>
-          <p:nvPr/>
-        </p:nvCxnSpPr>
-        <p:spPr>
-          <a:xfrm>
-            <a:off x="10668000" y="6273800"/>
             <a:ext cx="0" cy="76200"/>
           </a:xfrm>
           <a:prstGeom prst="line">
@@ -22941,7 +22590,7 @@
                 </a:solidFill>
                 <a:latin typeface="IBM Plex Mono"/>
               </a:rPr>
-              <a:t>2 / 33</a:t>
+              <a:t>2 / 32</a:t>
             </a:r>
           </a:p>
         </p:txBody>
@@ -24079,41 +23728,6 @@
         <p:spPr>
           <a:xfrm>
             <a:off x="10572750" y="6273800"/>
-            <a:ext cx="0" cy="76200"/>
-          </a:xfrm>
-          <a:prstGeom prst="line">
-            <a:avLst/>
-          </a:prstGeom>
-          <a:ln w="12700">
-            <a:solidFill>
-              <a:srgbClr val="3B5A85"/>
-            </a:solidFill>
-          </a:ln>
-        </p:spPr>
-        <p:style>
-          <a:lnRef idx="2">
-            <a:schemeClr val="accent1"/>
-          </a:lnRef>
-          <a:fillRef idx="0">
-            <a:schemeClr val="accent1"/>
-          </a:fillRef>
-          <a:effectRef idx="1">
-            <a:schemeClr val="accent1"/>
-          </a:effectRef>
-          <a:fontRef idx="minor">
-            <a:schemeClr val="tx1"/>
-          </a:fontRef>
-        </p:style>
-      </p:cxnSp>
-      <p:cxnSp>
-        <p:nvCxnSpPr>
-          <p:cNvPr id="48" name="motif-line-tick-33"/>
-          <p:cNvCxnSpPr/>
-          <p:nvPr/>
-        </p:nvCxnSpPr>
-        <p:spPr>
-          <a:xfrm>
-            <a:off x="10668000" y="6273800"/>
             <a:ext cx="0" cy="76200"/>
           </a:xfrm>
           <a:prstGeom prst="line">
@@ -24774,7 +24388,7 @@
                 </a:solidFill>
                 <a:latin typeface="IBM Plex Mono"/>
               </a:rPr>
-              <a:t>20 / 33</a:t>
+              <a:t>20 / 32</a:t>
             </a:r>
           </a:p>
         </p:txBody>
@@ -25912,41 +25526,6 @@
         <p:spPr>
           <a:xfrm>
             <a:off x="10572750" y="6273800"/>
-            <a:ext cx="0" cy="76200"/>
-          </a:xfrm>
-          <a:prstGeom prst="line">
-            <a:avLst/>
-          </a:prstGeom>
-          <a:ln w="12700">
-            <a:solidFill>
-              <a:srgbClr val="3B5A85"/>
-            </a:solidFill>
-          </a:ln>
-        </p:spPr>
-        <p:style>
-          <a:lnRef idx="2">
-            <a:schemeClr val="accent1"/>
-          </a:lnRef>
-          <a:fillRef idx="0">
-            <a:schemeClr val="accent1"/>
-          </a:fillRef>
-          <a:effectRef idx="1">
-            <a:schemeClr val="accent1"/>
-          </a:effectRef>
-          <a:fontRef idx="minor">
-            <a:schemeClr val="tx1"/>
-          </a:fontRef>
-        </p:style>
-      </p:cxnSp>
-      <p:cxnSp>
-        <p:nvCxnSpPr>
-          <p:cNvPr id="52" name="motif-line-tick-33"/>
-          <p:cNvCxnSpPr/>
-          <p:nvPr/>
-        </p:nvCxnSpPr>
-        <p:spPr>
-          <a:xfrm>
-            <a:off x="10668000" y="6273800"/>
             <a:ext cx="0" cy="76200"/>
           </a:xfrm>
           <a:prstGeom prst="line">
@@ -26568,7 +26147,7 @@
                 </a:solidFill>
                 <a:latin typeface="IBM Plex Mono"/>
               </a:rPr>
-              <a:t>21 / 33</a:t>
+              <a:t>21 / 32</a:t>
             </a:r>
           </a:p>
         </p:txBody>
@@ -27706,41 +27285,6 @@
         <p:spPr>
           <a:xfrm>
             <a:off x="10572750" y="6273800"/>
-            <a:ext cx="0" cy="76200"/>
-          </a:xfrm>
-          <a:prstGeom prst="line">
-            <a:avLst/>
-          </a:prstGeom>
-          <a:ln w="12700">
-            <a:solidFill>
-              <a:srgbClr val="3B5A85"/>
-            </a:solidFill>
-          </a:ln>
-        </p:spPr>
-        <p:style>
-          <a:lnRef idx="2">
-            <a:schemeClr val="accent1"/>
-          </a:lnRef>
-          <a:fillRef idx="0">
-            <a:schemeClr val="accent1"/>
-          </a:fillRef>
-          <a:effectRef idx="1">
-            <a:schemeClr val="accent1"/>
-          </a:effectRef>
-          <a:fontRef idx="minor">
-            <a:schemeClr val="tx1"/>
-          </a:fontRef>
-        </p:style>
-      </p:cxnSp>
-      <p:cxnSp>
-        <p:nvCxnSpPr>
-          <p:cNvPr id="51" name="motif-line-tick-33"/>
-          <p:cNvCxnSpPr/>
-          <p:nvPr/>
-        </p:nvCxnSpPr>
-        <p:spPr>
-          <a:xfrm>
-            <a:off x="10668000" y="6273800"/>
             <a:ext cx="0" cy="76200"/>
           </a:xfrm>
           <a:prstGeom prst="line">
@@ -28401,7 +27945,7 @@
                 </a:solidFill>
                 <a:latin typeface="IBM Plex Mono"/>
               </a:rPr>
-              <a:t>22 / 33</a:t>
+              <a:t>22 / 32</a:t>
             </a:r>
           </a:p>
         </p:txBody>
@@ -29539,41 +29083,6 @@
         <p:spPr>
           <a:xfrm>
             <a:off x="10572750" y="6273800"/>
-            <a:ext cx="0" cy="76200"/>
-          </a:xfrm>
-          <a:prstGeom prst="line">
-            <a:avLst/>
-          </a:prstGeom>
-          <a:ln w="12700">
-            <a:solidFill>
-              <a:srgbClr val="3B5A85"/>
-            </a:solidFill>
-          </a:ln>
-        </p:spPr>
-        <p:style>
-          <a:lnRef idx="2">
-            <a:schemeClr val="accent1"/>
-          </a:lnRef>
-          <a:fillRef idx="0">
-            <a:schemeClr val="accent1"/>
-          </a:fillRef>
-          <a:effectRef idx="1">
-            <a:schemeClr val="accent1"/>
-          </a:effectRef>
-          <a:fontRef idx="minor">
-            <a:schemeClr val="tx1"/>
-          </a:fontRef>
-        </p:style>
-      </p:cxnSp>
-      <p:cxnSp>
-        <p:nvCxnSpPr>
-          <p:cNvPr id="52" name="motif-line-tick-33"/>
-          <p:cNvCxnSpPr/>
-          <p:nvPr/>
-        </p:nvCxnSpPr>
-        <p:spPr>
-          <a:xfrm>
-            <a:off x="10668000" y="6273800"/>
             <a:ext cx="0" cy="76200"/>
           </a:xfrm>
           <a:prstGeom prst="line">
@@ -30195,7 +29704,7 @@
                 </a:solidFill>
                 <a:latin typeface="IBM Plex Mono"/>
               </a:rPr>
-              <a:t>23 / 33</a:t>
+              <a:t>23 / 32</a:t>
             </a:r>
           </a:p>
         </p:txBody>
@@ -31333,41 +30842,6 @@
         <p:spPr>
           <a:xfrm>
             <a:off x="10572750" y="6273800"/>
-            <a:ext cx="0" cy="76200"/>
-          </a:xfrm>
-          <a:prstGeom prst="line">
-            <a:avLst/>
-          </a:prstGeom>
-          <a:ln w="12700">
-            <a:solidFill>
-              <a:srgbClr val="3B5A85"/>
-            </a:solidFill>
-          </a:ln>
-        </p:spPr>
-        <p:style>
-          <a:lnRef idx="2">
-            <a:schemeClr val="accent1"/>
-          </a:lnRef>
-          <a:fillRef idx="0">
-            <a:schemeClr val="accent1"/>
-          </a:fillRef>
-          <a:effectRef idx="1">
-            <a:schemeClr val="accent1"/>
-          </a:effectRef>
-          <a:fontRef idx="minor">
-            <a:schemeClr val="tx1"/>
-          </a:fontRef>
-        </p:style>
-      </p:cxnSp>
-      <p:cxnSp>
-        <p:nvCxnSpPr>
-          <p:cNvPr id="51" name="motif-line-tick-33"/>
-          <p:cNvCxnSpPr/>
-          <p:nvPr/>
-        </p:nvCxnSpPr>
-        <p:spPr>
-          <a:xfrm>
-            <a:off x="10668000" y="6273800"/>
             <a:ext cx="0" cy="76200"/>
           </a:xfrm>
           <a:prstGeom prst="line">
@@ -32067,7 +31541,7 @@
                 </a:solidFill>
                 <a:latin typeface="IBM Plex Mono"/>
               </a:rPr>
-              <a:t>24 / 33</a:t>
+              <a:t>24 / 32</a:t>
             </a:r>
           </a:p>
         </p:txBody>
@@ -33205,41 +32679,6 @@
         <p:spPr>
           <a:xfrm>
             <a:off x="10572750" y="6273800"/>
-            <a:ext cx="0" cy="76200"/>
-          </a:xfrm>
-          <a:prstGeom prst="line">
-            <a:avLst/>
-          </a:prstGeom>
-          <a:ln w="12700">
-            <a:solidFill>
-              <a:srgbClr val="3B5A85"/>
-            </a:solidFill>
-          </a:ln>
-        </p:spPr>
-        <p:style>
-          <a:lnRef idx="2">
-            <a:schemeClr val="accent1"/>
-          </a:lnRef>
-          <a:fillRef idx="0">
-            <a:schemeClr val="accent1"/>
-          </a:fillRef>
-          <a:effectRef idx="1">
-            <a:schemeClr val="accent1"/>
-          </a:effectRef>
-          <a:fontRef idx="minor">
-            <a:schemeClr val="tx1"/>
-          </a:fontRef>
-        </p:style>
-      </p:cxnSp>
-      <p:cxnSp>
-        <p:nvCxnSpPr>
-          <p:cNvPr id="53" name="motif-line-tick-33"/>
-          <p:cNvCxnSpPr/>
-          <p:nvPr/>
-        </p:nvCxnSpPr>
-        <p:spPr>
-          <a:xfrm>
-            <a:off x="10668000" y="6273800"/>
             <a:ext cx="0" cy="76200"/>
           </a:xfrm>
           <a:prstGeom prst="line">
@@ -33900,7 +33339,7 @@
                 </a:solidFill>
                 <a:latin typeface="IBM Plex Mono"/>
               </a:rPr>
-              <a:t>25 / 33</a:t>
+              <a:t>25 / 32</a:t>
             </a:r>
           </a:p>
         </p:txBody>
@@ -35038,41 +34477,6 @@
         <p:spPr>
           <a:xfrm>
             <a:off x="10572750" y="6273800"/>
-            <a:ext cx="0" cy="76200"/>
-          </a:xfrm>
-          <a:prstGeom prst="line">
-            <a:avLst/>
-          </a:prstGeom>
-          <a:ln w="12700">
-            <a:solidFill>
-              <a:srgbClr val="3B5A85"/>
-            </a:solidFill>
-          </a:ln>
-        </p:spPr>
-        <p:style>
-          <a:lnRef idx="2">
-            <a:schemeClr val="accent1"/>
-          </a:lnRef>
-          <a:fillRef idx="0">
-            <a:schemeClr val="accent1"/>
-          </a:fillRef>
-          <a:effectRef idx="1">
-            <a:schemeClr val="accent1"/>
-          </a:effectRef>
-          <a:fontRef idx="minor">
-            <a:schemeClr val="tx1"/>
-          </a:fontRef>
-        </p:style>
-      </p:cxnSp>
-      <p:cxnSp>
-        <p:nvCxnSpPr>
-          <p:cNvPr id="52" name="motif-line-tick-33"/>
-          <p:cNvCxnSpPr/>
-          <p:nvPr/>
-        </p:nvCxnSpPr>
-        <p:spPr>
-          <a:xfrm>
-            <a:off x="10668000" y="6273800"/>
             <a:ext cx="0" cy="76200"/>
           </a:xfrm>
           <a:prstGeom prst="line">
@@ -35772,7 +35176,7 @@
                 </a:solidFill>
                 <a:latin typeface="IBM Plex Mono"/>
               </a:rPr>
-              <a:t>26 / 33</a:t>
+              <a:t>26 / 32</a:t>
             </a:r>
           </a:p>
         </p:txBody>
@@ -36910,41 +36314,6 @@
         <p:spPr>
           <a:xfrm>
             <a:off x="10572750" y="6273800"/>
-            <a:ext cx="0" cy="76200"/>
-          </a:xfrm>
-          <a:prstGeom prst="line">
-            <a:avLst/>
-          </a:prstGeom>
-          <a:ln w="12700">
-            <a:solidFill>
-              <a:srgbClr val="3B5A85"/>
-            </a:solidFill>
-          </a:ln>
-        </p:spPr>
-        <p:style>
-          <a:lnRef idx="2">
-            <a:schemeClr val="accent1"/>
-          </a:lnRef>
-          <a:fillRef idx="0">
-            <a:schemeClr val="accent1"/>
-          </a:fillRef>
-          <a:effectRef idx="1">
-            <a:schemeClr val="accent1"/>
-          </a:effectRef>
-          <a:fontRef idx="minor">
-            <a:schemeClr val="tx1"/>
-          </a:fontRef>
-        </p:style>
-      </p:cxnSp>
-      <p:cxnSp>
-        <p:nvCxnSpPr>
-          <p:cNvPr id="53" name="motif-line-tick-33"/>
-          <p:cNvCxnSpPr/>
-          <p:nvPr/>
-        </p:nvCxnSpPr>
-        <p:spPr>
-          <a:xfrm>
-            <a:off x="10668000" y="6273800"/>
             <a:ext cx="0" cy="76200"/>
           </a:xfrm>
           <a:prstGeom prst="line">
@@ -38158,7 +37527,7 @@
         </p:nvSpPr>
         <p:spPr>
           <a:xfrm>
-            <a:off x="762000" y="1197610"/>
+            <a:off x="762000" y="1410970"/>
             <a:ext cx="5588000" cy="320040"/>
           </a:xfrm>
           <a:prstGeom prst="rect">
@@ -38197,7 +37566,7 @@
         </p:nvCxnSpPr>
         <p:spPr>
           <a:xfrm>
-            <a:off x="762000" y="1644650"/>
+            <a:off x="762000" y="1858010"/>
             <a:ext cx="304800" cy="0"/>
           </a:xfrm>
           <a:prstGeom prst="line">
@@ -38232,7 +37601,7 @@
         </p:nvSpPr>
         <p:spPr>
           <a:xfrm>
-            <a:off x="762000" y="1771650"/>
+            <a:off x="762000" y="1985010"/>
             <a:ext cx="5588000" cy="2844800"/>
           </a:xfrm>
           <a:prstGeom prst="rect">
@@ -38271,8 +37640,8 @@
         </p:nvSpPr>
         <p:spPr>
           <a:xfrm>
-            <a:off x="762000" y="4806950"/>
-            <a:ext cx="5588000" cy="853439"/>
+            <a:off x="762000" y="5020310"/>
+            <a:ext cx="5588000" cy="426719"/>
           </a:xfrm>
           <a:prstGeom prst="rect">
             <a:avLst/>
@@ -38297,7 +37666,7 @@
                 </a:solidFill>
                 <a:latin typeface="Plus Jakarta Sans"/>
               </a:rPr>
-              <a:t>What the bank's website team can do with this</a:t>
+              <a:t>On the bank's website, and beyond it</a:t>
             </a:r>
           </a:p>
         </p:txBody>
@@ -38337,7 +37706,7 @@
         <p:spPr>
           <a:xfrm>
             <a:off x="762000" y="952500"/>
-            <a:ext cx="10668000" cy="604519"/>
+            <a:ext cx="10668000" cy="1209039"/>
           </a:xfrm>
           <a:prstGeom prst="rect">
             <a:avLst/>
@@ -38362,7 +37731,7 @@
                 </a:solidFill>
                 <a:latin typeface="Plus Jakarta Sans"/>
               </a:rPr>
-              <a:t>For the SEO strategist</a:t>
+              <a:t>On the website: ChatGPT took 64% of its citations from bank sites</a:t>
             </a:r>
           </a:p>
         </p:txBody>
@@ -38375,7 +37744,7 @@
         </p:nvSpPr>
         <p:spPr>
           <a:xfrm>
-            <a:off x="762000" y="1804670"/>
+            <a:off x="762000" y="2409190"/>
             <a:ext cx="381000" cy="266700"/>
           </a:xfrm>
           <a:prstGeom prst="rect">
@@ -38414,8 +37783,8 @@
         </p:nvSpPr>
         <p:spPr>
           <a:xfrm>
-            <a:off x="1524000" y="1760220"/>
-            <a:ext cx="9906000" cy="1066800"/>
+            <a:off x="1524000" y="2364740"/>
+            <a:ext cx="9906000" cy="711200"/>
           </a:xfrm>
           <a:prstGeom prst="rect">
             <a:avLst/>
@@ -38440,7 +37809,7 @@
                 </a:solidFill>
                 <a:latin typeface="Plus Jakarta Sans"/>
               </a:rPr>
-              <a:t>Measure AI answers as a channel of their own. Google rank is a weak proxy: 12% of URLs cited by AI assistants rank in Google's top 10 for the same query (Ahrefs).</a:t>
+              <a:t>Keep fee and rate pages current and dated. ChatGPT cited SeaBank's fees page 5 times and blu's 4 times.</a:t>
             </a:r>
           </a:p>
         </p:txBody>
@@ -38453,7 +37822,7 @@
         </p:nvSpPr>
         <p:spPr>
           <a:xfrm>
-            <a:off x="762000" y="2985770"/>
+            <a:off x="762000" y="3234690"/>
             <a:ext cx="381000" cy="266700"/>
           </a:xfrm>
           <a:prstGeom prst="rect">
@@ -38492,7 +37861,7 @@
         </p:nvSpPr>
         <p:spPr>
           <a:xfrm>
-            <a:off x="1524000" y="2941320"/>
+            <a:off x="1524000" y="3190240"/>
             <a:ext cx="9906000" cy="711200"/>
           </a:xfrm>
           <a:prstGeom prst="rect">
@@ -38518,7 +37887,7 @@
                 </a:solidFill>
                 <a:latin typeface="Plus Jakarta Sans"/>
               </a:rPr>
-              <a:t>Report ChatGPT and Gemini separately. ChatGPT took 64% of its citations from bank websites, Gemini 29%. A blended figure would hide that gap.</a:t>
+              <a:t>Publish explainers for how-to questions on deposit insurance, scams and complaints. Only 1 of 6 how-to answers named a bank.</a:t>
             </a:r>
           </a:p>
         </p:txBody>
@@ -38531,7 +37900,7 @@
         </p:nvSpPr>
         <p:spPr>
           <a:xfrm>
-            <a:off x="762000" y="3811270"/>
+            <a:off x="762000" y="4060190"/>
             <a:ext cx="381000" cy="266700"/>
           </a:xfrm>
           <a:prstGeom prst="rect">
@@ -38570,7 +37939,7 @@
         </p:nvSpPr>
         <p:spPr>
           <a:xfrm>
-            <a:off x="1524000" y="3766820"/>
+            <a:off x="1524000" y="4015740"/>
             <a:ext cx="9906000" cy="711200"/>
           </a:xfrm>
           <a:prstGeom prst="rect">
@@ -38596,7 +37965,7 @@
                 </a:solidFill>
                 <a:latin typeface="Plus Jakarta Sans"/>
               </a:rPr>
-              <a:t>Track pages, not only domains. The engines cited 21 of the same 97 sites but only 11 of the same 243 pages.</a:t>
+              <a:t>Put the answer and its figure at the top of each page, in the HTML the server sends. 12 cited bank pages showed text only after JavaScript ran.</a:t>
             </a:r>
           </a:p>
         </p:txBody>
@@ -38609,7 +37978,7 @@
         </p:nvSpPr>
         <p:spPr>
           <a:xfrm>
-            <a:off x="762000" y="4636770"/>
+            <a:off x="762000" y="4885690"/>
             <a:ext cx="381000" cy="266700"/>
           </a:xfrm>
           <a:prstGeom prst="rect">
@@ -38648,7 +38017,7 @@
         </p:nvSpPr>
         <p:spPr>
           <a:xfrm>
-            <a:off x="1524000" y="4592320"/>
+            <a:off x="1524000" y="4841240"/>
             <a:ext cx="9906000" cy="711200"/>
           </a:xfrm>
           <a:prstGeom prst="rect">
@@ -38674,7 +38043,7 @@
                 </a:solidFill>
                 <a:latin typeface="Plus Jakarta Sans"/>
               </a:rPr>
-              <a:t>Run a fixed set of customer questions in both engines every month, in Bahasa Indonesia. This study is one run of 20 questions, so treat it as the baseline.</a:t>
+              <a:t>Keep cited pages live. Gemini cited 2 broken bank pages 4 times. OpenAI says sites blocking OAI-SearchBot do not appear in ChatGPT search answers.</a:t>
             </a:r>
           </a:p>
         </p:txBody>
@@ -38687,8 +38056,8 @@
         </p:nvCxnSpPr>
         <p:spPr>
           <a:xfrm>
-            <a:off x="1282700" y="1823720"/>
-            <a:ext cx="0" cy="3060700"/>
+            <a:off x="1282700" y="2428240"/>
+            <a:ext cx="0" cy="2705100"/>
           </a:xfrm>
           <a:prstGeom prst="line">
             <a:avLst/>
@@ -38722,7 +38091,7 @@
         </p:nvCxnSpPr>
         <p:spPr>
           <a:xfrm>
-            <a:off x="1238250" y="1938020"/>
+            <a:off x="1238250" y="2542540"/>
             <a:ext cx="88900" cy="0"/>
           </a:xfrm>
           <a:prstGeom prst="line">
@@ -38757,7 +38126,7 @@
         </p:nvCxnSpPr>
         <p:spPr>
           <a:xfrm>
-            <a:off x="1238250" y="3119120"/>
+            <a:off x="1238250" y="3368040"/>
             <a:ext cx="88900" cy="0"/>
           </a:xfrm>
           <a:prstGeom prst="line">
@@ -38792,7 +38161,7 @@
         </p:nvCxnSpPr>
         <p:spPr>
           <a:xfrm>
-            <a:off x="1238250" y="3944620"/>
+            <a:off x="1238250" y="4193540"/>
             <a:ext cx="88900" cy="0"/>
           </a:xfrm>
           <a:prstGeom prst="line">
@@ -38827,7 +38196,7 @@
         </p:nvCxnSpPr>
         <p:spPr>
           <a:xfrm>
-            <a:off x="1238250" y="4770120"/>
+            <a:off x="1238250" y="5019040"/>
             <a:ext cx="88900" cy="0"/>
           </a:xfrm>
           <a:prstGeom prst="line">
@@ -38997,7 +38366,7 @@
                 </a:solidFill>
                 <a:latin typeface="IBM Plex Mono"/>
               </a:rPr>
-              <a:t>28 / 33</a:t>
+              <a:t>28 / 32</a:t>
             </a:r>
           </a:p>
         </p:txBody>
@@ -39011,7 +38380,7 @@
         <p:spPr>
           <a:xfrm>
             <a:off x="762000" y="6159500"/>
-            <a:ext cx="6604000" cy="177800"/>
+            <a:ext cx="6604000" cy="355600"/>
           </a:xfrm>
           <a:prstGeom prst="rect">
             <a:avLst/>
@@ -39036,7 +38405,7 @@
                 </a:solidFill>
                 <a:latin typeface="IBM Plex Mono"/>
               </a:rPr>
-              <a:t>Source: data/interim/citations.csv. Ahrefs, AI search overlap with Google results</a:t>
+              <a:t>Source: data/interim/citations.csv, pages.csv, data/processed/no_brand_rate.csv, crawled on 9 October 2026. OpenAI, Overview of OpenAI crawlers</a:t>
             </a:r>
           </a:p>
         </p:txBody>
@@ -40135,41 +39504,6 @@
         <p:spPr>
           <a:xfrm>
             <a:off x="10572750" y="6273800"/>
-            <a:ext cx="0" cy="76200"/>
-          </a:xfrm>
-          <a:prstGeom prst="line">
-            <a:avLst/>
-          </a:prstGeom>
-          <a:ln w="12700">
-            <a:solidFill>
-              <a:srgbClr val="3B5A85"/>
-            </a:solidFill>
-          </a:ln>
-        </p:spPr>
-        <p:style>
-          <a:lnRef idx="2">
-            <a:schemeClr val="accent1"/>
-          </a:lnRef>
-          <a:fillRef idx="0">
-            <a:schemeClr val="accent1"/>
-          </a:fillRef>
-          <a:effectRef idx="1">
-            <a:schemeClr val="accent1"/>
-          </a:effectRef>
-          <a:fontRef idx="minor">
-            <a:schemeClr val="tx1"/>
-          </a:fontRef>
-        </p:style>
-      </p:cxnSp>
-      <p:cxnSp>
-        <p:nvCxnSpPr>
-          <p:cNvPr id="53" name="motif-line-tick-33"/>
-          <p:cNvCxnSpPr/>
-          <p:nvPr/>
-        </p:nvCxnSpPr>
-        <p:spPr>
-          <a:xfrm>
-            <a:off x="10668000" y="6273800"/>
             <a:ext cx="0" cy="76200"/>
           </a:xfrm>
           <a:prstGeom prst="line">
@@ -40231,7 +39565,7 @@
         <p:spPr>
           <a:xfrm>
             <a:off x="762000" y="952500"/>
-            <a:ext cx="10668000" cy="604519"/>
+            <a:ext cx="10668000" cy="1209039"/>
           </a:xfrm>
           <a:prstGeom prst="rect">
             <a:avLst/>
@@ -40256,7 +39590,7 @@
                 </a:solidFill>
                 <a:latin typeface="Plus Jakarta Sans"/>
               </a:rPr>
-              <a:t>For content and marketing</a:t>
+              <a:t>Beyond the website: Gemini took 71% of its citations elsewhere</a:t>
             </a:r>
           </a:p>
         </p:txBody>
@@ -40269,7 +39603,7 @@
         </p:nvSpPr>
         <p:spPr>
           <a:xfrm>
-            <a:off x="762000" y="1806892"/>
+            <a:off x="762000" y="2409190"/>
             <a:ext cx="381000" cy="266700"/>
           </a:xfrm>
           <a:prstGeom prst="rect">
@@ -40308,8 +39642,8 @@
         </p:nvSpPr>
         <p:spPr>
           <a:xfrm>
-            <a:off x="1524000" y="1760220"/>
-            <a:ext cx="9906000" cy="746760"/>
+            <a:off x="1524000" y="2364740"/>
+            <a:ext cx="9906000" cy="1066800"/>
           </a:xfrm>
           <a:prstGeom prst="rect">
             <a:avLst/>
@@ -40328,13 +39662,13 @@
               </a:lnSpc>
             </a:pPr>
             <a:r>
-              <a:rPr sz="2100" b="0">
+              <a:rPr sz="2000" b="0">
                 <a:solidFill>
                   <a:srgbClr val="F4F6FA"/>
                 </a:solidFill>
                 <a:latin typeface="Plus Jakarta Sans"/>
               </a:rPr>
-              <a:t>Keep fee and rate pages complete and current. ChatGPT cited SeaBank's fees page 5 times and blu's 4 times, by URL.</a:t>
+              <a:t>Send corrections to the comparison articles Gemini cites when a fact about your bank is out of date. One Akulaku article appeared in 14 of Gemini's 20 answers.</a:t>
             </a:r>
           </a:p>
         </p:txBody>
@@ -40347,7 +39681,7 @@
         </p:nvSpPr>
         <p:spPr>
           <a:xfrm>
-            <a:off x="762000" y="2693352"/>
+            <a:off x="762000" y="3552190"/>
             <a:ext cx="381000" cy="266700"/>
           </a:xfrm>
           <a:prstGeom prst="rect">
@@ -40386,8 +39720,8 @@
         </p:nvSpPr>
         <p:spPr>
           <a:xfrm>
-            <a:off x="1524000" y="2646679"/>
-            <a:ext cx="9906000" cy="746760"/>
+            <a:off x="1524000" y="3507740"/>
+            <a:ext cx="9906000" cy="1066800"/>
           </a:xfrm>
           <a:prstGeom prst="rect">
             <a:avLst/>
@@ -40406,13 +39740,13 @@
               </a:lnSpc>
             </a:pPr>
             <a:r>
-              <a:rPr sz="2100" b="0">
+              <a:rPr sz="2000" b="0">
                 <a:solidFill>
                   <a:srgbClr val="F4F6FA"/>
                 </a:solidFill>
                 <a:latin typeface="Plus Jakarta Sans"/>
               </a:rPr>
-              <a:t>Write explainers for how-to questions on deposit insurance, scams and complaints. Only 1 of 6 how-to answers named a bank.</a:t>
+              <a:t>Put part of the media budget on fintech platforms, comparison blogs and news sites, which took 61% of Gemini's citations. Ask for a dated product entry and label paid placements as sponsored.</a:t>
             </a:r>
           </a:p>
         </p:txBody>
@@ -40425,7 +39759,7 @@
         </p:nvSpPr>
         <p:spPr>
           <a:xfrm>
-            <a:off x="762000" y="3579812"/>
+            <a:off x="762000" y="4695190"/>
             <a:ext cx="381000" cy="266700"/>
           </a:xfrm>
           <a:prstGeom prst="rect">
@@ -40464,8 +39798,8 @@
         </p:nvSpPr>
         <p:spPr>
           <a:xfrm>
-            <a:off x="1524000" y="3533140"/>
-            <a:ext cx="9906000" cy="1120139"/>
+            <a:off x="1524000" y="4650740"/>
+            <a:ext cx="9906000" cy="1066800"/>
           </a:xfrm>
           <a:prstGeom prst="rect">
             <a:avLst/>
@@ -40484,308 +39818,195 @@
               </a:lnSpc>
             </a:pPr>
             <a:r>
-              <a:rPr sz="2100" b="0">
+              <a:rPr sz="2000" b="0">
                 <a:solidFill>
                   <a:srgbClr val="F4F6FA"/>
                 </a:solidFill>
                 <a:latin typeface="Plus Jakarta Sans"/>
               </a:rPr>
-              <a:t>Read the comparison articles Gemini cites and send their publishers corrections when a fact about your bank is out of date. One Akulaku article appeared in 14 of Gemini's 20 answers.</a:t>
+              <a:t>Write articles with quotations and statistics from named sources. In the GEO study, quotations raised a page's PAWC by 41% and statistics by about 31%. Keyword stuffing lowered it.</a:t>
             </a:r>
           </a:p>
         </p:txBody>
       </p:sp>
+      <p:cxnSp>
+        <p:nvCxnSpPr>
+          <p:cNvPr id="9" name="motif-line-rail"/>
+          <p:cNvCxnSpPr/>
+          <p:nvPr/>
+        </p:nvCxnSpPr>
+        <p:spPr>
+          <a:xfrm>
+            <a:off x="1282700" y="2428240"/>
+            <a:ext cx="0" cy="2514600"/>
+          </a:xfrm>
+          <a:prstGeom prst="line">
+            <a:avLst/>
+          </a:prstGeom>
+          <a:ln w="12700">
+            <a:solidFill>
+              <a:srgbClr val="3B5A85"/>
+            </a:solidFill>
+          </a:ln>
+        </p:spPr>
+        <p:style>
+          <a:lnRef idx="2">
+            <a:schemeClr val="accent1"/>
+          </a:lnRef>
+          <a:fillRef idx="0">
+            <a:schemeClr val="accent1"/>
+          </a:fillRef>
+          <a:effectRef idx="1">
+            <a:schemeClr val="accent1"/>
+          </a:effectRef>
+          <a:fontRef idx="minor">
+            <a:schemeClr val="tx1"/>
+          </a:fontRef>
+        </p:style>
+      </p:cxnSp>
+      <p:cxnSp>
+        <p:nvCxnSpPr>
+          <p:cNvPr id="10" name="motif-line-stop-1"/>
+          <p:cNvCxnSpPr/>
+          <p:nvPr/>
+        </p:nvCxnSpPr>
+        <p:spPr>
+          <a:xfrm>
+            <a:off x="1238250" y="2542540"/>
+            <a:ext cx="88900" cy="0"/>
+          </a:xfrm>
+          <a:prstGeom prst="line">
+            <a:avLst/>
+          </a:prstGeom>
+          <a:ln w="19050">
+            <a:solidFill>
+              <a:srgbClr val="7FC0F5"/>
+            </a:solidFill>
+          </a:ln>
+        </p:spPr>
+        <p:style>
+          <a:lnRef idx="2">
+            <a:schemeClr val="accent1"/>
+          </a:lnRef>
+          <a:fillRef idx="0">
+            <a:schemeClr val="accent1"/>
+          </a:fillRef>
+          <a:effectRef idx="1">
+            <a:schemeClr val="accent1"/>
+          </a:effectRef>
+          <a:fontRef idx="minor">
+            <a:schemeClr val="tx1"/>
+          </a:fontRef>
+        </p:style>
+      </p:cxnSp>
+      <p:cxnSp>
+        <p:nvCxnSpPr>
+          <p:cNvPr id="11" name="motif-line-stop-2"/>
+          <p:cNvCxnSpPr/>
+          <p:nvPr/>
+        </p:nvCxnSpPr>
+        <p:spPr>
+          <a:xfrm>
+            <a:off x="1238250" y="3685540"/>
+            <a:ext cx="88900" cy="0"/>
+          </a:xfrm>
+          <a:prstGeom prst="line">
+            <a:avLst/>
+          </a:prstGeom>
+          <a:ln w="19050">
+            <a:solidFill>
+              <a:srgbClr val="7FC0F5"/>
+            </a:solidFill>
+          </a:ln>
+        </p:spPr>
+        <p:style>
+          <a:lnRef idx="2">
+            <a:schemeClr val="accent1"/>
+          </a:lnRef>
+          <a:fillRef idx="0">
+            <a:schemeClr val="accent1"/>
+          </a:fillRef>
+          <a:effectRef idx="1">
+            <a:schemeClr val="accent1"/>
+          </a:effectRef>
+          <a:fontRef idx="minor">
+            <a:schemeClr val="tx1"/>
+          </a:fontRef>
+        </p:style>
+      </p:cxnSp>
+      <p:cxnSp>
+        <p:nvCxnSpPr>
+          <p:cNvPr id="12" name="motif-line-stop-3"/>
+          <p:cNvCxnSpPr/>
+          <p:nvPr/>
+        </p:nvCxnSpPr>
+        <p:spPr>
+          <a:xfrm>
+            <a:off x="1238250" y="4828540"/>
+            <a:ext cx="88900" cy="0"/>
+          </a:xfrm>
+          <a:prstGeom prst="line">
+            <a:avLst/>
+          </a:prstGeom>
+          <a:ln w="19050">
+            <a:solidFill>
+              <a:srgbClr val="7FC0F5"/>
+            </a:solidFill>
+          </a:ln>
+        </p:spPr>
+        <p:style>
+          <a:lnRef idx="2">
+            <a:schemeClr val="accent1"/>
+          </a:lnRef>
+          <a:fillRef idx="0">
+            <a:schemeClr val="accent1"/>
+          </a:fillRef>
+          <a:effectRef idx="1">
+            <a:schemeClr val="accent1"/>
+          </a:effectRef>
+          <a:fontRef idx="minor">
+            <a:schemeClr val="tx1"/>
+          </a:fontRef>
+        </p:style>
+      </p:cxnSp>
+      <p:cxnSp>
+        <p:nvCxnSpPr>
+          <p:cNvPr id="13" name="motif-line-mark"/>
+          <p:cNvCxnSpPr/>
+          <p:nvPr/>
+        </p:nvCxnSpPr>
+        <p:spPr>
+          <a:xfrm>
+            <a:off x="762000" y="546100"/>
+            <a:ext cx="203200" cy="0"/>
+          </a:xfrm>
+          <a:prstGeom prst="line">
+            <a:avLst/>
+          </a:prstGeom>
+          <a:ln w="25400">
+            <a:solidFill>
+              <a:srgbClr val="7FC0F5"/>
+            </a:solidFill>
+          </a:ln>
+        </p:spPr>
+        <p:style>
+          <a:lnRef idx="2">
+            <a:schemeClr val="accent1"/>
+          </a:lnRef>
+          <a:fillRef idx="0">
+            <a:schemeClr val="accent1"/>
+          </a:fillRef>
+          <a:effectRef idx="1">
+            <a:schemeClr val="accent1"/>
+          </a:effectRef>
+          <a:fontRef idx="minor">
+            <a:schemeClr val="tx1"/>
+          </a:fontRef>
+        </p:style>
+      </p:cxnSp>
       <p:sp>
         <p:nvSpPr>
-          <p:cNvPr id="9" name="TextBox 8"/>
-          <p:cNvSpPr txBox="1"/>
-          <p:nvPr/>
-        </p:nvSpPr>
-        <p:spPr>
-          <a:xfrm>
-            <a:off x="762000" y="4839652"/>
-            <a:ext cx="381000" cy="266700"/>
-          </a:xfrm>
-          <a:prstGeom prst="rect">
-            <a:avLst/>
-          </a:prstGeom>
-          <a:noFill/>
-        </p:spPr>
-        <p:txBody>
-          <a:bodyPr wrap="square" lIns="0" rIns="0" tIns="0" bIns="0" anchor="t">
-            <a:spAutoFit/>
-          </a:bodyPr>
-          <a:lstStyle/>
-          <a:p>
-            <a:pPr algn="l">
-              <a:lnSpc>
-                <a:spcPct val="115000"/>
-              </a:lnSpc>
-            </a:pPr>
-            <a:r>
-              <a:rPr sz="1500" b="0">
-                <a:solidFill>
-                  <a:srgbClr val="7FC0F5"/>
-                </a:solidFill>
-                <a:latin typeface="IBM Plex Mono"/>
-              </a:rPr>
-              <a:t>04</a:t>
-            </a:r>
-          </a:p>
-        </p:txBody>
-      </p:sp>
-      <p:sp>
-        <p:nvSpPr>
-          <p:cNvPr id="10" name="TextBox 9"/>
-          <p:cNvSpPr txBox="1"/>
-          <p:nvPr/>
-        </p:nvSpPr>
-        <p:spPr>
-          <a:xfrm>
-            <a:off x="1524000" y="4792980"/>
-            <a:ext cx="9906000" cy="746760"/>
-          </a:xfrm>
-          <a:prstGeom prst="rect">
-            <a:avLst/>
-          </a:prstGeom>
-          <a:noFill/>
-        </p:spPr>
-        <p:txBody>
-          <a:bodyPr wrap="square" lIns="0" rIns="0" tIns="0" bIns="0" anchor="t">
-            <a:spAutoFit/>
-          </a:bodyPr>
-          <a:lstStyle/>
-          <a:p>
-            <a:pPr algn="l">
-              <a:lnSpc>
-                <a:spcPct val="115000"/>
-              </a:lnSpc>
-            </a:pPr>
-            <a:r>
-              <a:rPr sz="2100" b="0">
-                <a:solidFill>
-                  <a:srgbClr val="F4F6FA"/>
-                </a:solidFill>
-                <a:latin typeface="Plus Jakarta Sans"/>
-              </a:rPr>
-              <a:t>Report how often the bank is named before reporting tone. Of 137 answer and bank pairs, none was negative.</a:t>
-            </a:r>
-          </a:p>
-        </p:txBody>
-      </p:sp>
-      <p:cxnSp>
-        <p:nvCxnSpPr>
-          <p:cNvPr id="11" name="motif-line-rail"/>
-          <p:cNvCxnSpPr/>
-          <p:nvPr/>
-        </p:nvCxnSpPr>
-        <p:spPr>
-          <a:xfrm>
-            <a:off x="1282700" y="1832609"/>
-            <a:ext cx="0" cy="3261361"/>
-          </a:xfrm>
-          <a:prstGeom prst="line">
-            <a:avLst/>
-          </a:prstGeom>
-          <a:ln w="12700">
-            <a:solidFill>
-              <a:srgbClr val="3B5A85"/>
-            </a:solidFill>
-          </a:ln>
-        </p:spPr>
-        <p:style>
-          <a:lnRef idx="2">
-            <a:schemeClr val="accent1"/>
-          </a:lnRef>
-          <a:fillRef idx="0">
-            <a:schemeClr val="accent1"/>
-          </a:fillRef>
-          <a:effectRef idx="1">
-            <a:schemeClr val="accent1"/>
-          </a:effectRef>
-          <a:fontRef idx="minor">
-            <a:schemeClr val="tx1"/>
-          </a:fontRef>
-        </p:style>
-      </p:cxnSp>
-      <p:cxnSp>
-        <p:nvCxnSpPr>
-          <p:cNvPr id="12" name="motif-line-stop-1"/>
-          <p:cNvCxnSpPr/>
-          <p:nvPr/>
-        </p:nvCxnSpPr>
-        <p:spPr>
-          <a:xfrm>
-            <a:off x="1238250" y="1946909"/>
-            <a:ext cx="88900" cy="0"/>
-          </a:xfrm>
-          <a:prstGeom prst="line">
-            <a:avLst/>
-          </a:prstGeom>
-          <a:ln w="19050">
-            <a:solidFill>
-              <a:srgbClr val="7FC0F5"/>
-            </a:solidFill>
-          </a:ln>
-        </p:spPr>
-        <p:style>
-          <a:lnRef idx="2">
-            <a:schemeClr val="accent1"/>
-          </a:lnRef>
-          <a:fillRef idx="0">
-            <a:schemeClr val="accent1"/>
-          </a:fillRef>
-          <a:effectRef idx="1">
-            <a:schemeClr val="accent1"/>
-          </a:effectRef>
-          <a:fontRef idx="minor">
-            <a:schemeClr val="tx1"/>
-          </a:fontRef>
-        </p:style>
-      </p:cxnSp>
-      <p:cxnSp>
-        <p:nvCxnSpPr>
-          <p:cNvPr id="13" name="motif-line-stop-2"/>
-          <p:cNvCxnSpPr/>
-          <p:nvPr/>
-        </p:nvCxnSpPr>
-        <p:spPr>
-          <a:xfrm>
-            <a:off x="1238250" y="2833369"/>
-            <a:ext cx="88900" cy="0"/>
-          </a:xfrm>
-          <a:prstGeom prst="line">
-            <a:avLst/>
-          </a:prstGeom>
-          <a:ln w="19050">
-            <a:solidFill>
-              <a:srgbClr val="7FC0F5"/>
-            </a:solidFill>
-          </a:ln>
-        </p:spPr>
-        <p:style>
-          <a:lnRef idx="2">
-            <a:schemeClr val="accent1"/>
-          </a:lnRef>
-          <a:fillRef idx="0">
-            <a:schemeClr val="accent1"/>
-          </a:fillRef>
-          <a:effectRef idx="1">
-            <a:schemeClr val="accent1"/>
-          </a:effectRef>
-          <a:fontRef idx="minor">
-            <a:schemeClr val="tx1"/>
-          </a:fontRef>
-        </p:style>
-      </p:cxnSp>
-      <p:cxnSp>
-        <p:nvCxnSpPr>
-          <p:cNvPr id="14" name="motif-line-stop-3"/>
-          <p:cNvCxnSpPr/>
-          <p:nvPr/>
-        </p:nvCxnSpPr>
-        <p:spPr>
-          <a:xfrm>
-            <a:off x="1238250" y="3719829"/>
-            <a:ext cx="88900" cy="0"/>
-          </a:xfrm>
-          <a:prstGeom prst="line">
-            <a:avLst/>
-          </a:prstGeom>
-          <a:ln w="19050">
-            <a:solidFill>
-              <a:srgbClr val="7FC0F5"/>
-            </a:solidFill>
-          </a:ln>
-        </p:spPr>
-        <p:style>
-          <a:lnRef idx="2">
-            <a:schemeClr val="accent1"/>
-          </a:lnRef>
-          <a:fillRef idx="0">
-            <a:schemeClr val="accent1"/>
-          </a:fillRef>
-          <a:effectRef idx="1">
-            <a:schemeClr val="accent1"/>
-          </a:effectRef>
-          <a:fontRef idx="minor">
-            <a:schemeClr val="tx1"/>
-          </a:fontRef>
-        </p:style>
-      </p:cxnSp>
-      <p:cxnSp>
-        <p:nvCxnSpPr>
-          <p:cNvPr id="15" name="motif-line-stop-4"/>
-          <p:cNvCxnSpPr/>
-          <p:nvPr/>
-        </p:nvCxnSpPr>
-        <p:spPr>
-          <a:xfrm>
-            <a:off x="1238250" y="4979670"/>
-            <a:ext cx="88900" cy="0"/>
-          </a:xfrm>
-          <a:prstGeom prst="line">
-            <a:avLst/>
-          </a:prstGeom>
-          <a:ln w="19050">
-            <a:solidFill>
-              <a:srgbClr val="7FC0F5"/>
-            </a:solidFill>
-          </a:ln>
-        </p:spPr>
-        <p:style>
-          <a:lnRef idx="2">
-            <a:schemeClr val="accent1"/>
-          </a:lnRef>
-          <a:fillRef idx="0">
-            <a:schemeClr val="accent1"/>
-          </a:fillRef>
-          <a:effectRef idx="1">
-            <a:schemeClr val="accent1"/>
-          </a:effectRef>
-          <a:fontRef idx="minor">
-            <a:schemeClr val="tx1"/>
-          </a:fontRef>
-        </p:style>
-      </p:cxnSp>
-      <p:cxnSp>
-        <p:nvCxnSpPr>
-          <p:cNvPr id="16" name="motif-line-mark"/>
-          <p:cNvCxnSpPr/>
-          <p:nvPr/>
-        </p:nvCxnSpPr>
-        <p:spPr>
-          <a:xfrm>
-            <a:off x="762000" y="546100"/>
-            <a:ext cx="203200" cy="0"/>
-          </a:xfrm>
-          <a:prstGeom prst="line">
-            <a:avLst/>
-          </a:prstGeom>
-          <a:ln w="25400">
-            <a:solidFill>
-              <a:srgbClr val="7FC0F5"/>
-            </a:solidFill>
-          </a:ln>
-        </p:spPr>
-        <p:style>
-          <a:lnRef idx="2">
-            <a:schemeClr val="accent1"/>
-          </a:lnRef>
-          <a:fillRef idx="0">
-            <a:schemeClr val="accent1"/>
-          </a:fillRef>
-          <a:effectRef idx="1">
-            <a:schemeClr val="accent1"/>
-          </a:effectRef>
-          <a:fontRef idx="minor">
-            <a:schemeClr val="tx1"/>
-          </a:fontRef>
-        </p:style>
-      </p:cxnSp>
-      <p:sp>
-        <p:nvSpPr>
-          <p:cNvPr id="17" name="chrome-part"/>
+          <p:cNvPr id="14" name="chrome-part"/>
           <p:cNvSpPr txBox="1"/>
           <p:nvPr/>
         </p:nvSpPr>
@@ -40824,7 +40045,7 @@
       </p:sp>
       <p:cxnSp>
         <p:nvCxnSpPr>
-          <p:cNvPr id="18" name="motif-line-footer"/>
+          <p:cNvPr id="15" name="motif-line-footer"/>
           <p:cNvCxnSpPr/>
           <p:nvPr/>
         </p:nvCxnSpPr>
@@ -40859,7 +40080,7 @@
       </p:cxnSp>
       <p:sp>
         <p:nvSpPr>
-          <p:cNvPr id="19" name="chrome-page"/>
+          <p:cNvPr id="16" name="chrome-page"/>
           <p:cNvSpPr txBox="1"/>
           <p:nvPr/>
         </p:nvSpPr>
@@ -40891,14 +40112,14 @@
                 </a:solidFill>
                 <a:latin typeface="IBM Plex Mono"/>
               </a:rPr>
-              <a:t>29 / 33</a:t>
+              <a:t>29 / 32</a:t>
             </a:r>
           </a:p>
         </p:txBody>
       </p:sp>
       <p:sp>
         <p:nvSpPr>
-          <p:cNvPr id="20" name="chrome-foot"/>
+          <p:cNvPr id="17" name="chrome-foot"/>
           <p:cNvSpPr txBox="1"/>
           <p:nvPr/>
         </p:nvSpPr>
@@ -40930,14 +40151,14 @@
                 </a:solidFill>
                 <a:latin typeface="IBM Plex Mono"/>
               </a:rPr>
-              <a:t>Source: data/interim/citations.csv, data/processed/no_brand_rate.csv, pages_top.csv, data/labels/sentiment.csv</a:t>
+              <a:t>Source: data/processed/domain_type_mix.csv, pages_top.csv. AirOps (2025). Aggarwal et al. (2024)</a:t>
             </a:r>
           </a:p>
         </p:txBody>
       </p:sp>
       <p:cxnSp>
         <p:nvCxnSpPr>
-          <p:cNvPr id="21" name="motif-line-tick-01"/>
+          <p:cNvPr id="18" name="motif-line-tick-01"/>
           <p:cNvCxnSpPr/>
           <p:nvPr/>
         </p:nvCxnSpPr>
@@ -40972,7 +40193,7 @@
       </p:cxnSp>
       <p:cxnSp>
         <p:nvCxnSpPr>
-          <p:cNvPr id="22" name="motif-line-tick-02"/>
+          <p:cNvPr id="19" name="motif-line-tick-02"/>
           <p:cNvCxnSpPr/>
           <p:nvPr/>
         </p:nvCxnSpPr>
@@ -41007,7 +40228,7 @@
       </p:cxnSp>
       <p:cxnSp>
         <p:nvCxnSpPr>
-          <p:cNvPr id="23" name="motif-line-tick-03"/>
+          <p:cNvPr id="20" name="motif-line-tick-03"/>
           <p:cNvCxnSpPr/>
           <p:nvPr/>
         </p:nvCxnSpPr>
@@ -41042,7 +40263,7 @@
       </p:cxnSp>
       <p:cxnSp>
         <p:nvCxnSpPr>
-          <p:cNvPr id="24" name="motif-line-tick-04"/>
+          <p:cNvPr id="21" name="motif-line-tick-04"/>
           <p:cNvCxnSpPr/>
           <p:nvPr/>
         </p:nvCxnSpPr>
@@ -41077,7 +40298,7 @@
       </p:cxnSp>
       <p:cxnSp>
         <p:nvCxnSpPr>
-          <p:cNvPr id="25" name="motif-line-tick-05"/>
+          <p:cNvPr id="22" name="motif-line-tick-05"/>
           <p:cNvCxnSpPr/>
           <p:nvPr/>
         </p:nvCxnSpPr>
@@ -41112,7 +40333,7 @@
       </p:cxnSp>
       <p:cxnSp>
         <p:nvCxnSpPr>
-          <p:cNvPr id="26" name="motif-line-tick-06"/>
+          <p:cNvPr id="23" name="motif-line-tick-06"/>
           <p:cNvCxnSpPr/>
           <p:nvPr/>
         </p:nvCxnSpPr>
@@ -41147,7 +40368,7 @@
       </p:cxnSp>
       <p:cxnSp>
         <p:nvCxnSpPr>
-          <p:cNvPr id="27" name="motif-line-tick-07"/>
+          <p:cNvPr id="24" name="motif-line-tick-07"/>
           <p:cNvCxnSpPr/>
           <p:nvPr/>
         </p:nvCxnSpPr>
@@ -41182,7 +40403,7 @@
       </p:cxnSp>
       <p:cxnSp>
         <p:nvCxnSpPr>
-          <p:cNvPr id="28" name="motif-line-tick-08"/>
+          <p:cNvPr id="25" name="motif-line-tick-08"/>
           <p:cNvCxnSpPr/>
           <p:nvPr/>
         </p:nvCxnSpPr>
@@ -41217,7 +40438,7 @@
       </p:cxnSp>
       <p:cxnSp>
         <p:nvCxnSpPr>
-          <p:cNvPr id="29" name="motif-line-tick-09"/>
+          <p:cNvPr id="26" name="motif-line-tick-09"/>
           <p:cNvCxnSpPr/>
           <p:nvPr/>
         </p:nvCxnSpPr>
@@ -41252,7 +40473,7 @@
       </p:cxnSp>
       <p:cxnSp>
         <p:nvCxnSpPr>
-          <p:cNvPr id="30" name="motif-line-tick-10"/>
+          <p:cNvPr id="27" name="motif-line-tick-10"/>
           <p:cNvCxnSpPr/>
           <p:nvPr/>
         </p:nvCxnSpPr>
@@ -41287,7 +40508,7 @@
       </p:cxnSp>
       <p:cxnSp>
         <p:nvCxnSpPr>
-          <p:cNvPr id="31" name="motif-line-tick-11"/>
+          <p:cNvPr id="28" name="motif-line-tick-11"/>
           <p:cNvCxnSpPr/>
           <p:nvPr/>
         </p:nvCxnSpPr>
@@ -41322,7 +40543,7 @@
       </p:cxnSp>
       <p:cxnSp>
         <p:nvCxnSpPr>
-          <p:cNvPr id="32" name="motif-line-tick-12"/>
+          <p:cNvPr id="29" name="motif-line-tick-12"/>
           <p:cNvCxnSpPr/>
           <p:nvPr/>
         </p:nvCxnSpPr>
@@ -41357,7 +40578,7 @@
       </p:cxnSp>
       <p:cxnSp>
         <p:nvCxnSpPr>
-          <p:cNvPr id="33" name="motif-line-tick-13"/>
+          <p:cNvPr id="30" name="motif-line-tick-13"/>
           <p:cNvCxnSpPr/>
           <p:nvPr/>
         </p:nvCxnSpPr>
@@ -41392,7 +40613,7 @@
       </p:cxnSp>
       <p:cxnSp>
         <p:nvCxnSpPr>
-          <p:cNvPr id="34" name="motif-line-tick-14"/>
+          <p:cNvPr id="31" name="motif-line-tick-14"/>
           <p:cNvCxnSpPr/>
           <p:nvPr/>
         </p:nvCxnSpPr>
@@ -41427,7 +40648,7 @@
       </p:cxnSp>
       <p:cxnSp>
         <p:nvCxnSpPr>
-          <p:cNvPr id="35" name="motif-line-tick-15"/>
+          <p:cNvPr id="32" name="motif-line-tick-15"/>
           <p:cNvCxnSpPr/>
           <p:nvPr/>
         </p:nvCxnSpPr>
@@ -41462,7 +40683,7 @@
       </p:cxnSp>
       <p:cxnSp>
         <p:nvCxnSpPr>
-          <p:cNvPr id="36" name="motif-line-tick-16"/>
+          <p:cNvPr id="33" name="motif-line-tick-16"/>
           <p:cNvCxnSpPr/>
           <p:nvPr/>
         </p:nvCxnSpPr>
@@ -41497,7 +40718,7 @@
       </p:cxnSp>
       <p:cxnSp>
         <p:nvCxnSpPr>
-          <p:cNvPr id="37" name="motif-line-tick-17"/>
+          <p:cNvPr id="34" name="motif-line-tick-17"/>
           <p:cNvCxnSpPr/>
           <p:nvPr/>
         </p:nvCxnSpPr>
@@ -41532,7 +40753,7 @@
       </p:cxnSp>
       <p:cxnSp>
         <p:nvCxnSpPr>
-          <p:cNvPr id="38" name="motif-line-tick-18"/>
+          <p:cNvPr id="35" name="motif-line-tick-18"/>
           <p:cNvCxnSpPr/>
           <p:nvPr/>
         </p:nvCxnSpPr>
@@ -41567,7 +40788,7 @@
       </p:cxnSp>
       <p:cxnSp>
         <p:nvCxnSpPr>
-          <p:cNvPr id="39" name="motif-line-tick-19"/>
+          <p:cNvPr id="36" name="motif-line-tick-19"/>
           <p:cNvCxnSpPr/>
           <p:nvPr/>
         </p:nvCxnSpPr>
@@ -41602,7 +40823,7 @@
       </p:cxnSp>
       <p:cxnSp>
         <p:nvCxnSpPr>
-          <p:cNvPr id="40" name="motif-line-tick-20"/>
+          <p:cNvPr id="37" name="motif-line-tick-20"/>
           <p:cNvCxnSpPr/>
           <p:nvPr/>
         </p:nvCxnSpPr>
@@ -41637,7 +40858,7 @@
       </p:cxnSp>
       <p:cxnSp>
         <p:nvCxnSpPr>
-          <p:cNvPr id="41" name="motif-line-tick-21"/>
+          <p:cNvPr id="38" name="motif-line-tick-21"/>
           <p:cNvCxnSpPr/>
           <p:nvPr/>
         </p:nvCxnSpPr>
@@ -41672,7 +40893,7 @@
       </p:cxnSp>
       <p:cxnSp>
         <p:nvCxnSpPr>
-          <p:cNvPr id="42" name="motif-line-tick-22"/>
+          <p:cNvPr id="39" name="motif-line-tick-22"/>
           <p:cNvCxnSpPr/>
           <p:nvPr/>
         </p:nvCxnSpPr>
@@ -41707,7 +40928,7 @@
       </p:cxnSp>
       <p:cxnSp>
         <p:nvCxnSpPr>
-          <p:cNvPr id="43" name="motif-line-tick-23"/>
+          <p:cNvPr id="40" name="motif-line-tick-23"/>
           <p:cNvCxnSpPr/>
           <p:nvPr/>
         </p:nvCxnSpPr>
@@ -41742,7 +40963,7 @@
       </p:cxnSp>
       <p:cxnSp>
         <p:nvCxnSpPr>
-          <p:cNvPr id="44" name="motif-line-tick-24"/>
+          <p:cNvPr id="41" name="motif-line-tick-24"/>
           <p:cNvCxnSpPr/>
           <p:nvPr/>
         </p:nvCxnSpPr>
@@ -41777,7 +40998,7 @@
       </p:cxnSp>
       <p:cxnSp>
         <p:nvCxnSpPr>
-          <p:cNvPr id="45" name="motif-line-tick-25"/>
+          <p:cNvPr id="42" name="motif-line-tick-25"/>
           <p:cNvCxnSpPr/>
           <p:nvPr/>
         </p:nvCxnSpPr>
@@ -41812,7 +41033,7 @@
       </p:cxnSp>
       <p:cxnSp>
         <p:nvCxnSpPr>
-          <p:cNvPr id="46" name="motif-line-tick-26"/>
+          <p:cNvPr id="43" name="motif-line-tick-26"/>
           <p:cNvCxnSpPr/>
           <p:nvPr/>
         </p:nvCxnSpPr>
@@ -41847,7 +41068,7 @@
       </p:cxnSp>
       <p:cxnSp>
         <p:nvCxnSpPr>
-          <p:cNvPr id="47" name="motif-line-tick-27"/>
+          <p:cNvPr id="44" name="motif-line-tick-27"/>
           <p:cNvCxnSpPr/>
           <p:nvPr/>
         </p:nvCxnSpPr>
@@ -41882,7 +41103,7 @@
       </p:cxnSp>
       <p:cxnSp>
         <p:nvCxnSpPr>
-          <p:cNvPr id="48" name="motif-line-tick-28"/>
+          <p:cNvPr id="45" name="motif-line-tick-28"/>
           <p:cNvCxnSpPr/>
           <p:nvPr/>
         </p:nvCxnSpPr>
@@ -41917,7 +41138,7 @@
       </p:cxnSp>
       <p:cxnSp>
         <p:nvCxnSpPr>
-          <p:cNvPr id="49" name="motif-line-tick-29"/>
+          <p:cNvPr id="46" name="motif-line-tick-29"/>
           <p:cNvCxnSpPr/>
           <p:nvPr/>
         </p:nvCxnSpPr>
@@ -41952,7 +41173,7 @@
       </p:cxnSp>
       <p:cxnSp>
         <p:nvCxnSpPr>
-          <p:cNvPr id="50" name="motif-line-tick-30"/>
+          <p:cNvPr id="47" name="motif-line-tick-30"/>
           <p:cNvCxnSpPr/>
           <p:nvPr/>
         </p:nvCxnSpPr>
@@ -41987,7 +41208,7 @@
       </p:cxnSp>
       <p:cxnSp>
         <p:nvCxnSpPr>
-          <p:cNvPr id="51" name="motif-line-tick-31"/>
+          <p:cNvPr id="48" name="motif-line-tick-31"/>
           <p:cNvCxnSpPr/>
           <p:nvPr/>
         </p:nvCxnSpPr>
@@ -42022,48 +41243,13 @@
       </p:cxnSp>
       <p:cxnSp>
         <p:nvCxnSpPr>
-          <p:cNvPr id="52" name="motif-line-tick-32"/>
+          <p:cNvPr id="49" name="motif-line-tick-32"/>
           <p:cNvCxnSpPr/>
           <p:nvPr/>
         </p:nvCxnSpPr>
         <p:spPr>
           <a:xfrm>
             <a:off x="10572750" y="6273800"/>
-            <a:ext cx="0" cy="76200"/>
-          </a:xfrm>
-          <a:prstGeom prst="line">
-            <a:avLst/>
-          </a:prstGeom>
-          <a:ln w="12700">
-            <a:solidFill>
-              <a:srgbClr val="3B5A85"/>
-            </a:solidFill>
-          </a:ln>
-        </p:spPr>
-        <p:style>
-          <a:lnRef idx="2">
-            <a:schemeClr val="accent1"/>
-          </a:lnRef>
-          <a:fillRef idx="0">
-            <a:schemeClr val="accent1"/>
-          </a:fillRef>
-          <a:effectRef idx="1">
-            <a:schemeClr val="accent1"/>
-          </a:effectRef>
-          <a:fontRef idx="minor">
-            <a:schemeClr val="tx1"/>
-          </a:fontRef>
-        </p:style>
-      </p:cxnSp>
-      <p:cxnSp>
-        <p:nvCxnSpPr>
-          <p:cNvPr id="53" name="motif-line-tick-33"/>
-          <p:cNvCxnSpPr/>
-          <p:nvPr/>
-        </p:nvCxnSpPr>
-        <p:spPr>
-          <a:xfrm>
-            <a:off x="10668000" y="6273800"/>
             <a:ext cx="0" cy="76200"/>
           </a:xfrm>
           <a:prstGeom prst="line">
@@ -42497,7 +41683,7 @@
                 </a:solidFill>
                 <a:latin typeface="Plus Jakarta Sans"/>
               </a:rPr>
-              <a:t>For the web team</a:t>
+              <a:t>These numbers come from one run</a:t>
             </a:r>
           </a:p>
         </p:txBody>
@@ -42510,8 +41696,8 @@
         </p:nvSpPr>
         <p:spPr>
           <a:xfrm>
-            <a:off x="762000" y="1804670"/>
-            <a:ext cx="381000" cy="266700"/>
+            <a:off x="1524000" y="1760220"/>
+            <a:ext cx="9906000" cy="1280160"/>
           </a:xfrm>
           <a:prstGeom prst="rect">
             <a:avLst/>
@@ -42530,13 +41716,13 @@
               </a:lnSpc>
             </a:pPr>
             <a:r>
-              <a:rPr sz="1500" b="0">
+              <a:rPr sz="2400" b="0">
                 <a:solidFill>
-                  <a:srgbClr val="7FC0F5"/>
+                  <a:srgbClr val="F4F6FA"/>
                 </a:solidFill>
-                <a:latin typeface="IBM Plex Mono"/>
+                <a:latin typeface="Plus Jakarta Sans"/>
               </a:rPr>
-              <a:t>01</a:t>
+              <a:t>SparkToro and Gumshoe ran 12 prompts nearly 3,000 times. The same brand list came back less than 1 in 100 times (Search Engine Land, January 2026).</a:t>
             </a:r>
           </a:p>
         </p:txBody>
@@ -42549,8 +41735,8 @@
         </p:nvSpPr>
         <p:spPr>
           <a:xfrm>
-            <a:off x="1524000" y="1760220"/>
-            <a:ext cx="9906000" cy="1066800"/>
+            <a:off x="1524000" y="3256279"/>
+            <a:ext cx="9906000" cy="853439"/>
           </a:xfrm>
           <a:prstGeom prst="rect">
             <a:avLst/>
@@ -42569,464 +41755,160 @@
               </a:lnSpc>
             </a:pPr>
             <a:r>
-              <a:rPr sz="2000" b="0">
+              <a:rPr sz="2400" b="0">
                 <a:solidFill>
                   <a:srgbClr val="F4F6FA"/>
                 </a:solidFill>
                 <a:latin typeface="Plus Jakarta Sans"/>
               </a:rPr>
-              <a:t>Fix or redirect cited pages that no longer work. Gemini cited 2 broken bank pages 4 times: a 404 on jago.com and a BNI complaints page that loads as an error page.</a:t>
+              <a:t>Read gaps of a few points here as ties: BCA and Bank Jago at 55%, SeaBank at 53%.</a:t>
             </a:r>
           </a:p>
         </p:txBody>
       </p:sp>
+      <p:cxnSp>
+        <p:nvCxnSpPr>
+          <p:cNvPr id="5" name="motif-line-rail"/>
+          <p:cNvCxnSpPr/>
+          <p:nvPr/>
+        </p:nvCxnSpPr>
+        <p:spPr>
+          <a:xfrm>
+            <a:off x="1282700" y="1859279"/>
+            <a:ext cx="0" cy="1724661"/>
+          </a:xfrm>
+          <a:prstGeom prst="line">
+            <a:avLst/>
+          </a:prstGeom>
+          <a:ln w="12700">
+            <a:solidFill>
+              <a:srgbClr val="3B5A85"/>
+            </a:solidFill>
+          </a:ln>
+        </p:spPr>
+        <p:style>
+          <a:lnRef idx="2">
+            <a:schemeClr val="accent1"/>
+          </a:lnRef>
+          <a:fillRef idx="0">
+            <a:schemeClr val="accent1"/>
+          </a:fillRef>
+          <a:effectRef idx="1">
+            <a:schemeClr val="accent1"/>
+          </a:effectRef>
+          <a:fontRef idx="minor">
+            <a:schemeClr val="tx1"/>
+          </a:fontRef>
+        </p:style>
+      </p:cxnSp>
+      <p:cxnSp>
+        <p:nvCxnSpPr>
+          <p:cNvPr id="6" name="motif-line-stop-1"/>
+          <p:cNvCxnSpPr/>
+          <p:nvPr/>
+        </p:nvCxnSpPr>
+        <p:spPr>
+          <a:xfrm>
+            <a:off x="1238250" y="1973579"/>
+            <a:ext cx="88900" cy="0"/>
+          </a:xfrm>
+          <a:prstGeom prst="line">
+            <a:avLst/>
+          </a:prstGeom>
+          <a:ln w="19050">
+            <a:solidFill>
+              <a:srgbClr val="7FC0F5"/>
+            </a:solidFill>
+          </a:ln>
+        </p:spPr>
+        <p:style>
+          <a:lnRef idx="2">
+            <a:schemeClr val="accent1"/>
+          </a:lnRef>
+          <a:fillRef idx="0">
+            <a:schemeClr val="accent1"/>
+          </a:fillRef>
+          <a:effectRef idx="1">
+            <a:schemeClr val="accent1"/>
+          </a:effectRef>
+          <a:fontRef idx="minor">
+            <a:schemeClr val="tx1"/>
+          </a:fontRef>
+        </p:style>
+      </p:cxnSp>
+      <p:cxnSp>
+        <p:nvCxnSpPr>
+          <p:cNvPr id="7" name="motif-line-stop-2"/>
+          <p:cNvCxnSpPr/>
+          <p:nvPr/>
+        </p:nvCxnSpPr>
+        <p:spPr>
+          <a:xfrm>
+            <a:off x="1238250" y="3469640"/>
+            <a:ext cx="88900" cy="0"/>
+          </a:xfrm>
+          <a:prstGeom prst="line">
+            <a:avLst/>
+          </a:prstGeom>
+          <a:ln w="19050">
+            <a:solidFill>
+              <a:srgbClr val="7FC0F5"/>
+            </a:solidFill>
+          </a:ln>
+        </p:spPr>
+        <p:style>
+          <a:lnRef idx="2">
+            <a:schemeClr val="accent1"/>
+          </a:lnRef>
+          <a:fillRef idx="0">
+            <a:schemeClr val="accent1"/>
+          </a:fillRef>
+          <a:effectRef idx="1">
+            <a:schemeClr val="accent1"/>
+          </a:effectRef>
+          <a:fontRef idx="minor">
+            <a:schemeClr val="tx1"/>
+          </a:fontRef>
+        </p:style>
+      </p:cxnSp>
+      <p:cxnSp>
+        <p:nvCxnSpPr>
+          <p:cNvPr id="8" name="motif-line-mark"/>
+          <p:cNvCxnSpPr/>
+          <p:nvPr/>
+        </p:nvCxnSpPr>
+        <p:spPr>
+          <a:xfrm>
+            <a:off x="762000" y="546100"/>
+            <a:ext cx="203200" cy="0"/>
+          </a:xfrm>
+          <a:prstGeom prst="line">
+            <a:avLst/>
+          </a:prstGeom>
+          <a:ln w="25400">
+            <a:solidFill>
+              <a:srgbClr val="7FC0F5"/>
+            </a:solidFill>
+          </a:ln>
+        </p:spPr>
+        <p:style>
+          <a:lnRef idx="2">
+            <a:schemeClr val="accent1"/>
+          </a:lnRef>
+          <a:fillRef idx="0">
+            <a:schemeClr val="accent1"/>
+          </a:fillRef>
+          <a:effectRef idx="1">
+            <a:schemeClr val="accent1"/>
+          </a:effectRef>
+          <a:fontRef idx="minor">
+            <a:schemeClr val="tx1"/>
+          </a:fontRef>
+        </p:style>
+      </p:cxnSp>
       <p:sp>
         <p:nvSpPr>
-          <p:cNvPr id="5" name="TextBox 4"/>
-          <p:cNvSpPr txBox="1"/>
-          <p:nvPr/>
-        </p:nvSpPr>
-        <p:spPr>
-          <a:xfrm>
-            <a:off x="762000" y="2947670"/>
-            <a:ext cx="381000" cy="266700"/>
-          </a:xfrm>
-          <a:prstGeom prst="rect">
-            <a:avLst/>
-          </a:prstGeom>
-          <a:noFill/>
-        </p:spPr>
-        <p:txBody>
-          <a:bodyPr wrap="square" lIns="0" rIns="0" tIns="0" bIns="0" anchor="t">
-            <a:spAutoFit/>
-          </a:bodyPr>
-          <a:lstStyle/>
-          <a:p>
-            <a:pPr algn="l">
-              <a:lnSpc>
-                <a:spcPct val="115000"/>
-              </a:lnSpc>
-            </a:pPr>
-            <a:r>
-              <a:rPr sz="1500" b="0">
-                <a:solidFill>
-                  <a:srgbClr val="7FC0F5"/>
-                </a:solidFill>
-                <a:latin typeface="IBM Plex Mono"/>
-              </a:rPr>
-              <a:t>02</a:t>
-            </a:r>
-          </a:p>
-        </p:txBody>
-      </p:sp>
-      <p:sp>
-        <p:nvSpPr>
-          <p:cNvPr id="6" name="TextBox 5"/>
-          <p:cNvSpPr txBox="1"/>
-          <p:nvPr/>
-        </p:nvSpPr>
-        <p:spPr>
-          <a:xfrm>
-            <a:off x="1524000" y="2903220"/>
-            <a:ext cx="9906000" cy="1066800"/>
-          </a:xfrm>
-          <a:prstGeom prst="rect">
-            <a:avLst/>
-          </a:prstGeom>
-          <a:noFill/>
-        </p:spPr>
-        <p:txBody>
-          <a:bodyPr wrap="square" lIns="0" rIns="0" tIns="0" bIns="0" anchor="t">
-            <a:spAutoFit/>
-          </a:bodyPr>
-          <a:lstStyle/>
-          <a:p>
-            <a:pPr algn="l">
-              <a:lnSpc>
-                <a:spcPct val="115000"/>
-              </a:lnSpc>
-            </a:pPr>
-            <a:r>
-              <a:rPr sz="2000" b="0">
-                <a:solidFill>
-                  <a:srgbClr val="F4F6FA"/>
-                </a:solidFill>
-                <a:latin typeface="Plus Jakarta Sans"/>
-              </a:rPr>
-              <a:t>Send key text in the HTML from the server. 12 cited bank pages, SeaBank's fees and rates page among them, showed their text only after a browser ran JavaScript. A crawler that skips JavaScript may read them as empty.</a:t>
-            </a:r>
-          </a:p>
-        </p:txBody>
-      </p:sp>
-      <p:sp>
-        <p:nvSpPr>
-          <p:cNvPr id="7" name="TextBox 6"/>
-          <p:cNvSpPr txBox="1"/>
-          <p:nvPr/>
-        </p:nvSpPr>
-        <p:spPr>
-          <a:xfrm>
-            <a:off x="762000" y="4090670"/>
-            <a:ext cx="381000" cy="266700"/>
-          </a:xfrm>
-          <a:prstGeom prst="rect">
-            <a:avLst/>
-          </a:prstGeom>
-          <a:noFill/>
-        </p:spPr>
-        <p:txBody>
-          <a:bodyPr wrap="square" lIns="0" rIns="0" tIns="0" bIns="0" anchor="t">
-            <a:spAutoFit/>
-          </a:bodyPr>
-          <a:lstStyle/>
-          <a:p>
-            <a:pPr algn="l">
-              <a:lnSpc>
-                <a:spcPct val="115000"/>
-              </a:lnSpc>
-            </a:pPr>
-            <a:r>
-              <a:rPr sz="1500" b="0">
-                <a:solidFill>
-                  <a:srgbClr val="7FC0F5"/>
-                </a:solidFill>
-                <a:latin typeface="IBM Plex Mono"/>
-              </a:rPr>
-              <a:t>03</a:t>
-            </a:r>
-          </a:p>
-        </p:txBody>
-      </p:sp>
-      <p:sp>
-        <p:nvSpPr>
-          <p:cNvPr id="8" name="TextBox 7"/>
-          <p:cNvSpPr txBox="1"/>
-          <p:nvPr/>
-        </p:nvSpPr>
-        <p:spPr>
-          <a:xfrm>
-            <a:off x="1524000" y="4046220"/>
-            <a:ext cx="9906000" cy="1066800"/>
-          </a:xfrm>
-          <a:prstGeom prst="rect">
-            <a:avLst/>
-          </a:prstGeom>
-          <a:noFill/>
-        </p:spPr>
-        <p:txBody>
-          <a:bodyPr wrap="square" lIns="0" rIns="0" tIns="0" bIns="0" anchor="t">
-            <a:spAutoFit/>
-          </a:bodyPr>
-          <a:lstStyle/>
-          <a:p>
-            <a:pPr algn="l">
-              <a:lnSpc>
-                <a:spcPct val="115000"/>
-              </a:lnSpc>
-            </a:pPr>
-            <a:r>
-              <a:rPr sz="2000" b="0">
-                <a:solidFill>
-                  <a:srgbClr val="F4F6FA"/>
-                </a:solidFill>
-                <a:latin typeface="Plus Jakarta Sans"/>
-              </a:rPr>
-              <a:t>Check robots.txt on reports and product pages. It blocked our crawler from 2 BNI annual reports, and 3 bank sites returned no robots.txt our crawler could read.</a:t>
-            </a:r>
-          </a:p>
-        </p:txBody>
-      </p:sp>
-      <p:sp>
-        <p:nvSpPr>
-          <p:cNvPr id="9" name="TextBox 8"/>
-          <p:cNvSpPr txBox="1"/>
-          <p:nvPr/>
-        </p:nvSpPr>
-        <p:spPr>
-          <a:xfrm>
-            <a:off x="762000" y="5233670"/>
-            <a:ext cx="381000" cy="266700"/>
-          </a:xfrm>
-          <a:prstGeom prst="rect">
-            <a:avLst/>
-          </a:prstGeom>
-          <a:noFill/>
-        </p:spPr>
-        <p:txBody>
-          <a:bodyPr wrap="square" lIns="0" rIns="0" tIns="0" bIns="0" anchor="t">
-            <a:spAutoFit/>
-          </a:bodyPr>
-          <a:lstStyle/>
-          <a:p>
-            <a:pPr algn="l">
-              <a:lnSpc>
-                <a:spcPct val="115000"/>
-              </a:lnSpc>
-            </a:pPr>
-            <a:r>
-              <a:rPr sz="1500" b="0">
-                <a:solidFill>
-                  <a:srgbClr val="7FC0F5"/>
-                </a:solidFill>
-                <a:latin typeface="IBM Plex Mono"/>
-              </a:rPr>
-              <a:t>04</a:t>
-            </a:r>
-          </a:p>
-        </p:txBody>
-      </p:sp>
-      <p:sp>
-        <p:nvSpPr>
-          <p:cNvPr id="10" name="TextBox 9"/>
-          <p:cNvSpPr txBox="1"/>
-          <p:nvPr/>
-        </p:nvSpPr>
-        <p:spPr>
-          <a:xfrm>
-            <a:off x="1524000" y="5189220"/>
-            <a:ext cx="9906000" cy="711200"/>
-          </a:xfrm>
-          <a:prstGeom prst="rect">
-            <a:avLst/>
-          </a:prstGeom>
-          <a:noFill/>
-        </p:spPr>
-        <p:txBody>
-          <a:bodyPr wrap="square" lIns="0" rIns="0" tIns="0" bIns="0" anchor="t">
-            <a:spAutoFit/>
-          </a:bodyPr>
-          <a:lstStyle/>
-          <a:p>
-            <a:pPr algn="l">
-              <a:lnSpc>
-                <a:spcPct val="115000"/>
-              </a:lnSpc>
-            </a:pPr>
-            <a:r>
-              <a:rPr sz="2000" b="0">
-                <a:solidFill>
-                  <a:srgbClr val="F4F6FA"/>
-                </a:solidFill>
-                <a:latin typeface="Plus Jakarta Sans"/>
-              </a:rPr>
-              <a:t>Treat schema as optional for AI citations. Bank sites carried schema on 32% of cited pages and were still the most cited type.</a:t>
-            </a:r>
-          </a:p>
-        </p:txBody>
-      </p:sp>
-      <p:cxnSp>
-        <p:nvCxnSpPr>
-          <p:cNvPr id="11" name="motif-line-rail"/>
-          <p:cNvCxnSpPr/>
-          <p:nvPr/>
-        </p:nvCxnSpPr>
-        <p:spPr>
-          <a:xfrm>
-            <a:off x="1282700" y="1823720"/>
-            <a:ext cx="0" cy="3657600"/>
-          </a:xfrm>
-          <a:prstGeom prst="line">
-            <a:avLst/>
-          </a:prstGeom>
-          <a:ln w="12700">
-            <a:solidFill>
-              <a:srgbClr val="3B5A85"/>
-            </a:solidFill>
-          </a:ln>
-        </p:spPr>
-        <p:style>
-          <a:lnRef idx="2">
-            <a:schemeClr val="accent1"/>
-          </a:lnRef>
-          <a:fillRef idx="0">
-            <a:schemeClr val="accent1"/>
-          </a:fillRef>
-          <a:effectRef idx="1">
-            <a:schemeClr val="accent1"/>
-          </a:effectRef>
-          <a:fontRef idx="minor">
-            <a:schemeClr val="tx1"/>
-          </a:fontRef>
-        </p:style>
-      </p:cxnSp>
-      <p:cxnSp>
-        <p:nvCxnSpPr>
-          <p:cNvPr id="12" name="motif-line-stop-1"/>
-          <p:cNvCxnSpPr/>
-          <p:nvPr/>
-        </p:nvCxnSpPr>
-        <p:spPr>
-          <a:xfrm>
-            <a:off x="1238250" y="1938020"/>
-            <a:ext cx="88900" cy="0"/>
-          </a:xfrm>
-          <a:prstGeom prst="line">
-            <a:avLst/>
-          </a:prstGeom>
-          <a:ln w="19050">
-            <a:solidFill>
-              <a:srgbClr val="7FC0F5"/>
-            </a:solidFill>
-          </a:ln>
-        </p:spPr>
-        <p:style>
-          <a:lnRef idx="2">
-            <a:schemeClr val="accent1"/>
-          </a:lnRef>
-          <a:fillRef idx="0">
-            <a:schemeClr val="accent1"/>
-          </a:fillRef>
-          <a:effectRef idx="1">
-            <a:schemeClr val="accent1"/>
-          </a:effectRef>
-          <a:fontRef idx="minor">
-            <a:schemeClr val="tx1"/>
-          </a:fontRef>
-        </p:style>
-      </p:cxnSp>
-      <p:cxnSp>
-        <p:nvCxnSpPr>
-          <p:cNvPr id="13" name="motif-line-stop-2"/>
-          <p:cNvCxnSpPr/>
-          <p:nvPr/>
-        </p:nvCxnSpPr>
-        <p:spPr>
-          <a:xfrm>
-            <a:off x="1238250" y="3081020"/>
-            <a:ext cx="88900" cy="0"/>
-          </a:xfrm>
-          <a:prstGeom prst="line">
-            <a:avLst/>
-          </a:prstGeom>
-          <a:ln w="19050">
-            <a:solidFill>
-              <a:srgbClr val="7FC0F5"/>
-            </a:solidFill>
-          </a:ln>
-        </p:spPr>
-        <p:style>
-          <a:lnRef idx="2">
-            <a:schemeClr val="accent1"/>
-          </a:lnRef>
-          <a:fillRef idx="0">
-            <a:schemeClr val="accent1"/>
-          </a:fillRef>
-          <a:effectRef idx="1">
-            <a:schemeClr val="accent1"/>
-          </a:effectRef>
-          <a:fontRef idx="minor">
-            <a:schemeClr val="tx1"/>
-          </a:fontRef>
-        </p:style>
-      </p:cxnSp>
-      <p:cxnSp>
-        <p:nvCxnSpPr>
-          <p:cNvPr id="14" name="motif-line-stop-3"/>
-          <p:cNvCxnSpPr/>
-          <p:nvPr/>
-        </p:nvCxnSpPr>
-        <p:spPr>
-          <a:xfrm>
-            <a:off x="1238250" y="4224020"/>
-            <a:ext cx="88900" cy="0"/>
-          </a:xfrm>
-          <a:prstGeom prst="line">
-            <a:avLst/>
-          </a:prstGeom>
-          <a:ln w="19050">
-            <a:solidFill>
-              <a:srgbClr val="7FC0F5"/>
-            </a:solidFill>
-          </a:ln>
-        </p:spPr>
-        <p:style>
-          <a:lnRef idx="2">
-            <a:schemeClr val="accent1"/>
-          </a:lnRef>
-          <a:fillRef idx="0">
-            <a:schemeClr val="accent1"/>
-          </a:fillRef>
-          <a:effectRef idx="1">
-            <a:schemeClr val="accent1"/>
-          </a:effectRef>
-          <a:fontRef idx="minor">
-            <a:schemeClr val="tx1"/>
-          </a:fontRef>
-        </p:style>
-      </p:cxnSp>
-      <p:cxnSp>
-        <p:nvCxnSpPr>
-          <p:cNvPr id="15" name="motif-line-stop-4"/>
-          <p:cNvCxnSpPr/>
-          <p:nvPr/>
-        </p:nvCxnSpPr>
-        <p:spPr>
-          <a:xfrm>
-            <a:off x="1238250" y="5367020"/>
-            <a:ext cx="88900" cy="0"/>
-          </a:xfrm>
-          <a:prstGeom prst="line">
-            <a:avLst/>
-          </a:prstGeom>
-          <a:ln w="19050">
-            <a:solidFill>
-              <a:srgbClr val="7FC0F5"/>
-            </a:solidFill>
-          </a:ln>
-        </p:spPr>
-        <p:style>
-          <a:lnRef idx="2">
-            <a:schemeClr val="accent1"/>
-          </a:lnRef>
-          <a:fillRef idx="0">
-            <a:schemeClr val="accent1"/>
-          </a:fillRef>
-          <a:effectRef idx="1">
-            <a:schemeClr val="accent1"/>
-          </a:effectRef>
-          <a:fontRef idx="minor">
-            <a:schemeClr val="tx1"/>
-          </a:fontRef>
-        </p:style>
-      </p:cxnSp>
-      <p:cxnSp>
-        <p:nvCxnSpPr>
-          <p:cNvPr id="16" name="motif-line-mark"/>
-          <p:cNvCxnSpPr/>
-          <p:nvPr/>
-        </p:nvCxnSpPr>
-        <p:spPr>
-          <a:xfrm>
-            <a:off x="762000" y="546100"/>
-            <a:ext cx="203200" cy="0"/>
-          </a:xfrm>
-          <a:prstGeom prst="line">
-            <a:avLst/>
-          </a:prstGeom>
-          <a:ln w="25400">
-            <a:solidFill>
-              <a:srgbClr val="7FC0F5"/>
-            </a:solidFill>
-          </a:ln>
-        </p:spPr>
-        <p:style>
-          <a:lnRef idx="2">
-            <a:schemeClr val="accent1"/>
-          </a:lnRef>
-          <a:fillRef idx="0">
-            <a:schemeClr val="accent1"/>
-          </a:fillRef>
-          <a:effectRef idx="1">
-            <a:schemeClr val="accent1"/>
-          </a:effectRef>
-          <a:fontRef idx="minor">
-            <a:schemeClr val="tx1"/>
-          </a:fontRef>
-        </p:style>
-      </p:cxnSp>
-      <p:sp>
-        <p:nvSpPr>
-          <p:cNvPr id="17" name="chrome-part"/>
+          <p:cNvPr id="9" name="chrome-part"/>
           <p:cNvSpPr txBox="1"/>
           <p:nvPr/>
         </p:nvSpPr>
@@ -43065,7 +41947,7 @@
       </p:sp>
       <p:cxnSp>
         <p:nvCxnSpPr>
-          <p:cNvPr id="18" name="motif-line-footer"/>
+          <p:cNvPr id="10" name="motif-line-footer"/>
           <p:cNvCxnSpPr/>
           <p:nvPr/>
         </p:nvCxnSpPr>
@@ -43100,7 +41982,7 @@
       </p:cxnSp>
       <p:sp>
         <p:nvSpPr>
-          <p:cNvPr id="19" name="chrome-page"/>
+          <p:cNvPr id="11" name="chrome-page"/>
           <p:cNvSpPr txBox="1"/>
           <p:nvPr/>
         </p:nvSpPr>
@@ -43132,53 +42014,14 @@
                 </a:solidFill>
                 <a:latin typeface="IBM Plex Mono"/>
               </a:rPr>
-              <a:t>30 / 33</a:t>
+              <a:t>30 / 32</a:t>
             </a:r>
           </a:p>
         </p:txBody>
       </p:sp>
-      <p:sp>
-        <p:nvSpPr>
-          <p:cNvPr id="20" name="chrome-foot"/>
-          <p:cNvSpPr txBox="1"/>
-          <p:nvPr/>
-        </p:nvSpPr>
-        <p:spPr>
-          <a:xfrm>
-            <a:off x="762000" y="6159500"/>
-            <a:ext cx="6604000" cy="355600"/>
-          </a:xfrm>
-          <a:prstGeom prst="rect">
-            <a:avLst/>
-          </a:prstGeom>
-          <a:noFill/>
-        </p:spPr>
-        <p:txBody>
-          <a:bodyPr wrap="square" lIns="0" rIns="0" tIns="0" bIns="0" anchor="t">
-            <a:spAutoFit/>
-          </a:bodyPr>
-          <a:lstStyle/>
-          <a:p>
-            <a:pPr algn="l">
-              <a:lnSpc>
-                <a:spcPct val="115000"/>
-              </a:lnSpc>
-            </a:pPr>
-            <a:r>
-              <a:rPr sz="1000" b="0">
-                <a:solidFill>
-                  <a:srgbClr val="AFC0D8"/>
-                </a:solidFill>
-                <a:latin typeface="IBM Plex Mono"/>
-              </a:rPr>
-              <a:t>Source: data/interim/pages.csv, crawled from GitHub's servers on 9 October 2026. Google Search Central</a:t>
-            </a:r>
-          </a:p>
-        </p:txBody>
-      </p:sp>
-      <p:cxnSp>
-        <p:nvCxnSpPr>
-          <p:cNvPr id="21" name="motif-line-tick-01"/>
+      <p:cxnSp>
+        <p:nvCxnSpPr>
+          <p:cNvPr id="12" name="motif-line-tick-01"/>
           <p:cNvCxnSpPr/>
           <p:nvPr/>
         </p:nvCxnSpPr>
@@ -43213,7 +42056,7 @@
       </p:cxnSp>
       <p:cxnSp>
         <p:nvCxnSpPr>
-          <p:cNvPr id="22" name="motif-line-tick-02"/>
+          <p:cNvPr id="13" name="motif-line-tick-02"/>
           <p:cNvCxnSpPr/>
           <p:nvPr/>
         </p:nvCxnSpPr>
@@ -43248,7 +42091,7 @@
       </p:cxnSp>
       <p:cxnSp>
         <p:nvCxnSpPr>
-          <p:cNvPr id="23" name="motif-line-tick-03"/>
+          <p:cNvPr id="14" name="motif-line-tick-03"/>
           <p:cNvCxnSpPr/>
           <p:nvPr/>
         </p:nvCxnSpPr>
@@ -43283,7 +42126,7 @@
       </p:cxnSp>
       <p:cxnSp>
         <p:nvCxnSpPr>
-          <p:cNvPr id="24" name="motif-line-tick-04"/>
+          <p:cNvPr id="15" name="motif-line-tick-04"/>
           <p:cNvCxnSpPr/>
           <p:nvPr/>
         </p:nvCxnSpPr>
@@ -43318,7 +42161,7 @@
       </p:cxnSp>
       <p:cxnSp>
         <p:nvCxnSpPr>
-          <p:cNvPr id="25" name="motif-line-tick-05"/>
+          <p:cNvPr id="16" name="motif-line-tick-05"/>
           <p:cNvCxnSpPr/>
           <p:nvPr/>
         </p:nvCxnSpPr>
@@ -43353,7 +42196,7 @@
       </p:cxnSp>
       <p:cxnSp>
         <p:nvCxnSpPr>
-          <p:cNvPr id="26" name="motif-line-tick-06"/>
+          <p:cNvPr id="17" name="motif-line-tick-06"/>
           <p:cNvCxnSpPr/>
           <p:nvPr/>
         </p:nvCxnSpPr>
@@ -43388,7 +42231,7 @@
       </p:cxnSp>
       <p:cxnSp>
         <p:nvCxnSpPr>
-          <p:cNvPr id="27" name="motif-line-tick-07"/>
+          <p:cNvPr id="18" name="motif-line-tick-07"/>
           <p:cNvCxnSpPr/>
           <p:nvPr/>
         </p:nvCxnSpPr>
@@ -43423,7 +42266,7 @@
       </p:cxnSp>
       <p:cxnSp>
         <p:nvCxnSpPr>
-          <p:cNvPr id="28" name="motif-line-tick-08"/>
+          <p:cNvPr id="19" name="motif-line-tick-08"/>
           <p:cNvCxnSpPr/>
           <p:nvPr/>
         </p:nvCxnSpPr>
@@ -43458,7 +42301,7 @@
       </p:cxnSp>
       <p:cxnSp>
         <p:nvCxnSpPr>
-          <p:cNvPr id="29" name="motif-line-tick-09"/>
+          <p:cNvPr id="20" name="motif-line-tick-09"/>
           <p:cNvCxnSpPr/>
           <p:nvPr/>
         </p:nvCxnSpPr>
@@ -43493,7 +42336,7 @@
       </p:cxnSp>
       <p:cxnSp>
         <p:nvCxnSpPr>
-          <p:cNvPr id="30" name="motif-line-tick-10"/>
+          <p:cNvPr id="21" name="motif-line-tick-10"/>
           <p:cNvCxnSpPr/>
           <p:nvPr/>
         </p:nvCxnSpPr>
@@ -43528,7 +42371,7 @@
       </p:cxnSp>
       <p:cxnSp>
         <p:nvCxnSpPr>
-          <p:cNvPr id="31" name="motif-line-tick-11"/>
+          <p:cNvPr id="22" name="motif-line-tick-11"/>
           <p:cNvCxnSpPr/>
           <p:nvPr/>
         </p:nvCxnSpPr>
@@ -43563,7 +42406,7 @@
       </p:cxnSp>
       <p:cxnSp>
         <p:nvCxnSpPr>
-          <p:cNvPr id="32" name="motif-line-tick-12"/>
+          <p:cNvPr id="23" name="motif-line-tick-12"/>
           <p:cNvCxnSpPr/>
           <p:nvPr/>
         </p:nvCxnSpPr>
@@ -43598,7 +42441,7 @@
       </p:cxnSp>
       <p:cxnSp>
         <p:nvCxnSpPr>
-          <p:cNvPr id="33" name="motif-line-tick-13"/>
+          <p:cNvPr id="24" name="motif-line-tick-13"/>
           <p:cNvCxnSpPr/>
           <p:nvPr/>
         </p:nvCxnSpPr>
@@ -43633,7 +42476,7 @@
       </p:cxnSp>
       <p:cxnSp>
         <p:nvCxnSpPr>
-          <p:cNvPr id="34" name="motif-line-tick-14"/>
+          <p:cNvPr id="25" name="motif-line-tick-14"/>
           <p:cNvCxnSpPr/>
           <p:nvPr/>
         </p:nvCxnSpPr>
@@ -43668,7 +42511,7 @@
       </p:cxnSp>
       <p:cxnSp>
         <p:nvCxnSpPr>
-          <p:cNvPr id="35" name="motif-line-tick-15"/>
+          <p:cNvPr id="26" name="motif-line-tick-15"/>
           <p:cNvCxnSpPr/>
           <p:nvPr/>
         </p:nvCxnSpPr>
@@ -43703,7 +42546,7 @@
       </p:cxnSp>
       <p:cxnSp>
         <p:nvCxnSpPr>
-          <p:cNvPr id="36" name="motif-line-tick-16"/>
+          <p:cNvPr id="27" name="motif-line-tick-16"/>
           <p:cNvCxnSpPr/>
           <p:nvPr/>
         </p:nvCxnSpPr>
@@ -43738,7 +42581,7 @@
       </p:cxnSp>
       <p:cxnSp>
         <p:nvCxnSpPr>
-          <p:cNvPr id="37" name="motif-line-tick-17"/>
+          <p:cNvPr id="28" name="motif-line-tick-17"/>
           <p:cNvCxnSpPr/>
           <p:nvPr/>
         </p:nvCxnSpPr>
@@ -43773,7 +42616,7 @@
       </p:cxnSp>
       <p:cxnSp>
         <p:nvCxnSpPr>
-          <p:cNvPr id="38" name="motif-line-tick-18"/>
+          <p:cNvPr id="29" name="motif-line-tick-18"/>
           <p:cNvCxnSpPr/>
           <p:nvPr/>
         </p:nvCxnSpPr>
@@ -43808,7 +42651,7 @@
       </p:cxnSp>
       <p:cxnSp>
         <p:nvCxnSpPr>
-          <p:cNvPr id="39" name="motif-line-tick-19"/>
+          <p:cNvPr id="30" name="motif-line-tick-19"/>
           <p:cNvCxnSpPr/>
           <p:nvPr/>
         </p:nvCxnSpPr>
@@ -43843,7 +42686,7 @@
       </p:cxnSp>
       <p:cxnSp>
         <p:nvCxnSpPr>
-          <p:cNvPr id="40" name="motif-line-tick-20"/>
+          <p:cNvPr id="31" name="motif-line-tick-20"/>
           <p:cNvCxnSpPr/>
           <p:nvPr/>
         </p:nvCxnSpPr>
@@ -43878,7 +42721,7 @@
       </p:cxnSp>
       <p:cxnSp>
         <p:nvCxnSpPr>
-          <p:cNvPr id="41" name="motif-line-tick-21"/>
+          <p:cNvPr id="32" name="motif-line-tick-21"/>
           <p:cNvCxnSpPr/>
           <p:nvPr/>
         </p:nvCxnSpPr>
@@ -43913,7 +42756,7 @@
       </p:cxnSp>
       <p:cxnSp>
         <p:nvCxnSpPr>
-          <p:cNvPr id="42" name="motif-line-tick-22"/>
+          <p:cNvPr id="33" name="motif-line-tick-22"/>
           <p:cNvCxnSpPr/>
           <p:nvPr/>
         </p:nvCxnSpPr>
@@ -43948,7 +42791,7 @@
       </p:cxnSp>
       <p:cxnSp>
         <p:nvCxnSpPr>
-          <p:cNvPr id="43" name="motif-line-tick-23"/>
+          <p:cNvPr id="34" name="motif-line-tick-23"/>
           <p:cNvCxnSpPr/>
           <p:nvPr/>
         </p:nvCxnSpPr>
@@ -43983,7 +42826,7 @@
       </p:cxnSp>
       <p:cxnSp>
         <p:nvCxnSpPr>
-          <p:cNvPr id="44" name="motif-line-tick-24"/>
+          <p:cNvPr id="35" name="motif-line-tick-24"/>
           <p:cNvCxnSpPr/>
           <p:nvPr/>
         </p:nvCxnSpPr>
@@ -44018,7 +42861,7 @@
       </p:cxnSp>
       <p:cxnSp>
         <p:nvCxnSpPr>
-          <p:cNvPr id="45" name="motif-line-tick-25"/>
+          <p:cNvPr id="36" name="motif-line-tick-25"/>
           <p:cNvCxnSpPr/>
           <p:nvPr/>
         </p:nvCxnSpPr>
@@ -44053,7 +42896,7 @@
       </p:cxnSp>
       <p:cxnSp>
         <p:nvCxnSpPr>
-          <p:cNvPr id="46" name="motif-line-tick-26"/>
+          <p:cNvPr id="37" name="motif-line-tick-26"/>
           <p:cNvCxnSpPr/>
           <p:nvPr/>
         </p:nvCxnSpPr>
@@ -44088,7 +42931,7 @@
       </p:cxnSp>
       <p:cxnSp>
         <p:nvCxnSpPr>
-          <p:cNvPr id="47" name="motif-line-tick-27"/>
+          <p:cNvPr id="38" name="motif-line-tick-27"/>
           <p:cNvCxnSpPr/>
           <p:nvPr/>
         </p:nvCxnSpPr>
@@ -44123,7 +42966,7 @@
       </p:cxnSp>
       <p:cxnSp>
         <p:nvCxnSpPr>
-          <p:cNvPr id="48" name="motif-line-tick-28"/>
+          <p:cNvPr id="39" name="motif-line-tick-28"/>
           <p:cNvCxnSpPr/>
           <p:nvPr/>
         </p:nvCxnSpPr>
@@ -44158,7 +43001,7 @@
       </p:cxnSp>
       <p:cxnSp>
         <p:nvCxnSpPr>
-          <p:cNvPr id="49" name="motif-line-tick-29"/>
+          <p:cNvPr id="40" name="motif-line-tick-29"/>
           <p:cNvCxnSpPr/>
           <p:nvPr/>
         </p:nvCxnSpPr>
@@ -44193,7 +43036,7 @@
       </p:cxnSp>
       <p:cxnSp>
         <p:nvCxnSpPr>
-          <p:cNvPr id="50" name="motif-line-tick-30"/>
+          <p:cNvPr id="41" name="motif-line-tick-30"/>
           <p:cNvCxnSpPr/>
           <p:nvPr/>
         </p:nvCxnSpPr>
@@ -44228,7 +43071,7 @@
       </p:cxnSp>
       <p:cxnSp>
         <p:nvCxnSpPr>
-          <p:cNvPr id="51" name="motif-line-tick-31"/>
+          <p:cNvPr id="42" name="motif-line-tick-31"/>
           <p:cNvCxnSpPr/>
           <p:nvPr/>
         </p:nvCxnSpPr>
@@ -44263,48 +43106,13 @@
       </p:cxnSp>
       <p:cxnSp>
         <p:nvCxnSpPr>
-          <p:cNvPr id="52" name="motif-line-tick-32"/>
+          <p:cNvPr id="43" name="motif-line-tick-32"/>
           <p:cNvCxnSpPr/>
           <p:nvPr/>
         </p:nvCxnSpPr>
         <p:spPr>
           <a:xfrm>
             <a:off x="10572750" y="6273800"/>
-            <a:ext cx="0" cy="76200"/>
-          </a:xfrm>
-          <a:prstGeom prst="line">
-            <a:avLst/>
-          </a:prstGeom>
-          <a:ln w="12700">
-            <a:solidFill>
-              <a:srgbClr val="3B5A85"/>
-            </a:solidFill>
-          </a:ln>
-        </p:spPr>
-        <p:style>
-          <a:lnRef idx="2">
-            <a:schemeClr val="accent1"/>
-          </a:lnRef>
-          <a:fillRef idx="0">
-            <a:schemeClr val="accent1"/>
-          </a:fillRef>
-          <a:effectRef idx="1">
-            <a:schemeClr val="accent1"/>
-          </a:effectRef>
-          <a:fontRef idx="minor">
-            <a:schemeClr val="tx1"/>
-          </a:fontRef>
-        </p:style>
-      </p:cxnSp>
-      <p:cxnSp>
-        <p:nvCxnSpPr>
-          <p:cNvPr id="53" name="motif-line-tick-33"/>
-          <p:cNvCxnSpPr/>
-          <p:nvPr/>
-        </p:nvCxnSpPr>
-        <p:spPr>
-          <a:xfrm>
-            <a:off x="10668000" y="6273800"/>
             <a:ext cx="0" cy="76200"/>
           </a:xfrm>
           <a:prstGeom prst="line">
@@ -44391,7 +43199,7 @@
                 </a:solidFill>
                 <a:latin typeface="Plus Jakarta Sans"/>
               </a:rPr>
-              <a:t>These numbers come from one run</a:t>
+              <a:t>Next steps</a:t>
             </a:r>
           </a:p>
         </p:txBody>
@@ -44404,8 +43212,47 @@
         </p:nvSpPr>
         <p:spPr>
           <a:xfrm>
+            <a:off x="762000" y="1813559"/>
+            <a:ext cx="381000" cy="266700"/>
+          </a:xfrm>
+          <a:prstGeom prst="rect">
+            <a:avLst/>
+          </a:prstGeom>
+          <a:noFill/>
+        </p:spPr>
+        <p:txBody>
+          <a:bodyPr wrap="square" lIns="0" rIns="0" tIns="0" bIns="0" anchor="t">
+            <a:spAutoFit/>
+          </a:bodyPr>
+          <a:lstStyle/>
+          <a:p>
+            <a:pPr algn="l">
+              <a:lnSpc>
+                <a:spcPct val="115000"/>
+              </a:lnSpc>
+            </a:pPr>
+            <a:r>
+              <a:rPr sz="1500" b="0">
+                <a:solidFill>
+                  <a:srgbClr val="7FC0F5"/>
+                </a:solidFill>
+                <a:latin typeface="IBM Plex Mono"/>
+              </a:rPr>
+              <a:t>01</a:t>
+            </a:r>
+          </a:p>
+        </p:txBody>
+      </p:sp>
+      <p:sp>
+        <p:nvSpPr>
+          <p:cNvPr id="4" name="TextBox 3"/>
+          <p:cNvSpPr txBox="1"/>
+          <p:nvPr/>
+        </p:nvSpPr>
+        <p:spPr>
+          <a:xfrm>
             <a:off x="1524000" y="1760220"/>
-            <a:ext cx="9906000" cy="1280160"/>
+            <a:ext cx="9906000" cy="853439"/>
           </a:xfrm>
           <a:prstGeom prst="rect">
             <a:avLst/>
@@ -44430,21 +43277,60 @@
                 </a:solidFill>
                 <a:latin typeface="Plus Jakarta Sans"/>
               </a:rPr>
-              <a:t>SparkToro and Gumshoe ran 12 prompts nearly 3,000 times. The same brand list came back less than 1 in 100 times (Search Engine Land, January 2026).</a:t>
+              <a:t>Run the same 20 prompts at least four more times, so every number has a range.</a:t>
             </a:r>
           </a:p>
         </p:txBody>
       </p:sp>
       <p:sp>
         <p:nvSpPr>
-          <p:cNvPr id="4" name="TextBox 3"/>
+          <p:cNvPr id="5" name="TextBox 4"/>
           <p:cNvSpPr txBox="1"/>
           <p:nvPr/>
         </p:nvSpPr>
         <p:spPr>
           <a:xfrm>
-            <a:off x="1524000" y="3256279"/>
-            <a:ext cx="9906000" cy="853439"/>
+            <a:off x="762000" y="2882899"/>
+            <a:ext cx="381000" cy="266700"/>
+          </a:xfrm>
+          <a:prstGeom prst="rect">
+            <a:avLst/>
+          </a:prstGeom>
+          <a:noFill/>
+        </p:spPr>
+        <p:txBody>
+          <a:bodyPr wrap="square" lIns="0" rIns="0" tIns="0" bIns="0" anchor="t">
+            <a:spAutoFit/>
+          </a:bodyPr>
+          <a:lstStyle/>
+          <a:p>
+            <a:pPr algn="l">
+              <a:lnSpc>
+                <a:spcPct val="115000"/>
+              </a:lnSpc>
+            </a:pPr>
+            <a:r>
+              <a:rPr sz="1500" b="0">
+                <a:solidFill>
+                  <a:srgbClr val="7FC0F5"/>
+                </a:solidFill>
+                <a:latin typeface="IBM Plex Mono"/>
+              </a:rPr>
+              <a:t>02</a:t>
+            </a:r>
+          </a:p>
+        </p:txBody>
+      </p:sp>
+      <p:sp>
+        <p:nvSpPr>
+          <p:cNvPr id="6" name="TextBox 5"/>
+          <p:cNvSpPr txBox="1"/>
+          <p:nvPr/>
+        </p:nvSpPr>
+        <p:spPr>
+          <a:xfrm>
+            <a:off x="1524000" y="2829560"/>
+            <a:ext cx="9906000" cy="426719"/>
           </a:xfrm>
           <a:prstGeom prst="rect">
             <a:avLst/>
@@ -44469,21 +43355,177 @@
                 </a:solidFill>
                 <a:latin typeface="Plus Jakarta Sans"/>
               </a:rPr>
-              <a:t>Read gaps of a few points here as ties: BCA and Bank Jago at 55%, SeaBank at 53%.</a:t>
+              <a:t>Add Perplexity, Microsoft Copilot and Google AI Mode.</a:t>
             </a:r>
           </a:p>
         </p:txBody>
       </p:sp>
-      <p:cxnSp>
-        <p:nvCxnSpPr>
-          <p:cNvPr id="5" name="motif-line-rail"/>
+      <p:sp>
+        <p:nvSpPr>
+          <p:cNvPr id="7" name="TextBox 6"/>
+          <p:cNvSpPr txBox="1"/>
+          <p:nvPr/>
+        </p:nvSpPr>
+        <p:spPr>
+          <a:xfrm>
+            <a:off x="762000" y="3525519"/>
+            <a:ext cx="381000" cy="266700"/>
+          </a:xfrm>
+          <a:prstGeom prst="rect">
+            <a:avLst/>
+          </a:prstGeom>
+          <a:noFill/>
+        </p:spPr>
+        <p:txBody>
+          <a:bodyPr wrap="square" lIns="0" rIns="0" tIns="0" bIns="0" anchor="t">
+            <a:spAutoFit/>
+          </a:bodyPr>
+          <a:lstStyle/>
+          <a:p>
+            <a:pPr algn="l">
+              <a:lnSpc>
+                <a:spcPct val="115000"/>
+              </a:lnSpc>
+            </a:pPr>
+            <a:r>
+              <a:rPr sz="1500" b="0">
+                <a:solidFill>
+                  <a:srgbClr val="7FC0F5"/>
+                </a:solidFill>
+                <a:latin typeface="IBM Plex Mono"/>
+              </a:rPr>
+              <a:t>03</a:t>
+            </a:r>
+          </a:p>
+        </p:txBody>
+      </p:sp>
+      <p:sp>
+        <p:nvSpPr>
+          <p:cNvPr id="8" name="TextBox 7"/>
+          <p:cNvSpPr txBox="1"/>
+          <p:nvPr/>
+        </p:nvSpPr>
+        <p:spPr>
+          <a:xfrm>
+            <a:off x="1524000" y="3472179"/>
+            <a:ext cx="9906000" cy="853439"/>
+          </a:xfrm>
+          <a:prstGeom prst="rect">
+            <a:avLst/>
+          </a:prstGeom>
+          <a:noFill/>
+        </p:spPr>
+        <p:txBody>
+          <a:bodyPr wrap="square" lIns="0" rIns="0" tIns="0" bIns="0" anchor="t">
+            <a:spAutoFit/>
+          </a:bodyPr>
+          <a:lstStyle/>
+          <a:p>
+            <a:pPr algn="l">
+              <a:lnSpc>
+                <a:spcPct val="115000"/>
+              </a:lnSpc>
+            </a:pPr>
+            <a:r>
+              <a:rPr sz="2400" b="0">
+                <a:solidFill>
+                  <a:srgbClr val="F4F6FA"/>
+                </a:solidFill>
+                <a:latin typeface="Plus Jakarta Sans"/>
+              </a:rPr>
+              <a:t>Read the top Gemini comparison articles and record how each one describes each bank.</a:t>
+            </a:r>
+          </a:p>
+        </p:txBody>
+      </p:sp>
+      <p:sp>
+        <p:nvSpPr>
+          <p:cNvPr id="9" name="TextBox 8"/>
+          <p:cNvSpPr txBox="1"/>
+          <p:nvPr/>
+        </p:nvSpPr>
+        <p:spPr>
+          <a:xfrm>
+            <a:off x="762000" y="4594859"/>
+            <a:ext cx="381000" cy="266700"/>
+          </a:xfrm>
+          <a:prstGeom prst="rect">
+            <a:avLst/>
+          </a:prstGeom>
+          <a:noFill/>
+        </p:spPr>
+        <p:txBody>
+          <a:bodyPr wrap="square" lIns="0" rIns="0" tIns="0" bIns="0" anchor="t">
+            <a:spAutoFit/>
+          </a:bodyPr>
+          <a:lstStyle/>
+          <a:p>
+            <a:pPr algn="l">
+              <a:lnSpc>
+                <a:spcPct val="115000"/>
+              </a:lnSpc>
+            </a:pPr>
+            <a:r>
+              <a:rPr sz="1500" b="0">
+                <a:solidFill>
+                  <a:srgbClr val="7FC0F5"/>
+                </a:solidFill>
+                <a:latin typeface="IBM Plex Mono"/>
+              </a:rPr>
+              <a:t>04</a:t>
+            </a:r>
+          </a:p>
+        </p:txBody>
+      </p:sp>
+      <p:sp>
+        <p:nvSpPr>
+          <p:cNvPr id="10" name="TextBox 9"/>
+          <p:cNvSpPr txBox="1"/>
+          <p:nvPr/>
+        </p:nvSpPr>
+        <p:spPr>
+          <a:xfrm>
+            <a:off x="1524000" y="4541520"/>
+            <a:ext cx="9906000" cy="426719"/>
+          </a:xfrm>
+          <a:prstGeom prst="rect">
+            <a:avLst/>
+          </a:prstGeom>
+          <a:noFill/>
+        </p:spPr>
+        <p:txBody>
+          <a:bodyPr wrap="square" lIns="0" rIns="0" tIns="0" bIns="0" anchor="t">
+            <a:spAutoFit/>
+          </a:bodyPr>
+          <a:lstStyle/>
+          <a:p>
+            <a:pPr algn="l">
+              <a:lnSpc>
+                <a:spcPct val="115000"/>
+              </a:lnSpc>
+            </a:pPr>
+            <a:r>
+              <a:rPr sz="2400" b="0">
+                <a:solidFill>
+                  <a:srgbClr val="F4F6FA"/>
+                </a:solidFill>
+                <a:latin typeface="Plus Jakarta Sans"/>
+              </a:rPr>
+              <a:t>Put the tables in a public dashboard that refreshes after each run.</a:t>
+            </a:r>
+          </a:p>
+        </p:txBody>
+      </p:sp>
+      <p:cxnSp>
+        <p:nvCxnSpPr>
+          <p:cNvPr id="11" name="motif-line-rail"/>
           <p:cNvCxnSpPr/>
           <p:nvPr/>
         </p:nvCxnSpPr>
         <p:spPr>
           <a:xfrm>
             <a:off x="1282700" y="1859279"/>
-            <a:ext cx="0" cy="1724661"/>
+            <a:ext cx="0" cy="3009901"/>
           </a:xfrm>
           <a:prstGeom prst="line">
             <a:avLst/>
@@ -44511,7 +43553,7 @@
       </p:cxnSp>
       <p:cxnSp>
         <p:nvCxnSpPr>
-          <p:cNvPr id="6" name="motif-line-stop-1"/>
+          <p:cNvPr id="12" name="motif-line-stop-1"/>
           <p:cNvCxnSpPr/>
           <p:nvPr/>
         </p:nvCxnSpPr>
@@ -44546,13 +43588,13 @@
       </p:cxnSp>
       <p:cxnSp>
         <p:nvCxnSpPr>
-          <p:cNvPr id="7" name="motif-line-stop-2"/>
-          <p:cNvCxnSpPr/>
-          <p:nvPr/>
-        </p:nvCxnSpPr>
-        <p:spPr>
-          <a:xfrm>
-            <a:off x="1238250" y="3469640"/>
+          <p:cNvPr id="13" name="motif-line-stop-2"/>
+          <p:cNvCxnSpPr/>
+          <p:nvPr/>
+        </p:nvCxnSpPr>
+        <p:spPr>
+          <a:xfrm>
+            <a:off x="1238250" y="3042919"/>
             <a:ext cx="88900" cy="0"/>
           </a:xfrm>
           <a:prstGeom prst="line">
@@ -44581,7 +43623,77 @@
       </p:cxnSp>
       <p:cxnSp>
         <p:nvCxnSpPr>
-          <p:cNvPr id="8" name="motif-line-mark"/>
+          <p:cNvPr id="14" name="motif-line-stop-3"/>
+          <p:cNvCxnSpPr/>
+          <p:nvPr/>
+        </p:nvCxnSpPr>
+        <p:spPr>
+          <a:xfrm>
+            <a:off x="1238250" y="3685540"/>
+            <a:ext cx="88900" cy="0"/>
+          </a:xfrm>
+          <a:prstGeom prst="line">
+            <a:avLst/>
+          </a:prstGeom>
+          <a:ln w="19050">
+            <a:solidFill>
+              <a:srgbClr val="7FC0F5"/>
+            </a:solidFill>
+          </a:ln>
+        </p:spPr>
+        <p:style>
+          <a:lnRef idx="2">
+            <a:schemeClr val="accent1"/>
+          </a:lnRef>
+          <a:fillRef idx="0">
+            <a:schemeClr val="accent1"/>
+          </a:fillRef>
+          <a:effectRef idx="1">
+            <a:schemeClr val="accent1"/>
+          </a:effectRef>
+          <a:fontRef idx="minor">
+            <a:schemeClr val="tx1"/>
+          </a:fontRef>
+        </p:style>
+      </p:cxnSp>
+      <p:cxnSp>
+        <p:nvCxnSpPr>
+          <p:cNvPr id="15" name="motif-line-stop-4"/>
+          <p:cNvCxnSpPr/>
+          <p:nvPr/>
+        </p:nvCxnSpPr>
+        <p:spPr>
+          <a:xfrm>
+            <a:off x="1238250" y="4754880"/>
+            <a:ext cx="88900" cy="0"/>
+          </a:xfrm>
+          <a:prstGeom prst="line">
+            <a:avLst/>
+          </a:prstGeom>
+          <a:ln w="19050">
+            <a:solidFill>
+              <a:srgbClr val="7FC0F5"/>
+            </a:solidFill>
+          </a:ln>
+        </p:spPr>
+        <p:style>
+          <a:lnRef idx="2">
+            <a:schemeClr val="accent1"/>
+          </a:lnRef>
+          <a:fillRef idx="0">
+            <a:schemeClr val="accent1"/>
+          </a:fillRef>
+          <a:effectRef idx="1">
+            <a:schemeClr val="accent1"/>
+          </a:effectRef>
+          <a:fontRef idx="minor">
+            <a:schemeClr val="tx1"/>
+          </a:fontRef>
+        </p:style>
+      </p:cxnSp>
+      <p:cxnSp>
+        <p:nvCxnSpPr>
+          <p:cNvPr id="16" name="motif-line-mark"/>
           <p:cNvCxnSpPr/>
           <p:nvPr/>
         </p:nvCxnSpPr>
@@ -44616,7 +43728,7 @@
       </p:cxnSp>
       <p:sp>
         <p:nvSpPr>
-          <p:cNvPr id="9" name="chrome-part"/>
+          <p:cNvPr id="17" name="chrome-part"/>
           <p:cNvSpPr txBox="1"/>
           <p:nvPr/>
         </p:nvSpPr>
@@ -44655,7 +43767,7 @@
       </p:sp>
       <p:cxnSp>
         <p:nvCxnSpPr>
-          <p:cNvPr id="10" name="motif-line-footer"/>
+          <p:cNvPr id="18" name="motif-line-footer"/>
           <p:cNvCxnSpPr/>
           <p:nvPr/>
         </p:nvCxnSpPr>
@@ -44690,7 +43802,7 @@
       </p:cxnSp>
       <p:sp>
         <p:nvSpPr>
-          <p:cNvPr id="11" name="chrome-page"/>
+          <p:cNvPr id="19" name="chrome-page"/>
           <p:cNvSpPr txBox="1"/>
           <p:nvPr/>
         </p:nvSpPr>
@@ -44722,14 +43834,14 @@
                 </a:solidFill>
                 <a:latin typeface="IBM Plex Mono"/>
               </a:rPr>
-              <a:t>31 / 33</a:t>
+              <a:t>31 / 32</a:t>
             </a:r>
           </a:p>
         </p:txBody>
       </p:sp>
       <p:cxnSp>
         <p:nvCxnSpPr>
-          <p:cNvPr id="12" name="motif-line-tick-01"/>
+          <p:cNvPr id="20" name="motif-line-tick-01"/>
           <p:cNvCxnSpPr/>
           <p:nvPr/>
         </p:nvCxnSpPr>
@@ -44764,7 +43876,7 @@
       </p:cxnSp>
       <p:cxnSp>
         <p:nvCxnSpPr>
-          <p:cNvPr id="13" name="motif-line-tick-02"/>
+          <p:cNvPr id="21" name="motif-line-tick-02"/>
           <p:cNvCxnSpPr/>
           <p:nvPr/>
         </p:nvCxnSpPr>
@@ -44799,7 +43911,7 @@
       </p:cxnSp>
       <p:cxnSp>
         <p:nvCxnSpPr>
-          <p:cNvPr id="14" name="motif-line-tick-03"/>
+          <p:cNvPr id="22" name="motif-line-tick-03"/>
           <p:cNvCxnSpPr/>
           <p:nvPr/>
         </p:nvCxnSpPr>
@@ -44834,7 +43946,7 @@
       </p:cxnSp>
       <p:cxnSp>
         <p:nvCxnSpPr>
-          <p:cNvPr id="15" name="motif-line-tick-04"/>
+          <p:cNvPr id="23" name="motif-line-tick-04"/>
           <p:cNvCxnSpPr/>
           <p:nvPr/>
         </p:nvCxnSpPr>
@@ -44869,7 +43981,7 @@
       </p:cxnSp>
       <p:cxnSp>
         <p:nvCxnSpPr>
-          <p:cNvPr id="16" name="motif-line-tick-05"/>
+          <p:cNvPr id="24" name="motif-line-tick-05"/>
           <p:cNvCxnSpPr/>
           <p:nvPr/>
         </p:nvCxnSpPr>
@@ -44904,7 +44016,7 @@
       </p:cxnSp>
       <p:cxnSp>
         <p:nvCxnSpPr>
-          <p:cNvPr id="17" name="motif-line-tick-06"/>
+          <p:cNvPr id="25" name="motif-line-tick-06"/>
           <p:cNvCxnSpPr/>
           <p:nvPr/>
         </p:nvCxnSpPr>
@@ -44939,7 +44051,7 @@
       </p:cxnSp>
       <p:cxnSp>
         <p:nvCxnSpPr>
-          <p:cNvPr id="18" name="motif-line-tick-07"/>
+          <p:cNvPr id="26" name="motif-line-tick-07"/>
           <p:cNvCxnSpPr/>
           <p:nvPr/>
         </p:nvCxnSpPr>
@@ -44974,7 +44086,7 @@
       </p:cxnSp>
       <p:cxnSp>
         <p:nvCxnSpPr>
-          <p:cNvPr id="19" name="motif-line-tick-08"/>
+          <p:cNvPr id="27" name="motif-line-tick-08"/>
           <p:cNvCxnSpPr/>
           <p:nvPr/>
         </p:nvCxnSpPr>
@@ -45009,7 +44121,7 @@
       </p:cxnSp>
       <p:cxnSp>
         <p:nvCxnSpPr>
-          <p:cNvPr id="20" name="motif-line-tick-09"/>
+          <p:cNvPr id="28" name="motif-line-tick-09"/>
           <p:cNvCxnSpPr/>
           <p:nvPr/>
         </p:nvCxnSpPr>
@@ -45044,7 +44156,7 @@
       </p:cxnSp>
       <p:cxnSp>
         <p:nvCxnSpPr>
-          <p:cNvPr id="21" name="motif-line-tick-10"/>
+          <p:cNvPr id="29" name="motif-line-tick-10"/>
           <p:cNvCxnSpPr/>
           <p:nvPr/>
         </p:nvCxnSpPr>
@@ -45079,7 +44191,7 @@
       </p:cxnSp>
       <p:cxnSp>
         <p:nvCxnSpPr>
-          <p:cNvPr id="22" name="motif-line-tick-11"/>
+          <p:cNvPr id="30" name="motif-line-tick-11"/>
           <p:cNvCxnSpPr/>
           <p:nvPr/>
         </p:nvCxnSpPr>
@@ -45114,7 +44226,7 @@
       </p:cxnSp>
       <p:cxnSp>
         <p:nvCxnSpPr>
-          <p:cNvPr id="23" name="motif-line-tick-12"/>
+          <p:cNvPr id="31" name="motif-line-tick-12"/>
           <p:cNvCxnSpPr/>
           <p:nvPr/>
         </p:nvCxnSpPr>
@@ -45149,7 +44261,7 @@
       </p:cxnSp>
       <p:cxnSp>
         <p:nvCxnSpPr>
-          <p:cNvPr id="24" name="motif-line-tick-13"/>
+          <p:cNvPr id="32" name="motif-line-tick-13"/>
           <p:cNvCxnSpPr/>
           <p:nvPr/>
         </p:nvCxnSpPr>
@@ -45184,7 +44296,7 @@
       </p:cxnSp>
       <p:cxnSp>
         <p:nvCxnSpPr>
-          <p:cNvPr id="25" name="motif-line-tick-14"/>
+          <p:cNvPr id="33" name="motif-line-tick-14"/>
           <p:cNvCxnSpPr/>
           <p:nvPr/>
         </p:nvCxnSpPr>
@@ -45219,7 +44331,7 @@
       </p:cxnSp>
       <p:cxnSp>
         <p:nvCxnSpPr>
-          <p:cNvPr id="26" name="motif-line-tick-15"/>
+          <p:cNvPr id="34" name="motif-line-tick-15"/>
           <p:cNvCxnSpPr/>
           <p:nvPr/>
         </p:nvCxnSpPr>
@@ -45254,7 +44366,7 @@
       </p:cxnSp>
       <p:cxnSp>
         <p:nvCxnSpPr>
-          <p:cNvPr id="27" name="motif-line-tick-16"/>
+          <p:cNvPr id="35" name="motif-line-tick-16"/>
           <p:cNvCxnSpPr/>
           <p:nvPr/>
         </p:nvCxnSpPr>
@@ -45289,7 +44401,7 @@
       </p:cxnSp>
       <p:cxnSp>
         <p:nvCxnSpPr>
-          <p:cNvPr id="28" name="motif-line-tick-17"/>
+          <p:cNvPr id="36" name="motif-line-tick-17"/>
           <p:cNvCxnSpPr/>
           <p:nvPr/>
         </p:nvCxnSpPr>
@@ -45324,7 +44436,7 @@
       </p:cxnSp>
       <p:cxnSp>
         <p:nvCxnSpPr>
-          <p:cNvPr id="29" name="motif-line-tick-18"/>
+          <p:cNvPr id="37" name="motif-line-tick-18"/>
           <p:cNvCxnSpPr/>
           <p:nvPr/>
         </p:nvCxnSpPr>
@@ -45359,7 +44471,7 @@
       </p:cxnSp>
       <p:cxnSp>
         <p:nvCxnSpPr>
-          <p:cNvPr id="30" name="motif-line-tick-19"/>
+          <p:cNvPr id="38" name="motif-line-tick-19"/>
           <p:cNvCxnSpPr/>
           <p:nvPr/>
         </p:nvCxnSpPr>
@@ -45394,7 +44506,7 @@
       </p:cxnSp>
       <p:cxnSp>
         <p:nvCxnSpPr>
-          <p:cNvPr id="31" name="motif-line-tick-20"/>
+          <p:cNvPr id="39" name="motif-line-tick-20"/>
           <p:cNvCxnSpPr/>
           <p:nvPr/>
         </p:nvCxnSpPr>
@@ -45429,7 +44541,7 @@
       </p:cxnSp>
       <p:cxnSp>
         <p:nvCxnSpPr>
-          <p:cNvPr id="32" name="motif-line-tick-21"/>
+          <p:cNvPr id="40" name="motif-line-tick-21"/>
           <p:cNvCxnSpPr/>
           <p:nvPr/>
         </p:nvCxnSpPr>
@@ -45464,7 +44576,7 @@
       </p:cxnSp>
       <p:cxnSp>
         <p:nvCxnSpPr>
-          <p:cNvPr id="33" name="motif-line-tick-22"/>
+          <p:cNvPr id="41" name="motif-line-tick-22"/>
           <p:cNvCxnSpPr/>
           <p:nvPr/>
         </p:nvCxnSpPr>
@@ -45499,7 +44611,7 @@
       </p:cxnSp>
       <p:cxnSp>
         <p:nvCxnSpPr>
-          <p:cNvPr id="34" name="motif-line-tick-23"/>
+          <p:cNvPr id="42" name="motif-line-tick-23"/>
           <p:cNvCxnSpPr/>
           <p:nvPr/>
         </p:nvCxnSpPr>
@@ -45534,7 +44646,7 @@
       </p:cxnSp>
       <p:cxnSp>
         <p:nvCxnSpPr>
-          <p:cNvPr id="35" name="motif-line-tick-24"/>
+          <p:cNvPr id="43" name="motif-line-tick-24"/>
           <p:cNvCxnSpPr/>
           <p:nvPr/>
         </p:nvCxnSpPr>
@@ -45569,7 +44681,7 @@
       </p:cxnSp>
       <p:cxnSp>
         <p:nvCxnSpPr>
-          <p:cNvPr id="36" name="motif-line-tick-25"/>
+          <p:cNvPr id="44" name="motif-line-tick-25"/>
           <p:cNvCxnSpPr/>
           <p:nvPr/>
         </p:nvCxnSpPr>
@@ -45604,7 +44716,7 @@
       </p:cxnSp>
       <p:cxnSp>
         <p:nvCxnSpPr>
-          <p:cNvPr id="37" name="motif-line-tick-26"/>
+          <p:cNvPr id="45" name="motif-line-tick-26"/>
           <p:cNvCxnSpPr/>
           <p:nvPr/>
         </p:nvCxnSpPr>
@@ -45639,7 +44751,7 @@
       </p:cxnSp>
       <p:cxnSp>
         <p:nvCxnSpPr>
-          <p:cNvPr id="38" name="motif-line-tick-27"/>
+          <p:cNvPr id="46" name="motif-line-tick-27"/>
           <p:cNvCxnSpPr/>
           <p:nvPr/>
         </p:nvCxnSpPr>
@@ -45674,7 +44786,7 @@
       </p:cxnSp>
       <p:cxnSp>
         <p:nvCxnSpPr>
-          <p:cNvPr id="39" name="motif-line-tick-28"/>
+          <p:cNvPr id="47" name="motif-line-tick-28"/>
           <p:cNvCxnSpPr/>
           <p:nvPr/>
         </p:nvCxnSpPr>
@@ -45709,7 +44821,7 @@
       </p:cxnSp>
       <p:cxnSp>
         <p:nvCxnSpPr>
-          <p:cNvPr id="40" name="motif-line-tick-29"/>
+          <p:cNvPr id="48" name="motif-line-tick-29"/>
           <p:cNvCxnSpPr/>
           <p:nvPr/>
         </p:nvCxnSpPr>
@@ -45744,7 +44856,7 @@
       </p:cxnSp>
       <p:cxnSp>
         <p:nvCxnSpPr>
-          <p:cNvPr id="41" name="motif-line-tick-30"/>
+          <p:cNvPr id="49" name="motif-line-tick-30"/>
           <p:cNvCxnSpPr/>
           <p:nvPr/>
         </p:nvCxnSpPr>
@@ -45779,7 +44891,7 @@
       </p:cxnSp>
       <p:cxnSp>
         <p:nvCxnSpPr>
-          <p:cNvPr id="42" name="motif-line-tick-31"/>
+          <p:cNvPr id="50" name="motif-line-tick-31"/>
           <p:cNvCxnSpPr/>
           <p:nvPr/>
         </p:nvCxnSpPr>
@@ -45814,48 +44926,13 @@
       </p:cxnSp>
       <p:cxnSp>
         <p:nvCxnSpPr>
-          <p:cNvPr id="43" name="motif-line-tick-32"/>
+          <p:cNvPr id="51" name="motif-line-tick-32"/>
           <p:cNvCxnSpPr/>
           <p:nvPr/>
         </p:nvCxnSpPr>
         <p:spPr>
           <a:xfrm>
             <a:off x="10572750" y="6273800"/>
-            <a:ext cx="0" cy="76200"/>
-          </a:xfrm>
-          <a:prstGeom prst="line">
-            <a:avLst/>
-          </a:prstGeom>
-          <a:ln w="12700">
-            <a:solidFill>
-              <a:srgbClr val="3B5A85"/>
-            </a:solidFill>
-          </a:ln>
-        </p:spPr>
-        <p:style>
-          <a:lnRef idx="2">
-            <a:schemeClr val="accent1"/>
-          </a:lnRef>
-          <a:fillRef idx="0">
-            <a:schemeClr val="accent1"/>
-          </a:fillRef>
-          <a:effectRef idx="1">
-            <a:schemeClr val="accent1"/>
-          </a:effectRef>
-          <a:fontRef idx="minor">
-            <a:schemeClr val="tx1"/>
-          </a:fontRef>
-        </p:style>
-      </p:cxnSp>
-      <p:cxnSp>
-        <p:nvCxnSpPr>
-          <p:cNvPr id="44" name="motif-line-tick-33"/>
-          <p:cNvCxnSpPr/>
-          <p:nvPr/>
-        </p:nvCxnSpPr>
-        <p:spPr>
-          <a:xfrm>
-            <a:off x="10668000" y="6273800"/>
             <a:ext cx="0" cy="76200"/>
           </a:xfrm>
           <a:prstGeom prst="line">
@@ -45917,1861 +44994,6 @@
         <p:spPr>
           <a:xfrm>
             <a:off x="762000" y="952500"/>
-            <a:ext cx="10668000" cy="604519"/>
-          </a:xfrm>
-          <a:prstGeom prst="rect">
-            <a:avLst/>
-          </a:prstGeom>
-          <a:noFill/>
-        </p:spPr>
-        <p:txBody>
-          <a:bodyPr wrap="square" lIns="0" rIns="0" tIns="0" bIns="0" anchor="t">
-            <a:spAutoFit/>
-          </a:bodyPr>
-          <a:lstStyle/>
-          <a:p>
-            <a:pPr algn="l">
-              <a:lnSpc>
-                <a:spcPct val="115000"/>
-              </a:lnSpc>
-            </a:pPr>
-            <a:r>
-              <a:rPr sz="3400" b="1">
-                <a:solidFill>
-                  <a:srgbClr val="F4F6FA"/>
-                </a:solidFill>
-                <a:latin typeface="Plus Jakarta Sans"/>
-              </a:rPr>
-              <a:t>Next steps</a:t>
-            </a:r>
-          </a:p>
-        </p:txBody>
-      </p:sp>
-      <p:sp>
-        <p:nvSpPr>
-          <p:cNvPr id="3" name="TextBox 2"/>
-          <p:cNvSpPr txBox="1"/>
-          <p:nvPr/>
-        </p:nvSpPr>
-        <p:spPr>
-          <a:xfrm>
-            <a:off x="762000" y="1813559"/>
-            <a:ext cx="381000" cy="266700"/>
-          </a:xfrm>
-          <a:prstGeom prst="rect">
-            <a:avLst/>
-          </a:prstGeom>
-          <a:noFill/>
-        </p:spPr>
-        <p:txBody>
-          <a:bodyPr wrap="square" lIns="0" rIns="0" tIns="0" bIns="0" anchor="t">
-            <a:spAutoFit/>
-          </a:bodyPr>
-          <a:lstStyle/>
-          <a:p>
-            <a:pPr algn="l">
-              <a:lnSpc>
-                <a:spcPct val="115000"/>
-              </a:lnSpc>
-            </a:pPr>
-            <a:r>
-              <a:rPr sz="1500" b="0">
-                <a:solidFill>
-                  <a:srgbClr val="7FC0F5"/>
-                </a:solidFill>
-                <a:latin typeface="IBM Plex Mono"/>
-              </a:rPr>
-              <a:t>01</a:t>
-            </a:r>
-          </a:p>
-        </p:txBody>
-      </p:sp>
-      <p:sp>
-        <p:nvSpPr>
-          <p:cNvPr id="4" name="TextBox 3"/>
-          <p:cNvSpPr txBox="1"/>
-          <p:nvPr/>
-        </p:nvSpPr>
-        <p:spPr>
-          <a:xfrm>
-            <a:off x="1524000" y="1760220"/>
-            <a:ext cx="9906000" cy="853439"/>
-          </a:xfrm>
-          <a:prstGeom prst="rect">
-            <a:avLst/>
-          </a:prstGeom>
-          <a:noFill/>
-        </p:spPr>
-        <p:txBody>
-          <a:bodyPr wrap="square" lIns="0" rIns="0" tIns="0" bIns="0" anchor="t">
-            <a:spAutoFit/>
-          </a:bodyPr>
-          <a:lstStyle/>
-          <a:p>
-            <a:pPr algn="l">
-              <a:lnSpc>
-                <a:spcPct val="115000"/>
-              </a:lnSpc>
-            </a:pPr>
-            <a:r>
-              <a:rPr sz="2400" b="0">
-                <a:solidFill>
-                  <a:srgbClr val="F4F6FA"/>
-                </a:solidFill>
-                <a:latin typeface="Plus Jakarta Sans"/>
-              </a:rPr>
-              <a:t>Run the same 20 prompts at least four more times, so every number has a range.</a:t>
-            </a:r>
-          </a:p>
-        </p:txBody>
-      </p:sp>
-      <p:sp>
-        <p:nvSpPr>
-          <p:cNvPr id="5" name="TextBox 4"/>
-          <p:cNvSpPr txBox="1"/>
-          <p:nvPr/>
-        </p:nvSpPr>
-        <p:spPr>
-          <a:xfrm>
-            <a:off x="762000" y="2882899"/>
-            <a:ext cx="381000" cy="266700"/>
-          </a:xfrm>
-          <a:prstGeom prst="rect">
-            <a:avLst/>
-          </a:prstGeom>
-          <a:noFill/>
-        </p:spPr>
-        <p:txBody>
-          <a:bodyPr wrap="square" lIns="0" rIns="0" tIns="0" bIns="0" anchor="t">
-            <a:spAutoFit/>
-          </a:bodyPr>
-          <a:lstStyle/>
-          <a:p>
-            <a:pPr algn="l">
-              <a:lnSpc>
-                <a:spcPct val="115000"/>
-              </a:lnSpc>
-            </a:pPr>
-            <a:r>
-              <a:rPr sz="1500" b="0">
-                <a:solidFill>
-                  <a:srgbClr val="7FC0F5"/>
-                </a:solidFill>
-                <a:latin typeface="IBM Plex Mono"/>
-              </a:rPr>
-              <a:t>02</a:t>
-            </a:r>
-          </a:p>
-        </p:txBody>
-      </p:sp>
-      <p:sp>
-        <p:nvSpPr>
-          <p:cNvPr id="6" name="TextBox 5"/>
-          <p:cNvSpPr txBox="1"/>
-          <p:nvPr/>
-        </p:nvSpPr>
-        <p:spPr>
-          <a:xfrm>
-            <a:off x="1524000" y="2829560"/>
-            <a:ext cx="9906000" cy="426719"/>
-          </a:xfrm>
-          <a:prstGeom prst="rect">
-            <a:avLst/>
-          </a:prstGeom>
-          <a:noFill/>
-        </p:spPr>
-        <p:txBody>
-          <a:bodyPr wrap="square" lIns="0" rIns="0" tIns="0" bIns="0" anchor="t">
-            <a:spAutoFit/>
-          </a:bodyPr>
-          <a:lstStyle/>
-          <a:p>
-            <a:pPr algn="l">
-              <a:lnSpc>
-                <a:spcPct val="115000"/>
-              </a:lnSpc>
-            </a:pPr>
-            <a:r>
-              <a:rPr sz="2400" b="0">
-                <a:solidFill>
-                  <a:srgbClr val="F4F6FA"/>
-                </a:solidFill>
-                <a:latin typeface="Plus Jakarta Sans"/>
-              </a:rPr>
-              <a:t>Add Perplexity, Microsoft Copilot and Google AI Mode.</a:t>
-            </a:r>
-          </a:p>
-        </p:txBody>
-      </p:sp>
-      <p:sp>
-        <p:nvSpPr>
-          <p:cNvPr id="7" name="TextBox 6"/>
-          <p:cNvSpPr txBox="1"/>
-          <p:nvPr/>
-        </p:nvSpPr>
-        <p:spPr>
-          <a:xfrm>
-            <a:off x="762000" y="3525519"/>
-            <a:ext cx="381000" cy="266700"/>
-          </a:xfrm>
-          <a:prstGeom prst="rect">
-            <a:avLst/>
-          </a:prstGeom>
-          <a:noFill/>
-        </p:spPr>
-        <p:txBody>
-          <a:bodyPr wrap="square" lIns="0" rIns="0" tIns="0" bIns="0" anchor="t">
-            <a:spAutoFit/>
-          </a:bodyPr>
-          <a:lstStyle/>
-          <a:p>
-            <a:pPr algn="l">
-              <a:lnSpc>
-                <a:spcPct val="115000"/>
-              </a:lnSpc>
-            </a:pPr>
-            <a:r>
-              <a:rPr sz="1500" b="0">
-                <a:solidFill>
-                  <a:srgbClr val="7FC0F5"/>
-                </a:solidFill>
-                <a:latin typeface="IBM Plex Mono"/>
-              </a:rPr>
-              <a:t>03</a:t>
-            </a:r>
-          </a:p>
-        </p:txBody>
-      </p:sp>
-      <p:sp>
-        <p:nvSpPr>
-          <p:cNvPr id="8" name="TextBox 7"/>
-          <p:cNvSpPr txBox="1"/>
-          <p:nvPr/>
-        </p:nvSpPr>
-        <p:spPr>
-          <a:xfrm>
-            <a:off x="1524000" y="3472179"/>
-            <a:ext cx="9906000" cy="853439"/>
-          </a:xfrm>
-          <a:prstGeom prst="rect">
-            <a:avLst/>
-          </a:prstGeom>
-          <a:noFill/>
-        </p:spPr>
-        <p:txBody>
-          <a:bodyPr wrap="square" lIns="0" rIns="0" tIns="0" bIns="0" anchor="t">
-            <a:spAutoFit/>
-          </a:bodyPr>
-          <a:lstStyle/>
-          <a:p>
-            <a:pPr algn="l">
-              <a:lnSpc>
-                <a:spcPct val="115000"/>
-              </a:lnSpc>
-            </a:pPr>
-            <a:r>
-              <a:rPr sz="2400" b="0">
-                <a:solidFill>
-                  <a:srgbClr val="F4F6FA"/>
-                </a:solidFill>
-                <a:latin typeface="Plus Jakarta Sans"/>
-              </a:rPr>
-              <a:t>Read the top Gemini comparison articles and record how each one describes each bank.</a:t>
-            </a:r>
-          </a:p>
-        </p:txBody>
-      </p:sp>
-      <p:sp>
-        <p:nvSpPr>
-          <p:cNvPr id="9" name="TextBox 8"/>
-          <p:cNvSpPr txBox="1"/>
-          <p:nvPr/>
-        </p:nvSpPr>
-        <p:spPr>
-          <a:xfrm>
-            <a:off x="762000" y="4594859"/>
-            <a:ext cx="381000" cy="266700"/>
-          </a:xfrm>
-          <a:prstGeom prst="rect">
-            <a:avLst/>
-          </a:prstGeom>
-          <a:noFill/>
-        </p:spPr>
-        <p:txBody>
-          <a:bodyPr wrap="square" lIns="0" rIns="0" tIns="0" bIns="0" anchor="t">
-            <a:spAutoFit/>
-          </a:bodyPr>
-          <a:lstStyle/>
-          <a:p>
-            <a:pPr algn="l">
-              <a:lnSpc>
-                <a:spcPct val="115000"/>
-              </a:lnSpc>
-            </a:pPr>
-            <a:r>
-              <a:rPr sz="1500" b="0">
-                <a:solidFill>
-                  <a:srgbClr val="7FC0F5"/>
-                </a:solidFill>
-                <a:latin typeface="IBM Plex Mono"/>
-              </a:rPr>
-              <a:t>04</a:t>
-            </a:r>
-          </a:p>
-        </p:txBody>
-      </p:sp>
-      <p:sp>
-        <p:nvSpPr>
-          <p:cNvPr id="10" name="TextBox 9"/>
-          <p:cNvSpPr txBox="1"/>
-          <p:nvPr/>
-        </p:nvSpPr>
-        <p:spPr>
-          <a:xfrm>
-            <a:off x="1524000" y="4541520"/>
-            <a:ext cx="9906000" cy="426719"/>
-          </a:xfrm>
-          <a:prstGeom prst="rect">
-            <a:avLst/>
-          </a:prstGeom>
-          <a:noFill/>
-        </p:spPr>
-        <p:txBody>
-          <a:bodyPr wrap="square" lIns="0" rIns="0" tIns="0" bIns="0" anchor="t">
-            <a:spAutoFit/>
-          </a:bodyPr>
-          <a:lstStyle/>
-          <a:p>
-            <a:pPr algn="l">
-              <a:lnSpc>
-                <a:spcPct val="115000"/>
-              </a:lnSpc>
-            </a:pPr>
-            <a:r>
-              <a:rPr sz="2400" b="0">
-                <a:solidFill>
-                  <a:srgbClr val="F4F6FA"/>
-                </a:solidFill>
-                <a:latin typeface="Plus Jakarta Sans"/>
-              </a:rPr>
-              <a:t>Put the tables in a public dashboard that refreshes after each run.</a:t>
-            </a:r>
-          </a:p>
-        </p:txBody>
-      </p:sp>
-      <p:cxnSp>
-        <p:nvCxnSpPr>
-          <p:cNvPr id="11" name="motif-line-rail"/>
-          <p:cNvCxnSpPr/>
-          <p:nvPr/>
-        </p:nvCxnSpPr>
-        <p:spPr>
-          <a:xfrm>
-            <a:off x="1282700" y="1859279"/>
-            <a:ext cx="0" cy="3009901"/>
-          </a:xfrm>
-          <a:prstGeom prst="line">
-            <a:avLst/>
-          </a:prstGeom>
-          <a:ln w="12700">
-            <a:solidFill>
-              <a:srgbClr val="3B5A85"/>
-            </a:solidFill>
-          </a:ln>
-        </p:spPr>
-        <p:style>
-          <a:lnRef idx="2">
-            <a:schemeClr val="accent1"/>
-          </a:lnRef>
-          <a:fillRef idx="0">
-            <a:schemeClr val="accent1"/>
-          </a:fillRef>
-          <a:effectRef idx="1">
-            <a:schemeClr val="accent1"/>
-          </a:effectRef>
-          <a:fontRef idx="minor">
-            <a:schemeClr val="tx1"/>
-          </a:fontRef>
-        </p:style>
-      </p:cxnSp>
-      <p:cxnSp>
-        <p:nvCxnSpPr>
-          <p:cNvPr id="12" name="motif-line-stop-1"/>
-          <p:cNvCxnSpPr/>
-          <p:nvPr/>
-        </p:nvCxnSpPr>
-        <p:spPr>
-          <a:xfrm>
-            <a:off x="1238250" y="1973579"/>
-            <a:ext cx="88900" cy="0"/>
-          </a:xfrm>
-          <a:prstGeom prst="line">
-            <a:avLst/>
-          </a:prstGeom>
-          <a:ln w="19050">
-            <a:solidFill>
-              <a:srgbClr val="7FC0F5"/>
-            </a:solidFill>
-          </a:ln>
-        </p:spPr>
-        <p:style>
-          <a:lnRef idx="2">
-            <a:schemeClr val="accent1"/>
-          </a:lnRef>
-          <a:fillRef idx="0">
-            <a:schemeClr val="accent1"/>
-          </a:fillRef>
-          <a:effectRef idx="1">
-            <a:schemeClr val="accent1"/>
-          </a:effectRef>
-          <a:fontRef idx="minor">
-            <a:schemeClr val="tx1"/>
-          </a:fontRef>
-        </p:style>
-      </p:cxnSp>
-      <p:cxnSp>
-        <p:nvCxnSpPr>
-          <p:cNvPr id="13" name="motif-line-stop-2"/>
-          <p:cNvCxnSpPr/>
-          <p:nvPr/>
-        </p:nvCxnSpPr>
-        <p:spPr>
-          <a:xfrm>
-            <a:off x="1238250" y="3042919"/>
-            <a:ext cx="88900" cy="0"/>
-          </a:xfrm>
-          <a:prstGeom prst="line">
-            <a:avLst/>
-          </a:prstGeom>
-          <a:ln w="19050">
-            <a:solidFill>
-              <a:srgbClr val="7FC0F5"/>
-            </a:solidFill>
-          </a:ln>
-        </p:spPr>
-        <p:style>
-          <a:lnRef idx="2">
-            <a:schemeClr val="accent1"/>
-          </a:lnRef>
-          <a:fillRef idx="0">
-            <a:schemeClr val="accent1"/>
-          </a:fillRef>
-          <a:effectRef idx="1">
-            <a:schemeClr val="accent1"/>
-          </a:effectRef>
-          <a:fontRef idx="minor">
-            <a:schemeClr val="tx1"/>
-          </a:fontRef>
-        </p:style>
-      </p:cxnSp>
-      <p:cxnSp>
-        <p:nvCxnSpPr>
-          <p:cNvPr id="14" name="motif-line-stop-3"/>
-          <p:cNvCxnSpPr/>
-          <p:nvPr/>
-        </p:nvCxnSpPr>
-        <p:spPr>
-          <a:xfrm>
-            <a:off x="1238250" y="3685540"/>
-            <a:ext cx="88900" cy="0"/>
-          </a:xfrm>
-          <a:prstGeom prst="line">
-            <a:avLst/>
-          </a:prstGeom>
-          <a:ln w="19050">
-            <a:solidFill>
-              <a:srgbClr val="7FC0F5"/>
-            </a:solidFill>
-          </a:ln>
-        </p:spPr>
-        <p:style>
-          <a:lnRef idx="2">
-            <a:schemeClr val="accent1"/>
-          </a:lnRef>
-          <a:fillRef idx="0">
-            <a:schemeClr val="accent1"/>
-          </a:fillRef>
-          <a:effectRef idx="1">
-            <a:schemeClr val="accent1"/>
-          </a:effectRef>
-          <a:fontRef idx="minor">
-            <a:schemeClr val="tx1"/>
-          </a:fontRef>
-        </p:style>
-      </p:cxnSp>
-      <p:cxnSp>
-        <p:nvCxnSpPr>
-          <p:cNvPr id="15" name="motif-line-stop-4"/>
-          <p:cNvCxnSpPr/>
-          <p:nvPr/>
-        </p:nvCxnSpPr>
-        <p:spPr>
-          <a:xfrm>
-            <a:off x="1238250" y="4754880"/>
-            <a:ext cx="88900" cy="0"/>
-          </a:xfrm>
-          <a:prstGeom prst="line">
-            <a:avLst/>
-          </a:prstGeom>
-          <a:ln w="19050">
-            <a:solidFill>
-              <a:srgbClr val="7FC0F5"/>
-            </a:solidFill>
-          </a:ln>
-        </p:spPr>
-        <p:style>
-          <a:lnRef idx="2">
-            <a:schemeClr val="accent1"/>
-          </a:lnRef>
-          <a:fillRef idx="0">
-            <a:schemeClr val="accent1"/>
-          </a:fillRef>
-          <a:effectRef idx="1">
-            <a:schemeClr val="accent1"/>
-          </a:effectRef>
-          <a:fontRef idx="minor">
-            <a:schemeClr val="tx1"/>
-          </a:fontRef>
-        </p:style>
-      </p:cxnSp>
-      <p:cxnSp>
-        <p:nvCxnSpPr>
-          <p:cNvPr id="16" name="motif-line-mark"/>
-          <p:cNvCxnSpPr/>
-          <p:nvPr/>
-        </p:nvCxnSpPr>
-        <p:spPr>
-          <a:xfrm>
-            <a:off x="762000" y="546100"/>
-            <a:ext cx="203200" cy="0"/>
-          </a:xfrm>
-          <a:prstGeom prst="line">
-            <a:avLst/>
-          </a:prstGeom>
-          <a:ln w="25400">
-            <a:solidFill>
-              <a:srgbClr val="7FC0F5"/>
-            </a:solidFill>
-          </a:ln>
-        </p:spPr>
-        <p:style>
-          <a:lnRef idx="2">
-            <a:schemeClr val="accent1"/>
-          </a:lnRef>
-          <a:fillRef idx="0">
-            <a:schemeClr val="accent1"/>
-          </a:fillRef>
-          <a:effectRef idx="1">
-            <a:schemeClr val="accent1"/>
-          </a:effectRef>
-          <a:fontRef idx="minor">
-            <a:schemeClr val="tx1"/>
-          </a:fontRef>
-        </p:style>
-      </p:cxnSp>
-      <p:sp>
-        <p:nvSpPr>
-          <p:cNvPr id="17" name="chrome-part"/>
-          <p:cNvSpPr txBox="1"/>
-          <p:nvPr/>
-        </p:nvSpPr>
-        <p:spPr>
-          <a:xfrm>
-            <a:off x="1066800" y="457200"/>
-            <a:ext cx="5715000" cy="266700"/>
-          </a:xfrm>
-          <a:prstGeom prst="rect">
-            <a:avLst/>
-          </a:prstGeom>
-          <a:noFill/>
-        </p:spPr>
-        <p:txBody>
-          <a:bodyPr wrap="square" lIns="0" rIns="0" tIns="0" bIns="0" anchor="t">
-            <a:spAutoFit/>
-          </a:bodyPr>
-          <a:lstStyle/>
-          <a:p>
-            <a:pPr algn="l">
-              <a:lnSpc>
-                <a:spcPct val="115000"/>
-              </a:lnSpc>
-            </a:pPr>
-            <a:r>
-              <a:rPr sz="1500" b="0">
-                <a:solidFill>
-                  <a:srgbClr val="AFC0D8"/>
-                </a:solidFill>
-                <a:latin typeface="Plus Jakarta Sans"/>
-              </a:rPr>
-              <a:t>Part IV: What it means</a:t>
-            </a:r>
-          </a:p>
-        </p:txBody>
-      </p:sp>
-      <p:cxnSp>
-        <p:nvCxnSpPr>
-          <p:cNvPr id="18" name="motif-line-footer"/>
-          <p:cNvCxnSpPr/>
-          <p:nvPr/>
-        </p:nvCxnSpPr>
-        <p:spPr>
-          <a:xfrm>
-            <a:off x="762000" y="6045200"/>
-            <a:ext cx="10668000" cy="0"/>
-          </a:xfrm>
-          <a:prstGeom prst="line">
-            <a:avLst/>
-          </a:prstGeom>
-          <a:ln w="9525">
-            <a:solidFill>
-              <a:srgbClr val="3B5A85"/>
-            </a:solidFill>
-          </a:ln>
-        </p:spPr>
-        <p:style>
-          <a:lnRef idx="2">
-            <a:schemeClr val="accent1"/>
-          </a:lnRef>
-          <a:fillRef idx="0">
-            <a:schemeClr val="accent1"/>
-          </a:fillRef>
-          <a:effectRef idx="1">
-            <a:schemeClr val="accent1"/>
-          </a:effectRef>
-          <a:fontRef idx="minor">
-            <a:schemeClr val="tx1"/>
-          </a:fontRef>
-        </p:style>
-      </p:cxnSp>
-      <p:sp>
-        <p:nvSpPr>
-          <p:cNvPr id="19" name="chrome-page"/>
-          <p:cNvSpPr txBox="1"/>
-          <p:nvPr/>
-        </p:nvSpPr>
-        <p:spPr>
-          <a:xfrm>
-            <a:off x="10795000" y="6223000"/>
-            <a:ext cx="635000" cy="177800"/>
-          </a:xfrm>
-          <a:prstGeom prst="rect">
-            <a:avLst/>
-          </a:prstGeom>
-          <a:noFill/>
-        </p:spPr>
-        <p:txBody>
-          <a:bodyPr wrap="square" lIns="0" rIns="0" tIns="0" bIns="0" anchor="t">
-            <a:spAutoFit/>
-          </a:bodyPr>
-          <a:lstStyle/>
-          <a:p>
-            <a:pPr algn="r">
-              <a:lnSpc>
-                <a:spcPct val="115000"/>
-              </a:lnSpc>
-            </a:pPr>
-            <a:r>
-              <a:rPr sz="1000" b="0">
-                <a:solidFill>
-                  <a:srgbClr val="AFC0D8"/>
-                </a:solidFill>
-                <a:latin typeface="IBM Plex Mono"/>
-              </a:rPr>
-              <a:t>32 / 33</a:t>
-            </a:r>
-          </a:p>
-        </p:txBody>
-      </p:sp>
-      <p:cxnSp>
-        <p:nvCxnSpPr>
-          <p:cNvPr id="20" name="motif-line-tick-01"/>
-          <p:cNvCxnSpPr/>
-          <p:nvPr/>
-        </p:nvCxnSpPr>
-        <p:spPr>
-          <a:xfrm>
-            <a:off x="7620000" y="6273800"/>
-            <a:ext cx="0" cy="76200"/>
-          </a:xfrm>
-          <a:prstGeom prst="line">
-            <a:avLst/>
-          </a:prstGeom>
-          <a:ln w="12700">
-            <a:solidFill>
-              <a:srgbClr val="AFC0D8"/>
-            </a:solidFill>
-          </a:ln>
-        </p:spPr>
-        <p:style>
-          <a:lnRef idx="2">
-            <a:schemeClr val="accent1"/>
-          </a:lnRef>
-          <a:fillRef idx="0">
-            <a:schemeClr val="accent1"/>
-          </a:fillRef>
-          <a:effectRef idx="1">
-            <a:schemeClr val="accent1"/>
-          </a:effectRef>
-          <a:fontRef idx="minor">
-            <a:schemeClr val="tx1"/>
-          </a:fontRef>
-        </p:style>
-      </p:cxnSp>
-      <p:cxnSp>
-        <p:nvCxnSpPr>
-          <p:cNvPr id="21" name="motif-line-tick-02"/>
-          <p:cNvCxnSpPr/>
-          <p:nvPr/>
-        </p:nvCxnSpPr>
-        <p:spPr>
-          <a:xfrm>
-            <a:off x="7715250" y="6273800"/>
-            <a:ext cx="0" cy="76200"/>
-          </a:xfrm>
-          <a:prstGeom prst="line">
-            <a:avLst/>
-          </a:prstGeom>
-          <a:ln w="12700">
-            <a:solidFill>
-              <a:srgbClr val="AFC0D8"/>
-            </a:solidFill>
-          </a:ln>
-        </p:spPr>
-        <p:style>
-          <a:lnRef idx="2">
-            <a:schemeClr val="accent1"/>
-          </a:lnRef>
-          <a:fillRef idx="0">
-            <a:schemeClr val="accent1"/>
-          </a:fillRef>
-          <a:effectRef idx="1">
-            <a:schemeClr val="accent1"/>
-          </a:effectRef>
-          <a:fontRef idx="minor">
-            <a:schemeClr val="tx1"/>
-          </a:fontRef>
-        </p:style>
-      </p:cxnSp>
-      <p:cxnSp>
-        <p:nvCxnSpPr>
-          <p:cNvPr id="22" name="motif-line-tick-03"/>
-          <p:cNvCxnSpPr/>
-          <p:nvPr/>
-        </p:nvCxnSpPr>
-        <p:spPr>
-          <a:xfrm>
-            <a:off x="7810500" y="6273800"/>
-            <a:ext cx="0" cy="76200"/>
-          </a:xfrm>
-          <a:prstGeom prst="line">
-            <a:avLst/>
-          </a:prstGeom>
-          <a:ln w="12700">
-            <a:solidFill>
-              <a:srgbClr val="AFC0D8"/>
-            </a:solidFill>
-          </a:ln>
-        </p:spPr>
-        <p:style>
-          <a:lnRef idx="2">
-            <a:schemeClr val="accent1"/>
-          </a:lnRef>
-          <a:fillRef idx="0">
-            <a:schemeClr val="accent1"/>
-          </a:fillRef>
-          <a:effectRef idx="1">
-            <a:schemeClr val="accent1"/>
-          </a:effectRef>
-          <a:fontRef idx="minor">
-            <a:schemeClr val="tx1"/>
-          </a:fontRef>
-        </p:style>
-      </p:cxnSp>
-      <p:cxnSp>
-        <p:nvCxnSpPr>
-          <p:cNvPr id="23" name="motif-line-tick-04"/>
-          <p:cNvCxnSpPr/>
-          <p:nvPr/>
-        </p:nvCxnSpPr>
-        <p:spPr>
-          <a:xfrm>
-            <a:off x="7905750" y="6273800"/>
-            <a:ext cx="0" cy="76200"/>
-          </a:xfrm>
-          <a:prstGeom prst="line">
-            <a:avLst/>
-          </a:prstGeom>
-          <a:ln w="12700">
-            <a:solidFill>
-              <a:srgbClr val="AFC0D8"/>
-            </a:solidFill>
-          </a:ln>
-        </p:spPr>
-        <p:style>
-          <a:lnRef idx="2">
-            <a:schemeClr val="accent1"/>
-          </a:lnRef>
-          <a:fillRef idx="0">
-            <a:schemeClr val="accent1"/>
-          </a:fillRef>
-          <a:effectRef idx="1">
-            <a:schemeClr val="accent1"/>
-          </a:effectRef>
-          <a:fontRef idx="minor">
-            <a:schemeClr val="tx1"/>
-          </a:fontRef>
-        </p:style>
-      </p:cxnSp>
-      <p:cxnSp>
-        <p:nvCxnSpPr>
-          <p:cNvPr id="24" name="motif-line-tick-05"/>
-          <p:cNvCxnSpPr/>
-          <p:nvPr/>
-        </p:nvCxnSpPr>
-        <p:spPr>
-          <a:xfrm>
-            <a:off x="8001000" y="6273800"/>
-            <a:ext cx="0" cy="76200"/>
-          </a:xfrm>
-          <a:prstGeom prst="line">
-            <a:avLst/>
-          </a:prstGeom>
-          <a:ln w="12700">
-            <a:solidFill>
-              <a:srgbClr val="AFC0D8"/>
-            </a:solidFill>
-          </a:ln>
-        </p:spPr>
-        <p:style>
-          <a:lnRef idx="2">
-            <a:schemeClr val="accent1"/>
-          </a:lnRef>
-          <a:fillRef idx="0">
-            <a:schemeClr val="accent1"/>
-          </a:fillRef>
-          <a:effectRef idx="1">
-            <a:schemeClr val="accent1"/>
-          </a:effectRef>
-          <a:fontRef idx="minor">
-            <a:schemeClr val="tx1"/>
-          </a:fontRef>
-        </p:style>
-      </p:cxnSp>
-      <p:cxnSp>
-        <p:nvCxnSpPr>
-          <p:cNvPr id="25" name="motif-line-tick-06"/>
-          <p:cNvCxnSpPr/>
-          <p:nvPr/>
-        </p:nvCxnSpPr>
-        <p:spPr>
-          <a:xfrm>
-            <a:off x="8096250" y="6273800"/>
-            <a:ext cx="0" cy="76200"/>
-          </a:xfrm>
-          <a:prstGeom prst="line">
-            <a:avLst/>
-          </a:prstGeom>
-          <a:ln w="12700">
-            <a:solidFill>
-              <a:srgbClr val="AFC0D8"/>
-            </a:solidFill>
-          </a:ln>
-        </p:spPr>
-        <p:style>
-          <a:lnRef idx="2">
-            <a:schemeClr val="accent1"/>
-          </a:lnRef>
-          <a:fillRef idx="0">
-            <a:schemeClr val="accent1"/>
-          </a:fillRef>
-          <a:effectRef idx="1">
-            <a:schemeClr val="accent1"/>
-          </a:effectRef>
-          <a:fontRef idx="minor">
-            <a:schemeClr val="tx1"/>
-          </a:fontRef>
-        </p:style>
-      </p:cxnSp>
-      <p:cxnSp>
-        <p:nvCxnSpPr>
-          <p:cNvPr id="26" name="motif-line-tick-07"/>
-          <p:cNvCxnSpPr/>
-          <p:nvPr/>
-        </p:nvCxnSpPr>
-        <p:spPr>
-          <a:xfrm>
-            <a:off x="8191500" y="6273800"/>
-            <a:ext cx="0" cy="76200"/>
-          </a:xfrm>
-          <a:prstGeom prst="line">
-            <a:avLst/>
-          </a:prstGeom>
-          <a:ln w="12700">
-            <a:solidFill>
-              <a:srgbClr val="AFC0D8"/>
-            </a:solidFill>
-          </a:ln>
-        </p:spPr>
-        <p:style>
-          <a:lnRef idx="2">
-            <a:schemeClr val="accent1"/>
-          </a:lnRef>
-          <a:fillRef idx="0">
-            <a:schemeClr val="accent1"/>
-          </a:fillRef>
-          <a:effectRef idx="1">
-            <a:schemeClr val="accent1"/>
-          </a:effectRef>
-          <a:fontRef idx="minor">
-            <a:schemeClr val="tx1"/>
-          </a:fontRef>
-        </p:style>
-      </p:cxnSp>
-      <p:cxnSp>
-        <p:nvCxnSpPr>
-          <p:cNvPr id="27" name="motif-line-tick-08"/>
-          <p:cNvCxnSpPr/>
-          <p:nvPr/>
-        </p:nvCxnSpPr>
-        <p:spPr>
-          <a:xfrm>
-            <a:off x="8286750" y="6273800"/>
-            <a:ext cx="0" cy="76200"/>
-          </a:xfrm>
-          <a:prstGeom prst="line">
-            <a:avLst/>
-          </a:prstGeom>
-          <a:ln w="12700">
-            <a:solidFill>
-              <a:srgbClr val="AFC0D8"/>
-            </a:solidFill>
-          </a:ln>
-        </p:spPr>
-        <p:style>
-          <a:lnRef idx="2">
-            <a:schemeClr val="accent1"/>
-          </a:lnRef>
-          <a:fillRef idx="0">
-            <a:schemeClr val="accent1"/>
-          </a:fillRef>
-          <a:effectRef idx="1">
-            <a:schemeClr val="accent1"/>
-          </a:effectRef>
-          <a:fontRef idx="minor">
-            <a:schemeClr val="tx1"/>
-          </a:fontRef>
-        </p:style>
-      </p:cxnSp>
-      <p:cxnSp>
-        <p:nvCxnSpPr>
-          <p:cNvPr id="28" name="motif-line-tick-09"/>
-          <p:cNvCxnSpPr/>
-          <p:nvPr/>
-        </p:nvCxnSpPr>
-        <p:spPr>
-          <a:xfrm>
-            <a:off x="8382000" y="6273800"/>
-            <a:ext cx="0" cy="76200"/>
-          </a:xfrm>
-          <a:prstGeom prst="line">
-            <a:avLst/>
-          </a:prstGeom>
-          <a:ln w="12700">
-            <a:solidFill>
-              <a:srgbClr val="AFC0D8"/>
-            </a:solidFill>
-          </a:ln>
-        </p:spPr>
-        <p:style>
-          <a:lnRef idx="2">
-            <a:schemeClr val="accent1"/>
-          </a:lnRef>
-          <a:fillRef idx="0">
-            <a:schemeClr val="accent1"/>
-          </a:fillRef>
-          <a:effectRef idx="1">
-            <a:schemeClr val="accent1"/>
-          </a:effectRef>
-          <a:fontRef idx="minor">
-            <a:schemeClr val="tx1"/>
-          </a:fontRef>
-        </p:style>
-      </p:cxnSp>
-      <p:cxnSp>
-        <p:nvCxnSpPr>
-          <p:cNvPr id="29" name="motif-line-tick-10"/>
-          <p:cNvCxnSpPr/>
-          <p:nvPr/>
-        </p:nvCxnSpPr>
-        <p:spPr>
-          <a:xfrm>
-            <a:off x="8477250" y="6273800"/>
-            <a:ext cx="0" cy="76200"/>
-          </a:xfrm>
-          <a:prstGeom prst="line">
-            <a:avLst/>
-          </a:prstGeom>
-          <a:ln w="12700">
-            <a:solidFill>
-              <a:srgbClr val="AFC0D8"/>
-            </a:solidFill>
-          </a:ln>
-        </p:spPr>
-        <p:style>
-          <a:lnRef idx="2">
-            <a:schemeClr val="accent1"/>
-          </a:lnRef>
-          <a:fillRef idx="0">
-            <a:schemeClr val="accent1"/>
-          </a:fillRef>
-          <a:effectRef idx="1">
-            <a:schemeClr val="accent1"/>
-          </a:effectRef>
-          <a:fontRef idx="minor">
-            <a:schemeClr val="tx1"/>
-          </a:fontRef>
-        </p:style>
-      </p:cxnSp>
-      <p:cxnSp>
-        <p:nvCxnSpPr>
-          <p:cNvPr id="30" name="motif-line-tick-11"/>
-          <p:cNvCxnSpPr/>
-          <p:nvPr/>
-        </p:nvCxnSpPr>
-        <p:spPr>
-          <a:xfrm>
-            <a:off x="8572500" y="6273800"/>
-            <a:ext cx="0" cy="76200"/>
-          </a:xfrm>
-          <a:prstGeom prst="line">
-            <a:avLst/>
-          </a:prstGeom>
-          <a:ln w="12700">
-            <a:solidFill>
-              <a:srgbClr val="AFC0D8"/>
-            </a:solidFill>
-          </a:ln>
-        </p:spPr>
-        <p:style>
-          <a:lnRef idx="2">
-            <a:schemeClr val="accent1"/>
-          </a:lnRef>
-          <a:fillRef idx="0">
-            <a:schemeClr val="accent1"/>
-          </a:fillRef>
-          <a:effectRef idx="1">
-            <a:schemeClr val="accent1"/>
-          </a:effectRef>
-          <a:fontRef idx="minor">
-            <a:schemeClr val="tx1"/>
-          </a:fontRef>
-        </p:style>
-      </p:cxnSp>
-      <p:cxnSp>
-        <p:nvCxnSpPr>
-          <p:cNvPr id="31" name="motif-line-tick-12"/>
-          <p:cNvCxnSpPr/>
-          <p:nvPr/>
-        </p:nvCxnSpPr>
-        <p:spPr>
-          <a:xfrm>
-            <a:off x="8667750" y="6273800"/>
-            <a:ext cx="0" cy="76200"/>
-          </a:xfrm>
-          <a:prstGeom prst="line">
-            <a:avLst/>
-          </a:prstGeom>
-          <a:ln w="12700">
-            <a:solidFill>
-              <a:srgbClr val="AFC0D8"/>
-            </a:solidFill>
-          </a:ln>
-        </p:spPr>
-        <p:style>
-          <a:lnRef idx="2">
-            <a:schemeClr val="accent1"/>
-          </a:lnRef>
-          <a:fillRef idx="0">
-            <a:schemeClr val="accent1"/>
-          </a:fillRef>
-          <a:effectRef idx="1">
-            <a:schemeClr val="accent1"/>
-          </a:effectRef>
-          <a:fontRef idx="minor">
-            <a:schemeClr val="tx1"/>
-          </a:fontRef>
-        </p:style>
-      </p:cxnSp>
-      <p:cxnSp>
-        <p:nvCxnSpPr>
-          <p:cNvPr id="32" name="motif-line-tick-13"/>
-          <p:cNvCxnSpPr/>
-          <p:nvPr/>
-        </p:nvCxnSpPr>
-        <p:spPr>
-          <a:xfrm>
-            <a:off x="8763000" y="6273800"/>
-            <a:ext cx="0" cy="76200"/>
-          </a:xfrm>
-          <a:prstGeom prst="line">
-            <a:avLst/>
-          </a:prstGeom>
-          <a:ln w="12700">
-            <a:solidFill>
-              <a:srgbClr val="AFC0D8"/>
-            </a:solidFill>
-          </a:ln>
-        </p:spPr>
-        <p:style>
-          <a:lnRef idx="2">
-            <a:schemeClr val="accent1"/>
-          </a:lnRef>
-          <a:fillRef idx="0">
-            <a:schemeClr val="accent1"/>
-          </a:fillRef>
-          <a:effectRef idx="1">
-            <a:schemeClr val="accent1"/>
-          </a:effectRef>
-          <a:fontRef idx="minor">
-            <a:schemeClr val="tx1"/>
-          </a:fontRef>
-        </p:style>
-      </p:cxnSp>
-      <p:cxnSp>
-        <p:nvCxnSpPr>
-          <p:cNvPr id="33" name="motif-line-tick-14"/>
-          <p:cNvCxnSpPr/>
-          <p:nvPr/>
-        </p:nvCxnSpPr>
-        <p:spPr>
-          <a:xfrm>
-            <a:off x="8858250" y="6273800"/>
-            <a:ext cx="0" cy="76200"/>
-          </a:xfrm>
-          <a:prstGeom prst="line">
-            <a:avLst/>
-          </a:prstGeom>
-          <a:ln w="12700">
-            <a:solidFill>
-              <a:srgbClr val="AFC0D8"/>
-            </a:solidFill>
-          </a:ln>
-        </p:spPr>
-        <p:style>
-          <a:lnRef idx="2">
-            <a:schemeClr val="accent1"/>
-          </a:lnRef>
-          <a:fillRef idx="0">
-            <a:schemeClr val="accent1"/>
-          </a:fillRef>
-          <a:effectRef idx="1">
-            <a:schemeClr val="accent1"/>
-          </a:effectRef>
-          <a:fontRef idx="minor">
-            <a:schemeClr val="tx1"/>
-          </a:fontRef>
-        </p:style>
-      </p:cxnSp>
-      <p:cxnSp>
-        <p:nvCxnSpPr>
-          <p:cNvPr id="34" name="motif-line-tick-15"/>
-          <p:cNvCxnSpPr/>
-          <p:nvPr/>
-        </p:nvCxnSpPr>
-        <p:spPr>
-          <a:xfrm>
-            <a:off x="8953500" y="6273800"/>
-            <a:ext cx="0" cy="76200"/>
-          </a:xfrm>
-          <a:prstGeom prst="line">
-            <a:avLst/>
-          </a:prstGeom>
-          <a:ln w="12700">
-            <a:solidFill>
-              <a:srgbClr val="AFC0D8"/>
-            </a:solidFill>
-          </a:ln>
-        </p:spPr>
-        <p:style>
-          <a:lnRef idx="2">
-            <a:schemeClr val="accent1"/>
-          </a:lnRef>
-          <a:fillRef idx="0">
-            <a:schemeClr val="accent1"/>
-          </a:fillRef>
-          <a:effectRef idx="1">
-            <a:schemeClr val="accent1"/>
-          </a:effectRef>
-          <a:fontRef idx="minor">
-            <a:schemeClr val="tx1"/>
-          </a:fontRef>
-        </p:style>
-      </p:cxnSp>
-      <p:cxnSp>
-        <p:nvCxnSpPr>
-          <p:cNvPr id="35" name="motif-line-tick-16"/>
-          <p:cNvCxnSpPr/>
-          <p:nvPr/>
-        </p:nvCxnSpPr>
-        <p:spPr>
-          <a:xfrm>
-            <a:off x="9048750" y="6273800"/>
-            <a:ext cx="0" cy="76200"/>
-          </a:xfrm>
-          <a:prstGeom prst="line">
-            <a:avLst/>
-          </a:prstGeom>
-          <a:ln w="12700">
-            <a:solidFill>
-              <a:srgbClr val="AFC0D8"/>
-            </a:solidFill>
-          </a:ln>
-        </p:spPr>
-        <p:style>
-          <a:lnRef idx="2">
-            <a:schemeClr val="accent1"/>
-          </a:lnRef>
-          <a:fillRef idx="0">
-            <a:schemeClr val="accent1"/>
-          </a:fillRef>
-          <a:effectRef idx="1">
-            <a:schemeClr val="accent1"/>
-          </a:effectRef>
-          <a:fontRef idx="minor">
-            <a:schemeClr val="tx1"/>
-          </a:fontRef>
-        </p:style>
-      </p:cxnSp>
-      <p:cxnSp>
-        <p:nvCxnSpPr>
-          <p:cNvPr id="36" name="motif-line-tick-17"/>
-          <p:cNvCxnSpPr/>
-          <p:nvPr/>
-        </p:nvCxnSpPr>
-        <p:spPr>
-          <a:xfrm>
-            <a:off x="9144000" y="6273800"/>
-            <a:ext cx="0" cy="76200"/>
-          </a:xfrm>
-          <a:prstGeom prst="line">
-            <a:avLst/>
-          </a:prstGeom>
-          <a:ln w="12700">
-            <a:solidFill>
-              <a:srgbClr val="AFC0D8"/>
-            </a:solidFill>
-          </a:ln>
-        </p:spPr>
-        <p:style>
-          <a:lnRef idx="2">
-            <a:schemeClr val="accent1"/>
-          </a:lnRef>
-          <a:fillRef idx="0">
-            <a:schemeClr val="accent1"/>
-          </a:fillRef>
-          <a:effectRef idx="1">
-            <a:schemeClr val="accent1"/>
-          </a:effectRef>
-          <a:fontRef idx="minor">
-            <a:schemeClr val="tx1"/>
-          </a:fontRef>
-        </p:style>
-      </p:cxnSp>
-      <p:cxnSp>
-        <p:nvCxnSpPr>
-          <p:cNvPr id="37" name="motif-line-tick-18"/>
-          <p:cNvCxnSpPr/>
-          <p:nvPr/>
-        </p:nvCxnSpPr>
-        <p:spPr>
-          <a:xfrm>
-            <a:off x="9239250" y="6273800"/>
-            <a:ext cx="0" cy="76200"/>
-          </a:xfrm>
-          <a:prstGeom prst="line">
-            <a:avLst/>
-          </a:prstGeom>
-          <a:ln w="12700">
-            <a:solidFill>
-              <a:srgbClr val="AFC0D8"/>
-            </a:solidFill>
-          </a:ln>
-        </p:spPr>
-        <p:style>
-          <a:lnRef idx="2">
-            <a:schemeClr val="accent1"/>
-          </a:lnRef>
-          <a:fillRef idx="0">
-            <a:schemeClr val="accent1"/>
-          </a:fillRef>
-          <a:effectRef idx="1">
-            <a:schemeClr val="accent1"/>
-          </a:effectRef>
-          <a:fontRef idx="minor">
-            <a:schemeClr val="tx1"/>
-          </a:fontRef>
-        </p:style>
-      </p:cxnSp>
-      <p:cxnSp>
-        <p:nvCxnSpPr>
-          <p:cNvPr id="38" name="motif-line-tick-19"/>
-          <p:cNvCxnSpPr/>
-          <p:nvPr/>
-        </p:nvCxnSpPr>
-        <p:spPr>
-          <a:xfrm>
-            <a:off x="9334500" y="6273800"/>
-            <a:ext cx="0" cy="76200"/>
-          </a:xfrm>
-          <a:prstGeom prst="line">
-            <a:avLst/>
-          </a:prstGeom>
-          <a:ln w="12700">
-            <a:solidFill>
-              <a:srgbClr val="AFC0D8"/>
-            </a:solidFill>
-          </a:ln>
-        </p:spPr>
-        <p:style>
-          <a:lnRef idx="2">
-            <a:schemeClr val="accent1"/>
-          </a:lnRef>
-          <a:fillRef idx="0">
-            <a:schemeClr val="accent1"/>
-          </a:fillRef>
-          <a:effectRef idx="1">
-            <a:schemeClr val="accent1"/>
-          </a:effectRef>
-          <a:fontRef idx="minor">
-            <a:schemeClr val="tx1"/>
-          </a:fontRef>
-        </p:style>
-      </p:cxnSp>
-      <p:cxnSp>
-        <p:nvCxnSpPr>
-          <p:cNvPr id="39" name="motif-line-tick-20"/>
-          <p:cNvCxnSpPr/>
-          <p:nvPr/>
-        </p:nvCxnSpPr>
-        <p:spPr>
-          <a:xfrm>
-            <a:off x="9429750" y="6273800"/>
-            <a:ext cx="0" cy="76200"/>
-          </a:xfrm>
-          <a:prstGeom prst="line">
-            <a:avLst/>
-          </a:prstGeom>
-          <a:ln w="12700">
-            <a:solidFill>
-              <a:srgbClr val="AFC0D8"/>
-            </a:solidFill>
-          </a:ln>
-        </p:spPr>
-        <p:style>
-          <a:lnRef idx="2">
-            <a:schemeClr val="accent1"/>
-          </a:lnRef>
-          <a:fillRef idx="0">
-            <a:schemeClr val="accent1"/>
-          </a:fillRef>
-          <a:effectRef idx="1">
-            <a:schemeClr val="accent1"/>
-          </a:effectRef>
-          <a:fontRef idx="minor">
-            <a:schemeClr val="tx1"/>
-          </a:fontRef>
-        </p:style>
-      </p:cxnSp>
-      <p:cxnSp>
-        <p:nvCxnSpPr>
-          <p:cNvPr id="40" name="motif-line-tick-21"/>
-          <p:cNvCxnSpPr/>
-          <p:nvPr/>
-        </p:nvCxnSpPr>
-        <p:spPr>
-          <a:xfrm>
-            <a:off x="9525000" y="6273800"/>
-            <a:ext cx="0" cy="76200"/>
-          </a:xfrm>
-          <a:prstGeom prst="line">
-            <a:avLst/>
-          </a:prstGeom>
-          <a:ln w="12700">
-            <a:solidFill>
-              <a:srgbClr val="AFC0D8"/>
-            </a:solidFill>
-          </a:ln>
-        </p:spPr>
-        <p:style>
-          <a:lnRef idx="2">
-            <a:schemeClr val="accent1"/>
-          </a:lnRef>
-          <a:fillRef idx="0">
-            <a:schemeClr val="accent1"/>
-          </a:fillRef>
-          <a:effectRef idx="1">
-            <a:schemeClr val="accent1"/>
-          </a:effectRef>
-          <a:fontRef idx="minor">
-            <a:schemeClr val="tx1"/>
-          </a:fontRef>
-        </p:style>
-      </p:cxnSp>
-      <p:cxnSp>
-        <p:nvCxnSpPr>
-          <p:cNvPr id="41" name="motif-line-tick-22"/>
-          <p:cNvCxnSpPr/>
-          <p:nvPr/>
-        </p:nvCxnSpPr>
-        <p:spPr>
-          <a:xfrm>
-            <a:off x="9620250" y="6273800"/>
-            <a:ext cx="0" cy="76200"/>
-          </a:xfrm>
-          <a:prstGeom prst="line">
-            <a:avLst/>
-          </a:prstGeom>
-          <a:ln w="12700">
-            <a:solidFill>
-              <a:srgbClr val="AFC0D8"/>
-            </a:solidFill>
-          </a:ln>
-        </p:spPr>
-        <p:style>
-          <a:lnRef idx="2">
-            <a:schemeClr val="accent1"/>
-          </a:lnRef>
-          <a:fillRef idx="0">
-            <a:schemeClr val="accent1"/>
-          </a:fillRef>
-          <a:effectRef idx="1">
-            <a:schemeClr val="accent1"/>
-          </a:effectRef>
-          <a:fontRef idx="minor">
-            <a:schemeClr val="tx1"/>
-          </a:fontRef>
-        </p:style>
-      </p:cxnSp>
-      <p:cxnSp>
-        <p:nvCxnSpPr>
-          <p:cNvPr id="42" name="motif-line-tick-23"/>
-          <p:cNvCxnSpPr/>
-          <p:nvPr/>
-        </p:nvCxnSpPr>
-        <p:spPr>
-          <a:xfrm>
-            <a:off x="9715500" y="6273800"/>
-            <a:ext cx="0" cy="76200"/>
-          </a:xfrm>
-          <a:prstGeom prst="line">
-            <a:avLst/>
-          </a:prstGeom>
-          <a:ln w="12700">
-            <a:solidFill>
-              <a:srgbClr val="AFC0D8"/>
-            </a:solidFill>
-          </a:ln>
-        </p:spPr>
-        <p:style>
-          <a:lnRef idx="2">
-            <a:schemeClr val="accent1"/>
-          </a:lnRef>
-          <a:fillRef idx="0">
-            <a:schemeClr val="accent1"/>
-          </a:fillRef>
-          <a:effectRef idx="1">
-            <a:schemeClr val="accent1"/>
-          </a:effectRef>
-          <a:fontRef idx="minor">
-            <a:schemeClr val="tx1"/>
-          </a:fontRef>
-        </p:style>
-      </p:cxnSp>
-      <p:cxnSp>
-        <p:nvCxnSpPr>
-          <p:cNvPr id="43" name="motif-line-tick-24"/>
-          <p:cNvCxnSpPr/>
-          <p:nvPr/>
-        </p:nvCxnSpPr>
-        <p:spPr>
-          <a:xfrm>
-            <a:off x="9810750" y="6273800"/>
-            <a:ext cx="0" cy="76200"/>
-          </a:xfrm>
-          <a:prstGeom prst="line">
-            <a:avLst/>
-          </a:prstGeom>
-          <a:ln w="12700">
-            <a:solidFill>
-              <a:srgbClr val="AFC0D8"/>
-            </a:solidFill>
-          </a:ln>
-        </p:spPr>
-        <p:style>
-          <a:lnRef idx="2">
-            <a:schemeClr val="accent1"/>
-          </a:lnRef>
-          <a:fillRef idx="0">
-            <a:schemeClr val="accent1"/>
-          </a:fillRef>
-          <a:effectRef idx="1">
-            <a:schemeClr val="accent1"/>
-          </a:effectRef>
-          <a:fontRef idx="minor">
-            <a:schemeClr val="tx1"/>
-          </a:fontRef>
-        </p:style>
-      </p:cxnSp>
-      <p:cxnSp>
-        <p:nvCxnSpPr>
-          <p:cNvPr id="44" name="motif-line-tick-25"/>
-          <p:cNvCxnSpPr/>
-          <p:nvPr/>
-        </p:nvCxnSpPr>
-        <p:spPr>
-          <a:xfrm>
-            <a:off x="9906000" y="6273800"/>
-            <a:ext cx="0" cy="76200"/>
-          </a:xfrm>
-          <a:prstGeom prst="line">
-            <a:avLst/>
-          </a:prstGeom>
-          <a:ln w="12700">
-            <a:solidFill>
-              <a:srgbClr val="AFC0D8"/>
-            </a:solidFill>
-          </a:ln>
-        </p:spPr>
-        <p:style>
-          <a:lnRef idx="2">
-            <a:schemeClr val="accent1"/>
-          </a:lnRef>
-          <a:fillRef idx="0">
-            <a:schemeClr val="accent1"/>
-          </a:fillRef>
-          <a:effectRef idx="1">
-            <a:schemeClr val="accent1"/>
-          </a:effectRef>
-          <a:fontRef idx="minor">
-            <a:schemeClr val="tx1"/>
-          </a:fontRef>
-        </p:style>
-      </p:cxnSp>
-      <p:cxnSp>
-        <p:nvCxnSpPr>
-          <p:cNvPr id="45" name="motif-line-tick-26"/>
-          <p:cNvCxnSpPr/>
-          <p:nvPr/>
-        </p:nvCxnSpPr>
-        <p:spPr>
-          <a:xfrm>
-            <a:off x="10001250" y="6273800"/>
-            <a:ext cx="0" cy="76200"/>
-          </a:xfrm>
-          <a:prstGeom prst="line">
-            <a:avLst/>
-          </a:prstGeom>
-          <a:ln w="12700">
-            <a:solidFill>
-              <a:srgbClr val="AFC0D8"/>
-            </a:solidFill>
-          </a:ln>
-        </p:spPr>
-        <p:style>
-          <a:lnRef idx="2">
-            <a:schemeClr val="accent1"/>
-          </a:lnRef>
-          <a:fillRef idx="0">
-            <a:schemeClr val="accent1"/>
-          </a:fillRef>
-          <a:effectRef idx="1">
-            <a:schemeClr val="accent1"/>
-          </a:effectRef>
-          <a:fontRef idx="minor">
-            <a:schemeClr val="tx1"/>
-          </a:fontRef>
-        </p:style>
-      </p:cxnSp>
-      <p:cxnSp>
-        <p:nvCxnSpPr>
-          <p:cNvPr id="46" name="motif-line-tick-27"/>
-          <p:cNvCxnSpPr/>
-          <p:nvPr/>
-        </p:nvCxnSpPr>
-        <p:spPr>
-          <a:xfrm>
-            <a:off x="10096500" y="6273800"/>
-            <a:ext cx="0" cy="76200"/>
-          </a:xfrm>
-          <a:prstGeom prst="line">
-            <a:avLst/>
-          </a:prstGeom>
-          <a:ln w="12700">
-            <a:solidFill>
-              <a:srgbClr val="AFC0D8"/>
-            </a:solidFill>
-          </a:ln>
-        </p:spPr>
-        <p:style>
-          <a:lnRef idx="2">
-            <a:schemeClr val="accent1"/>
-          </a:lnRef>
-          <a:fillRef idx="0">
-            <a:schemeClr val="accent1"/>
-          </a:fillRef>
-          <a:effectRef idx="1">
-            <a:schemeClr val="accent1"/>
-          </a:effectRef>
-          <a:fontRef idx="minor">
-            <a:schemeClr val="tx1"/>
-          </a:fontRef>
-        </p:style>
-      </p:cxnSp>
-      <p:cxnSp>
-        <p:nvCxnSpPr>
-          <p:cNvPr id="47" name="motif-line-tick-28"/>
-          <p:cNvCxnSpPr/>
-          <p:nvPr/>
-        </p:nvCxnSpPr>
-        <p:spPr>
-          <a:xfrm>
-            <a:off x="10191750" y="6273800"/>
-            <a:ext cx="0" cy="76200"/>
-          </a:xfrm>
-          <a:prstGeom prst="line">
-            <a:avLst/>
-          </a:prstGeom>
-          <a:ln w="12700">
-            <a:solidFill>
-              <a:srgbClr val="AFC0D8"/>
-            </a:solidFill>
-          </a:ln>
-        </p:spPr>
-        <p:style>
-          <a:lnRef idx="2">
-            <a:schemeClr val="accent1"/>
-          </a:lnRef>
-          <a:fillRef idx="0">
-            <a:schemeClr val="accent1"/>
-          </a:fillRef>
-          <a:effectRef idx="1">
-            <a:schemeClr val="accent1"/>
-          </a:effectRef>
-          <a:fontRef idx="minor">
-            <a:schemeClr val="tx1"/>
-          </a:fontRef>
-        </p:style>
-      </p:cxnSp>
-      <p:cxnSp>
-        <p:nvCxnSpPr>
-          <p:cNvPr id="48" name="motif-line-tick-29"/>
-          <p:cNvCxnSpPr/>
-          <p:nvPr/>
-        </p:nvCxnSpPr>
-        <p:spPr>
-          <a:xfrm>
-            <a:off x="10287000" y="6273800"/>
-            <a:ext cx="0" cy="76200"/>
-          </a:xfrm>
-          <a:prstGeom prst="line">
-            <a:avLst/>
-          </a:prstGeom>
-          <a:ln w="12700">
-            <a:solidFill>
-              <a:srgbClr val="AFC0D8"/>
-            </a:solidFill>
-          </a:ln>
-        </p:spPr>
-        <p:style>
-          <a:lnRef idx="2">
-            <a:schemeClr val="accent1"/>
-          </a:lnRef>
-          <a:fillRef idx="0">
-            <a:schemeClr val="accent1"/>
-          </a:fillRef>
-          <a:effectRef idx="1">
-            <a:schemeClr val="accent1"/>
-          </a:effectRef>
-          <a:fontRef idx="minor">
-            <a:schemeClr val="tx1"/>
-          </a:fontRef>
-        </p:style>
-      </p:cxnSp>
-      <p:cxnSp>
-        <p:nvCxnSpPr>
-          <p:cNvPr id="49" name="motif-line-tick-30"/>
-          <p:cNvCxnSpPr/>
-          <p:nvPr/>
-        </p:nvCxnSpPr>
-        <p:spPr>
-          <a:xfrm>
-            <a:off x="10382250" y="6273800"/>
-            <a:ext cx="0" cy="76200"/>
-          </a:xfrm>
-          <a:prstGeom prst="line">
-            <a:avLst/>
-          </a:prstGeom>
-          <a:ln w="12700">
-            <a:solidFill>
-              <a:srgbClr val="AFC0D8"/>
-            </a:solidFill>
-          </a:ln>
-        </p:spPr>
-        <p:style>
-          <a:lnRef idx="2">
-            <a:schemeClr val="accent1"/>
-          </a:lnRef>
-          <a:fillRef idx="0">
-            <a:schemeClr val="accent1"/>
-          </a:fillRef>
-          <a:effectRef idx="1">
-            <a:schemeClr val="accent1"/>
-          </a:effectRef>
-          <a:fontRef idx="minor">
-            <a:schemeClr val="tx1"/>
-          </a:fontRef>
-        </p:style>
-      </p:cxnSp>
-      <p:cxnSp>
-        <p:nvCxnSpPr>
-          <p:cNvPr id="50" name="motif-line-tick-31"/>
-          <p:cNvCxnSpPr/>
-          <p:nvPr/>
-        </p:nvCxnSpPr>
-        <p:spPr>
-          <a:xfrm>
-            <a:off x="10477500" y="6273800"/>
-            <a:ext cx="0" cy="76200"/>
-          </a:xfrm>
-          <a:prstGeom prst="line">
-            <a:avLst/>
-          </a:prstGeom>
-          <a:ln w="12700">
-            <a:solidFill>
-              <a:srgbClr val="AFC0D8"/>
-            </a:solidFill>
-          </a:ln>
-        </p:spPr>
-        <p:style>
-          <a:lnRef idx="2">
-            <a:schemeClr val="accent1"/>
-          </a:lnRef>
-          <a:fillRef idx="0">
-            <a:schemeClr val="accent1"/>
-          </a:fillRef>
-          <a:effectRef idx="1">
-            <a:schemeClr val="accent1"/>
-          </a:effectRef>
-          <a:fontRef idx="minor">
-            <a:schemeClr val="tx1"/>
-          </a:fontRef>
-        </p:style>
-      </p:cxnSp>
-      <p:cxnSp>
-        <p:nvCxnSpPr>
-          <p:cNvPr id="51" name="motif-line-tick-32"/>
-          <p:cNvCxnSpPr/>
-          <p:nvPr/>
-        </p:nvCxnSpPr>
-        <p:spPr>
-          <a:xfrm>
-            <a:off x="10572750" y="6223000"/>
-            <a:ext cx="0" cy="177800"/>
-          </a:xfrm>
-          <a:prstGeom prst="line">
-            <a:avLst/>
-          </a:prstGeom>
-          <a:ln w="25400">
-            <a:solidFill>
-              <a:srgbClr val="F4F6FA"/>
-            </a:solidFill>
-          </a:ln>
-        </p:spPr>
-        <p:style>
-          <a:lnRef idx="2">
-            <a:schemeClr val="accent1"/>
-          </a:lnRef>
-          <a:fillRef idx="0">
-            <a:schemeClr val="accent1"/>
-          </a:fillRef>
-          <a:effectRef idx="1">
-            <a:schemeClr val="accent1"/>
-          </a:effectRef>
-          <a:fontRef idx="minor">
-            <a:schemeClr val="tx1"/>
-          </a:fontRef>
-        </p:style>
-      </p:cxnSp>
-      <p:cxnSp>
-        <p:nvCxnSpPr>
-          <p:cNvPr id="52" name="motif-line-tick-33"/>
-          <p:cNvCxnSpPr/>
-          <p:nvPr/>
-        </p:nvCxnSpPr>
-        <p:spPr>
-          <a:xfrm>
-            <a:off x="10668000" y="6273800"/>
-            <a:ext cx="0" cy="76200"/>
-          </a:xfrm>
-          <a:prstGeom prst="line">
-            <a:avLst/>
-          </a:prstGeom>
-          <a:ln w="12700">
-            <a:solidFill>
-              <a:srgbClr val="3B5A85"/>
-            </a:solidFill>
-          </a:ln>
-        </p:spPr>
-        <p:style>
-          <a:lnRef idx="2">
-            <a:schemeClr val="accent1"/>
-          </a:lnRef>
-          <a:fillRef idx="0">
-            <a:schemeClr val="accent1"/>
-          </a:fillRef>
-          <a:effectRef idx="1">
-            <a:schemeClr val="accent1"/>
-          </a:effectRef>
-          <a:fontRef idx="minor">
-            <a:schemeClr val="tx1"/>
-          </a:fontRef>
-        </p:style>
-      </p:cxnSp>
-    </p:spTree>
-  </p:cSld>
-  <p:clrMapOvr>
-    <a:masterClrMapping/>
-  </p:clrMapOvr>
-</p:sld>
-</file>
-
-<file path=ppt/slides/slide33.xml><?xml version="1.0" encoding="utf-8"?>
-<p:sld xmlns:a="http://schemas.openxmlformats.org/drawingml/2006/main" xmlns:p="http://schemas.openxmlformats.org/presentationml/2006/main" xmlns:r="http://schemas.openxmlformats.org/officeDocument/2006/relationships">
-  <p:cSld>
-    <p:bg>
-      <p:bgPr>
-        <a:solidFill>
-          <a:srgbClr val="0F2747"/>
-        </a:solidFill>
-        <a:effectLst/>
-      </p:bgPr>
-    </p:bg>
-    <p:spTree>
-      <p:nvGrpSpPr>
-        <p:cNvPr id="1" name=""/>
-        <p:cNvGrpSpPr/>
-        <p:nvPr/>
-      </p:nvGrpSpPr>
-      <p:grpSpPr/>
-      <p:sp>
-        <p:nvSpPr>
-          <p:cNvPr id="2" name="TextBox 1"/>
-          <p:cNvSpPr txBox="1"/>
-          <p:nvPr/>
-        </p:nvSpPr>
-        <p:spPr>
-          <a:xfrm>
-            <a:off x="762000" y="952500"/>
             <a:ext cx="10668000" cy="711200"/>
           </a:xfrm>
           <a:prstGeom prst="rect">
@@ -48200,7 +45422,85 @@
         </p:nvSpPr>
         <p:spPr>
           <a:xfrm>
-            <a:off x="762000" y="5080000"/>
+            <a:off x="762000" y="4699000"/>
+            <a:ext cx="10160000" cy="213359"/>
+          </a:xfrm>
+          <a:prstGeom prst="rect">
+            <a:avLst/>
+          </a:prstGeom>
+          <a:noFill/>
+        </p:spPr>
+        <p:txBody>
+          <a:bodyPr wrap="square" lIns="0" rIns="0" tIns="0" bIns="0" anchor="t">
+            <a:spAutoFit/>
+          </a:bodyPr>
+          <a:lstStyle/>
+          <a:p>
+            <a:pPr algn="l">
+              <a:lnSpc>
+                <a:spcPct val="115000"/>
+              </a:lnSpc>
+            </a:pPr>
+            <a:r>
+              <a:rPr sz="1200" b="0">
+                <a:solidFill>
+                  <a:srgbClr val="AFC0D8"/>
+                </a:solidFill>
+                <a:latin typeface="IBM Plex Mono"/>
+              </a:rPr>
+              <a:t>OpenAI. Overview of OpenAI crawlers</a:t>
+            </a:r>
+          </a:p>
+        </p:txBody>
+      </p:sp>
+      <p:sp>
+        <p:nvSpPr>
+          <p:cNvPr id="14" name="TextBox 13"/>
+          <p:cNvSpPr txBox="1"/>
+          <p:nvPr/>
+        </p:nvSpPr>
+        <p:spPr>
+          <a:xfrm>
+            <a:off x="762000" y="4940300"/>
+            <a:ext cx="10160000" cy="213359"/>
+          </a:xfrm>
+          <a:prstGeom prst="rect">
+            <a:avLst/>
+          </a:prstGeom>
+          <a:noFill/>
+        </p:spPr>
+        <p:txBody>
+          <a:bodyPr wrap="square" lIns="0" rIns="0" tIns="0" bIns="0" anchor="t">
+            <a:spAutoFit/>
+          </a:bodyPr>
+          <a:lstStyle/>
+          <a:p>
+            <a:pPr algn="l">
+              <a:lnSpc>
+                <a:spcPct val="115000"/>
+              </a:lnSpc>
+            </a:pPr>
+            <a:r>
+              <a:rPr sz="1200" b="0">
+                <a:solidFill>
+                  <a:srgbClr val="AFC0D8"/>
+                </a:solidFill>
+                <a:latin typeface="IBM Plex Mono"/>
+              </a:rPr>
+              <a:t>AirOps (2025). Third-party sources drive 85% of brand discovery</a:t>
+            </a:r>
+          </a:p>
+        </p:txBody>
+      </p:sp>
+      <p:sp>
+        <p:nvSpPr>
+          <p:cNvPr id="15" name="TextBox 14"/>
+          <p:cNvSpPr txBox="1"/>
+          <p:nvPr/>
+        </p:nvSpPr>
+        <p:spPr>
+          <a:xfrm>
+            <a:off x="762000" y="5334000"/>
             <a:ext cx="8255000" cy="248919"/>
           </a:xfrm>
           <a:prstGeom prst="rect">
@@ -48233,7 +45533,7 @@
       </p:sp>
       <p:pic>
         <p:nvPicPr>
-          <p:cNvPr id="14" name="motif-horizon" descr="motif-horizon.png"/>
+          <p:cNvPr id="16" name="motif-horizon" descr="motif-horizon.png"/>
           <p:cNvPicPr>
             <a:picLocks noChangeAspect="1"/>
           </p:cNvPicPr>
@@ -48837,7 +46137,7 @@
                 </a:solidFill>
                 <a:latin typeface="IBM Plex Mono"/>
               </a:rPr>
-              <a:t>4 / 33</a:t>
+              <a:t>4 / 32</a:t>
             </a:r>
           </a:p>
         </p:txBody>
@@ -49936,41 +47236,6 @@
         <p:spPr>
           <a:xfrm>
             <a:off x="10572750" y="6273800"/>
-            <a:ext cx="0" cy="76200"/>
-          </a:xfrm>
-          <a:prstGeom prst="line">
-            <a:avLst/>
-          </a:prstGeom>
-          <a:ln w="12700">
-            <a:solidFill>
-              <a:srgbClr val="3B5A85"/>
-            </a:solidFill>
-          </a:ln>
-        </p:spPr>
-        <p:style>
-          <a:lnRef idx="2">
-            <a:schemeClr val="accent1"/>
-          </a:lnRef>
-          <a:fillRef idx="0">
-            <a:schemeClr val="accent1"/>
-          </a:fillRef>
-          <a:effectRef idx="1">
-            <a:schemeClr val="accent1"/>
-          </a:effectRef>
-          <a:fontRef idx="minor">
-            <a:schemeClr val="tx1"/>
-          </a:fontRef>
-        </p:style>
-      </p:cxnSp>
-      <p:cxnSp>
-        <p:nvCxnSpPr>
-          <p:cNvPr id="49" name="motif-line-tick-33"/>
-          <p:cNvCxnSpPr/>
-          <p:nvPr/>
-        </p:nvCxnSpPr>
-        <p:spPr>
-          <a:xfrm>
-            <a:off x="10668000" y="6273800"/>
             <a:ext cx="0" cy="76200"/>
           </a:xfrm>
           <a:prstGeom prst="line">
@@ -51503,7 +48768,7 @@
                 </a:solidFill>
                 <a:latin typeface="IBM Plex Mono"/>
               </a:rPr>
-              <a:t>6 / 33</a:t>
+              <a:t>6 / 32</a:t>
             </a:r>
           </a:p>
         </p:txBody>
@@ -52641,41 +49906,6 @@
         <p:spPr>
           <a:xfrm>
             <a:off x="10572750" y="6273800"/>
-            <a:ext cx="0" cy="76200"/>
-          </a:xfrm>
-          <a:prstGeom prst="line">
-            <a:avLst/>
-          </a:prstGeom>
-          <a:ln w="12700">
-            <a:solidFill>
-              <a:srgbClr val="3B5A85"/>
-            </a:solidFill>
-          </a:ln>
-        </p:spPr>
-        <p:style>
-          <a:lnRef idx="2">
-            <a:schemeClr val="accent1"/>
-          </a:lnRef>
-          <a:fillRef idx="0">
-            <a:schemeClr val="accent1"/>
-          </a:fillRef>
-          <a:effectRef idx="1">
-            <a:schemeClr val="accent1"/>
-          </a:effectRef>
-          <a:fontRef idx="minor">
-            <a:schemeClr val="tx1"/>
-          </a:fontRef>
-        </p:style>
-      </p:cxnSp>
-      <p:cxnSp>
-        <p:nvCxnSpPr>
-          <p:cNvPr id="51" name="motif-line-tick-33"/>
-          <p:cNvCxnSpPr/>
-          <p:nvPr/>
-        </p:nvCxnSpPr>
-        <p:spPr>
-          <a:xfrm>
-            <a:off x="10668000" y="6273800"/>
             <a:ext cx="0" cy="76200"/>
           </a:xfrm>
           <a:prstGeom prst="line">
@@ -53297,7 +50527,7 @@
                 </a:solidFill>
                 <a:latin typeface="IBM Plex Mono"/>
               </a:rPr>
-              <a:t>7 / 33</a:t>
+              <a:t>7 / 32</a:t>
             </a:r>
           </a:p>
         </p:txBody>
@@ -54435,41 +51665,6 @@
         <p:spPr>
           <a:xfrm>
             <a:off x="10572750" y="6273800"/>
-            <a:ext cx="0" cy="76200"/>
-          </a:xfrm>
-          <a:prstGeom prst="line">
-            <a:avLst/>
-          </a:prstGeom>
-          <a:ln w="12700">
-            <a:solidFill>
-              <a:srgbClr val="3B5A85"/>
-            </a:solidFill>
-          </a:ln>
-        </p:spPr>
-        <p:style>
-          <a:lnRef idx="2">
-            <a:schemeClr val="accent1"/>
-          </a:lnRef>
-          <a:fillRef idx="0">
-            <a:schemeClr val="accent1"/>
-          </a:fillRef>
-          <a:effectRef idx="1">
-            <a:schemeClr val="accent1"/>
-          </a:effectRef>
-          <a:fontRef idx="minor">
-            <a:schemeClr val="tx1"/>
-          </a:fontRef>
-        </p:style>
-      </p:cxnSp>
-      <p:cxnSp>
-        <p:nvCxnSpPr>
-          <p:cNvPr id="51" name="motif-line-tick-33"/>
-          <p:cNvCxnSpPr/>
-          <p:nvPr/>
-        </p:nvCxnSpPr>
-        <p:spPr>
-          <a:xfrm>
-            <a:off x="10668000" y="6273800"/>
             <a:ext cx="0" cy="76200"/>
           </a:xfrm>
           <a:prstGeom prst="line">
@@ -55520,7 +52715,7 @@
                 </a:solidFill>
                 <a:latin typeface="IBM Plex Mono"/>
               </a:rPr>
-              <a:t>8 / 33</a:t>
+              <a:t>8 / 32</a:t>
             </a:r>
           </a:p>
         </p:txBody>
@@ -56658,41 +53853,6 @@
         <p:spPr>
           <a:xfrm>
             <a:off x="10572750" y="6273800"/>
-            <a:ext cx="0" cy="76200"/>
-          </a:xfrm>
-          <a:prstGeom prst="line">
-            <a:avLst/>
-          </a:prstGeom>
-          <a:ln w="12700">
-            <a:solidFill>
-              <a:srgbClr val="3B5A85"/>
-            </a:solidFill>
-          </a:ln>
-        </p:spPr>
-        <p:style>
-          <a:lnRef idx="2">
-            <a:schemeClr val="accent1"/>
-          </a:lnRef>
-          <a:fillRef idx="0">
-            <a:schemeClr val="accent1"/>
-          </a:fillRef>
-          <a:effectRef idx="1">
-            <a:schemeClr val="accent1"/>
-          </a:effectRef>
-          <a:fontRef idx="minor">
-            <a:schemeClr val="tx1"/>
-          </a:fontRef>
-        </p:style>
-      </p:cxnSp>
-      <p:cxnSp>
-        <p:nvCxnSpPr>
-          <p:cNvPr id="62" name="motif-line-tick-33"/>
-          <p:cNvCxnSpPr/>
-          <p:nvPr/>
-        </p:nvCxnSpPr>
-        <p:spPr>
-          <a:xfrm>
-            <a:off x="10668000" y="6273800"/>
             <a:ext cx="0" cy="76200"/>
           </a:xfrm>
           <a:prstGeom prst="line">
@@ -57509,7 +54669,7 @@
                 </a:solidFill>
                 <a:latin typeface="IBM Plex Mono"/>
               </a:rPr>
-              <a:t>9 / 33</a:t>
+              <a:t>9 / 32</a:t>
             </a:r>
           </a:p>
         </p:txBody>
@@ -58647,41 +55807,6 @@
         <p:spPr>
           <a:xfrm>
             <a:off x="10572750" y="6273800"/>
-            <a:ext cx="0" cy="76200"/>
-          </a:xfrm>
-          <a:prstGeom prst="line">
-            <a:avLst/>
-          </a:prstGeom>
-          <a:ln w="12700">
-            <a:solidFill>
-              <a:srgbClr val="3B5A85"/>
-            </a:solidFill>
-          </a:ln>
-        </p:spPr>
-        <p:style>
-          <a:lnRef idx="2">
-            <a:schemeClr val="accent1"/>
-          </a:lnRef>
-          <a:fillRef idx="0">
-            <a:schemeClr val="accent1"/>
-          </a:fillRef>
-          <a:effectRef idx="1">
-            <a:schemeClr val="accent1"/>
-          </a:effectRef>
-          <a:fontRef idx="minor">
-            <a:schemeClr val="tx1"/>
-          </a:fontRef>
-        </p:style>
-      </p:cxnSp>
-      <p:cxnSp>
-        <p:nvCxnSpPr>
-          <p:cNvPr id="56" name="motif-line-tick-33"/>
-          <p:cNvCxnSpPr/>
-          <p:nvPr/>
-        </p:nvCxnSpPr>
-        <p:spPr>
-          <a:xfrm>
-            <a:off x="10668000" y="6273800"/>
             <a:ext cx="0" cy="76200"/>
           </a:xfrm>
           <a:prstGeom prst="line">
